--- a/checkpoint4/apresentacao_cp4.pptx
+++ b/checkpoint4/apresentacao_cp4.pptx
@@ -4970,12 +4970,12 @@
         </p:nvSpPr>
         <p:spPr>
           <a:xfrm>
-            <a:off x="566928" y="1545336"/>
-            <a:ext cx="11045952" cy="658368"/>
+            <a:off x="566928" y="1463040"/>
+            <a:ext cx="11045952" cy="585216"/>
           </a:xfrm>
           <a:prstGeom prst="roundRect">
             <a:avLst>
-              <a:gd name="adj" fmla="val 6944"/>
+              <a:gd name="adj" fmla="val 7813"/>
             </a:avLst>
           </a:prstGeom>
           <a:solidFill>
@@ -4997,24 +4997,24 @@
         </p:nvSpPr>
         <p:spPr>
           <a:xfrm>
-            <a:off x="777240" y="1581912"/>
-            <a:ext cx="10607040" cy="585216"/>
-          </a:xfrm>
-          <a:prstGeom prst="rect">
-            <a:avLst/>
-          </a:prstGeom>
-          <a:noFill/>
-          <a:ln/>
-        </p:spPr>
-        <p:txBody>
-          <a:bodyPr wrap="square" lIns="0" tIns="0" rIns="0" bIns="0" rtlCol="0" anchor="ctr"/>
-          <a:lstStyle/>
-          <a:p>
-            <a:pPr indent="0" marL="0">
-              <a:buNone/>
-            </a:pPr>
-            <a:r>
-              <a:rPr lang="en-US" sz="1250" dirty="0">
+            <a:off x="777240" y="1490472"/>
+            <a:ext cx="10607040" cy="530352"/>
+          </a:xfrm>
+          <a:prstGeom prst="rect">
+            <a:avLst/>
+          </a:prstGeom>
+          <a:noFill/>
+          <a:ln/>
+        </p:spPr>
+        <p:txBody>
+          <a:bodyPr wrap="square" lIns="0" tIns="0" rIns="0" bIns="0" rtlCol="0" anchor="ctr"/>
+          <a:lstStyle/>
+          <a:p>
+            <a:pPr indent="0" marL="0">
+              <a:buNone/>
+            </a:pPr>
+            <a:r>
+              <a:rPr lang="en-US" sz="1150" dirty="0">
                 <a:solidFill>
                   <a:srgbClr val="1B2A3A"/>
                 </a:solidFill>
@@ -5024,7 +5024,7 @@
               </a:rPr>
               <a:t>BUSSAB, Wilson de O.; MORETTIN, Pedro A. Estatística básica. 9. ed. São Paulo: Saraiva, 2017.</a:t>
             </a:r>
-            <a:endParaRPr lang="en-US" sz="1250" dirty="0"/>
+            <a:endParaRPr lang="en-US" sz="1150" dirty="0"/>
           </a:p>
         </p:txBody>
       </p:sp>
@@ -5036,24 +5036,24 @@
         </p:nvSpPr>
         <p:spPr>
           <a:xfrm>
-            <a:off x="777240" y="2148840"/>
-            <a:ext cx="10607040" cy="585216"/>
-          </a:xfrm>
-          <a:prstGeom prst="rect">
-            <a:avLst/>
-          </a:prstGeom>
-          <a:noFill/>
-          <a:ln/>
-        </p:spPr>
-        <p:txBody>
-          <a:bodyPr wrap="square" lIns="0" tIns="0" rIns="0" bIns="0" rtlCol="0" anchor="ctr"/>
-          <a:lstStyle/>
-          <a:p>
-            <a:pPr indent="0" marL="0">
-              <a:buNone/>
-            </a:pPr>
-            <a:r>
-              <a:rPr lang="en-US" sz="1250" dirty="0">
+            <a:off x="777240" y="2002536"/>
+            <a:ext cx="10607040" cy="530352"/>
+          </a:xfrm>
+          <a:prstGeom prst="rect">
+            <a:avLst/>
+          </a:prstGeom>
+          <a:noFill/>
+          <a:ln/>
+        </p:spPr>
+        <p:txBody>
+          <a:bodyPr wrap="square" lIns="0" tIns="0" rIns="0" bIns="0" rtlCol="0" anchor="ctr"/>
+          <a:lstStyle/>
+          <a:p>
+            <a:pPr indent="0" marL="0">
+              <a:buNone/>
+            </a:pPr>
+            <a:r>
+              <a:rPr lang="en-US" sz="1150" dirty="0">
                 <a:solidFill>
                   <a:srgbClr val="1B2A3A"/>
                 </a:solidFill>
@@ -5063,7 +5063,7 @@
               </a:rPr>
               <a:t>MONTGOMERY, Douglas C.; RUNGER, George C. Estatística aplicada e probabilidade para engenheiros. 7. ed. Rio de Janeiro: LTC, 2021.</a:t>
             </a:r>
-            <a:endParaRPr lang="en-US" sz="1250" dirty="0"/>
+            <a:endParaRPr lang="en-US" sz="1150" dirty="0"/>
           </a:p>
         </p:txBody>
       </p:sp>
@@ -5075,12 +5075,12 @@
         </p:nvSpPr>
         <p:spPr>
           <a:xfrm>
-            <a:off x="566928" y="2679192"/>
-            <a:ext cx="11045952" cy="658368"/>
+            <a:off x="566928" y="2487168"/>
+            <a:ext cx="11045952" cy="585216"/>
           </a:xfrm>
           <a:prstGeom prst="roundRect">
             <a:avLst>
-              <a:gd name="adj" fmla="val 6944"/>
+              <a:gd name="adj" fmla="val 7813"/>
             </a:avLst>
           </a:prstGeom>
           <a:solidFill>
@@ -5102,24 +5102,24 @@
         </p:nvSpPr>
         <p:spPr>
           <a:xfrm>
-            <a:off x="777240" y="2715768"/>
-            <a:ext cx="10607040" cy="585216"/>
-          </a:xfrm>
-          <a:prstGeom prst="rect">
-            <a:avLst/>
-          </a:prstGeom>
-          <a:noFill/>
-          <a:ln/>
-        </p:spPr>
-        <p:txBody>
-          <a:bodyPr wrap="square" lIns="0" tIns="0" rIns="0" bIns="0" rtlCol="0" anchor="ctr"/>
-          <a:lstStyle/>
-          <a:p>
-            <a:pPr indent="0" marL="0">
-              <a:buNone/>
-            </a:pPr>
-            <a:r>
-              <a:rPr lang="en-US" sz="1250" dirty="0">
+            <a:off x="777240" y="2514600"/>
+            <a:ext cx="10607040" cy="530352"/>
+          </a:xfrm>
+          <a:prstGeom prst="rect">
+            <a:avLst/>
+          </a:prstGeom>
+          <a:noFill/>
+          <a:ln/>
+        </p:spPr>
+        <p:txBody>
+          <a:bodyPr wrap="square" lIns="0" tIns="0" rIns="0" bIns="0" rtlCol="0" anchor="ctr"/>
+          <a:lstStyle/>
+          <a:p>
+            <a:pPr indent="0" marL="0">
+              <a:buNone/>
+            </a:pPr>
+            <a:r>
+              <a:rPr lang="en-US" sz="1150" dirty="0">
                 <a:solidFill>
                   <a:srgbClr val="1B2A3A"/>
                 </a:solidFill>
@@ -5129,7 +5129,7 @@
               </a:rPr>
               <a:t>FÁVERO, Luiz Paulo; BELFIORE, Patrícia. Manual de análise de dados: estatística e modelagem multivariada. Rio de Janeiro: LTC, 2017.</a:t>
             </a:r>
-            <a:endParaRPr lang="en-US" sz="1250" dirty="0"/>
+            <a:endParaRPr lang="en-US" sz="1150" dirty="0"/>
           </a:p>
         </p:txBody>
       </p:sp>
@@ -5141,24 +5141,24 @@
         </p:nvSpPr>
         <p:spPr>
           <a:xfrm>
-            <a:off x="777240" y="3282696"/>
-            <a:ext cx="10607040" cy="585216"/>
-          </a:xfrm>
-          <a:prstGeom prst="rect">
-            <a:avLst/>
-          </a:prstGeom>
-          <a:noFill/>
-          <a:ln/>
-        </p:spPr>
-        <p:txBody>
-          <a:bodyPr wrap="square" lIns="0" tIns="0" rIns="0" bIns="0" rtlCol="0" anchor="ctr"/>
-          <a:lstStyle/>
-          <a:p>
-            <a:pPr indent="0" marL="0">
-              <a:buNone/>
-            </a:pPr>
-            <a:r>
-              <a:rPr lang="en-US" sz="1250" dirty="0">
+            <a:off x="777240" y="3026664"/>
+            <a:ext cx="10607040" cy="530352"/>
+          </a:xfrm>
+          <a:prstGeom prst="rect">
+            <a:avLst/>
+          </a:prstGeom>
+          <a:noFill/>
+          <a:ln/>
+        </p:spPr>
+        <p:txBody>
+          <a:bodyPr wrap="square" lIns="0" tIns="0" rIns="0" bIns="0" rtlCol="0" anchor="ctr"/>
+          <a:lstStyle/>
+          <a:p>
+            <a:pPr indent="0" marL="0">
+              <a:buNone/>
+            </a:pPr>
+            <a:r>
+              <a:rPr lang="en-US" sz="1150" dirty="0">
                 <a:solidFill>
                   <a:srgbClr val="1B2A3A"/>
                 </a:solidFill>
@@ -5168,7 +5168,7 @@
               </a:rPr>
               <a:t>JAMES, Gareth et al. An introduction to statistical learning: with applications in Python. Cham: Springer, 2023.</a:t>
             </a:r>
-            <a:endParaRPr lang="en-US" sz="1250" dirty="0"/>
+            <a:endParaRPr lang="en-US" sz="1150" dirty="0"/>
           </a:p>
         </p:txBody>
       </p:sp>
@@ -5180,12 +5180,12 @@
         </p:nvSpPr>
         <p:spPr>
           <a:xfrm>
-            <a:off x="566928" y="3813048"/>
-            <a:ext cx="11045952" cy="658368"/>
+            <a:off x="566928" y="3511296"/>
+            <a:ext cx="11045952" cy="585216"/>
           </a:xfrm>
           <a:prstGeom prst="roundRect">
             <a:avLst>
-              <a:gd name="adj" fmla="val 6944"/>
+              <a:gd name="adj" fmla="val 7813"/>
             </a:avLst>
           </a:prstGeom>
           <a:solidFill>
@@ -5207,24 +5207,24 @@
         </p:nvSpPr>
         <p:spPr>
           <a:xfrm>
-            <a:off x="777240" y="3849624"/>
-            <a:ext cx="10607040" cy="585216"/>
-          </a:xfrm>
-          <a:prstGeom prst="rect">
-            <a:avLst/>
-          </a:prstGeom>
-          <a:noFill/>
-          <a:ln/>
-        </p:spPr>
-        <p:txBody>
-          <a:bodyPr wrap="square" lIns="0" tIns="0" rIns="0" bIns="0" rtlCol="0" anchor="ctr"/>
-          <a:lstStyle/>
-          <a:p>
-            <a:pPr indent="0" marL="0">
-              <a:buNone/>
-            </a:pPr>
-            <a:r>
-              <a:rPr lang="en-US" sz="1250" dirty="0">
+            <a:off x="777240" y="3538728"/>
+            <a:ext cx="10607040" cy="530352"/>
+          </a:xfrm>
+          <a:prstGeom prst="rect">
+            <a:avLst/>
+          </a:prstGeom>
+          <a:noFill/>
+          <a:ln/>
+        </p:spPr>
+        <p:txBody>
+          <a:bodyPr wrap="square" lIns="0" tIns="0" rIns="0" bIns="0" rtlCol="0" anchor="ctr"/>
+          <a:lstStyle/>
+          <a:p>
+            <a:pPr indent="0" marL="0">
+              <a:buNone/>
+            </a:pPr>
+            <a:r>
+              <a:rPr lang="en-US" sz="1150" dirty="0">
                 <a:solidFill>
                   <a:srgbClr val="1B2A3A"/>
                 </a:solidFill>
@@ -5234,7 +5234,7 @@
               </a:rPr>
               <a:t>GÉRON, Aurélien. Mãos à obra: aprendizado de máquina com Scikit-Learn, Keras &amp; TensorFlow. 2. ed. Rio de Janeiro: Alta Books, 2021.</a:t>
             </a:r>
-            <a:endParaRPr lang="en-US" sz="1250" dirty="0"/>
+            <a:endParaRPr lang="en-US" sz="1150" dirty="0"/>
           </a:p>
         </p:txBody>
       </p:sp>
@@ -5246,24 +5246,24 @@
         </p:nvSpPr>
         <p:spPr>
           <a:xfrm>
-            <a:off x="777240" y="4416552"/>
-            <a:ext cx="10607040" cy="585216"/>
-          </a:xfrm>
-          <a:prstGeom prst="rect">
-            <a:avLst/>
-          </a:prstGeom>
-          <a:noFill/>
-          <a:ln/>
-        </p:spPr>
-        <p:txBody>
-          <a:bodyPr wrap="square" lIns="0" tIns="0" rIns="0" bIns="0" rtlCol="0" anchor="ctr"/>
-          <a:lstStyle/>
-          <a:p>
-            <a:pPr indent="0" marL="0">
-              <a:buNone/>
-            </a:pPr>
-            <a:r>
-              <a:rPr lang="en-US" sz="1250" dirty="0">
+            <a:off x="777240" y="4050792"/>
+            <a:ext cx="10607040" cy="530352"/>
+          </a:xfrm>
+          <a:prstGeom prst="rect">
+            <a:avLst/>
+          </a:prstGeom>
+          <a:noFill/>
+          <a:ln/>
+        </p:spPr>
+        <p:txBody>
+          <a:bodyPr wrap="square" lIns="0" tIns="0" rIns="0" bIns="0" rtlCol="0" anchor="ctr"/>
+          <a:lstStyle/>
+          <a:p>
+            <a:pPr indent="0" marL="0">
+              <a:buNone/>
+            </a:pPr>
+            <a:r>
+              <a:rPr lang="en-US" sz="1150" dirty="0">
                 <a:solidFill>
                   <a:srgbClr val="1B2A3A"/>
                 </a:solidFill>
@@ -5273,7 +5273,7 @@
               </a:rPr>
               <a:t>MCKINNEY, Wes. Python para análise de dados: tratamento de dados com Pandas, NumPy e Jupyter. 3. ed. São Paulo: Novatec, 2023.</a:t>
             </a:r>
-            <a:endParaRPr lang="en-US" sz="1250" dirty="0"/>
+            <a:endParaRPr lang="en-US" sz="1150" dirty="0"/>
           </a:p>
         </p:txBody>
       </p:sp>
@@ -5285,12 +5285,12 @@
         </p:nvSpPr>
         <p:spPr>
           <a:xfrm>
-            <a:off x="566928" y="4946904"/>
-            <a:ext cx="11045952" cy="658368"/>
+            <a:off x="566928" y="4535424"/>
+            <a:ext cx="11045952" cy="585216"/>
           </a:xfrm>
           <a:prstGeom prst="roundRect">
             <a:avLst>
-              <a:gd name="adj" fmla="val 6944"/>
+              <a:gd name="adj" fmla="val 7813"/>
             </a:avLst>
           </a:prstGeom>
           <a:solidFill>
@@ -5312,24 +5312,24 @@
         </p:nvSpPr>
         <p:spPr>
           <a:xfrm>
-            <a:off x="777240" y="4983480"/>
-            <a:ext cx="10607040" cy="585216"/>
-          </a:xfrm>
-          <a:prstGeom prst="rect">
-            <a:avLst/>
-          </a:prstGeom>
-          <a:noFill/>
-          <a:ln/>
-        </p:spPr>
-        <p:txBody>
-          <a:bodyPr wrap="square" lIns="0" tIns="0" rIns="0" bIns="0" rtlCol="0" anchor="ctr"/>
-          <a:lstStyle/>
-          <a:p>
-            <a:pPr indent="0" marL="0">
-              <a:buNone/>
-            </a:pPr>
-            <a:r>
-              <a:rPr lang="en-US" sz="1250" dirty="0">
+            <a:off x="777240" y="4562856"/>
+            <a:ext cx="10607040" cy="530352"/>
+          </a:xfrm>
+          <a:prstGeom prst="rect">
+            <a:avLst/>
+          </a:prstGeom>
+          <a:noFill/>
+          <a:ln/>
+        </p:spPr>
+        <p:txBody>
+          <a:bodyPr wrap="square" lIns="0" tIns="0" rIns="0" bIns="0" rtlCol="0" anchor="ctr"/>
+          <a:lstStyle/>
+          <a:p>
+            <a:pPr indent="0" marL="0">
+              <a:buNone/>
+            </a:pPr>
+            <a:r>
+              <a:rPr lang="en-US" sz="1150" dirty="0">
                 <a:solidFill>
                   <a:srgbClr val="1B2A3A"/>
                 </a:solidFill>
@@ -5339,7 +5339,7 @@
               </a:rPr>
               <a:t>NUMPY DEVELOPERS. NumPy documentation: random sampling (numpy.random). Disponível em: https://numpy.org/doc/stable/reference/random/index.html. Acesso em: 10 set. 2026.</a:t>
             </a:r>
-            <a:endParaRPr lang="en-US" sz="1250" dirty="0"/>
+            <a:endParaRPr lang="en-US" sz="1150" dirty="0"/>
           </a:p>
         </p:txBody>
       </p:sp>
@@ -5351,24 +5351,24 @@
         </p:nvSpPr>
         <p:spPr>
           <a:xfrm>
-            <a:off x="777240" y="5550408"/>
-            <a:ext cx="10607040" cy="585216"/>
-          </a:xfrm>
-          <a:prstGeom prst="rect">
-            <a:avLst/>
-          </a:prstGeom>
-          <a:noFill/>
-          <a:ln/>
-        </p:spPr>
-        <p:txBody>
-          <a:bodyPr wrap="square" lIns="0" tIns="0" rIns="0" bIns="0" rtlCol="0" anchor="ctr"/>
-          <a:lstStyle/>
-          <a:p>
-            <a:pPr indent="0" marL="0">
-              <a:buNone/>
-            </a:pPr>
-            <a:r>
-              <a:rPr lang="en-US" sz="1250" dirty="0">
+            <a:off x="777240" y="5074920"/>
+            <a:ext cx="10607040" cy="530352"/>
+          </a:xfrm>
+          <a:prstGeom prst="rect">
+            <a:avLst/>
+          </a:prstGeom>
+          <a:noFill/>
+          <a:ln/>
+        </p:spPr>
+        <p:txBody>
+          <a:bodyPr wrap="square" lIns="0" tIns="0" rIns="0" bIns="0" rtlCol="0" anchor="ctr"/>
+          <a:lstStyle/>
+          <a:p>
+            <a:pPr indent="0" marL="0">
+              <a:buNone/>
+            </a:pPr>
+            <a:r>
+              <a:rPr lang="en-US" sz="1150" dirty="0">
                 <a:solidFill>
                   <a:srgbClr val="1B2A3A"/>
                 </a:solidFill>
@@ -5378,13 +5378,79 @@
               </a:rPr>
               <a:t>SCIPY COMMUNITY. SciPy documentation: statistical functions (scipy.stats). Disponível em: https://docs.scipy.org/doc/scipy/reference/stats.html. Acesso em: 10 set. 2026.</a:t>
             </a:r>
-            <a:endParaRPr lang="en-US" sz="1250" dirty="0"/>
-          </a:p>
-        </p:txBody>
-      </p:sp>
-      <p:sp>
-        <p:nvSpPr>
-          <p:cNvPr id="18" name="Text 16"/>
+            <a:endParaRPr lang="en-US" sz="1150" dirty="0"/>
+          </a:p>
+        </p:txBody>
+      </p:sp>
+      <p:sp>
+        <p:nvSpPr>
+          <p:cNvPr id="18" name="Shape 16"/>
+          <p:cNvSpPr/>
+          <p:nvPr/>
+        </p:nvSpPr>
+        <p:spPr>
+          <a:xfrm>
+            <a:off x="566928" y="5559552"/>
+            <a:ext cx="11045952" cy="585216"/>
+          </a:xfrm>
+          <a:prstGeom prst="roundRect">
+            <a:avLst>
+              <a:gd name="adj" fmla="val 7813"/>
+            </a:avLst>
+          </a:prstGeom>
+          <a:solidFill>
+            <a:srgbClr val="F4F8FB"/>
+          </a:solidFill>
+          <a:ln w="12700">
+            <a:solidFill>
+              <a:srgbClr val="F4F8FB"/>
+            </a:solidFill>
+            <a:prstDash val="solid"/>
+          </a:ln>
+        </p:spPr>
+      </p:sp>
+      <p:sp>
+        <p:nvSpPr>
+          <p:cNvPr id="19" name="Text 17"/>
+          <p:cNvSpPr txBox="1"/>
+          <p:nvPr/>
+        </p:nvSpPr>
+        <p:spPr>
+          <a:xfrm>
+            <a:off x="777240" y="5586984"/>
+            <a:ext cx="10607040" cy="530352"/>
+          </a:xfrm>
+          <a:prstGeom prst="rect">
+            <a:avLst/>
+          </a:prstGeom>
+          <a:noFill/>
+          <a:ln/>
+        </p:spPr>
+        <p:txBody>
+          <a:bodyPr wrap="square" lIns="0" tIns="0" rIns="0" bIns="0" rtlCol="0" anchor="ctr"/>
+          <a:lstStyle/>
+          <a:p>
+            <a:pPr indent="0" marL="0">
+              <a:buNone/>
+            </a:pPr>
+            <a:r>
+              <a:rPr lang="en-US" sz="1150" dirty="0">
+                <a:solidFill>
+                  <a:srgbClr val="1B2A3A"/>
+                </a:solidFill>
+                <a:latin typeface="Calibri" pitchFamily="34" charset="0"/>
+                <a:ea typeface="Calibri" pitchFamily="34" charset="-122"/>
+                <a:cs typeface="Calibri" pitchFamily="34" charset="-120"/>
+              </a:rPr>
+              <a:t>ANTHROPIC. Claude: modelo de linguagem de grande porte. Versão Opus 5. San Francisco: Anthropic, 2026. Disponível em: https://claude.ai. Acesso em: 10 set. 2026. Utilizado como apoio na estruturação da apresentação e na revisão do código.</a:t>
+            </a:r>
+            <a:endParaRPr lang="en-US" sz="1150" dirty="0"/>
+          </a:p>
+        </p:txBody>
+      </p:sp>
+      <p:sp>
+        <p:nvSpPr>
+          <p:cNvPr id="20" name="Text 18"/>
           <p:cNvSpPr txBox="1"/>
           <p:nvPr/>
         </p:nvSpPr>

--- a/checkpoint4/apresentacao_cp4.pptx
+++ b/checkpoint4/apresentacao_cp4.pptx
@@ -2450,7 +2450,7 @@
                 <a:ea typeface="Calibri" pitchFamily="34" charset="-122"/>
                 <a:cs typeface="Calibri" pitchFamily="34" charset="-120"/>
               </a:rPr>
-              <a:t>Desempenho no conjunto de teste (300 entregas nunca vistas)</a:t>
+              <a:t>Testamos em 300 entregas que o modelo nunca tinha visto</a:t>
             </a:r>
             <a:endParaRPr lang="en-US" sz="1400" dirty="0"/>
           </a:p>
@@ -2933,7 +2933,7 @@
                 <a:ea typeface="Calibri" pitchFamily="34" charset="-122"/>
                 <a:cs typeface="Calibri" pitchFamily="34" charset="-120"/>
               </a:rPr>
-              <a:t>Precisão alta e recall moderado. Quando o modelo aponta atraso, quase sempre acerta, mas deixa passar parte dos atrasos limítrofes.</a:t>
+              <a:t>Quando o modelo avisa que vai atrasar, ele quase sempre acerta. O ponto fraco é deixar escapar algumas entregas que atrasaram por pouco.</a:t>
             </a:r>
             <a:endParaRPr lang="en-US" sz="1250" dirty="0"/>
           </a:p>
@@ -3392,7 +3392,7 @@
                 <a:ea typeface="Calibri" pitchFamily="34" charset="-122"/>
                 <a:cs typeface="Calibri" pitchFamily="34" charset="-120"/>
               </a:rPr>
-              <a:t>Com o risco calculado pedido a pedido, a operação consegue reforçar a frota, reroteirizar ou avisar o cliente antes que o prazo estoure.</a:t>
+              <a:t>Sabendo o risco de cada pedido antes de sair, a empresa pode mandar outro veículo, mudar a rota ou avisar o cliente antes do prazo estourar.</a:t>
             </a:r>
             <a:endParaRPr lang="en-US" sz="1250" dirty="0"/>
           </a:p>
@@ -3561,7 +3561,7 @@
                 <a:ea typeface="Calibri" pitchFamily="34" charset="-122"/>
                 <a:cs typeface="Calibri" pitchFamily="34" charset="-120"/>
               </a:rPr>
-              <a:t>20.000 sorteios por cenário para comparar decisões</a:t>
+              <a:t>Testando mudanças na operação antes de aplicá-las</a:t>
             </a:r>
             <a:endParaRPr lang="en-US" sz="1400" dirty="0"/>
           </a:p>
@@ -3815,7 +3815,7 @@
                 <a:ea typeface="Calibri" pitchFamily="34" charset="-122"/>
                 <a:cs typeface="Calibri" pitchFamily="34" charset="-120"/>
               </a:rPr>
-              <a:t>Queda de 17 pontos percentuais combinando roteirização automática e padronização da frota, o que representa cerca de 17 mil entregas atrasadas a menos a cada 100 mil.</a:t>
+              <a:t>Fazendo as duas mudanças juntas, o risco cai 17 pontos. Em cada 100 mil entregas, são cerca de 17 mil atrasos a menos.</a:t>
             </a:r>
             <a:endParaRPr lang="en-US" sz="1250" dirty="0"/>
           </a:p>
@@ -3900,7 +3900,7 @@
                 <a:ea typeface="Calibri" pitchFamily="34" charset="-122"/>
                 <a:cs typeface="Calibri" pitchFamily="34" charset="-120"/>
               </a:rPr>
-              <a:t>Neste caso, reduzir a média (μ) pesa mais do que reduzir o desvio (σ).</a:t>
+              <a:t>Ganhar tempo médio ajudou mais do que reduzir a variação.</a:t>
             </a:r>
             <a:endParaRPr lang="en-US" sz="1300" dirty="0"/>
           </a:p>
@@ -3924,7 +3924,7 @@
                 <a:ea typeface="Calibri" pitchFamily="34" charset="-122"/>
                 <a:cs typeface="Calibri" pitchFamily="34" charset="-120"/>
               </a:rPr>
-              <a:t>As duas ações combinadas derrubam o risco a menos de um terço.</a:t>
+              <a:t>As duas mudanças juntas derrubam o risco a menos de um terço.</a:t>
             </a:r>
             <a:endParaRPr lang="en-US" sz="1300" dirty="0"/>
           </a:p>
@@ -3948,7 +3948,7 @@
                 <a:ea typeface="Calibri" pitchFamily="34" charset="-122"/>
                 <a:cs typeface="Calibri" pitchFamily="34" charset="-120"/>
               </a:rPr>
-              <a:t>Simular a decisão antes de aplicá-la evita testar hipóteses na operação real.</a:t>
+              <a:t>Simular no computador evita testar a mudança direto na rua.</a:t>
             </a:r>
             <a:endParaRPr lang="en-US" sz="1300" dirty="0"/>
           </a:p>
@@ -4247,7 +4247,7 @@
                 <a:ea typeface="Calibri" pitchFamily="34" charset="-122"/>
                 <a:cs typeface="Calibri" pitchFamily="34" charset="-120"/>
               </a:rPr>
-              <a:t>A taxa geral de 22,5% de atrasos convivia com cenários de 64,7%. Foram a probabilidade condicional e o Teorema de Bayes que mostraram onde o risco se concentra.</a:t>
+              <a:t>Olhando só o total, 22,5% das entregas atrasam. Separando por cenário, o risco chega a 64,7%. A probabilidade mostrou onde estava o problema.</a:t>
             </a:r>
             <a:endParaRPr lang="en-US" sz="1250" dirty="0"/>
           </a:p>
@@ -4372,7 +4372,7 @@
                 <a:ea typeface="Cambria" pitchFamily="34" charset="-122"/>
                 <a:cs typeface="Cambria" pitchFamily="34" charset="-120"/>
               </a:rPr>
-              <a:t>A Normal descreveu bem o tempo</a:t>
+              <a:t>A curva Normal descreveu o tempo</a:t>
             </a:r>
             <a:endParaRPr lang="en-US" sz="1600" dirty="0"/>
           </a:p>
@@ -4414,7 +4414,7 @@
                 <a:ea typeface="Calibri" pitchFamily="34" charset="-122"/>
                 <a:cs typeface="Calibri" pitchFamily="34" charset="-120"/>
               </a:rPr>
-              <a:t>Com μ = 48,9 e σ = 15,4 min, a curva estimou 23,7% de estouro de SLA, contra 22,5% observados, e apontou 75 min como prazo capaz de cobrir 95% das entregas.</a:t>
+              <a:t>Com média de 48,9 e desvio de 15,4 minutos, a curva calculou 23,7% de risco, bem perto dos 22,5% que realmente aconteceram.</a:t>
             </a:r>
             <a:endParaRPr lang="en-US" sz="1250" dirty="0"/>
           </a:p>
@@ -4539,7 +4539,7 @@
                 <a:ea typeface="Cambria" pitchFamily="34" charset="-122"/>
                 <a:cs typeface="Cambria" pitchFamily="34" charset="-120"/>
               </a:rPr>
-              <a:t>Do conceito ao modelo preditivo</a:t>
+              <a:t>Da fórmula ao programa que prevê</a:t>
             </a:r>
             <a:endParaRPr lang="en-US" sz="1600" dirty="0"/>
           </a:p>
@@ -4581,7 +4581,7 @@
                 <a:ea typeface="Calibri" pitchFamily="34" charset="-122"/>
                 <a:cs typeface="Calibri" pitchFamily="34" charset="-120"/>
               </a:rPr>
-              <a:t>Um Naive Bayes Gaussiano escrito do zero, usando apenas Bayes e a densidade normal, atingiu 87,3% de acurácia e 89,1% de precisão em dados nunca vistos.</a:t>
+              <a:t>Usando só as fórmulas dos slides, o modelo acertou 87,3% das entregas de teste, que ele nunca tinha visto antes.</a:t>
             </a:r>
             <a:endParaRPr lang="en-US" sz="1250" dirty="0"/>
           </a:p>
@@ -4706,7 +4706,7 @@
                 <a:ea typeface="Cambria" pitchFamily="34" charset="-122"/>
                 <a:cs typeface="Cambria" pitchFamily="34" charset="-120"/>
               </a:rPr>
-              <a:t>Ganho possível para a operação</a:t>
+              <a:t>O ganho para a empresa</a:t>
             </a:r>
             <a:endParaRPr lang="en-US" sz="1600" dirty="0"/>
           </a:p>
@@ -4748,7 +4748,7 @@
                 <a:ea typeface="Calibri" pitchFamily="34" charset="-122"/>
                 <a:cs typeface="Calibri" pitchFamily="34" charset="-120"/>
               </a:rPr>
-              <a:t>A simulação de Monte Carlo apontou queda do risco de 23,7% para 6,8%, com reflexo em multas de SLA, retrabalho logístico e satisfação do cliente.</a:t>
+              <a:t>Na simulação, o risco cai de 23,7% para 6,8%. Isso significa menos multa por atraso, menos retrabalho e cliente mais satisfeito.</a:t>
             </a:r>
             <a:endParaRPr lang="en-US" sz="1250" dirty="0"/>
           </a:p>
@@ -4787,7 +4787,7 @@
                 <a:ea typeface="Calibri" pitchFamily="34" charset="-122"/>
                 <a:cs typeface="Calibri" pitchFamily="34" charset="-120"/>
               </a:rPr>
-              <a:t>Como continuidade, o mesmo modelo poderia ser treinado com dados reais de telemetria e comparado com regressão logística e gradient boosting.</a:t>
+              <a:t>Como próximo passo, o mesmo modelo poderia ser testado com dados reais da empresa e comparado com outros métodos.</a:t>
             </a:r>
             <a:endParaRPr lang="en-US" sz="1300" dirty="0"/>
           </a:p>
@@ -5650,7 +5650,7 @@
                 <a:ea typeface="Calibri" pitchFamily="34" charset="-122"/>
                 <a:cs typeface="Calibri" pitchFamily="34" charset="-120"/>
               </a:rPr>
-              <a:t>Por que probabilidade é a linguagem da Inteligência Artificial</a:t>
+              <a:t>Qual problema escolhemos e por que ele precisa de probabilidade</a:t>
             </a:r>
             <a:endParaRPr lang="en-US" sz="1400" dirty="0"/>
           </a:p>
@@ -5692,7 +5692,7 @@
                 <a:ea typeface="Calibri" pitchFamily="34" charset="-122"/>
                 <a:cs typeface="Calibri" pitchFamily="34" charset="-120"/>
               </a:rPr>
-              <a:t>Trânsito, clima e distância mudam o tempo de cada entrega, então toda previsão de prazo carrega incerteza. Um modelo preditivo não responde com certezas, e sim com probabilidades. Entender Probabilidade e Distribuição Normal é, portanto, condição para construir e interpretar esse tipo de modelo.</a:t>
+              <a:t>Uma transportadora promete entregar em até 60 minutos. Só que trânsito, chuva e distância mudam esse tempo, então ninguém tem certeza se vai dar. Quando a certeza não existe, a saída é calcular a chance de acontecer. É isso que os dois temas fazem, e é assim que um programa de computador consegue prever.</a:t>
             </a:r>
             <a:endParaRPr lang="en-US" sz="1500" dirty="0"/>
           </a:p>
@@ -6109,7 +6109,7 @@
                 <a:ea typeface="Calibri" pitchFamily="34" charset="-122"/>
                 <a:cs typeface="Calibri" pitchFamily="34" charset="-120"/>
               </a:rPr>
-              <a:t>Modelo probabilístico (Naive Bayes Gaussiano) escrito do zero em Python.</a:t>
+              <a:t>Um programa em Python que calcula a chance de atraso de cada entrega.</a:t>
             </a:r>
             <a:endParaRPr lang="en-US" sz="1300" dirty="0"/>
           </a:p>
@@ -6248,7 +6248,7 @@
                 <a:ea typeface="Calibri" pitchFamily="34" charset="-122"/>
                 <a:cs typeface="Calibri" pitchFamily="34" charset="-120"/>
               </a:rPr>
-              <a:t>Base simulada com números pseudoaleatórios (seed = 42), o que torna o estudo reprodutível.</a:t>
+              <a:t>Mil entregas criadas pelo próprio código, sempre iguais por causa da semente fixa.</a:t>
             </a:r>
             <a:endParaRPr lang="en-US" sz="1300" dirty="0"/>
           </a:p>
@@ -6416,7 +6416,7 @@
                 <a:ea typeface="Calibri" pitchFamily="34" charset="-122"/>
                 <a:cs typeface="Calibri" pitchFamily="34" charset="-120"/>
               </a:rPr>
-              <a:t>4.  A IA consegue prever o atraso antes de ele acontecer?</a:t>
+              <a:t>4.  Dá para prever o atraso antes de ele acontecer?</a:t>
             </a:r>
             <a:endParaRPr lang="en-US" sz="1500" dirty="0"/>
           </a:p>
@@ -6436,7 +6436,7 @@
                 <a:ea typeface="Calibri" pitchFamily="34" charset="-122"/>
                 <a:cs typeface="Calibri" pitchFamily="34" charset="-120"/>
               </a:rPr>
-              <a:t>5.  Que decisão gerencial reduz mais o risco?</a:t>
+              <a:t>5.  Qual mudança na operação reduz mais o risco?</a:t>
             </a:r>
             <a:endParaRPr lang="en-US" sz="1500" dirty="0"/>
           </a:p>
@@ -6605,7 +6605,7 @@
                 <a:ea typeface="Calibri" pitchFamily="34" charset="-122"/>
                 <a:cs typeface="Calibri" pitchFamily="34" charset="-120"/>
               </a:rPr>
-              <a:t>Tema 1: a base matemática do raciocínio sob incerteza</a:t>
+              <a:t>Tema 1: as três fórmulas que usamos no trabalho</a:t>
             </a:r>
             <a:endParaRPr lang="en-US" sz="1400" dirty="0"/>
           </a:p>
@@ -6619,12 +6619,12 @@
         </p:nvSpPr>
         <p:spPr>
           <a:xfrm>
-            <a:off x="566928" y="1572768"/>
-            <a:ext cx="6675120" cy="1371600"/>
+            <a:off x="566928" y="1536192"/>
+            <a:ext cx="6675120" cy="1481328"/>
           </a:xfrm>
           <a:prstGeom prst="roundRect">
             <a:avLst>
-              <a:gd name="adj" fmla="val 5333"/>
+              <a:gd name="adj" fmla="val 4938"/>
             </a:avLst>
           </a:prstGeom>
           <a:solidFill>
@@ -6646,8 +6646,8 @@
         </p:nvSpPr>
         <p:spPr>
           <a:xfrm>
-            <a:off x="841248" y="1700784"/>
-            <a:ext cx="6126480" cy="310896"/>
+            <a:off x="841248" y="1627632"/>
+            <a:ext cx="6126480" cy="292608"/>
           </a:xfrm>
           <a:prstGeom prst="rect">
             <a:avLst/>
@@ -6671,7 +6671,7 @@
                 <a:ea typeface="Cambria" pitchFamily="34" charset="-122"/>
                 <a:cs typeface="Cambria" pitchFamily="34" charset="-120"/>
               </a:rPr>
-              <a:t>Probabilidade clássica</a:t>
+              <a:t>Probabilidade</a:t>
             </a:r>
             <a:endParaRPr lang="en-US" sz="1700" dirty="0"/>
           </a:p>
@@ -6685,24 +6685,24 @@
         </p:nvSpPr>
         <p:spPr>
           <a:xfrm>
-            <a:off x="841248" y="2048256"/>
-            <a:ext cx="6126480" cy="329184"/>
-          </a:xfrm>
-          <a:prstGeom prst="rect">
-            <a:avLst/>
-          </a:prstGeom>
-          <a:noFill/>
-          <a:ln/>
-        </p:spPr>
-        <p:txBody>
-          <a:bodyPr wrap="square" lIns="0" tIns="0" rIns="0" bIns="0" rtlCol="0" anchor="ctr"/>
-          <a:lstStyle/>
-          <a:p>
-            <a:pPr indent="0" marL="0">
-              <a:buNone/>
-            </a:pPr>
-            <a:r>
-              <a:rPr lang="en-US" sz="1500" b="1" dirty="0">
+            <a:off x="841248" y="1956816"/>
+            <a:ext cx="6126480" cy="310896"/>
+          </a:xfrm>
+          <a:prstGeom prst="rect">
+            <a:avLst/>
+          </a:prstGeom>
+          <a:noFill/>
+          <a:ln/>
+        </p:spPr>
+        <p:txBody>
+          <a:bodyPr wrap="square" lIns="0" tIns="0" rIns="0" bIns="0" rtlCol="0" anchor="ctr"/>
+          <a:lstStyle/>
+          <a:p>
+            <a:pPr indent="0" marL="0">
+              <a:buNone/>
+            </a:pPr>
+            <a:r>
+              <a:rPr lang="en-US" sz="1450" b="1" dirty="0">
                 <a:solidFill>
                   <a:srgbClr val="D1495B"/>
                 </a:solidFill>
@@ -6712,7 +6712,7 @@
               </a:rPr>
               <a:t>P(A) = casos favoráveis / casos possíveis</a:t>
             </a:r>
-            <a:endParaRPr lang="en-US" sz="1500" dirty="0"/>
+            <a:endParaRPr lang="en-US" sz="1450" dirty="0"/>
           </a:p>
         </p:txBody>
       </p:sp>
@@ -6724,8 +6724,8 @@
         </p:nvSpPr>
         <p:spPr>
           <a:xfrm>
-            <a:off x="841248" y="2414016"/>
-            <a:ext cx="6126480" cy="365760"/>
+            <a:off x="841248" y="2295144"/>
+            <a:ext cx="6126480" cy="310896"/>
           </a:xfrm>
           <a:prstGeom prst="rect">
             <a:avLst/>
@@ -6749,7 +6749,7 @@
                 <a:ea typeface="Calibri" pitchFamily="34" charset="-122"/>
                 <a:cs typeface="Calibri" pitchFamily="34" charset="-120"/>
               </a:rPr>
-              <a:t>Frequência relativa do evento na base observada.</a:t>
+              <a:t>Quantas vezes o evento aconteceu, dividido pelo total.</a:t>
             </a:r>
             <a:endParaRPr lang="en-US" sz="1250" dirty="0"/>
           </a:p>
@@ -6757,18 +6757,71 @@
       </p:sp>
       <p:sp>
         <p:nvSpPr>
-          <p:cNvPr id="10" name="Shape 8"/>
+          <p:cNvPr id="10" name="Text 8"/>
+          <p:cNvSpPr txBox="1"/>
+          <p:nvPr/>
+        </p:nvSpPr>
+        <p:spPr>
+          <a:xfrm>
+            <a:off x="841248" y="2606040"/>
+            <a:ext cx="6126480" cy="310896"/>
+          </a:xfrm>
+          <a:prstGeom prst="rect">
+            <a:avLst/>
+          </a:prstGeom>
+          <a:noFill/>
+          <a:ln/>
+        </p:spPr>
+        <p:txBody>
+          <a:bodyPr wrap="square" lIns="0" tIns="0" rIns="0" bIns="0" rtlCol="0" anchor="ctr"/>
+          <a:lstStyle/>
+          <a:p>
+            <a:pPr indent="0" marL="0">
+              <a:buNone/>
+            </a:pPr>
+            <a:r>
+              <a:rPr lang="en-US" sz="1250" b="1" dirty="0">
+                <a:solidFill>
+                  <a:srgbClr val="1C7293"/>
+                </a:solidFill>
+                <a:latin typeface="Calibri" pitchFamily="34" charset="0"/>
+                <a:ea typeface="Calibri" pitchFamily="34" charset="-122"/>
+                <a:cs typeface="Calibri" pitchFamily="34" charset="-120"/>
+              </a:rPr>
+              <a:t>Exemplo: </a:t>
+            </a:r>
+            <a:pPr indent="0" marL="0">
+              <a:buNone/>
+            </a:pPr>
+            <a:r>
+              <a:rPr lang="en-US" sz="1250" dirty="0">
+                <a:solidFill>
+                  <a:srgbClr val="1B2A3A"/>
+                </a:solidFill>
+                <a:latin typeface="Calibri" pitchFamily="34" charset="0"/>
+                <a:ea typeface="Calibri" pitchFamily="34" charset="-122"/>
+                <a:cs typeface="Calibri" pitchFamily="34" charset="-120"/>
+              </a:rPr>
+              <a:t>Num dado comum, a chance de sair 6 é 1 em 6, ou seja, 16,7%.</a:t>
+            </a:r>
+            <a:endParaRPr lang="en-US" sz="1250" dirty="0"/>
+          </a:p>
+        </p:txBody>
+      </p:sp>
+      <p:sp>
+        <p:nvSpPr>
+          <p:cNvPr id="11" name="Shape 9"/>
           <p:cNvSpPr/>
           <p:nvPr/>
         </p:nvSpPr>
         <p:spPr>
           <a:xfrm>
-            <a:off x="566928" y="3090672"/>
-            <a:ext cx="6675120" cy="1371600"/>
+            <a:off x="566928" y="3108960"/>
+            <a:ext cx="6675120" cy="1481328"/>
           </a:xfrm>
           <a:prstGeom prst="roundRect">
             <a:avLst>
-              <a:gd name="adj" fmla="val 5333"/>
+              <a:gd name="adj" fmla="val 4938"/>
             </a:avLst>
           </a:prstGeom>
           <a:solidFill>
@@ -6784,14 +6837,14 @@
       </p:sp>
       <p:sp>
         <p:nvSpPr>
-          <p:cNvPr id="11" name="Text 9"/>
-          <p:cNvSpPr txBox="1"/>
-          <p:nvPr/>
-        </p:nvSpPr>
-        <p:spPr>
-          <a:xfrm>
-            <a:off x="841248" y="3218688"/>
-            <a:ext cx="6126480" cy="310896"/>
+          <p:cNvPr id="12" name="Text 10"/>
+          <p:cNvSpPr txBox="1"/>
+          <p:nvPr/>
+        </p:nvSpPr>
+        <p:spPr>
+          <a:xfrm>
+            <a:off x="841248" y="3200400"/>
+            <a:ext cx="6126480" cy="292608"/>
           </a:xfrm>
           <a:prstGeom prst="rect">
             <a:avLst/>
@@ -6823,30 +6876,30 @@
       </p:sp>
       <p:sp>
         <p:nvSpPr>
-          <p:cNvPr id="12" name="Text 10"/>
-          <p:cNvSpPr txBox="1"/>
-          <p:nvPr/>
-        </p:nvSpPr>
-        <p:spPr>
-          <a:xfrm>
-            <a:off x="841248" y="3566160"/>
-            <a:ext cx="6126480" cy="329184"/>
-          </a:xfrm>
-          <a:prstGeom prst="rect">
-            <a:avLst/>
-          </a:prstGeom>
-          <a:noFill/>
-          <a:ln/>
-        </p:spPr>
-        <p:txBody>
-          <a:bodyPr wrap="square" lIns="0" tIns="0" rIns="0" bIns="0" rtlCol="0" anchor="ctr"/>
-          <a:lstStyle/>
-          <a:p>
-            <a:pPr indent="0" marL="0">
-              <a:buNone/>
-            </a:pPr>
-            <a:r>
-              <a:rPr lang="en-US" sz="1500" b="1" dirty="0">
+          <p:cNvPr id="13" name="Text 11"/>
+          <p:cNvSpPr txBox="1"/>
+          <p:nvPr/>
+        </p:nvSpPr>
+        <p:spPr>
+          <a:xfrm>
+            <a:off x="841248" y="3529584"/>
+            <a:ext cx="6126480" cy="310896"/>
+          </a:xfrm>
+          <a:prstGeom prst="rect">
+            <a:avLst/>
+          </a:prstGeom>
+          <a:noFill/>
+          <a:ln/>
+        </p:spPr>
+        <p:txBody>
+          <a:bodyPr wrap="square" lIns="0" tIns="0" rIns="0" bIns="0" rtlCol="0" anchor="ctr"/>
+          <a:lstStyle/>
+          <a:p>
+            <a:pPr indent="0" marL="0">
+              <a:buNone/>
+            </a:pPr>
+            <a:r>
+              <a:rPr lang="en-US" sz="1450" b="1" dirty="0">
                 <a:solidFill>
                   <a:srgbClr val="D1495B"/>
                 </a:solidFill>
@@ -6854,22 +6907,22 @@
                 <a:ea typeface="Courier New" pitchFamily="34" charset="-122"/>
                 <a:cs typeface="Courier New" pitchFamily="34" charset="-120"/>
               </a:rPr>
-              <a:t>P(A|B) = P(A ∩ B) / P(B)</a:t>
-            </a:r>
-            <a:endParaRPr lang="en-US" sz="1500" dirty="0"/>
-          </a:p>
-        </p:txBody>
-      </p:sp>
-      <p:sp>
-        <p:nvSpPr>
-          <p:cNvPr id="13" name="Text 11"/>
-          <p:cNvSpPr txBox="1"/>
-          <p:nvPr/>
-        </p:nvSpPr>
-        <p:spPr>
-          <a:xfrm>
-            <a:off x="841248" y="3931920"/>
-            <a:ext cx="6126480" cy="365760"/>
+              <a:t>P(A|B) = P(A e B) / P(B)</a:t>
+            </a:r>
+            <a:endParaRPr lang="en-US" sz="1450" dirty="0"/>
+          </a:p>
+        </p:txBody>
+      </p:sp>
+      <p:sp>
+        <p:nvSpPr>
+          <p:cNvPr id="14" name="Text 12"/>
+          <p:cNvSpPr txBox="1"/>
+          <p:nvPr/>
+        </p:nvSpPr>
+        <p:spPr>
+          <a:xfrm>
+            <a:off x="841248" y="3867912"/>
+            <a:ext cx="6126480" cy="310896"/>
           </a:xfrm>
           <a:prstGeom prst="rect">
             <a:avLst/>
@@ -6893,7 +6946,7 @@
                 <a:ea typeface="Calibri" pitchFamily="34" charset="-122"/>
                 <a:cs typeface="Calibri" pitchFamily="34" charset="-120"/>
               </a:rPr>
-              <a:t>Atualiza a chance de A quando já se sabe que B ocorreu.</a:t>
+              <a:t>A chance de algo acontecer quando já sabemos que outra coisa aconteceu.</a:t>
             </a:r>
             <a:endParaRPr lang="en-US" sz="1250" dirty="0"/>
           </a:p>
@@ -6901,18 +6954,71 @@
       </p:sp>
       <p:sp>
         <p:nvSpPr>
-          <p:cNvPr id="14" name="Shape 12"/>
+          <p:cNvPr id="15" name="Text 13"/>
+          <p:cNvSpPr txBox="1"/>
+          <p:nvPr/>
+        </p:nvSpPr>
+        <p:spPr>
+          <a:xfrm>
+            <a:off x="841248" y="4178808"/>
+            <a:ext cx="6126480" cy="310896"/>
+          </a:xfrm>
+          <a:prstGeom prst="rect">
+            <a:avLst/>
+          </a:prstGeom>
+          <a:noFill/>
+          <a:ln/>
+        </p:spPr>
+        <p:txBody>
+          <a:bodyPr wrap="square" lIns="0" tIns="0" rIns="0" bIns="0" rtlCol="0" anchor="ctr"/>
+          <a:lstStyle/>
+          <a:p>
+            <a:pPr indent="0" marL="0">
+              <a:buNone/>
+            </a:pPr>
+            <a:r>
+              <a:rPr lang="en-US" sz="1250" b="1" dirty="0">
+                <a:solidFill>
+                  <a:srgbClr val="1C7293"/>
+                </a:solidFill>
+                <a:latin typeface="Calibri" pitchFamily="34" charset="0"/>
+                <a:ea typeface="Calibri" pitchFamily="34" charset="-122"/>
+                <a:cs typeface="Calibri" pitchFamily="34" charset="-120"/>
+              </a:rPr>
+              <a:t>Exemplo: </a:t>
+            </a:r>
+            <a:pPr indent="0" marL="0">
+              <a:buNone/>
+            </a:pPr>
+            <a:r>
+              <a:rPr lang="en-US" sz="1250" dirty="0">
+                <a:solidFill>
+                  <a:srgbClr val="1B2A3A"/>
+                </a:solidFill>
+                <a:latin typeface="Calibri" pitchFamily="34" charset="0"/>
+                <a:ea typeface="Calibri" pitchFamily="34" charset="-122"/>
+                <a:cs typeface="Calibri" pitchFamily="34" charset="-120"/>
+              </a:rPr>
+              <a:t>Se alguém já disse que saiu número par, a chance de ser 6 sobe para 1 em 3.</a:t>
+            </a:r>
+            <a:endParaRPr lang="en-US" sz="1250" dirty="0"/>
+          </a:p>
+        </p:txBody>
+      </p:sp>
+      <p:sp>
+        <p:nvSpPr>
+          <p:cNvPr id="16" name="Shape 14"/>
           <p:cNvSpPr/>
           <p:nvPr/>
         </p:nvSpPr>
         <p:spPr>
           <a:xfrm>
-            <a:off x="566928" y="4608576"/>
-            <a:ext cx="6675120" cy="1371600"/>
+            <a:off x="566928" y="4681728"/>
+            <a:ext cx="6675120" cy="1481328"/>
           </a:xfrm>
           <a:prstGeom prst="roundRect">
             <a:avLst>
-              <a:gd name="adj" fmla="val 5333"/>
+              <a:gd name="adj" fmla="val 4938"/>
             </a:avLst>
           </a:prstGeom>
           <a:solidFill>
@@ -6928,14 +7034,14 @@
       </p:sp>
       <p:sp>
         <p:nvSpPr>
-          <p:cNvPr id="15" name="Text 13"/>
-          <p:cNvSpPr txBox="1"/>
-          <p:nvPr/>
-        </p:nvSpPr>
-        <p:spPr>
-          <a:xfrm>
-            <a:off x="841248" y="4736592"/>
-            <a:ext cx="6126480" cy="310896"/>
+          <p:cNvPr id="17" name="Text 15"/>
+          <p:cNvSpPr txBox="1"/>
+          <p:nvPr/>
+        </p:nvSpPr>
+        <p:spPr>
+          <a:xfrm>
+            <a:off x="841248" y="4773168"/>
+            <a:ext cx="6126480" cy="292608"/>
           </a:xfrm>
           <a:prstGeom prst="rect">
             <a:avLst/>
@@ -6967,30 +7073,30 @@
       </p:sp>
       <p:sp>
         <p:nvSpPr>
-          <p:cNvPr id="16" name="Text 14"/>
-          <p:cNvSpPr txBox="1"/>
-          <p:nvPr/>
-        </p:nvSpPr>
-        <p:spPr>
-          <a:xfrm>
-            <a:off x="841248" y="5084064"/>
-            <a:ext cx="6126480" cy="329184"/>
-          </a:xfrm>
-          <a:prstGeom prst="rect">
-            <a:avLst/>
-          </a:prstGeom>
-          <a:noFill/>
-          <a:ln/>
-        </p:spPr>
-        <p:txBody>
-          <a:bodyPr wrap="square" lIns="0" tIns="0" rIns="0" bIns="0" rtlCol="0" anchor="ctr"/>
-          <a:lstStyle/>
-          <a:p>
-            <a:pPr indent="0" marL="0">
-              <a:buNone/>
-            </a:pPr>
-            <a:r>
-              <a:rPr lang="en-US" sz="1500" b="1" dirty="0">
+          <p:cNvPr id="18" name="Text 16"/>
+          <p:cNvSpPr txBox="1"/>
+          <p:nvPr/>
+        </p:nvSpPr>
+        <p:spPr>
+          <a:xfrm>
+            <a:off x="841248" y="5102352"/>
+            <a:ext cx="6126480" cy="310896"/>
+          </a:xfrm>
+          <a:prstGeom prst="rect">
+            <a:avLst/>
+          </a:prstGeom>
+          <a:noFill/>
+          <a:ln/>
+        </p:spPr>
+        <p:txBody>
+          <a:bodyPr wrap="square" lIns="0" tIns="0" rIns="0" bIns="0" rtlCol="0" anchor="ctr"/>
+          <a:lstStyle/>
+          <a:p>
+            <a:pPr indent="0" marL="0">
+              <a:buNone/>
+            </a:pPr>
+            <a:r>
+              <a:rPr lang="en-US" sz="1450" b="1" dirty="0">
                 <a:solidFill>
                   <a:srgbClr val="D1495B"/>
                 </a:solidFill>
@@ -6998,22 +7104,22 @@
                 <a:ea typeface="Courier New" pitchFamily="34" charset="-122"/>
                 <a:cs typeface="Courier New" pitchFamily="34" charset="-120"/>
               </a:rPr>
-              <a:t>P(B|A) = P(A|B) · P(B) / P(A)</a:t>
-            </a:r>
-            <a:endParaRPr lang="en-US" sz="1500" dirty="0"/>
-          </a:p>
-        </p:txBody>
-      </p:sp>
-      <p:sp>
-        <p:nvSpPr>
-          <p:cNvPr id="17" name="Text 15"/>
-          <p:cNvSpPr txBox="1"/>
-          <p:nvPr/>
-        </p:nvSpPr>
-        <p:spPr>
-          <a:xfrm>
-            <a:off x="841248" y="5449824"/>
-            <a:ext cx="6126480" cy="365760"/>
+              <a:t>P(B|A) = P(A|B) x P(B) / P(A)</a:t>
+            </a:r>
+            <a:endParaRPr lang="en-US" sz="1450" dirty="0"/>
+          </a:p>
+        </p:txBody>
+      </p:sp>
+      <p:sp>
+        <p:nvSpPr>
+          <p:cNvPr id="19" name="Text 17"/>
+          <p:cNvSpPr txBox="1"/>
+          <p:nvPr/>
+        </p:nvSpPr>
+        <p:spPr>
+          <a:xfrm>
+            <a:off x="841248" y="5440680"/>
+            <a:ext cx="6126480" cy="310896"/>
           </a:xfrm>
           <a:prstGeom prst="rect">
             <a:avLst/>
@@ -7037,7 +7143,7 @@
                 <a:ea typeface="Calibri" pitchFamily="34" charset="-122"/>
                 <a:cs typeface="Calibri" pitchFamily="34" charset="-120"/>
               </a:rPr>
-              <a:t>Inverte a condicional e sustenta os classificadores probabilísticos.</a:t>
+              <a:t>Vira a pergunta do avesso: a partir do resultado, descobre a causa provável.</a:t>
             </a:r>
             <a:endParaRPr lang="en-US" sz="1250" dirty="0"/>
           </a:p>
@@ -7045,7 +7151,60 @@
       </p:sp>
       <p:sp>
         <p:nvSpPr>
-          <p:cNvPr id="18" name="Shape 16"/>
+          <p:cNvPr id="20" name="Text 18"/>
+          <p:cNvSpPr txBox="1"/>
+          <p:nvPr/>
+        </p:nvSpPr>
+        <p:spPr>
+          <a:xfrm>
+            <a:off x="841248" y="5751576"/>
+            <a:ext cx="6126480" cy="310896"/>
+          </a:xfrm>
+          <a:prstGeom prst="rect">
+            <a:avLst/>
+          </a:prstGeom>
+          <a:noFill/>
+          <a:ln/>
+        </p:spPr>
+        <p:txBody>
+          <a:bodyPr wrap="square" lIns="0" tIns="0" rIns="0" bIns="0" rtlCol="0" anchor="ctr"/>
+          <a:lstStyle/>
+          <a:p>
+            <a:pPr indent="0" marL="0">
+              <a:buNone/>
+            </a:pPr>
+            <a:r>
+              <a:rPr lang="en-US" sz="1250" b="1" dirty="0">
+                <a:solidFill>
+                  <a:srgbClr val="1C7293"/>
+                </a:solidFill>
+                <a:latin typeface="Calibri" pitchFamily="34" charset="0"/>
+                <a:ea typeface="Calibri" pitchFamily="34" charset="-122"/>
+                <a:cs typeface="Calibri" pitchFamily="34" charset="-120"/>
+              </a:rPr>
+              <a:t>Exemplo: </a:t>
+            </a:r>
+            <a:pPr indent="0" marL="0">
+              <a:buNone/>
+            </a:pPr>
+            <a:r>
+              <a:rPr lang="en-US" sz="1250" dirty="0">
+                <a:solidFill>
+                  <a:srgbClr val="1B2A3A"/>
+                </a:solidFill>
+                <a:latin typeface="Calibri" pitchFamily="34" charset="0"/>
+                <a:ea typeface="Calibri" pitchFamily="34" charset="-122"/>
+                <a:cs typeface="Calibri" pitchFamily="34" charset="-120"/>
+              </a:rPr>
+              <a:t>O médico vê a febre e calcula qual doença é a causa mais provável.</a:t>
+            </a:r>
+            <a:endParaRPr lang="en-US" sz="1250" dirty="0"/>
+          </a:p>
+        </p:txBody>
+      </p:sp>
+      <p:sp>
+        <p:nvSpPr>
+          <p:cNvPr id="21" name="Shape 19"/>
           <p:cNvSpPr/>
           <p:nvPr/>
         </p:nvSpPr>
@@ -7072,7 +7231,7 @@
       </p:sp>
       <p:sp>
         <p:nvSpPr>
-          <p:cNvPr id="19" name="Text 17"/>
+          <p:cNvPr id="22" name="Text 20"/>
           <p:cNvSpPr txBox="1"/>
           <p:nvPr/>
         </p:nvSpPr>
@@ -7103,7 +7262,7 @@
                 <a:ea typeface="Calibri" pitchFamily="34" charset="-122"/>
                 <a:cs typeface="Calibri" pitchFamily="34" charset="-120"/>
               </a:rPr>
-              <a:t>AXIOMAS DE KOLMOGOROV</a:t>
+              <a:t>REGRAS BÁSICAS</a:t>
             </a:r>
             <a:endParaRPr lang="en-US" sz="1050" dirty="0"/>
           </a:p>
@@ -7111,7 +7270,7 @@
       </p:sp>
       <p:sp>
         <p:nvSpPr>
-          <p:cNvPr id="20" name="Text 18"/>
+          <p:cNvPr id="23" name="Text 21"/>
           <p:cNvSpPr txBox="1"/>
           <p:nvPr/>
         </p:nvSpPr>
@@ -7145,7 +7304,7 @@
                 <a:ea typeface="Calibri" pitchFamily="34" charset="-122"/>
                 <a:cs typeface="Calibri" pitchFamily="34" charset="-120"/>
               </a:rPr>
-              <a:t>0 ≤ P(A) ≤ 1</a:t>
+              <a:t>Toda chance fica entre 0 e 1 (0% e 100%)</a:t>
             </a:r>
             <a:endParaRPr lang="en-US" sz="1350" dirty="0"/>
           </a:p>
@@ -7165,7 +7324,7 @@
                 <a:ea typeface="Calibri" pitchFamily="34" charset="-122"/>
                 <a:cs typeface="Calibri" pitchFamily="34" charset="-120"/>
               </a:rPr>
-              <a:t>P(espaço amostral) = 1</a:t>
+              <a:t>A soma de todas as possibilidades dá 1</a:t>
             </a:r>
             <a:endParaRPr lang="en-US" sz="1350" dirty="0"/>
           </a:p>
@@ -7185,7 +7344,7 @@
                 <a:ea typeface="Calibri" pitchFamily="34" charset="-122"/>
                 <a:cs typeface="Calibri" pitchFamily="34" charset="-120"/>
               </a:rPr>
-              <a:t>A e B disjuntos ⇒ P(A ∪ B) = P(A) + P(B)</a:t>
+              <a:t>Se A e B não acontecem juntos, somam-se as chances</a:t>
             </a:r>
             <a:endParaRPr lang="en-US" sz="1350" dirty="0"/>
           </a:p>
@@ -7193,7 +7352,7 @@
       </p:sp>
       <p:sp>
         <p:nvSpPr>
-          <p:cNvPr id="21" name="Text 19"/>
+          <p:cNvPr id="24" name="Text 22"/>
           <p:cNvSpPr txBox="1"/>
           <p:nvPr/>
         </p:nvSpPr>
@@ -7224,7 +7383,7 @@
                 <a:ea typeface="Cambria" pitchFamily="34" charset="-122"/>
                 <a:cs typeface="Cambria" pitchFamily="34" charset="-120"/>
               </a:rPr>
-              <a:t>Onde isso aparece na IA</a:t>
+              <a:t>Onde isso é usado</a:t>
             </a:r>
             <a:endParaRPr lang="en-US" sz="1700" dirty="0"/>
           </a:p>
@@ -7232,7 +7391,7 @@
       </p:sp>
       <p:sp>
         <p:nvSpPr>
-          <p:cNvPr id="22" name="Text 20"/>
+          <p:cNvPr id="25" name="Text 23"/>
           <p:cNvSpPr txBox="1"/>
           <p:nvPr/>
         </p:nvSpPr>
@@ -7270,7 +7429,7 @@
                 <a:ea typeface="Calibri" pitchFamily="34" charset="-122"/>
                 <a:cs typeface="Calibri" pitchFamily="34" charset="-120"/>
               </a:rPr>
-              <a:t>Classificadores como Naive Bayes e regressão logística</a:t>
+              <a:t>Aplicativo que avisa se vai chover hoje</a:t>
             </a:r>
             <a:endParaRPr lang="en-US" sz="1350" dirty="0"/>
           </a:p>
@@ -7294,7 +7453,7 @@
                 <a:ea typeface="Calibri" pitchFamily="34" charset="-122"/>
                 <a:cs typeface="Calibri" pitchFamily="34" charset="-120"/>
               </a:rPr>
-              <a:t>Saída de redes neurais pela função softmax</a:t>
+              <a:t>Filtro que separa e-mail de spam</a:t>
             </a:r>
             <a:endParaRPr lang="en-US" sz="1350" dirty="0"/>
           </a:p>
@@ -7318,7 +7477,7 @@
                 <a:ea typeface="Calibri" pitchFamily="34" charset="-122"/>
                 <a:cs typeface="Calibri" pitchFamily="34" charset="-120"/>
               </a:rPr>
-              <a:t>Filtros de spam e sistemas de recomendação</a:t>
+              <a:t>Banco que avalia risco de um empréstimo</a:t>
             </a:r>
             <a:endParaRPr lang="en-US" sz="1350" dirty="0"/>
           </a:p>
@@ -7342,7 +7501,7 @@
                 <a:ea typeface="Calibri" pitchFamily="34" charset="-122"/>
                 <a:cs typeface="Calibri" pitchFamily="34" charset="-120"/>
               </a:rPr>
-              <a:t>Cálculo de risco e precificação de seguros</a:t>
+              <a:t>Netflix e YouTube sugerindo o próximo vídeo</a:t>
             </a:r>
             <a:endParaRPr lang="en-US" sz="1350" dirty="0"/>
           </a:p>
@@ -7511,7 +7670,7 @@
                 <a:ea typeface="Calibri" pitchFamily="34" charset="-122"/>
                 <a:cs typeface="Calibri" pitchFamily="34" charset="-120"/>
               </a:rPr>
-              <a:t>Simulação controlada de 1.000 entregas urbanas em Python</a:t>
+              <a:t>Mil entregas criadas pelo próprio programa</a:t>
             </a:r>
             <a:endParaRPr lang="en-US" sz="1400" dirty="0"/>
           </a:p>
@@ -7553,7 +7712,7 @@
                 <a:ea typeface="Calibri" pitchFamily="34" charset="-122"/>
                 <a:cs typeface="Calibri" pitchFamily="34" charset="-120"/>
               </a:rPr>
-              <a:t>O computador não gera acaso verdadeiro. Um algoritmo determinístico parte de uma semente (seed) e produz uma sequência com propriedades estatísticas de aleatoriedade. Como a semente está fixa, qualquer execução devolve os mesmos números.</a:t>
+              <a:t>O computador não sorteia de verdade. Ele segue uma conta que parte de um número inicial, a semente, e devolve valores que parecem sorteados. Como a semente está fixa em 42, rodar o código hoje ou amanhã dá exatamente o mesmo resultado.</a:t>
             </a:r>
             <a:endParaRPr lang="en-US" sz="1400" dirty="0"/>
           </a:p>
@@ -7778,7 +7937,7 @@
                 <a:ea typeface="Cambria" pitchFamily="34" charset="-122"/>
                 <a:cs typeface="Cambria" pitchFamily="34" charset="-120"/>
               </a:rPr>
-              <a:t>Cada variável tem uma distribuição por trás</a:t>
+              <a:t>Parece sorteio, mas é repetível</a:t>
             </a:r>
             <a:endParaRPr lang="en-US" sz="1500" dirty="0"/>
           </a:p>
@@ -7817,7 +7976,7 @@
                 <a:ea typeface="Calibri" pitchFamily="34" charset="-122"/>
                 <a:cs typeface="Calibri" pitchFamily="34" charset="-120"/>
               </a:rPr>
-              <a:t>Distância ~ Normal(12; 4), Chuva ~ Bernoulli(0,30), Pico ~ Bernoulli(0,40), Erro ~ Normal(0; 7)</a:t>
+              <a:t>É como um baralho embaralhado sempre da mesma forma: o resultado parece sorteado, mas qualquer pessoa consegue repetir o mesmo embaralhamento e conferir nossas contas.</a:t>
             </a:r>
             <a:endParaRPr lang="en-US" sz="1250" dirty="0"/>
           </a:p>
@@ -9899,7 +10058,7 @@
                 <a:ea typeface="Calibri" pitchFamily="34" charset="-122"/>
                 <a:cs typeface="Calibri" pitchFamily="34" charset="-120"/>
               </a:rPr>
-              <a:t>A coluna alvo segue uma regra simples: atraso = 1 quando o tempo simulado ultrapassa o SLA de 60 minutos.</a:t>
+              <a:t>A última coluna é o que queremos prever: vale 1 quando o tempo passa de 60 minutos.</a:t>
             </a:r>
             <a:endParaRPr lang="en-US" sz="1250" dirty="0"/>
           </a:p>
@@ -10068,7 +10227,7 @@
                 <a:ea typeface="Calibri" pitchFamily="34" charset="-122"/>
                 <a:cs typeface="Calibri" pitchFamily="34" charset="-120"/>
               </a:rPr>
-              <a:t>Executando o código: como cada fator muda o risco de atraso</a:t>
+              <a:t>Rodando o código: o risco muda muito de um cenário para outro</a:t>
             </a:r>
             <a:endParaRPr lang="en-US" sz="1400" dirty="0"/>
           </a:p>
@@ -10731,7 +10890,7 @@
                 <a:ea typeface="Calibri" pitchFamily="34" charset="-122"/>
                 <a:cs typeface="Calibri" pitchFamily="34" charset="-120"/>
               </a:rPr>
-              <a:t>Com chuva, a chance de estourar o prazo quase triplica.</a:t>
+              <a:t>Com chuva, a chance de perder o prazo quase triplica.</a:t>
             </a:r>
             <a:endParaRPr lang="en-US" sz="1250" dirty="0"/>
           </a:p>
@@ -10861,7 +11020,7 @@
                 <a:ea typeface="Cambria" pitchFamily="34" charset="-122"/>
                 <a:cs typeface="Cambria" pitchFamily="34" charset="-120"/>
               </a:rPr>
-              <a:t>Teorema de Bayes: invertendo a pergunta</a:t>
+              <a:t>Teorema de Bayes na prática</a:t>
             </a:r>
             <a:endParaRPr lang="en-US" sz="3000" dirty="0"/>
           </a:p>
@@ -11032,7 +11191,7 @@
                 <a:ea typeface="Cambria" pitchFamily="34" charset="-122"/>
                 <a:cs typeface="Cambria" pitchFamily="34" charset="-120"/>
               </a:rPr>
-              <a:t>Verossimilhança</a:t>
+              <a:t>O que já sabemos</a:t>
             </a:r>
             <a:endParaRPr lang="en-US" sz="1500" dirty="0"/>
           </a:p>
@@ -11110,7 +11269,7 @@
                 <a:ea typeface="Calibri" pitchFamily="34" charset="-122"/>
                 <a:cs typeface="Calibri" pitchFamily="34" charset="-120"/>
               </a:rPr>
-              <a:t>O que a base mostra sobre o efeito da chuva.</a:t>
+              <a:t>Das entregas com chuva, 41% atrasaram.</a:t>
             </a:r>
             <a:endParaRPr lang="en-US" sz="1200" dirty="0"/>
           </a:p>
@@ -11176,7 +11335,7 @@
                 <a:ea typeface="Cambria" pitchFamily="34" charset="-122"/>
                 <a:cs typeface="Cambria" pitchFamily="34" charset="-120"/>
               </a:rPr>
-              <a:t>Priori</a:t>
+              <a:t>Chance de chover</a:t>
             </a:r>
             <a:endParaRPr lang="en-US" sz="1500" dirty="0"/>
           </a:p>
@@ -11254,7 +11413,7 @@
                 <a:ea typeface="Calibri" pitchFamily="34" charset="-122"/>
                 <a:cs typeface="Calibri" pitchFamily="34" charset="-120"/>
               </a:rPr>
-              <a:t>Chance de chuva antes de observar a entrega.</a:t>
+              <a:t>Choveu em 30,7% das entregas da base.</a:t>
             </a:r>
             <a:endParaRPr lang="en-US" sz="1200" dirty="0"/>
           </a:p>
@@ -11320,7 +11479,7 @@
                 <a:ea typeface="Cambria" pitchFamily="34" charset="-122"/>
                 <a:cs typeface="Cambria" pitchFamily="34" charset="-120"/>
               </a:rPr>
-              <a:t>Evidência</a:t>
+              <a:t>Chance de atrasar</a:t>
             </a:r>
             <a:endParaRPr lang="en-US" sz="1500" dirty="0"/>
           </a:p>
@@ -11398,7 +11557,7 @@
                 <a:ea typeface="Calibri" pitchFamily="34" charset="-122"/>
                 <a:cs typeface="Calibri" pitchFamily="34" charset="-120"/>
               </a:rPr>
-              <a:t>Normaliza o resultado para virar probabilidade.</a:t>
+              <a:t>22,5% de todas as entregas atrasaram.</a:t>
             </a:r>
             <a:endParaRPr lang="en-US" sz="1200" dirty="0"/>
           </a:p>
@@ -11464,7 +11623,7 @@
                 <a:ea typeface="Cambria" pitchFamily="34" charset="-122"/>
                 <a:cs typeface="Cambria" pitchFamily="34" charset="-120"/>
               </a:rPr>
-              <a:t>Posteriori</a:t>
+              <a:t>Resposta</a:t>
             </a:r>
             <a:endParaRPr lang="en-US" sz="1500" dirty="0"/>
           </a:p>
@@ -11542,7 +11701,7 @@
                 <a:ea typeface="Calibri" pitchFamily="34" charset="-122"/>
                 <a:cs typeface="Calibri" pitchFamily="34" charset="-120"/>
               </a:rPr>
-              <a:t>56% das entregas atrasadas ocorreram sob chuva.</a:t>
+              <a:t>Das entregas que atrasaram, 56% foram em dia de chuva.</a:t>
             </a:r>
             <a:endParaRPr lang="en-US" sz="1200" dirty="0"/>
           </a:p>
@@ -11584,7 +11743,7 @@
                 <a:ea typeface="Calibri" pitchFamily="34" charset="-122"/>
                 <a:cs typeface="Calibri" pitchFamily="34" charset="-120"/>
               </a:rPr>
-              <a:t>Validação no código: </a:t>
+              <a:t>Conferindo no código: </a:t>
             </a:r>
             <a:pPr indent="0" marL="0">
               <a:lnSpc>
@@ -11601,7 +11760,7 @@
                 <a:ea typeface="Calibri" pitchFamily="34" charset="-122"/>
                 <a:cs typeface="Calibri" pitchFamily="34" charset="-120"/>
               </a:rPr>
-              <a:t>o valor calculado pela fórmula (0,560) coincide com a frequência observada na base, df.loc[df['atraso']==1, 'chuva'].mean() = 0,560.</a:t>
+              <a:t>contamos na base quantas entregas atrasadas tiveram chuva e deu 0,560, exatamente o mesmo valor da fórmula.</a:t>
             </a:r>
             <a:endParaRPr lang="en-US" sz="1400" dirty="0"/>
           </a:p>
@@ -11731,7 +11890,7 @@
                 <a:ea typeface="Cambria" pitchFamily="34" charset="-122"/>
                 <a:cs typeface="Cambria" pitchFamily="34" charset="-120"/>
               </a:rPr>
-              <a:t>Distribuição Normal: modelando o tempo</a:t>
+              <a:t>Distribuição Normal do tempo de entrega</a:t>
             </a:r>
             <a:endParaRPr lang="en-US" sz="3000" dirty="0"/>
           </a:p>
@@ -11770,7 +11929,7 @@
                 <a:ea typeface="Calibri" pitchFamily="34" charset="-122"/>
                 <a:cs typeface="Calibri" pitchFamily="34" charset="-120"/>
               </a:rPr>
-              <a:t>Tema 2: a curva que descreve grandezas contínuas somadas</a:t>
+              <a:t>Tema 2: a curva em formato de sino</a:t>
             </a:r>
             <a:endParaRPr lang="en-US" sz="1400" dirty="0"/>
           </a:p>
@@ -11833,7 +11992,7 @@
                 <a:ea typeface="Calibri" pitchFamily="34" charset="-122"/>
                 <a:cs typeface="Calibri" pitchFamily="34" charset="-120"/>
               </a:rPr>
-              <a:t>Com média e desvio conhecidos, a curva responde qualquer pergunta de prazo, inclusive sobre valores que a base não observou.</a:t>
+              <a:t>A altura das pessoas e as notas de uma prova se comportam assim: a maioria fica perto da média e poucos ficam nos extremos. Com o tempo de entrega acontece o mesmo.</a:t>
             </a:r>
             <a:endParaRPr lang="en-US" sz="1250" dirty="0"/>
           </a:p>
@@ -12121,7 +12280,7 @@
                 <a:ea typeface="Cambria" pitchFamily="34" charset="-122"/>
                 <a:cs typeface="Cambria" pitchFamily="34" charset="-120"/>
               </a:rPr>
-              <a:t>Padronização (escore z)</a:t>
+              <a:t>Chance de passar dos 60 minutos</a:t>
             </a:r>
             <a:endParaRPr lang="en-US" sz="1600" dirty="0"/>
           </a:p>
@@ -12260,7 +12419,7 @@
                 <a:ea typeface="Calibri" pitchFamily="34" charset="-122"/>
                 <a:cs typeface="Calibri" pitchFamily="34" charset="-120"/>
               </a:rPr>
-              <a:t>Percentil 95: prometer 75 min cumpriria o prazo em 95% das entregas.</a:t>
+              <a:t>A curva também mostra que prometer 75 minutos daria conta de 95% das entregas.</a:t>
             </a:r>
             <a:endParaRPr lang="en-US" sz="1250" dirty="0"/>
           </a:p>
@@ -12390,7 +12549,7 @@
                 <a:ea typeface="Cambria" pitchFamily="34" charset="-122"/>
                 <a:cs typeface="Cambria" pitchFamily="34" charset="-120"/>
               </a:rPr>
-              <a:t>Por que a Normal aparece tanto?</a:t>
+              <a:t>Por que essa curva aparece tanto?</a:t>
             </a:r>
             <a:endParaRPr lang="en-US" sz="3000" dirty="0"/>
           </a:p>
@@ -12429,7 +12588,7 @@
                 <a:ea typeface="Calibri" pitchFamily="34" charset="-122"/>
                 <a:cs typeface="Calibri" pitchFamily="34" charset="-120"/>
               </a:rPr>
-              <a:t>Teste de normalidade, regra empírica e Teorema Central do Limite</a:t>
+              <a:t>Conferindo se os dados realmente seguem a curva Normal</a:t>
             </a:r>
             <a:endParaRPr lang="en-US" sz="1400" dirty="0"/>
           </a:p>
@@ -12495,7 +12654,7 @@
                 <a:ea typeface="Calibri" pitchFamily="34" charset="-122"/>
                 <a:cs typeface="Calibri" pitchFamily="34" charset="-120"/>
               </a:rPr>
-              <a:t>Mesmo partindo de uma população fortemente assimétrica (exponencial), a distribuição das médias amostrais converge para a Normal conforme n cresce. Essa é a razão de a curva aparecer em tantos métodos estatísticos.</a:t>
+              <a:t>No primeiro gráfico os dados são bem tortos, nada parecido com um sino. Mas quando tiramos médias de grupos de 5 e depois de 50, o desenho vai virando o sino da Normal. Por isso essa curva aparece em quase tudo.</a:t>
             </a:r>
             <a:endParaRPr lang="en-US" sz="1400" dirty="0"/>
           </a:p>
@@ -13533,7 +13692,7 @@
                 <a:ea typeface="Calibri" pitchFamily="34" charset="-122"/>
                 <a:cs typeface="Calibri" pitchFamily="34" charset="-120"/>
               </a:rPr>
-              <a:t>Como p &gt; 0,05, não rejeitamos H₀: os dados são compatíveis com a Normal.</a:t>
+              <a:t>O valor de p ficou acima de 0,05, então os dados combinam com a Normal.</a:t>
             </a:r>
             <a:endParaRPr lang="en-US" sz="1150" dirty="0"/>
           </a:p>
@@ -13599,7 +13758,7 @@
                 <a:ea typeface="Calibri" pitchFamily="34" charset="-122"/>
                 <a:cs typeface="Calibri" pitchFamily="34" charset="-120"/>
               </a:rPr>
-              <a:t>ONDE A NORMAL É USADA</a:t>
+              <a:t>ONDE A CURVA NORMAL É USADA</a:t>
             </a:r>
             <a:endParaRPr lang="en-US" sz="1050" dirty="0"/>
           </a:p>
@@ -13645,7 +13804,7 @@
                 <a:ea typeface="Calibri" pitchFamily="34" charset="-122"/>
                 <a:cs typeface="Calibri" pitchFamily="34" charset="-120"/>
               </a:rPr>
-              <a:t>Inicialização de pesos de redes neurais (Xavier, He)</a:t>
+              <a:t>Ajuste inicial de redes neurais</a:t>
             </a:r>
             <a:endParaRPr lang="en-US" sz="1350" dirty="0"/>
           </a:p>
@@ -13669,7 +13828,7 @@
                 <a:ea typeface="Calibri" pitchFamily="34" charset="-122"/>
                 <a:cs typeface="Calibri" pitchFamily="34" charset="-120"/>
               </a:rPr>
-              <a:t>Padronização de variáveis (z-score) antes do treino</a:t>
+              <a:t>Deixar variáveis na mesma escala</a:t>
             </a:r>
             <a:endParaRPr lang="en-US" sz="1350" dirty="0"/>
           </a:p>
@@ -13693,7 +13852,7 @@
                 <a:ea typeface="Calibri" pitchFamily="34" charset="-122"/>
                 <a:cs typeface="Calibri" pitchFamily="34" charset="-120"/>
               </a:rPr>
-              <a:t>Verossimilhança gaussiana no Naive Bayes</a:t>
+              <a:t>O modelo que usamos no próximo slide</a:t>
             </a:r>
             <a:endParaRPr lang="en-US" sz="1350" dirty="0"/>
           </a:p>
@@ -13717,7 +13876,7 @@
                 <a:ea typeface="Calibri" pitchFamily="34" charset="-122"/>
                 <a:cs typeface="Calibri" pitchFamily="34" charset="-120"/>
               </a:rPr>
-              <a:t>Detecção de anomalias acima de 3σ</a:t>
+              <a:t>Encontrar valores fora do normal</a:t>
             </a:r>
             <a:endParaRPr lang="en-US" sz="1350" dirty="0"/>
           </a:p>
@@ -13741,7 +13900,7 @@
                 <a:ea typeface="Calibri" pitchFamily="34" charset="-122"/>
                 <a:cs typeface="Calibri" pitchFamily="34" charset="-120"/>
               </a:rPr>
-              <a:t>Ruído gaussiano em modelos de difusão</a:t>
+              <a:t>Programas que geram imagens</a:t>
             </a:r>
             <a:endParaRPr lang="en-US" sz="1350" dirty="0"/>
           </a:p>
@@ -13765,7 +13924,7 @@
                 <a:ea typeface="Calibri" pitchFamily="34" charset="-122"/>
                 <a:cs typeface="Calibri" pitchFamily="34" charset="-120"/>
               </a:rPr>
-              <a:t>Intervalos de confiança das métricas do modelo</a:t>
+              <a:t>Margem de erro de pesquisas e testes</a:t>
             </a:r>
             <a:endParaRPr lang="en-US" sz="1350" dirty="0"/>
           </a:p>
@@ -13934,7 +14093,7 @@
                 <a:ea typeface="Calibri" pitchFamily="34" charset="-122"/>
                 <a:cs typeface="Calibri" pitchFamily="34" charset="-120"/>
               </a:rPr>
-              <a:t>Onde os dois temas se encontram: Bayes decide e a Normal calcula</a:t>
+              <a:t>O modelo que junta os dois temas</a:t>
             </a:r>
             <a:endParaRPr lang="en-US" sz="1400" dirty="0"/>
           </a:p>
@@ -13949,7 +14108,7 @@
         <p:spPr>
           <a:xfrm>
             <a:off x="566928" y="1536192"/>
-            <a:ext cx="5760720" cy="960120"/>
+            <a:ext cx="5760720" cy="1325880"/>
           </a:xfrm>
           <a:prstGeom prst="rect">
             <a:avLst/>
@@ -13976,7 +14135,7 @@
                 <a:ea typeface="Calibri" pitchFamily="34" charset="-122"/>
                 <a:cs typeface="Calibri" pitchFamily="34" charset="-120"/>
               </a:rPr>
-              <a:t>Para cada classe, o modelo estima a probabilidade a priori e uma curva Normal por variável. Diante de uma nova entrega, multiplica priori e verossimilhanças e escolhe a classe de maior probabilidade a posteriori.</a:t>
+              <a:t>O modelo aprende como é cada grupo, entregas no prazo e entregas atrasadas: distância média, quanto chove e quanto pega horário de pico. Diante de uma entrega nova, compara com os dois grupos, escolhe o mais parecido e diz em quantos por cento confia.</a:t>
             </a:r>
             <a:endParaRPr lang="en-US" sz="1400" dirty="0"/>
           </a:p>
@@ -13990,12 +14149,12 @@
         </p:nvSpPr>
         <p:spPr>
           <a:xfrm>
-            <a:off x="566928" y="2606040"/>
-            <a:ext cx="5760720" cy="713232"/>
+            <a:off x="566928" y="2971800"/>
+            <a:ext cx="5760720" cy="658368"/>
           </a:xfrm>
           <a:prstGeom prst="roundRect">
             <a:avLst>
-              <a:gd name="adj" fmla="val 10256"/>
+              <a:gd name="adj" fmla="val 11111"/>
             </a:avLst>
           </a:prstGeom>
           <a:solidFill>
@@ -14017,8 +14176,8 @@
         </p:nvSpPr>
         <p:spPr>
           <a:xfrm>
-            <a:off x="566928" y="2606040"/>
-            <a:ext cx="5760720" cy="713232"/>
+            <a:off x="566928" y="2971800"/>
+            <a:ext cx="5760720" cy="658368"/>
           </a:xfrm>
           <a:prstGeom prst="rect">
             <a:avLst/>
@@ -14034,7 +14193,7 @@
               <a:buNone/>
             </a:pPr>
             <a:r>
-              <a:rPr lang="en-US" sz="1600" b="1" dirty="0">
+              <a:rPr lang="en-US" sz="1500" b="1" dirty="0">
                 <a:solidFill>
                   <a:srgbClr val="FFFFFF"/>
                 </a:solidFill>
@@ -14042,9 +14201,9 @@
                 <a:ea typeface="Courier New" pitchFamily="34" charset="-122"/>
                 <a:cs typeface="Courier New" pitchFamily="34" charset="-120"/>
               </a:rPr>
-              <a:t>P(classe | x) ∝ P(classe) · Π P(xᵢ | classe)</a:t>
-            </a:r>
-            <a:endParaRPr lang="en-US" sz="1600" dirty="0"/>
+              <a:t>P(grupo | dados) = P(grupo) x P(dados | grupo)</a:t>
+            </a:r>
+            <a:endParaRPr lang="en-US" sz="1500" dirty="0"/>
           </a:p>
         </p:txBody>
       </p:sp>
@@ -14056,8 +14215,8 @@
         </p:nvSpPr>
         <p:spPr>
           <a:xfrm>
-            <a:off x="566928" y="3520440"/>
-            <a:ext cx="5760720" cy="2286000"/>
+            <a:off x="566928" y="3794760"/>
+            <a:ext cx="5760720" cy="2103120"/>
           </a:xfrm>
           <a:prstGeom prst="rect">
             <a:avLst/>
@@ -14088,7 +14247,7 @@
                 <a:ea typeface="Calibri" pitchFamily="34" charset="-122"/>
                 <a:cs typeface="Calibri" pitchFamily="34" charset="-120"/>
               </a:rPr>
-              <a:t>Treino com 70% da base: calcula P(classe), μ e σ de cada variável.</a:t>
+              <a:t>Treinamos com 70% das entregas e testamos nas outras 30%.</a:t>
             </a:r>
             <a:endParaRPr lang="en-US" sz="1400" dirty="0"/>
           </a:p>
@@ -14112,7 +14271,7 @@
                 <a:ea typeface="Calibri" pitchFamily="34" charset="-122"/>
                 <a:cs typeface="Calibri" pitchFamily="34" charset="-120"/>
               </a:rPr>
-              <a:t>O termo “naive” vem da suposição de independência entre as variáveis.</a:t>
+              <a:t>O nome “naive”, ingênuo, vem de tratar as colunas como independentes.</a:t>
             </a:r>
             <a:endParaRPr lang="en-US" sz="1400" dirty="0"/>
           </a:p>
@@ -14136,7 +14295,7 @@
                 <a:ea typeface="Calibri" pitchFamily="34" charset="-122"/>
                 <a:cs typeface="Calibri" pitchFamily="34" charset="-120"/>
               </a:rPr>
-              <a:t>A verossimilhança contínua usa a densidade da Normal na distância.</a:t>
+              <a:t>A curva Normal entra para medir o quanto a distância combina com cada grupo.</a:t>
             </a:r>
             <a:endParaRPr lang="en-US" sz="1400" dirty="0"/>
           </a:p>
@@ -14160,7 +14319,7 @@
                 <a:ea typeface="Calibri" pitchFamily="34" charset="-122"/>
                 <a:cs typeface="Calibri" pitchFamily="34" charset="-120"/>
               </a:rPr>
-              <a:t>A saída é uma probabilidade, e não apenas um rótulo.</a:t>
+              <a:t>A resposta vem em porcentagem, não só um sim ou não.</a:t>
             </a:r>
             <a:endParaRPr lang="en-US" sz="1400" dirty="0"/>
           </a:p>
@@ -14475,7 +14634,7 @@
                 <a:ea typeface="Calibri" pitchFamily="34" charset="-122"/>
                 <a:cs typeface="Calibri" pitchFamily="34" charset="-120"/>
               </a:rPr>
-              <a:t>Nenhuma biblioteca de machine learning foi usada. O modelo usa apenas probabilidade e a fórmula da Normal.</a:t>
+              <a:t>É o mesmo raciocínio de olhar uma fruta e dizer se é laranja ou limão pelo tamanho e pela cor: comparamos com o que já vimos antes de cada uma.</a:t>
             </a:r>
             <a:endParaRPr lang="en-US" sz="1200" dirty="0"/>
           </a:p>

--- a/checkpoint4/apresentacao_cp4.pptx
+++ b/checkpoint4/apresentacao_cp4.pptx
@@ -1925,7 +1925,7 @@
     <p:bg>
       <p:bgPr>
         <a:solidFill>
-          <a:srgbClr val="21295C"/>
+          <a:srgbClr val="1A1A1A"/>
         </a:solidFill>
       </p:bgPr>
     </p:bg>
@@ -1958,7 +1958,7 @@
             <a:avLst/>
           </a:prstGeom>
           <a:solidFill>
-            <a:srgbClr val="1C7293">
+            <a:srgbClr val="1A1A1A">
               <a:alpha val="38000"/>
             </a:srgbClr>
           </a:solidFill>
@@ -1980,22 +1980,46 @@
             <a:avLst/>
           </a:prstGeom>
           <a:solidFill>
-            <a:srgbClr val="D1495B">
+            <a:srgbClr val="ED1165">
               <a:alpha val="28000"/>
             </a:srgbClr>
           </a:solidFill>
           <a:ln/>
         </p:spPr>
       </p:sp>
-      <p:sp>
-        <p:nvSpPr>
-          <p:cNvPr id="4" name="Text 2"/>
-          <p:cNvSpPr txBox="1"/>
-          <p:nvPr/>
-        </p:nvSpPr>
-        <p:spPr>
-          <a:xfrm>
-            <a:off x="822960" y="658368"/>
+      <p:pic>
+        <p:nvPicPr>
+          <p:cNvPr id="4" name="Image 0" descr="/home/user/Projeto-Python/.claude/skills/fiap-doc/assets/header-logo.png">    </p:cNvPr>
+          <p:cNvPicPr>
+            <a:picLocks noChangeAspect="1"/>
+          </p:cNvPicPr>
+          <p:nvPr/>
+        </p:nvPicPr>
+        <p:blipFill>
+          <a:blip r:embed="rId1"/>
+          <a:stretch>
+            <a:fillRect/>
+          </a:stretch>
+        </p:blipFill>
+        <p:spPr>
+          <a:xfrm>
+            <a:off x="822960" y="502920"/>
+            <a:ext cx="1554480" cy="733349"/>
+          </a:xfrm>
+          <a:prstGeom prst="rect">
+            <a:avLst/>
+          </a:prstGeom>
+        </p:spPr>
+      </p:pic>
+      <p:sp>
+        <p:nvSpPr>
+          <p:cNvPr id="5" name="Text 2"/>
+          <p:cNvSpPr txBox="1"/>
+          <p:nvPr/>
+        </p:nvSpPr>
+        <p:spPr>
+          <a:xfrm>
+            <a:off x="822960" y="1481328"/>
             <a:ext cx="9692640" cy="320040"/>
           </a:xfrm>
           <a:prstGeom prst="rect">
@@ -2014,11 +2038,11 @@
             <a:r>
               <a:rPr lang="en-US" sz="1250" b="1" spc="200" kern="0" dirty="0">
                 <a:solidFill>
-                  <a:srgbClr val="9EC6DC"/>
-                </a:solidFill>
-                <a:latin typeface="Calibri" pitchFamily="34" charset="0"/>
-                <a:ea typeface="Calibri" pitchFamily="34" charset="-122"/>
-                <a:cs typeface="Calibri" pitchFamily="34" charset="-120"/>
+                  <a:srgbClr val="F0A8C4"/>
+                </a:solidFill>
+                <a:latin typeface="Montserrat" pitchFamily="34" charset="0"/>
+                <a:ea typeface="Montserrat" pitchFamily="34" charset="-122"/>
+                <a:cs typeface="Montserrat" pitchFamily="34" charset="-120"/>
               </a:rPr>
               <a:t>CHECKPOINT 4  |  STATISTICAL COMPUTING WITH R &amp; PYTHON</a:t>
             </a:r>
@@ -2028,13 +2052,13 @@
       </p:sp>
       <p:sp>
         <p:nvSpPr>
-          <p:cNvPr id="5" name="Text 3"/>
-          <p:cNvSpPr txBox="1"/>
-          <p:nvPr/>
-        </p:nvSpPr>
-        <p:spPr>
-          <a:xfrm>
-            <a:off x="822960" y="1188720"/>
+          <p:cNvPr id="6" name="Text 3"/>
+          <p:cNvSpPr txBox="1"/>
+          <p:nvPr/>
+        </p:nvSpPr>
+        <p:spPr>
+          <a:xfrm>
+            <a:off x="822960" y="1920240"/>
             <a:ext cx="9326880" cy="1554480"/>
           </a:xfrm>
           <a:prstGeom prst="rect">
@@ -2054,29 +2078,29 @@
               <a:buNone/>
             </a:pPr>
             <a:r>
-              <a:rPr lang="en-US" sz="3800" b="1" dirty="0">
+              <a:rPr lang="en-US" sz="3400" b="1" dirty="0">
                 <a:solidFill>
                   <a:srgbClr val="FFFFFF"/>
                 </a:solidFill>
-                <a:latin typeface="Cambria" pitchFamily="34" charset="0"/>
-                <a:ea typeface="Cambria" pitchFamily="34" charset="-122"/>
-                <a:cs typeface="Cambria" pitchFamily="34" charset="-120"/>
+                <a:latin typeface="Montserrat" pitchFamily="34" charset="0"/>
+                <a:ea typeface="Montserrat" pitchFamily="34" charset="-122"/>
+                <a:cs typeface="Montserrat" pitchFamily="34" charset="-120"/>
               </a:rPr>
               <a:t>Probabilidade e Distribuição Normal aplicadas à Inteligência Artificial</a:t>
             </a:r>
-            <a:endParaRPr lang="en-US" sz="3800" dirty="0"/>
-          </a:p>
-        </p:txBody>
-      </p:sp>
-      <p:sp>
-        <p:nvSpPr>
-          <p:cNvPr id="6" name="Text 4"/>
-          <p:cNvSpPr txBox="1"/>
-          <p:nvPr/>
-        </p:nvSpPr>
-        <p:spPr>
-          <a:xfrm>
-            <a:off x="822960" y="2788920"/>
+            <a:endParaRPr lang="en-US" sz="3400" dirty="0"/>
+          </a:p>
+        </p:txBody>
+      </p:sp>
+      <p:sp>
+        <p:nvSpPr>
+          <p:cNvPr id="7" name="Text 4"/>
+          <p:cNvSpPr txBox="1"/>
+          <p:nvPr/>
+        </p:nvSpPr>
+        <p:spPr>
+          <a:xfrm>
+            <a:off x="822960" y="3456432"/>
             <a:ext cx="9144000" cy="640080"/>
           </a:xfrm>
           <a:prstGeom prst="rect">
@@ -2093,29 +2117,29 @@
               <a:buNone/>
             </a:pPr>
             <a:r>
-              <a:rPr lang="en-US" sz="1600" i="1" dirty="0">
-                <a:solidFill>
-                  <a:srgbClr val="CFE2EE"/>
-                </a:solidFill>
-                <a:latin typeface="Calibri" pitchFamily="34" charset="0"/>
-                <a:ea typeface="Calibri" pitchFamily="34" charset="-122"/>
-                <a:cs typeface="Calibri" pitchFamily="34" charset="-120"/>
+              <a:rPr lang="en-US" sz="1500" i="1" dirty="0">
+                <a:solidFill>
+                  <a:srgbClr val="E8E8E8"/>
+                </a:solidFill>
+                <a:latin typeface="Montserrat" pitchFamily="34" charset="0"/>
+                <a:ea typeface="Montserrat" pitchFamily="34" charset="-122"/>
+                <a:cs typeface="Montserrat" pitchFamily="34" charset="-120"/>
               </a:rPr>
               <a:t>Previsão de atrasos em entregas: estudo aplicado à Logística com dados simulados em Python</a:t>
             </a:r>
-            <a:endParaRPr lang="en-US" sz="1600" dirty="0"/>
-          </a:p>
-        </p:txBody>
-      </p:sp>
-      <p:sp>
-        <p:nvSpPr>
-          <p:cNvPr id="7" name="Text 5"/>
-          <p:cNvSpPr txBox="1"/>
-          <p:nvPr/>
-        </p:nvSpPr>
-        <p:spPr>
-          <a:xfrm>
-            <a:off x="822960" y="3703320"/>
+            <a:endParaRPr lang="en-US" sz="1500" dirty="0"/>
+          </a:p>
+        </p:txBody>
+      </p:sp>
+      <p:sp>
+        <p:nvSpPr>
+          <p:cNvPr id="8" name="Text 5"/>
+          <p:cNvSpPr txBox="1"/>
+          <p:nvPr/>
+        </p:nvSpPr>
+        <p:spPr>
+          <a:xfrm>
+            <a:off x="822960" y="4224528"/>
             <a:ext cx="4572000" cy="274320"/>
           </a:xfrm>
           <a:prstGeom prst="rect">
@@ -2134,11 +2158,11 @@
             <a:r>
               <a:rPr lang="en-US" sz="1100" b="1" spc="150" kern="0" dirty="0">
                 <a:solidFill>
-                  <a:srgbClr val="9EC6DC"/>
-                </a:solidFill>
-                <a:latin typeface="Calibri" pitchFamily="34" charset="0"/>
-                <a:ea typeface="Calibri" pitchFamily="34" charset="-122"/>
-                <a:cs typeface="Calibri" pitchFamily="34" charset="-120"/>
+                  <a:srgbClr val="F0A8C4"/>
+                </a:solidFill>
+                <a:latin typeface="Montserrat" pitchFamily="34" charset="0"/>
+                <a:ea typeface="Montserrat" pitchFamily="34" charset="-122"/>
+                <a:cs typeface="Montserrat" pitchFamily="34" charset="-120"/>
               </a:rPr>
               <a:t>INTEGRANTES</a:t>
             </a:r>
@@ -2148,13 +2172,13 @@
       </p:sp>
       <p:sp>
         <p:nvSpPr>
-          <p:cNvPr id="8" name="Text 6"/>
-          <p:cNvSpPr txBox="1"/>
-          <p:nvPr/>
-        </p:nvSpPr>
-        <p:spPr>
-          <a:xfrm>
-            <a:off x="822960" y="4023360"/>
+          <p:cNvPr id="9" name="Text 6"/>
+          <p:cNvSpPr txBox="1"/>
+          <p:nvPr/>
+        </p:nvSpPr>
+        <p:spPr>
+          <a:xfrm>
+            <a:off x="822960" y="4535424"/>
             <a:ext cx="6400800" cy="1371600"/>
           </a:xfrm>
           <a:prstGeom prst="rect">
@@ -2174,17 +2198,17 @@
               <a:buNone/>
             </a:pPr>
             <a:r>
-              <a:rPr lang="en-US" sz="1450" dirty="0">
+              <a:rPr lang="en-US" sz="1350" dirty="0">
                 <a:solidFill>
                   <a:srgbClr val="FFFFFF"/>
                 </a:solidFill>
-                <a:latin typeface="Calibri" pitchFamily="34" charset="0"/>
-                <a:ea typeface="Calibri" pitchFamily="34" charset="-122"/>
-                <a:cs typeface="Calibri" pitchFamily="34" charset="-120"/>
+                <a:latin typeface="Montserrat" pitchFamily="34" charset="0"/>
+                <a:ea typeface="Montserrat" pitchFamily="34" charset="-122"/>
+                <a:cs typeface="Montserrat" pitchFamily="34" charset="-120"/>
               </a:rPr>
               <a:t>Giovanni Henrique Pereira Hessel (RM 570574)</a:t>
             </a:r>
-            <a:endParaRPr lang="en-US" sz="1450" dirty="0"/>
+            <a:endParaRPr lang="en-US" sz="1350" dirty="0"/>
           </a:p>
           <a:p>
             <a:pPr indent="0" marL="0">
@@ -2194,17 +2218,17 @@
               <a:buNone/>
             </a:pPr>
             <a:r>
-              <a:rPr lang="en-US" sz="1450" dirty="0">
+              <a:rPr lang="en-US" sz="1350" dirty="0">
                 <a:solidFill>
                   <a:srgbClr val="FFFFFF"/>
                 </a:solidFill>
-                <a:latin typeface="Calibri" pitchFamily="34" charset="0"/>
-                <a:ea typeface="Calibri" pitchFamily="34" charset="-122"/>
-                <a:cs typeface="Calibri" pitchFamily="34" charset="-120"/>
+                <a:latin typeface="Montserrat" pitchFamily="34" charset="0"/>
+                <a:ea typeface="Montserrat" pitchFamily="34" charset="-122"/>
+                <a:cs typeface="Montserrat" pitchFamily="34" charset="-120"/>
               </a:rPr>
               <a:t>Suellen Pereira da Silva (RM 573862)</a:t>
             </a:r>
-            <a:endParaRPr lang="en-US" sz="1450" dirty="0"/>
+            <a:endParaRPr lang="en-US" sz="1350" dirty="0"/>
           </a:p>
           <a:p>
             <a:pPr indent="0" marL="0">
@@ -2214,17 +2238,17 @@
               <a:buNone/>
             </a:pPr>
             <a:r>
-              <a:rPr lang="en-US" sz="1450" dirty="0">
+              <a:rPr lang="en-US" sz="1350" dirty="0">
                 <a:solidFill>
                   <a:srgbClr val="FFFFFF"/>
                 </a:solidFill>
-                <a:latin typeface="Calibri" pitchFamily="34" charset="0"/>
-                <a:ea typeface="Calibri" pitchFamily="34" charset="-122"/>
-                <a:cs typeface="Calibri" pitchFamily="34" charset="-120"/>
+                <a:latin typeface="Montserrat" pitchFamily="34" charset="0"/>
+                <a:ea typeface="Montserrat" pitchFamily="34" charset="-122"/>
+                <a:cs typeface="Montserrat" pitchFamily="34" charset="-120"/>
               </a:rPr>
               <a:t>Arthur Zeferino (RM 570858)</a:t>
             </a:r>
-            <a:endParaRPr lang="en-US" sz="1450" dirty="0"/>
+            <a:endParaRPr lang="en-US" sz="1350" dirty="0"/>
           </a:p>
           <a:p>
             <a:pPr indent="0" marL="0">
@@ -2234,23 +2258,23 @@
               <a:buNone/>
             </a:pPr>
             <a:r>
-              <a:rPr lang="en-US" sz="1450" dirty="0">
+              <a:rPr lang="en-US" sz="1350" dirty="0">
                 <a:solidFill>
                   <a:srgbClr val="FFFFFF"/>
                 </a:solidFill>
-                <a:latin typeface="Calibri" pitchFamily="34" charset="0"/>
-                <a:ea typeface="Calibri" pitchFamily="34" charset="-122"/>
-                <a:cs typeface="Calibri" pitchFamily="34" charset="-120"/>
+                <a:latin typeface="Montserrat" pitchFamily="34" charset="0"/>
+                <a:ea typeface="Montserrat" pitchFamily="34" charset="-122"/>
+                <a:cs typeface="Montserrat" pitchFamily="34" charset="-120"/>
               </a:rPr>
               <a:t>Israel Carneiro de Toledo (RM 573854)</a:t>
             </a:r>
-            <a:endParaRPr lang="en-US" sz="1450" dirty="0"/>
-          </a:p>
-        </p:txBody>
-      </p:sp>
-      <p:sp>
-        <p:nvSpPr>
-          <p:cNvPr id="9" name="Text 7"/>
+            <a:endParaRPr lang="en-US" sz="1350" dirty="0"/>
+          </a:p>
+        </p:txBody>
+      </p:sp>
+      <p:sp>
+        <p:nvSpPr>
+          <p:cNvPr id="10" name="Text 7"/>
           <p:cNvSpPr txBox="1"/>
           <p:nvPr/>
         </p:nvSpPr>
@@ -2275,11 +2299,11 @@
             <a:r>
               <a:rPr lang="en-US" sz="1200" dirty="0">
                 <a:solidFill>
-                  <a:srgbClr val="9EC6DC"/>
-                </a:solidFill>
-                <a:latin typeface="Calibri" pitchFamily="34" charset="0"/>
-                <a:ea typeface="Calibri" pitchFamily="34" charset="-122"/>
-                <a:cs typeface="Calibri" pitchFamily="34" charset="-120"/>
+                  <a:srgbClr val="F0A8C4"/>
+                </a:solidFill>
+                <a:latin typeface="Montserrat" pitchFamily="34" charset="0"/>
+                <a:ea typeface="Montserrat" pitchFamily="34" charset="-122"/>
+                <a:cs typeface="Montserrat" pitchFamily="34" charset="-120"/>
               </a:rPr>
               <a:t>2º Semestre, Tecnólogo em Inteligência Artificial  |  Professor: Me. Eng. Rodolfo Magliari de Paiva</a:t>
             </a:r>
@@ -2334,7 +2358,7 @@
             <a:avLst/>
           </a:prstGeom>
           <a:solidFill>
-            <a:srgbClr val="1C7293"/>
+            <a:srgbClr val="1A1A1A"/>
           </a:solidFill>
           <a:ln/>
         </p:spPr>
@@ -2368,9 +2392,9 @@
                 <a:solidFill>
                   <a:srgbClr val="FFFFFF"/>
                 </a:solidFill>
-                <a:latin typeface="Cambria" pitchFamily="34" charset="0"/>
-                <a:ea typeface="Cambria" pitchFamily="34" charset="-122"/>
-                <a:cs typeface="Cambria" pitchFamily="34" charset="-120"/>
+                <a:latin typeface="Montserrat" pitchFamily="34" charset="0"/>
+                <a:ea typeface="Montserrat" pitchFamily="34" charset="-122"/>
+                <a:cs typeface="Montserrat" pitchFamily="34" charset="-120"/>
               </a:rPr>
               <a:t>9</a:t>
             </a:r>
@@ -2387,7 +2411,7 @@
         <p:spPr>
           <a:xfrm>
             <a:off x="1298448" y="329184"/>
-            <a:ext cx="10332720" cy="658368"/>
+            <a:ext cx="9235440" cy="658368"/>
           </a:xfrm>
           <a:prstGeom prst="rect">
             <a:avLst/>
@@ -2405,60 +2429,21 @@
             <a:r>
               <a:rPr lang="en-US" sz="3000" b="1" dirty="0">
                 <a:solidFill>
-                  <a:srgbClr val="21295C"/>
-                </a:solidFill>
-                <a:latin typeface="Cambria" pitchFamily="34" charset="0"/>
-                <a:ea typeface="Cambria" pitchFamily="34" charset="-122"/>
-                <a:cs typeface="Cambria" pitchFamily="34" charset="-120"/>
+                  <a:srgbClr val="1A1A1A"/>
+                </a:solidFill>
+                <a:latin typeface="Montserrat" pitchFamily="34" charset="0"/>
+                <a:ea typeface="Montserrat" pitchFamily="34" charset="-122"/>
+                <a:cs typeface="Montserrat" pitchFamily="34" charset="-120"/>
               </a:rPr>
               <a:t>Resultados e simulação de cenários</a:t>
             </a:r>
             <a:endParaRPr lang="en-US" sz="3000" dirty="0"/>
-          </a:p>
-        </p:txBody>
-      </p:sp>
-      <p:sp>
-        <p:nvSpPr>
-          <p:cNvPr id="5" name="Text 3"/>
-          <p:cNvSpPr txBox="1"/>
-          <p:nvPr/>
-        </p:nvSpPr>
-        <p:spPr>
-          <a:xfrm>
-            <a:off x="1298448" y="969264"/>
-            <a:ext cx="10332720" cy="347472"/>
-          </a:xfrm>
-          <a:prstGeom prst="rect">
-            <a:avLst/>
-          </a:prstGeom>
-          <a:noFill/>
-          <a:ln/>
-        </p:spPr>
-        <p:txBody>
-          <a:bodyPr wrap="square" lIns="0" tIns="0" rIns="0" bIns="0" rtlCol="0" anchor="ctr"/>
-          <a:lstStyle/>
-          <a:p>
-            <a:pPr indent="0" marL="0">
-              <a:buNone/>
-            </a:pPr>
-            <a:r>
-              <a:rPr lang="en-US" sz="1400" i="1" dirty="0">
-                <a:solidFill>
-                  <a:srgbClr val="5A6B7B"/>
-                </a:solidFill>
-                <a:latin typeface="Calibri" pitchFamily="34" charset="0"/>
-                <a:ea typeface="Calibri" pitchFamily="34" charset="-122"/>
-                <a:cs typeface="Calibri" pitchFamily="34" charset="-120"/>
-              </a:rPr>
-              <a:t>Testamos em 300 entregas que o modelo nunca tinha visto</a:t>
-            </a:r>
-            <a:endParaRPr lang="en-US" sz="1400" dirty="0"/>
           </a:p>
         </p:txBody>
       </p:sp>
       <p:pic>
         <p:nvPicPr>
-          <p:cNvPr id="6" name="Image 0" descr="/home/user/Projeto-Python/checkpoint4/graficos/g4_naive_bayes.png">    </p:cNvPr>
+          <p:cNvPr id="5" name="Image 0" descr="/home/user/Projeto-Python/.claude/skills/fiap-doc/assets/header-logo.png">    </p:cNvPr>
           <p:cNvPicPr>
             <a:picLocks noChangeAspect="1"/>
           </p:cNvPicPr>
@@ -2472,6 +2457,69 @@
         </p:blipFill>
         <p:spPr>
           <a:xfrm>
+            <a:off x="10716768" y="402336"/>
+            <a:ext cx="896112" cy="422453"/>
+          </a:xfrm>
+          <a:prstGeom prst="rect">
+            <a:avLst/>
+          </a:prstGeom>
+        </p:spPr>
+      </p:pic>
+      <p:sp>
+        <p:nvSpPr>
+          <p:cNvPr id="6" name="Text 3"/>
+          <p:cNvSpPr txBox="1"/>
+          <p:nvPr/>
+        </p:nvSpPr>
+        <p:spPr>
+          <a:xfrm>
+            <a:off x="1298448" y="969264"/>
+            <a:ext cx="10332720" cy="347472"/>
+          </a:xfrm>
+          <a:prstGeom prst="rect">
+            <a:avLst/>
+          </a:prstGeom>
+          <a:noFill/>
+          <a:ln/>
+        </p:spPr>
+        <p:txBody>
+          <a:bodyPr wrap="square" lIns="0" tIns="0" rIns="0" bIns="0" rtlCol="0" anchor="ctr"/>
+          <a:lstStyle/>
+          <a:p>
+            <a:pPr indent="0" marL="0">
+              <a:buNone/>
+            </a:pPr>
+            <a:r>
+              <a:rPr lang="en-US" sz="1400" i="1" dirty="0">
+                <a:solidFill>
+                  <a:srgbClr val="6E6E6E"/>
+                </a:solidFill>
+                <a:latin typeface="Montserrat" pitchFamily="34" charset="0"/>
+                <a:ea typeface="Montserrat" pitchFamily="34" charset="-122"/>
+                <a:cs typeface="Montserrat" pitchFamily="34" charset="-120"/>
+              </a:rPr>
+              <a:t>Testamos em 300 entregas que o modelo nunca tinha visto</a:t>
+            </a:r>
+            <a:endParaRPr lang="en-US" sz="1400" dirty="0"/>
+          </a:p>
+        </p:txBody>
+      </p:sp>
+      <p:pic>
+        <p:nvPicPr>
+          <p:cNvPr id="7" name="Image 1" descr="/home/user/Projeto-Python/checkpoint4/graficos/g4_naive_bayes.png">    </p:cNvPr>
+          <p:cNvPicPr>
+            <a:picLocks noChangeAspect="1"/>
+          </p:cNvPicPr>
+          <p:nvPr/>
+        </p:nvPicPr>
+        <p:blipFill>
+          <a:blip r:embed="rId2"/>
+          <a:stretch>
+            <a:fillRect/>
+          </a:stretch>
+        </p:blipFill>
+        <p:spPr>
+          <a:xfrm>
             <a:off x="457200" y="1517904"/>
             <a:ext cx="7223760" cy="2697480"/>
           </a:xfrm>
@@ -2482,7 +2530,7 @@
       </p:pic>
       <p:sp>
         <p:nvSpPr>
-          <p:cNvPr id="7" name="Shape 4"/>
+          <p:cNvPr id="8" name="Shape 4"/>
           <p:cNvSpPr/>
           <p:nvPr/>
         </p:nvSpPr>
@@ -2497,11 +2545,11 @@
             </a:avLst>
           </a:prstGeom>
           <a:solidFill>
-            <a:srgbClr val="EDF3F7"/>
+            <a:srgbClr val="F5F5F5"/>
           </a:solidFill>
           <a:ln w="12700">
             <a:solidFill>
-              <a:srgbClr val="EDF3F7"/>
+              <a:srgbClr val="F5F5F5"/>
             </a:solidFill>
             <a:prstDash val="solid"/>
           </a:ln>
@@ -2509,7 +2557,7 @@
       </p:sp>
       <p:sp>
         <p:nvSpPr>
-          <p:cNvPr id="8" name="Text 5"/>
+          <p:cNvPr id="9" name="Text 5"/>
           <p:cNvSpPr txBox="1"/>
           <p:nvPr/>
         </p:nvSpPr>
@@ -2534,11 +2582,11 @@
             <a:r>
               <a:rPr lang="en-US" sz="3400" b="1" dirty="0">
                 <a:solidFill>
-                  <a:srgbClr val="065A82"/>
-                </a:solidFill>
-                <a:latin typeface="Cambria" pitchFamily="34" charset="0"/>
-                <a:ea typeface="Cambria" pitchFamily="34" charset="-122"/>
-                <a:cs typeface="Cambria" pitchFamily="34" charset="-120"/>
+                  <a:srgbClr val="ED1165"/>
+                </a:solidFill>
+                <a:latin typeface="Montserrat" pitchFamily="34" charset="0"/>
+                <a:ea typeface="Montserrat" pitchFamily="34" charset="-122"/>
+                <a:cs typeface="Montserrat" pitchFamily="34" charset="-120"/>
               </a:rPr>
               <a:t>87,3%</a:t>
             </a:r>
@@ -2548,7 +2596,7 @@
       </p:sp>
       <p:sp>
         <p:nvSpPr>
-          <p:cNvPr id="9" name="Text 6"/>
+          <p:cNvPr id="10" name="Text 6"/>
           <p:cNvSpPr txBox="1"/>
           <p:nvPr/>
         </p:nvSpPr>
@@ -2573,11 +2621,11 @@
             <a:r>
               <a:rPr lang="en-US" sz="1150" dirty="0">
                 <a:solidFill>
-                  <a:srgbClr val="5A6B7B"/>
-                </a:solidFill>
-                <a:latin typeface="Calibri" pitchFamily="34" charset="0"/>
-                <a:ea typeface="Calibri" pitchFamily="34" charset="-122"/>
-                <a:cs typeface="Calibri" pitchFamily="34" charset="-120"/>
+                  <a:srgbClr val="6E6E6E"/>
+                </a:solidFill>
+                <a:latin typeface="Montserrat" pitchFamily="34" charset="0"/>
+                <a:ea typeface="Montserrat" pitchFamily="34" charset="-122"/>
+                <a:cs typeface="Montserrat" pitchFamily="34" charset="-120"/>
               </a:rPr>
               <a:t>Acurácia</a:t>
             </a:r>
@@ -2587,7 +2635,7 @@
       </p:sp>
       <p:sp>
         <p:nvSpPr>
-          <p:cNvPr id="10" name="Shape 7"/>
+          <p:cNvPr id="11" name="Shape 7"/>
           <p:cNvSpPr/>
           <p:nvPr/>
         </p:nvSpPr>
@@ -2602,11 +2650,11 @@
             </a:avLst>
           </a:prstGeom>
           <a:solidFill>
-            <a:srgbClr val="EDF3F7"/>
+            <a:srgbClr val="F5F5F5"/>
           </a:solidFill>
           <a:ln w="12700">
             <a:solidFill>
-              <a:srgbClr val="EDF3F7"/>
+              <a:srgbClr val="F5F5F5"/>
             </a:solidFill>
             <a:prstDash val="solid"/>
           </a:ln>
@@ -2614,7 +2662,7 @@
       </p:sp>
       <p:sp>
         <p:nvSpPr>
-          <p:cNvPr id="11" name="Text 8"/>
+          <p:cNvPr id="12" name="Text 8"/>
           <p:cNvSpPr txBox="1"/>
           <p:nvPr/>
         </p:nvSpPr>
@@ -2639,11 +2687,11 @@
             <a:r>
               <a:rPr lang="en-US" sz="3400" b="1" dirty="0">
                 <a:solidFill>
-                  <a:srgbClr val="1C7293"/>
-                </a:solidFill>
-                <a:latin typeface="Cambria" pitchFamily="34" charset="0"/>
-                <a:ea typeface="Cambria" pitchFamily="34" charset="-122"/>
-                <a:cs typeface="Cambria" pitchFamily="34" charset="-120"/>
+                  <a:srgbClr val="1A1A1A"/>
+                </a:solidFill>
+                <a:latin typeface="Montserrat" pitchFamily="34" charset="0"/>
+                <a:ea typeface="Montserrat" pitchFamily="34" charset="-122"/>
+                <a:cs typeface="Montserrat" pitchFamily="34" charset="-120"/>
               </a:rPr>
               <a:t>89,1%</a:t>
             </a:r>
@@ -2653,7 +2701,7 @@
       </p:sp>
       <p:sp>
         <p:nvSpPr>
-          <p:cNvPr id="12" name="Text 9"/>
+          <p:cNvPr id="13" name="Text 9"/>
           <p:cNvSpPr txBox="1"/>
           <p:nvPr/>
         </p:nvSpPr>
@@ -2678,11 +2726,11 @@
             <a:r>
               <a:rPr lang="en-US" sz="1150" dirty="0">
                 <a:solidFill>
-                  <a:srgbClr val="5A6B7B"/>
-                </a:solidFill>
-                <a:latin typeface="Calibri" pitchFamily="34" charset="0"/>
-                <a:ea typeface="Calibri" pitchFamily="34" charset="-122"/>
-                <a:cs typeface="Calibri" pitchFamily="34" charset="-120"/>
+                  <a:srgbClr val="6E6E6E"/>
+                </a:solidFill>
+                <a:latin typeface="Montserrat" pitchFamily="34" charset="0"/>
+                <a:ea typeface="Montserrat" pitchFamily="34" charset="-122"/>
+                <a:cs typeface="Montserrat" pitchFamily="34" charset="-120"/>
               </a:rPr>
               <a:t>Precisão</a:t>
             </a:r>
@@ -2692,7 +2740,7 @@
       </p:sp>
       <p:sp>
         <p:nvSpPr>
-          <p:cNvPr id="13" name="Shape 10"/>
+          <p:cNvPr id="14" name="Shape 10"/>
           <p:cNvSpPr/>
           <p:nvPr/>
         </p:nvSpPr>
@@ -2707,11 +2755,11 @@
             </a:avLst>
           </a:prstGeom>
           <a:solidFill>
-            <a:srgbClr val="EDF3F7"/>
+            <a:srgbClr val="F5F5F5"/>
           </a:solidFill>
           <a:ln w="12700">
             <a:solidFill>
-              <a:srgbClr val="EDF3F7"/>
+              <a:srgbClr val="F5F5F5"/>
             </a:solidFill>
             <a:prstDash val="solid"/>
           </a:ln>
@@ -2719,7 +2767,7 @@
       </p:sp>
       <p:sp>
         <p:nvSpPr>
-          <p:cNvPr id="14" name="Text 11"/>
+          <p:cNvPr id="15" name="Text 11"/>
           <p:cNvSpPr txBox="1"/>
           <p:nvPr/>
         </p:nvSpPr>
@@ -2744,11 +2792,11 @@
             <a:r>
               <a:rPr lang="en-US" sz="3400" b="1" dirty="0">
                 <a:solidFill>
-                  <a:srgbClr val="D1495B"/>
-                </a:solidFill>
-                <a:latin typeface="Cambria" pitchFamily="34" charset="0"/>
-                <a:ea typeface="Cambria" pitchFamily="34" charset="-122"/>
-                <a:cs typeface="Cambria" pitchFamily="34" charset="-120"/>
+                  <a:srgbClr val="ED1165"/>
+                </a:solidFill>
+                <a:latin typeface="Montserrat" pitchFamily="34" charset="0"/>
+                <a:ea typeface="Montserrat" pitchFamily="34" charset="-122"/>
+                <a:cs typeface="Montserrat" pitchFamily="34" charset="-120"/>
               </a:rPr>
               <a:t>55,4%</a:t>
             </a:r>
@@ -2758,7 +2806,7 @@
       </p:sp>
       <p:sp>
         <p:nvSpPr>
-          <p:cNvPr id="15" name="Text 12"/>
+          <p:cNvPr id="16" name="Text 12"/>
           <p:cNvSpPr txBox="1"/>
           <p:nvPr/>
         </p:nvSpPr>
@@ -2783,11 +2831,11 @@
             <a:r>
               <a:rPr lang="en-US" sz="1150" dirty="0">
                 <a:solidFill>
-                  <a:srgbClr val="5A6B7B"/>
-                </a:solidFill>
-                <a:latin typeface="Calibri" pitchFamily="34" charset="0"/>
-                <a:ea typeface="Calibri" pitchFamily="34" charset="-122"/>
-                <a:cs typeface="Calibri" pitchFamily="34" charset="-120"/>
+                  <a:srgbClr val="6E6E6E"/>
+                </a:solidFill>
+                <a:latin typeface="Montserrat" pitchFamily="34" charset="0"/>
+                <a:ea typeface="Montserrat" pitchFamily="34" charset="-122"/>
+                <a:cs typeface="Montserrat" pitchFamily="34" charset="-120"/>
               </a:rPr>
               <a:t>Recall</a:t>
             </a:r>
@@ -2797,7 +2845,7 @@
       </p:sp>
       <p:sp>
         <p:nvSpPr>
-          <p:cNvPr id="16" name="Shape 13"/>
+          <p:cNvPr id="17" name="Shape 13"/>
           <p:cNvSpPr/>
           <p:nvPr/>
         </p:nvSpPr>
@@ -2812,11 +2860,11 @@
             </a:avLst>
           </a:prstGeom>
           <a:solidFill>
-            <a:srgbClr val="EDF3F7"/>
+            <a:srgbClr val="F5F5F5"/>
           </a:solidFill>
           <a:ln w="12700">
             <a:solidFill>
-              <a:srgbClr val="EDF3F7"/>
+              <a:srgbClr val="F5F5F5"/>
             </a:solidFill>
             <a:prstDash val="solid"/>
           </a:ln>
@@ -2824,7 +2872,7 @@
       </p:sp>
       <p:sp>
         <p:nvSpPr>
-          <p:cNvPr id="17" name="Text 14"/>
+          <p:cNvPr id="18" name="Text 14"/>
           <p:cNvSpPr txBox="1"/>
           <p:nvPr/>
         </p:nvSpPr>
@@ -2849,11 +2897,11 @@
             <a:r>
               <a:rPr lang="en-US" sz="3400" b="1" dirty="0">
                 <a:solidFill>
-                  <a:srgbClr val="21295C"/>
-                </a:solidFill>
-                <a:latin typeface="Cambria" pitchFamily="34" charset="0"/>
-                <a:ea typeface="Cambria" pitchFamily="34" charset="-122"/>
-                <a:cs typeface="Cambria" pitchFamily="34" charset="-120"/>
+                  <a:srgbClr val="1A1A1A"/>
+                </a:solidFill>
+                <a:latin typeface="Montserrat" pitchFamily="34" charset="0"/>
+                <a:ea typeface="Montserrat" pitchFamily="34" charset="-122"/>
+                <a:cs typeface="Montserrat" pitchFamily="34" charset="-120"/>
               </a:rPr>
               <a:t>0,683</a:t>
             </a:r>
@@ -2863,7 +2911,7 @@
       </p:sp>
       <p:sp>
         <p:nvSpPr>
-          <p:cNvPr id="18" name="Text 15"/>
+          <p:cNvPr id="19" name="Text 15"/>
           <p:cNvSpPr txBox="1"/>
           <p:nvPr/>
         </p:nvSpPr>
@@ -2888,11 +2936,11 @@
             <a:r>
               <a:rPr lang="en-US" sz="1150" dirty="0">
                 <a:solidFill>
-                  <a:srgbClr val="5A6B7B"/>
-                </a:solidFill>
-                <a:latin typeface="Calibri" pitchFamily="34" charset="0"/>
-                <a:ea typeface="Calibri" pitchFamily="34" charset="-122"/>
-                <a:cs typeface="Calibri" pitchFamily="34" charset="-120"/>
+                  <a:srgbClr val="6E6E6E"/>
+                </a:solidFill>
+                <a:latin typeface="Montserrat" pitchFamily="34" charset="0"/>
+                <a:ea typeface="Montserrat" pitchFamily="34" charset="-122"/>
+                <a:cs typeface="Montserrat" pitchFamily="34" charset="-120"/>
               </a:rPr>
               <a:t>F1-score</a:t>
             </a:r>
@@ -2902,7 +2950,7 @@
       </p:sp>
       <p:sp>
         <p:nvSpPr>
-          <p:cNvPr id="19" name="Text 16"/>
+          <p:cNvPr id="20" name="Text 16"/>
           <p:cNvSpPr txBox="1"/>
           <p:nvPr/>
         </p:nvSpPr>
@@ -2927,11 +2975,11 @@
             <a:r>
               <a:rPr lang="en-US" sz="1250" i="1" dirty="0">
                 <a:solidFill>
-                  <a:srgbClr val="5A6B7B"/>
-                </a:solidFill>
-                <a:latin typeface="Calibri" pitchFamily="34" charset="0"/>
-                <a:ea typeface="Calibri" pitchFamily="34" charset="-122"/>
-                <a:cs typeface="Calibri" pitchFamily="34" charset="-120"/>
+                  <a:srgbClr val="6E6E6E"/>
+                </a:solidFill>
+                <a:latin typeface="Montserrat" pitchFamily="34" charset="0"/>
+                <a:ea typeface="Montserrat" pitchFamily="34" charset="-122"/>
+                <a:cs typeface="Montserrat" pitchFamily="34" charset="-120"/>
               </a:rPr>
               <a:t>Quando o modelo avisa que vai atrasar, ele quase sempre acerta. O ponto fraco é deixar escapar algumas entregas que atrasaram por pouco.</a:t>
             </a:r>
@@ -2941,7 +2989,7 @@
       </p:sp>
       <p:sp>
         <p:nvSpPr>
-          <p:cNvPr id="20" name="Shape 17"/>
+          <p:cNvPr id="21" name="Shape 17"/>
           <p:cNvSpPr/>
           <p:nvPr/>
         </p:nvSpPr>
@@ -2956,11 +3004,11 @@
             </a:avLst>
           </a:prstGeom>
           <a:solidFill>
-            <a:srgbClr val="EDF3F7"/>
+            <a:srgbClr val="F5F5F5"/>
           </a:solidFill>
           <a:ln w="12700">
             <a:solidFill>
-              <a:srgbClr val="EDF3F7"/>
+              <a:srgbClr val="F5F5F5"/>
             </a:solidFill>
             <a:prstDash val="solid"/>
           </a:ln>
@@ -2968,7 +3016,7 @@
       </p:sp>
       <p:sp>
         <p:nvSpPr>
-          <p:cNvPr id="21" name="Text 18"/>
+          <p:cNvPr id="22" name="Text 18"/>
           <p:cNvSpPr txBox="1"/>
           <p:nvPr/>
         </p:nvSpPr>
@@ -2993,11 +3041,11 @@
             <a:r>
               <a:rPr lang="en-US" sz="1050" b="1" spc="120" kern="0" dirty="0">
                 <a:solidFill>
-                  <a:srgbClr val="1C7293"/>
-                </a:solidFill>
-                <a:latin typeface="Calibri" pitchFamily="34" charset="0"/>
-                <a:ea typeface="Calibri" pitchFamily="34" charset="-122"/>
-                <a:cs typeface="Calibri" pitchFamily="34" charset="-120"/>
+                  <a:srgbClr val="1A1A1A"/>
+                </a:solidFill>
+                <a:latin typeface="Montserrat" pitchFamily="34" charset="0"/>
+                <a:ea typeface="Montserrat" pitchFamily="34" charset="-122"/>
+                <a:cs typeface="Montserrat" pitchFamily="34" charset="-120"/>
               </a:rPr>
               <a:t>PREVISÃO PARA NOVAS ENTREGAS</a:t>
             </a:r>
@@ -3007,7 +3055,7 @@
       </p:sp>
       <p:sp>
         <p:nvSpPr>
-          <p:cNvPr id="22" name="Text 19"/>
+          <p:cNvPr id="23" name="Text 19"/>
           <p:cNvSpPr txBox="1"/>
           <p:nvPr/>
         </p:nvSpPr>
@@ -3032,11 +3080,11 @@
             <a:r>
               <a:rPr lang="en-US" sz="1250" dirty="0">
                 <a:solidFill>
-                  <a:srgbClr val="1B2A3A"/>
-                </a:solidFill>
-                <a:latin typeface="Calibri" pitchFamily="34" charset="0"/>
-                <a:ea typeface="Calibri" pitchFamily="34" charset="-122"/>
-                <a:cs typeface="Calibri" pitchFamily="34" charset="-120"/>
+                  <a:srgbClr val="333333"/>
+                </a:solidFill>
+                <a:latin typeface="Montserrat" pitchFamily="34" charset="0"/>
+                <a:ea typeface="Montserrat" pitchFamily="34" charset="-122"/>
+                <a:cs typeface="Montserrat" pitchFamily="34" charset="-120"/>
               </a:rPr>
               <a:t>5 km, tempo bom</a:t>
             </a:r>
@@ -3046,7 +3094,7 @@
       </p:sp>
       <p:sp>
         <p:nvSpPr>
-          <p:cNvPr id="23" name="Text 20"/>
+          <p:cNvPr id="24" name="Text 20"/>
           <p:cNvSpPr txBox="1"/>
           <p:nvPr/>
         </p:nvSpPr>
@@ -3071,11 +3119,11 @@
             <a:r>
               <a:rPr lang="en-US" sz="1700" b="1" dirty="0">
                 <a:solidFill>
-                  <a:srgbClr val="065A82"/>
-                </a:solidFill>
-                <a:latin typeface="Cambria" pitchFamily="34" charset="0"/>
-                <a:ea typeface="Cambria" pitchFamily="34" charset="-122"/>
-                <a:cs typeface="Cambria" pitchFamily="34" charset="-120"/>
+                  <a:srgbClr val="ED1165"/>
+                </a:solidFill>
+                <a:latin typeface="Montserrat" pitchFamily="34" charset="0"/>
+                <a:ea typeface="Montserrat" pitchFamily="34" charset="-122"/>
+                <a:cs typeface="Montserrat" pitchFamily="34" charset="-120"/>
               </a:rPr>
               <a:t>0,0%</a:t>
             </a:r>
@@ -3085,7 +3133,7 @@
       </p:sp>
       <p:sp>
         <p:nvSpPr>
-          <p:cNvPr id="24" name="Text 21"/>
+          <p:cNvPr id="25" name="Text 21"/>
           <p:cNvSpPr txBox="1"/>
           <p:nvPr/>
         </p:nvSpPr>
@@ -3110,11 +3158,11 @@
             <a:r>
               <a:rPr lang="en-US" sz="1250" dirty="0">
                 <a:solidFill>
-                  <a:srgbClr val="1B2A3A"/>
-                </a:solidFill>
-                <a:latin typeface="Calibri" pitchFamily="34" charset="0"/>
-                <a:ea typeface="Calibri" pitchFamily="34" charset="-122"/>
-                <a:cs typeface="Calibri" pitchFamily="34" charset="-120"/>
+                  <a:srgbClr val="333333"/>
+                </a:solidFill>
+                <a:latin typeface="Montserrat" pitchFamily="34" charset="0"/>
+                <a:ea typeface="Montserrat" pitchFamily="34" charset="-122"/>
+                <a:cs typeface="Montserrat" pitchFamily="34" charset="-120"/>
               </a:rPr>
               <a:t>12 km, com chuva</a:t>
             </a:r>
@@ -3124,7 +3172,7 @@
       </p:sp>
       <p:sp>
         <p:nvSpPr>
-          <p:cNvPr id="25" name="Text 22"/>
+          <p:cNvPr id="26" name="Text 22"/>
           <p:cNvSpPr txBox="1"/>
           <p:nvPr/>
         </p:nvSpPr>
@@ -3149,11 +3197,11 @@
             <a:r>
               <a:rPr lang="en-US" sz="1700" b="1" dirty="0">
                 <a:solidFill>
-                  <a:srgbClr val="065A82"/>
-                </a:solidFill>
-                <a:latin typeface="Cambria" pitchFamily="34" charset="0"/>
-                <a:ea typeface="Cambria" pitchFamily="34" charset="-122"/>
-                <a:cs typeface="Cambria" pitchFamily="34" charset="-120"/>
+                  <a:srgbClr val="ED1165"/>
+                </a:solidFill>
+                <a:latin typeface="Montserrat" pitchFamily="34" charset="0"/>
+                <a:ea typeface="Montserrat" pitchFamily="34" charset="-122"/>
+                <a:cs typeface="Montserrat" pitchFamily="34" charset="-120"/>
               </a:rPr>
               <a:t>20,6%</a:t>
             </a:r>
@@ -3163,7 +3211,7 @@
       </p:sp>
       <p:sp>
         <p:nvSpPr>
-          <p:cNvPr id="26" name="Text 23"/>
+          <p:cNvPr id="27" name="Text 23"/>
           <p:cNvSpPr txBox="1"/>
           <p:nvPr/>
         </p:nvSpPr>
@@ -3188,11 +3236,11 @@
             <a:r>
               <a:rPr lang="en-US" sz="1250" dirty="0">
                 <a:solidFill>
-                  <a:srgbClr val="1B2A3A"/>
-                </a:solidFill>
-                <a:latin typeface="Calibri" pitchFamily="34" charset="0"/>
-                <a:ea typeface="Calibri" pitchFamily="34" charset="-122"/>
-                <a:cs typeface="Calibri" pitchFamily="34" charset="-120"/>
+                  <a:srgbClr val="333333"/>
+                </a:solidFill>
+                <a:latin typeface="Montserrat" pitchFamily="34" charset="0"/>
+                <a:ea typeface="Montserrat" pitchFamily="34" charset="-122"/>
+                <a:cs typeface="Montserrat" pitchFamily="34" charset="-120"/>
               </a:rPr>
               <a:t>18 km, horário de pico</a:t>
             </a:r>
@@ -3202,7 +3250,7 @@
       </p:sp>
       <p:sp>
         <p:nvSpPr>
-          <p:cNvPr id="27" name="Text 24"/>
+          <p:cNvPr id="28" name="Text 24"/>
           <p:cNvSpPr txBox="1"/>
           <p:nvPr/>
         </p:nvSpPr>
@@ -3227,11 +3275,11 @@
             <a:r>
               <a:rPr lang="en-US" sz="1700" b="1" dirty="0">
                 <a:solidFill>
-                  <a:srgbClr val="D1495B"/>
-                </a:solidFill>
-                <a:latin typeface="Cambria" pitchFamily="34" charset="0"/>
-                <a:ea typeface="Cambria" pitchFamily="34" charset="-122"/>
-                <a:cs typeface="Cambria" pitchFamily="34" charset="-120"/>
+                  <a:srgbClr val="ED1165"/>
+                </a:solidFill>
+                <a:latin typeface="Montserrat" pitchFamily="34" charset="0"/>
+                <a:ea typeface="Montserrat" pitchFamily="34" charset="-122"/>
+                <a:cs typeface="Montserrat" pitchFamily="34" charset="-120"/>
               </a:rPr>
               <a:t>69,9%</a:t>
             </a:r>
@@ -3241,7 +3289,7 @@
       </p:sp>
       <p:sp>
         <p:nvSpPr>
-          <p:cNvPr id="28" name="Text 25"/>
+          <p:cNvPr id="29" name="Text 25"/>
           <p:cNvSpPr txBox="1"/>
           <p:nvPr/>
         </p:nvSpPr>
@@ -3266,11 +3314,11 @@
             <a:r>
               <a:rPr lang="en-US" sz="1250" dirty="0">
                 <a:solidFill>
-                  <a:srgbClr val="1B2A3A"/>
-                </a:solidFill>
-                <a:latin typeface="Calibri" pitchFamily="34" charset="0"/>
-                <a:ea typeface="Calibri" pitchFamily="34" charset="-122"/>
-                <a:cs typeface="Calibri" pitchFamily="34" charset="-120"/>
+                  <a:srgbClr val="333333"/>
+                </a:solidFill>
+                <a:latin typeface="Montserrat" pitchFamily="34" charset="0"/>
+                <a:ea typeface="Montserrat" pitchFamily="34" charset="-122"/>
+                <a:cs typeface="Montserrat" pitchFamily="34" charset="-120"/>
               </a:rPr>
               <a:t>20 km, chuva e pico</a:t>
             </a:r>
@@ -3280,7 +3328,7 @@
       </p:sp>
       <p:sp>
         <p:nvSpPr>
-          <p:cNvPr id="29" name="Text 26"/>
+          <p:cNvPr id="30" name="Text 26"/>
           <p:cNvSpPr txBox="1"/>
           <p:nvPr/>
         </p:nvSpPr>
@@ -3305,11 +3353,11 @@
             <a:r>
               <a:rPr lang="en-US" sz="1700" b="1" dirty="0">
                 <a:solidFill>
-                  <a:srgbClr val="D1495B"/>
-                </a:solidFill>
-                <a:latin typeface="Cambria" pitchFamily="34" charset="0"/>
-                <a:ea typeface="Cambria" pitchFamily="34" charset="-122"/>
-                <a:cs typeface="Cambria" pitchFamily="34" charset="-120"/>
+                  <a:srgbClr val="ED1165"/>
+                </a:solidFill>
+                <a:latin typeface="Montserrat" pitchFamily="34" charset="0"/>
+                <a:ea typeface="Montserrat" pitchFamily="34" charset="-122"/>
+                <a:cs typeface="Montserrat" pitchFamily="34" charset="-120"/>
               </a:rPr>
               <a:t>97,7%</a:t>
             </a:r>
@@ -3319,7 +3367,7 @@
       </p:sp>
       <p:sp>
         <p:nvSpPr>
-          <p:cNvPr id="30" name="Text 27"/>
+          <p:cNvPr id="31" name="Text 27"/>
           <p:cNvSpPr txBox="1"/>
           <p:nvPr/>
         </p:nvSpPr>
@@ -3344,11 +3392,11 @@
             <a:r>
               <a:rPr lang="en-US" sz="1500" b="1" dirty="0">
                 <a:solidFill>
-                  <a:srgbClr val="21295C"/>
-                </a:solidFill>
-                <a:latin typeface="Cambria" pitchFamily="34" charset="0"/>
-                <a:ea typeface="Cambria" pitchFamily="34" charset="-122"/>
-                <a:cs typeface="Cambria" pitchFamily="34" charset="-120"/>
+                  <a:srgbClr val="1A1A1A"/>
+                </a:solidFill>
+                <a:latin typeface="Montserrat" pitchFamily="34" charset="0"/>
+                <a:ea typeface="Montserrat" pitchFamily="34" charset="-122"/>
+                <a:cs typeface="Montserrat" pitchFamily="34" charset="-120"/>
               </a:rPr>
               <a:t>Uso na operação</a:t>
             </a:r>
@@ -3358,7 +3406,7 @@
       </p:sp>
       <p:sp>
         <p:nvSpPr>
-          <p:cNvPr id="31" name="Text 28"/>
+          <p:cNvPr id="32" name="Text 28"/>
           <p:cNvSpPr txBox="1"/>
           <p:nvPr/>
         </p:nvSpPr>
@@ -3386,11 +3434,11 @@
             <a:r>
               <a:rPr lang="en-US" sz="1250" dirty="0">
                 <a:solidFill>
-                  <a:srgbClr val="1B2A3A"/>
-                </a:solidFill>
-                <a:latin typeface="Calibri" pitchFamily="34" charset="0"/>
-                <a:ea typeface="Calibri" pitchFamily="34" charset="-122"/>
-                <a:cs typeface="Calibri" pitchFamily="34" charset="-120"/>
+                  <a:srgbClr val="333333"/>
+                </a:solidFill>
+                <a:latin typeface="Montserrat" pitchFamily="34" charset="0"/>
+                <a:ea typeface="Montserrat" pitchFamily="34" charset="-122"/>
+                <a:cs typeface="Montserrat" pitchFamily="34" charset="-120"/>
               </a:rPr>
               <a:t>Sabendo o risco de cada pedido antes de sair, a empresa pode mandar outro veículo, mudar a rota ou avisar o cliente antes do prazo estourar.</a:t>
             </a:r>
@@ -3445,7 +3493,7 @@
             <a:avLst/>
           </a:prstGeom>
           <a:solidFill>
-            <a:srgbClr val="1C7293"/>
+            <a:srgbClr val="1A1A1A"/>
           </a:solidFill>
           <a:ln/>
         </p:spPr>
@@ -3479,9 +3527,9 @@
                 <a:solidFill>
                   <a:srgbClr val="FFFFFF"/>
                 </a:solidFill>
-                <a:latin typeface="Cambria" pitchFamily="34" charset="0"/>
-                <a:ea typeface="Cambria" pitchFamily="34" charset="-122"/>
-                <a:cs typeface="Cambria" pitchFamily="34" charset="-120"/>
+                <a:latin typeface="Montserrat" pitchFamily="34" charset="0"/>
+                <a:ea typeface="Montserrat" pitchFamily="34" charset="-122"/>
+                <a:cs typeface="Montserrat" pitchFamily="34" charset="-120"/>
               </a:rPr>
               <a:t>10</a:t>
             </a:r>
@@ -3498,7 +3546,7 @@
         <p:spPr>
           <a:xfrm>
             <a:off x="1298448" y="329184"/>
-            <a:ext cx="10332720" cy="658368"/>
+            <a:ext cx="9235440" cy="658368"/>
           </a:xfrm>
           <a:prstGeom prst="rect">
             <a:avLst/>
@@ -3516,60 +3564,21 @@
             <a:r>
               <a:rPr lang="en-US" sz="3000" b="1" dirty="0">
                 <a:solidFill>
-                  <a:srgbClr val="21295C"/>
-                </a:solidFill>
-                <a:latin typeface="Cambria" pitchFamily="34" charset="0"/>
-                <a:ea typeface="Cambria" pitchFamily="34" charset="-122"/>
-                <a:cs typeface="Cambria" pitchFamily="34" charset="-120"/>
+                  <a:srgbClr val="1A1A1A"/>
+                </a:solidFill>
+                <a:latin typeface="Montserrat" pitchFamily="34" charset="0"/>
+                <a:ea typeface="Montserrat" pitchFamily="34" charset="-122"/>
+                <a:cs typeface="Montserrat" pitchFamily="34" charset="-120"/>
               </a:rPr>
               <a:t>Simulação de Monte Carlo</a:t>
             </a:r>
             <a:endParaRPr lang="en-US" sz="3000" dirty="0"/>
-          </a:p>
-        </p:txBody>
-      </p:sp>
-      <p:sp>
-        <p:nvSpPr>
-          <p:cNvPr id="5" name="Text 3"/>
-          <p:cNvSpPr txBox="1"/>
-          <p:nvPr/>
-        </p:nvSpPr>
-        <p:spPr>
-          <a:xfrm>
-            <a:off x="1298448" y="969264"/>
-            <a:ext cx="10332720" cy="347472"/>
-          </a:xfrm>
-          <a:prstGeom prst="rect">
-            <a:avLst/>
-          </a:prstGeom>
-          <a:noFill/>
-          <a:ln/>
-        </p:spPr>
-        <p:txBody>
-          <a:bodyPr wrap="square" lIns="0" tIns="0" rIns="0" bIns="0" rtlCol="0" anchor="ctr"/>
-          <a:lstStyle/>
-          <a:p>
-            <a:pPr indent="0" marL="0">
-              <a:buNone/>
-            </a:pPr>
-            <a:r>
-              <a:rPr lang="en-US" sz="1400" i="1" dirty="0">
-                <a:solidFill>
-                  <a:srgbClr val="5A6B7B"/>
-                </a:solidFill>
-                <a:latin typeface="Calibri" pitchFamily="34" charset="0"/>
-                <a:ea typeface="Calibri" pitchFamily="34" charset="-122"/>
-                <a:cs typeface="Calibri" pitchFamily="34" charset="-120"/>
-              </a:rPr>
-              <a:t>Testando mudanças na operação antes de aplicá-las</a:t>
-            </a:r>
-            <a:endParaRPr lang="en-US" sz="1400" dirty="0"/>
           </a:p>
         </p:txBody>
       </p:sp>
       <p:pic>
         <p:nvPicPr>
-          <p:cNvPr id="6" name="Image 0" descr="/home/user/Projeto-Python/checkpoint4/graficos/g5_monte_carlo.png">    </p:cNvPr>
+          <p:cNvPr id="5" name="Image 0" descr="/home/user/Projeto-Python/.claude/skills/fiap-doc/assets/header-logo.png">    </p:cNvPr>
           <p:cNvPicPr>
             <a:picLocks noChangeAspect="1"/>
           </p:cNvPicPr>
@@ -3583,6 +3592,69 @@
         </p:blipFill>
         <p:spPr>
           <a:xfrm>
+            <a:off x="10716768" y="402336"/>
+            <a:ext cx="896112" cy="422453"/>
+          </a:xfrm>
+          <a:prstGeom prst="rect">
+            <a:avLst/>
+          </a:prstGeom>
+        </p:spPr>
+      </p:pic>
+      <p:sp>
+        <p:nvSpPr>
+          <p:cNvPr id="6" name="Text 3"/>
+          <p:cNvSpPr txBox="1"/>
+          <p:nvPr/>
+        </p:nvSpPr>
+        <p:spPr>
+          <a:xfrm>
+            <a:off x="1298448" y="969264"/>
+            <a:ext cx="10332720" cy="347472"/>
+          </a:xfrm>
+          <a:prstGeom prst="rect">
+            <a:avLst/>
+          </a:prstGeom>
+          <a:noFill/>
+          <a:ln/>
+        </p:spPr>
+        <p:txBody>
+          <a:bodyPr wrap="square" lIns="0" tIns="0" rIns="0" bIns="0" rtlCol="0" anchor="ctr"/>
+          <a:lstStyle/>
+          <a:p>
+            <a:pPr indent="0" marL="0">
+              <a:buNone/>
+            </a:pPr>
+            <a:r>
+              <a:rPr lang="en-US" sz="1400" i="1" dirty="0">
+                <a:solidFill>
+                  <a:srgbClr val="6E6E6E"/>
+                </a:solidFill>
+                <a:latin typeface="Montserrat" pitchFamily="34" charset="0"/>
+                <a:ea typeface="Montserrat" pitchFamily="34" charset="-122"/>
+                <a:cs typeface="Montserrat" pitchFamily="34" charset="-120"/>
+              </a:rPr>
+              <a:t>Testando mudanças na operação antes de aplicá-las</a:t>
+            </a:r>
+            <a:endParaRPr lang="en-US" sz="1400" dirty="0"/>
+          </a:p>
+        </p:txBody>
+      </p:sp>
+      <p:pic>
+        <p:nvPicPr>
+          <p:cNvPr id="7" name="Image 1" descr="/home/user/Projeto-Python/checkpoint4/graficos/g5_monte_carlo.png">    </p:cNvPr>
+          <p:cNvPicPr>
+            <a:picLocks noChangeAspect="1"/>
+          </p:cNvPicPr>
+          <p:nvPr/>
+        </p:nvPicPr>
+        <p:blipFill>
+          <a:blip r:embed="rId2"/>
+          <a:stretch>
+            <a:fillRect/>
+          </a:stretch>
+        </p:blipFill>
+        <p:spPr>
+          <a:xfrm>
             <a:off x="502920" y="1554480"/>
             <a:ext cx="7132320" cy="3611880"/>
           </a:xfrm>
@@ -3593,7 +3665,7 @@
       </p:pic>
       <p:sp>
         <p:nvSpPr>
-          <p:cNvPr id="7" name="Shape 4"/>
+          <p:cNvPr id="8" name="Shape 4"/>
           <p:cNvSpPr/>
           <p:nvPr/>
         </p:nvSpPr>
@@ -3608,11 +3680,11 @@
             </a:avLst>
           </a:prstGeom>
           <a:solidFill>
-            <a:srgbClr val="0E2233"/>
+            <a:srgbClr val="1A1A1A"/>
           </a:solidFill>
           <a:ln w="12700">
             <a:solidFill>
-              <a:srgbClr val="0E2233"/>
+              <a:srgbClr val="1A1A1A"/>
             </a:solidFill>
             <a:prstDash val="solid"/>
           </a:ln>
@@ -3620,7 +3692,7 @@
       </p:sp>
       <p:sp>
         <p:nvSpPr>
-          <p:cNvPr id="8" name="Text 5"/>
+          <p:cNvPr id="9" name="Text 5"/>
           <p:cNvSpPr txBox="1"/>
           <p:nvPr/>
         </p:nvSpPr>
@@ -3645,7 +3717,7 @@
             <a:r>
               <a:rPr lang="en-US" sz="1150" dirty="0">
                 <a:solidFill>
-                  <a:srgbClr val="DCE9F2"/>
+                  <a:srgbClr val="EDEDED"/>
                 </a:solidFill>
                 <a:latin typeface="Courier New" pitchFamily="34" charset="0"/>
                 <a:ea typeface="Courier New" pitchFamily="34" charset="-122"/>
@@ -3662,7 +3734,7 @@
             <a:r>
               <a:rPr lang="en-US" sz="1150" dirty="0">
                 <a:solidFill>
-                  <a:srgbClr val="DCE9F2"/>
+                  <a:srgbClr val="EDEDED"/>
                 </a:solidFill>
                 <a:latin typeface="Courier New" pitchFamily="34" charset="0"/>
                 <a:ea typeface="Courier New" pitchFamily="34" charset="-122"/>
@@ -3676,7 +3748,7 @@
       </p:sp>
       <p:sp>
         <p:nvSpPr>
-          <p:cNvPr id="9" name="Shape 6"/>
+          <p:cNvPr id="10" name="Shape 6"/>
           <p:cNvSpPr/>
           <p:nvPr/>
         </p:nvSpPr>
@@ -3691,11 +3763,11 @@
             </a:avLst>
           </a:prstGeom>
           <a:solidFill>
-            <a:srgbClr val="FBE9EC"/>
+            <a:srgbClr val="FDE7EF"/>
           </a:solidFill>
           <a:ln w="12700">
             <a:solidFill>
-              <a:srgbClr val="FBE9EC"/>
+              <a:srgbClr val="FDE7EF"/>
             </a:solidFill>
             <a:prstDash val="solid"/>
           </a:ln>
@@ -3703,7 +3775,7 @@
       </p:sp>
       <p:sp>
         <p:nvSpPr>
-          <p:cNvPr id="10" name="Text 7"/>
+          <p:cNvPr id="11" name="Text 7"/>
           <p:cNvSpPr txBox="1"/>
           <p:nvPr/>
         </p:nvSpPr>
@@ -3728,11 +3800,11 @@
             <a:r>
               <a:rPr lang="en-US" sz="1050" b="1" spc="120" kern="0" dirty="0">
                 <a:solidFill>
-                  <a:srgbClr val="D1495B"/>
-                </a:solidFill>
-                <a:latin typeface="Calibri" pitchFamily="34" charset="0"/>
-                <a:ea typeface="Calibri" pitchFamily="34" charset="-122"/>
-                <a:cs typeface="Calibri" pitchFamily="34" charset="-120"/>
+                  <a:srgbClr val="ED1165"/>
+                </a:solidFill>
+                <a:latin typeface="Montserrat" pitchFamily="34" charset="0"/>
+                <a:ea typeface="Montserrat" pitchFamily="34" charset="-122"/>
+                <a:cs typeface="Montserrat" pitchFamily="34" charset="-120"/>
               </a:rPr>
               <a:t>REDUÇÃO DO RISCO</a:t>
             </a:r>
@@ -3742,7 +3814,7 @@
       </p:sp>
       <p:sp>
         <p:nvSpPr>
-          <p:cNvPr id="11" name="Text 8"/>
+          <p:cNvPr id="12" name="Text 8"/>
           <p:cNvSpPr txBox="1"/>
           <p:nvPr/>
         </p:nvSpPr>
@@ -3767,11 +3839,11 @@
             <a:r>
               <a:rPr lang="en-US" sz="2800" b="1" dirty="0">
                 <a:solidFill>
-                  <a:srgbClr val="21295C"/>
-                </a:solidFill>
-                <a:latin typeface="Cambria" pitchFamily="34" charset="0"/>
-                <a:ea typeface="Cambria" pitchFamily="34" charset="-122"/>
-                <a:cs typeface="Cambria" pitchFamily="34" charset="-120"/>
+                  <a:srgbClr val="1A1A1A"/>
+                </a:solidFill>
+                <a:latin typeface="Montserrat" pitchFamily="34" charset="0"/>
+                <a:ea typeface="Montserrat" pitchFamily="34" charset="-122"/>
+                <a:cs typeface="Montserrat" pitchFamily="34" charset="-120"/>
               </a:rPr>
               <a:t>23,7% → 6,8%</a:t>
             </a:r>
@@ -3781,7 +3853,7 @@
       </p:sp>
       <p:sp>
         <p:nvSpPr>
-          <p:cNvPr id="12" name="Text 9"/>
+          <p:cNvPr id="13" name="Text 9"/>
           <p:cNvSpPr txBox="1"/>
           <p:nvPr/>
         </p:nvSpPr>
@@ -3809,11 +3881,11 @@
             <a:r>
               <a:rPr lang="en-US" sz="1250" dirty="0">
                 <a:solidFill>
-                  <a:srgbClr val="1B2A3A"/>
-                </a:solidFill>
-                <a:latin typeface="Calibri" pitchFamily="34" charset="0"/>
-                <a:ea typeface="Calibri" pitchFamily="34" charset="-122"/>
-                <a:cs typeface="Calibri" pitchFamily="34" charset="-120"/>
+                  <a:srgbClr val="333333"/>
+                </a:solidFill>
+                <a:latin typeface="Montserrat" pitchFamily="34" charset="0"/>
+                <a:ea typeface="Montserrat" pitchFamily="34" charset="-122"/>
+                <a:cs typeface="Montserrat" pitchFamily="34" charset="-120"/>
               </a:rPr>
               <a:t>Fazendo as duas mudanças juntas, o risco cai 17 pontos. Em cada 100 mil entregas, são cerca de 17 mil atrasos a menos.</a:t>
             </a:r>
@@ -3823,7 +3895,7 @@
       </p:sp>
       <p:sp>
         <p:nvSpPr>
-          <p:cNvPr id="13" name="Text 10"/>
+          <p:cNvPr id="14" name="Text 10"/>
           <p:cNvSpPr txBox="1"/>
           <p:nvPr/>
         </p:nvSpPr>
@@ -3848,11 +3920,11 @@
             <a:r>
               <a:rPr lang="en-US" sz="1600" b="1" dirty="0">
                 <a:solidFill>
-                  <a:srgbClr val="21295C"/>
-                </a:solidFill>
-                <a:latin typeface="Cambria" pitchFamily="34" charset="0"/>
-                <a:ea typeface="Cambria" pitchFamily="34" charset="-122"/>
-                <a:cs typeface="Cambria" pitchFamily="34" charset="-120"/>
+                  <a:srgbClr val="1A1A1A"/>
+                </a:solidFill>
+                <a:latin typeface="Montserrat" pitchFamily="34" charset="0"/>
+                <a:ea typeface="Montserrat" pitchFamily="34" charset="-122"/>
+                <a:cs typeface="Montserrat" pitchFamily="34" charset="-120"/>
               </a:rPr>
               <a:t>Leitura dos cenários</a:t>
             </a:r>
@@ -3862,7 +3934,7 @@
       </p:sp>
       <p:sp>
         <p:nvSpPr>
-          <p:cNvPr id="14" name="Text 11"/>
+          <p:cNvPr id="15" name="Text 11"/>
           <p:cNvSpPr txBox="1"/>
           <p:nvPr/>
         </p:nvSpPr>
@@ -3894,11 +3966,11 @@
             <a:r>
               <a:rPr lang="en-US" sz="1300" dirty="0">
                 <a:solidFill>
-                  <a:srgbClr val="1B2A3A"/>
-                </a:solidFill>
-                <a:latin typeface="Calibri" pitchFamily="34" charset="0"/>
-                <a:ea typeface="Calibri" pitchFamily="34" charset="-122"/>
-                <a:cs typeface="Calibri" pitchFamily="34" charset="-120"/>
+                  <a:srgbClr val="333333"/>
+                </a:solidFill>
+                <a:latin typeface="Montserrat" pitchFamily="34" charset="0"/>
+                <a:ea typeface="Montserrat" pitchFamily="34" charset="-122"/>
+                <a:cs typeface="Montserrat" pitchFamily="34" charset="-120"/>
               </a:rPr>
               <a:t>Ganhar tempo médio ajudou mais do que reduzir a variação.</a:t>
             </a:r>
@@ -3918,11 +3990,11 @@
             <a:r>
               <a:rPr lang="en-US" sz="1300" dirty="0">
                 <a:solidFill>
-                  <a:srgbClr val="1B2A3A"/>
-                </a:solidFill>
-                <a:latin typeface="Calibri" pitchFamily="34" charset="0"/>
-                <a:ea typeface="Calibri" pitchFamily="34" charset="-122"/>
-                <a:cs typeface="Calibri" pitchFamily="34" charset="-120"/>
+                  <a:srgbClr val="333333"/>
+                </a:solidFill>
+                <a:latin typeface="Montserrat" pitchFamily="34" charset="0"/>
+                <a:ea typeface="Montserrat" pitchFamily="34" charset="-122"/>
+                <a:cs typeface="Montserrat" pitchFamily="34" charset="-120"/>
               </a:rPr>
               <a:t>As duas mudanças juntas derrubam o risco a menos de um terço.</a:t>
             </a:r>
@@ -3942,11 +4014,11 @@
             <a:r>
               <a:rPr lang="en-US" sz="1300" dirty="0">
                 <a:solidFill>
-                  <a:srgbClr val="1B2A3A"/>
-                </a:solidFill>
-                <a:latin typeface="Calibri" pitchFamily="34" charset="0"/>
-                <a:ea typeface="Calibri" pitchFamily="34" charset="-122"/>
-                <a:cs typeface="Calibri" pitchFamily="34" charset="-120"/>
+                  <a:srgbClr val="333333"/>
+                </a:solidFill>
+                <a:latin typeface="Montserrat" pitchFamily="34" charset="0"/>
+                <a:ea typeface="Montserrat" pitchFamily="34" charset="-122"/>
+                <a:cs typeface="Montserrat" pitchFamily="34" charset="-120"/>
               </a:rPr>
               <a:t>Simular no computador evita testar a mudança direto na rua.</a:t>
             </a:r>
@@ -3968,7 +4040,7 @@
     <p:bg>
       <p:bgPr>
         <a:solidFill>
-          <a:srgbClr val="21295C"/>
+          <a:srgbClr val="1A1A1A"/>
         </a:solidFill>
       </p:bgPr>
     </p:bg>
@@ -4001,16 +4073,40 @@
             <a:avLst/>
           </a:prstGeom>
           <a:solidFill>
-            <a:srgbClr val="1C7293">
+            <a:srgbClr val="1A1A1A">
               <a:alpha val="30000"/>
             </a:srgbClr>
           </a:solidFill>
           <a:ln/>
         </p:spPr>
       </p:sp>
-      <p:sp>
-        <p:nvSpPr>
-          <p:cNvPr id="3" name="Text 1"/>
+      <p:pic>
+        <p:nvPicPr>
+          <p:cNvPr id="3" name="Image 0" descr="/home/user/Projeto-Python/.claude/skills/fiap-doc/assets/header-logo.png">    </p:cNvPr>
+          <p:cNvPicPr>
+            <a:picLocks noChangeAspect="1"/>
+          </p:cNvPicPr>
+          <p:nvPr/>
+        </p:nvPicPr>
+        <p:blipFill>
+          <a:blip r:embed="rId1"/>
+          <a:stretch>
+            <a:fillRect/>
+          </a:stretch>
+        </p:blipFill>
+        <p:spPr>
+          <a:xfrm>
+            <a:off x="10607040" y="502920"/>
+            <a:ext cx="1005840" cy="474574"/>
+          </a:xfrm>
+          <a:prstGeom prst="rect">
+            <a:avLst/>
+          </a:prstGeom>
+        </p:spPr>
+      </p:pic>
+      <p:sp>
+        <p:nvSpPr>
+          <p:cNvPr id="4" name="Text 1"/>
           <p:cNvSpPr txBox="1"/>
           <p:nvPr/>
         </p:nvSpPr>
@@ -4035,11 +4131,11 @@
             <a:r>
               <a:rPr lang="en-US" sz="3400" b="1" dirty="0">
                 <a:solidFill>
-                  <a:srgbClr val="FFFFFF"/>
-                </a:solidFill>
-                <a:latin typeface="Cambria" pitchFamily="34" charset="0"/>
-                <a:ea typeface="Cambria" pitchFamily="34" charset="-122"/>
-                <a:cs typeface="Cambria" pitchFamily="34" charset="-120"/>
+                  <a:srgbClr val="ED1165"/>
+                </a:solidFill>
+                <a:latin typeface="Montserrat" pitchFamily="34" charset="0"/>
+                <a:ea typeface="Montserrat" pitchFamily="34" charset="-122"/>
+                <a:cs typeface="Montserrat" pitchFamily="34" charset="-120"/>
               </a:rPr>
               <a:t>Conclusão</a:t>
             </a:r>
@@ -4049,7 +4145,7 @@
       </p:sp>
       <p:sp>
         <p:nvSpPr>
-          <p:cNvPr id="4" name="Text 2"/>
+          <p:cNvPr id="5" name="Text 2"/>
           <p:cNvSpPr txBox="1"/>
           <p:nvPr/>
         </p:nvSpPr>
@@ -4074,11 +4170,11 @@
             <a:r>
               <a:rPr lang="en-US" sz="1450" i="1" dirty="0">
                 <a:solidFill>
-                  <a:srgbClr val="9EC6DC"/>
-                </a:solidFill>
-                <a:latin typeface="Calibri" pitchFamily="34" charset="0"/>
-                <a:ea typeface="Calibri" pitchFamily="34" charset="-122"/>
-                <a:cs typeface="Calibri" pitchFamily="34" charset="-120"/>
+                  <a:srgbClr val="F0A8C4"/>
+                </a:solidFill>
+                <a:latin typeface="Montserrat" pitchFamily="34" charset="0"/>
+                <a:ea typeface="Montserrat" pitchFamily="34" charset="-122"/>
+                <a:cs typeface="Montserrat" pitchFamily="34" charset="-120"/>
               </a:rPr>
               <a:t>Análise dos resultados e benefícios da solução</a:t>
             </a:r>
@@ -4088,7 +4184,7 @@
       </p:sp>
       <p:sp>
         <p:nvSpPr>
-          <p:cNvPr id="5" name="Shape 3"/>
+          <p:cNvPr id="6" name="Shape 3"/>
           <p:cNvSpPr/>
           <p:nvPr/>
         </p:nvSpPr>
@@ -4103,11 +4199,11 @@
             </a:avLst>
           </a:prstGeom>
           <a:solidFill>
-            <a:srgbClr val="2E3A73"/>
+            <a:srgbClr val="2B2B2B"/>
           </a:solidFill>
           <a:ln w="12700">
             <a:solidFill>
-              <a:srgbClr val="2E3A73"/>
+              <a:srgbClr val="2B2B2B"/>
             </a:solidFill>
             <a:prstDash val="solid"/>
           </a:ln>
@@ -4115,7 +4211,7 @@
       </p:sp>
       <p:sp>
         <p:nvSpPr>
-          <p:cNvPr id="6" name="Shape 4"/>
+          <p:cNvPr id="7" name="Shape 4"/>
           <p:cNvSpPr/>
           <p:nvPr/>
         </p:nvSpPr>
@@ -4128,14 +4224,14 @@
             <a:avLst/>
           </a:prstGeom>
           <a:solidFill>
-            <a:srgbClr val="1C7293"/>
+            <a:srgbClr val="1A1A1A"/>
           </a:solidFill>
           <a:ln/>
         </p:spPr>
       </p:sp>
       <p:sp>
         <p:nvSpPr>
-          <p:cNvPr id="7" name="Text 5"/>
+          <p:cNvPr id="8" name="Text 5"/>
           <p:cNvSpPr txBox="1"/>
           <p:nvPr/>
         </p:nvSpPr>
@@ -4162,9 +4258,9 @@
                 <a:solidFill>
                   <a:srgbClr val="FFFFFF"/>
                 </a:solidFill>
-                <a:latin typeface="Calibri" pitchFamily="34" charset="0"/>
-                <a:ea typeface="Calibri" pitchFamily="34" charset="-122"/>
-                <a:cs typeface="Calibri" pitchFamily="34" charset="-120"/>
+                <a:latin typeface="Montserrat" pitchFamily="34" charset="0"/>
+                <a:ea typeface="Montserrat" pitchFamily="34" charset="-122"/>
+                <a:cs typeface="Montserrat" pitchFamily="34" charset="-120"/>
               </a:rPr>
               <a:t>1</a:t>
             </a:r>
@@ -4174,7 +4270,7 @@
       </p:sp>
       <p:sp>
         <p:nvSpPr>
-          <p:cNvPr id="8" name="Text 6"/>
+          <p:cNvPr id="9" name="Text 6"/>
           <p:cNvSpPr txBox="1"/>
           <p:nvPr/>
         </p:nvSpPr>
@@ -4201,9 +4297,9 @@
                 <a:solidFill>
                   <a:srgbClr val="FFFFFF"/>
                 </a:solidFill>
-                <a:latin typeface="Cambria" pitchFamily="34" charset="0"/>
-                <a:ea typeface="Cambria" pitchFamily="34" charset="-122"/>
-                <a:cs typeface="Cambria" pitchFamily="34" charset="-120"/>
+                <a:latin typeface="Montserrat" pitchFamily="34" charset="0"/>
+                <a:ea typeface="Montserrat" pitchFamily="34" charset="-122"/>
+                <a:cs typeface="Montserrat" pitchFamily="34" charset="-120"/>
               </a:rPr>
               <a:t>A média escondia o risco real</a:t>
             </a:r>
@@ -4213,7 +4309,7 @@
       </p:sp>
       <p:sp>
         <p:nvSpPr>
-          <p:cNvPr id="9" name="Text 7"/>
+          <p:cNvPr id="10" name="Text 7"/>
           <p:cNvSpPr txBox="1"/>
           <p:nvPr/>
         </p:nvSpPr>
@@ -4241,11 +4337,11 @@
             <a:r>
               <a:rPr lang="en-US" sz="1250" dirty="0">
                 <a:solidFill>
-                  <a:srgbClr val="D6E4EE"/>
-                </a:solidFill>
-                <a:latin typeface="Calibri" pitchFamily="34" charset="0"/>
-                <a:ea typeface="Calibri" pitchFamily="34" charset="-122"/>
-                <a:cs typeface="Calibri" pitchFamily="34" charset="-120"/>
+                  <a:srgbClr val="DCDCDC"/>
+                </a:solidFill>
+                <a:latin typeface="Montserrat" pitchFamily="34" charset="0"/>
+                <a:ea typeface="Montserrat" pitchFamily="34" charset="-122"/>
+                <a:cs typeface="Montserrat" pitchFamily="34" charset="-120"/>
               </a:rPr>
               <a:t>Olhando só o total, 22,5% das entregas atrasam. Separando por cenário, o risco chega a 64,7%. A probabilidade mostrou onde estava o problema.</a:t>
             </a:r>
@@ -4255,7 +4351,7 @@
       </p:sp>
       <p:sp>
         <p:nvSpPr>
-          <p:cNvPr id="10" name="Shape 8"/>
+          <p:cNvPr id="11" name="Shape 8"/>
           <p:cNvSpPr/>
           <p:nvPr/>
         </p:nvSpPr>
@@ -4270,11 +4366,11 @@
             </a:avLst>
           </a:prstGeom>
           <a:solidFill>
-            <a:srgbClr val="2E3A73"/>
+            <a:srgbClr val="2B2B2B"/>
           </a:solidFill>
           <a:ln w="12700">
             <a:solidFill>
-              <a:srgbClr val="2E3A73"/>
+              <a:srgbClr val="2B2B2B"/>
             </a:solidFill>
             <a:prstDash val="solid"/>
           </a:ln>
@@ -4282,7 +4378,7 @@
       </p:sp>
       <p:sp>
         <p:nvSpPr>
-          <p:cNvPr id="11" name="Shape 9"/>
+          <p:cNvPr id="12" name="Shape 9"/>
           <p:cNvSpPr/>
           <p:nvPr/>
         </p:nvSpPr>
@@ -4295,14 +4391,14 @@
             <a:avLst/>
           </a:prstGeom>
           <a:solidFill>
-            <a:srgbClr val="D1495B"/>
+            <a:srgbClr val="ED1165"/>
           </a:solidFill>
           <a:ln/>
         </p:spPr>
       </p:sp>
       <p:sp>
         <p:nvSpPr>
-          <p:cNvPr id="12" name="Text 10"/>
+          <p:cNvPr id="13" name="Text 10"/>
           <p:cNvSpPr txBox="1"/>
           <p:nvPr/>
         </p:nvSpPr>
@@ -4329,9 +4425,9 @@
                 <a:solidFill>
                   <a:srgbClr val="FFFFFF"/>
                 </a:solidFill>
-                <a:latin typeface="Calibri" pitchFamily="34" charset="0"/>
-                <a:ea typeface="Calibri" pitchFamily="34" charset="-122"/>
-                <a:cs typeface="Calibri" pitchFamily="34" charset="-120"/>
+                <a:latin typeface="Montserrat" pitchFamily="34" charset="0"/>
+                <a:ea typeface="Montserrat" pitchFamily="34" charset="-122"/>
+                <a:cs typeface="Montserrat" pitchFamily="34" charset="-120"/>
               </a:rPr>
               <a:t>2</a:t>
             </a:r>
@@ -4341,7 +4437,7 @@
       </p:sp>
       <p:sp>
         <p:nvSpPr>
-          <p:cNvPr id="13" name="Text 11"/>
+          <p:cNvPr id="14" name="Text 11"/>
           <p:cNvSpPr txBox="1"/>
           <p:nvPr/>
         </p:nvSpPr>
@@ -4368,9 +4464,9 @@
                 <a:solidFill>
                   <a:srgbClr val="FFFFFF"/>
                 </a:solidFill>
-                <a:latin typeface="Cambria" pitchFamily="34" charset="0"/>
-                <a:ea typeface="Cambria" pitchFamily="34" charset="-122"/>
-                <a:cs typeface="Cambria" pitchFamily="34" charset="-120"/>
+                <a:latin typeface="Montserrat" pitchFamily="34" charset="0"/>
+                <a:ea typeface="Montserrat" pitchFamily="34" charset="-122"/>
+                <a:cs typeface="Montserrat" pitchFamily="34" charset="-120"/>
               </a:rPr>
               <a:t>A curva Normal descreveu o tempo</a:t>
             </a:r>
@@ -4380,7 +4476,7 @@
       </p:sp>
       <p:sp>
         <p:nvSpPr>
-          <p:cNvPr id="14" name="Text 12"/>
+          <p:cNvPr id="15" name="Text 12"/>
           <p:cNvSpPr txBox="1"/>
           <p:nvPr/>
         </p:nvSpPr>
@@ -4408,11 +4504,11 @@
             <a:r>
               <a:rPr lang="en-US" sz="1250" dirty="0">
                 <a:solidFill>
-                  <a:srgbClr val="D6E4EE"/>
-                </a:solidFill>
-                <a:latin typeface="Calibri" pitchFamily="34" charset="0"/>
-                <a:ea typeface="Calibri" pitchFamily="34" charset="-122"/>
-                <a:cs typeface="Calibri" pitchFamily="34" charset="-120"/>
+                  <a:srgbClr val="DCDCDC"/>
+                </a:solidFill>
+                <a:latin typeface="Montserrat" pitchFamily="34" charset="0"/>
+                <a:ea typeface="Montserrat" pitchFamily="34" charset="-122"/>
+                <a:cs typeface="Montserrat" pitchFamily="34" charset="-120"/>
               </a:rPr>
               <a:t>Com média de 48,9 e desvio de 15,4 minutos, a curva calculou 23,7% de risco, bem perto dos 22,5% que realmente aconteceram.</a:t>
             </a:r>
@@ -4422,7 +4518,7 @@
       </p:sp>
       <p:sp>
         <p:nvSpPr>
-          <p:cNvPr id="15" name="Shape 13"/>
+          <p:cNvPr id="16" name="Shape 13"/>
           <p:cNvSpPr/>
           <p:nvPr/>
         </p:nvSpPr>
@@ -4437,11 +4533,11 @@
             </a:avLst>
           </a:prstGeom>
           <a:solidFill>
-            <a:srgbClr val="2E3A73"/>
+            <a:srgbClr val="2B2B2B"/>
           </a:solidFill>
           <a:ln w="12700">
             <a:solidFill>
-              <a:srgbClr val="2E3A73"/>
+              <a:srgbClr val="2B2B2B"/>
             </a:solidFill>
             <a:prstDash val="solid"/>
           </a:ln>
@@ -4449,7 +4545,7 @@
       </p:sp>
       <p:sp>
         <p:nvSpPr>
-          <p:cNvPr id="16" name="Shape 14"/>
+          <p:cNvPr id="17" name="Shape 14"/>
           <p:cNvSpPr/>
           <p:nvPr/>
         </p:nvSpPr>
@@ -4462,14 +4558,14 @@
             <a:avLst/>
           </a:prstGeom>
           <a:solidFill>
-            <a:srgbClr val="1C7293"/>
+            <a:srgbClr val="1A1A1A"/>
           </a:solidFill>
           <a:ln/>
         </p:spPr>
       </p:sp>
       <p:sp>
         <p:nvSpPr>
-          <p:cNvPr id="17" name="Text 15"/>
+          <p:cNvPr id="18" name="Text 15"/>
           <p:cNvSpPr txBox="1"/>
           <p:nvPr/>
         </p:nvSpPr>
@@ -4496,9 +4592,9 @@
                 <a:solidFill>
                   <a:srgbClr val="FFFFFF"/>
                 </a:solidFill>
-                <a:latin typeface="Calibri" pitchFamily="34" charset="0"/>
-                <a:ea typeface="Calibri" pitchFamily="34" charset="-122"/>
-                <a:cs typeface="Calibri" pitchFamily="34" charset="-120"/>
+                <a:latin typeface="Montserrat" pitchFamily="34" charset="0"/>
+                <a:ea typeface="Montserrat" pitchFamily="34" charset="-122"/>
+                <a:cs typeface="Montserrat" pitchFamily="34" charset="-120"/>
               </a:rPr>
               <a:t>3</a:t>
             </a:r>
@@ -4508,7 +4604,7 @@
       </p:sp>
       <p:sp>
         <p:nvSpPr>
-          <p:cNvPr id="18" name="Text 16"/>
+          <p:cNvPr id="19" name="Text 16"/>
           <p:cNvSpPr txBox="1"/>
           <p:nvPr/>
         </p:nvSpPr>
@@ -4535,9 +4631,9 @@
                 <a:solidFill>
                   <a:srgbClr val="FFFFFF"/>
                 </a:solidFill>
-                <a:latin typeface="Cambria" pitchFamily="34" charset="0"/>
-                <a:ea typeface="Cambria" pitchFamily="34" charset="-122"/>
-                <a:cs typeface="Cambria" pitchFamily="34" charset="-120"/>
+                <a:latin typeface="Montserrat" pitchFamily="34" charset="0"/>
+                <a:ea typeface="Montserrat" pitchFamily="34" charset="-122"/>
+                <a:cs typeface="Montserrat" pitchFamily="34" charset="-120"/>
               </a:rPr>
               <a:t>Da fórmula ao programa que prevê</a:t>
             </a:r>
@@ -4547,7 +4643,7 @@
       </p:sp>
       <p:sp>
         <p:nvSpPr>
-          <p:cNvPr id="19" name="Text 17"/>
+          <p:cNvPr id="20" name="Text 17"/>
           <p:cNvSpPr txBox="1"/>
           <p:nvPr/>
         </p:nvSpPr>
@@ -4575,11 +4671,11 @@
             <a:r>
               <a:rPr lang="en-US" sz="1250" dirty="0">
                 <a:solidFill>
-                  <a:srgbClr val="D6E4EE"/>
-                </a:solidFill>
-                <a:latin typeface="Calibri" pitchFamily="34" charset="0"/>
-                <a:ea typeface="Calibri" pitchFamily="34" charset="-122"/>
-                <a:cs typeface="Calibri" pitchFamily="34" charset="-120"/>
+                  <a:srgbClr val="DCDCDC"/>
+                </a:solidFill>
+                <a:latin typeface="Montserrat" pitchFamily="34" charset="0"/>
+                <a:ea typeface="Montserrat" pitchFamily="34" charset="-122"/>
+                <a:cs typeface="Montserrat" pitchFamily="34" charset="-120"/>
               </a:rPr>
               <a:t>Usando só as fórmulas dos slides, o modelo acertou 87,3% das entregas de teste, que ele nunca tinha visto antes.</a:t>
             </a:r>
@@ -4589,7 +4685,7 @@
       </p:sp>
       <p:sp>
         <p:nvSpPr>
-          <p:cNvPr id="20" name="Shape 18"/>
+          <p:cNvPr id="21" name="Shape 18"/>
           <p:cNvSpPr/>
           <p:nvPr/>
         </p:nvSpPr>
@@ -4604,11 +4700,11 @@
             </a:avLst>
           </a:prstGeom>
           <a:solidFill>
-            <a:srgbClr val="2E3A73"/>
+            <a:srgbClr val="2B2B2B"/>
           </a:solidFill>
           <a:ln w="12700">
             <a:solidFill>
-              <a:srgbClr val="2E3A73"/>
+              <a:srgbClr val="2B2B2B"/>
             </a:solidFill>
             <a:prstDash val="solid"/>
           </a:ln>
@@ -4616,7 +4712,7 @@
       </p:sp>
       <p:sp>
         <p:nvSpPr>
-          <p:cNvPr id="21" name="Shape 19"/>
+          <p:cNvPr id="22" name="Shape 19"/>
           <p:cNvSpPr/>
           <p:nvPr/>
         </p:nvSpPr>
@@ -4629,14 +4725,14 @@
             <a:avLst/>
           </a:prstGeom>
           <a:solidFill>
-            <a:srgbClr val="D1495B"/>
+            <a:srgbClr val="ED1165"/>
           </a:solidFill>
           <a:ln/>
         </p:spPr>
       </p:sp>
       <p:sp>
         <p:nvSpPr>
-          <p:cNvPr id="22" name="Text 20"/>
+          <p:cNvPr id="23" name="Text 20"/>
           <p:cNvSpPr txBox="1"/>
           <p:nvPr/>
         </p:nvSpPr>
@@ -4663,9 +4759,9 @@
                 <a:solidFill>
                   <a:srgbClr val="FFFFFF"/>
                 </a:solidFill>
-                <a:latin typeface="Calibri" pitchFamily="34" charset="0"/>
-                <a:ea typeface="Calibri" pitchFamily="34" charset="-122"/>
-                <a:cs typeface="Calibri" pitchFamily="34" charset="-120"/>
+                <a:latin typeface="Montserrat" pitchFamily="34" charset="0"/>
+                <a:ea typeface="Montserrat" pitchFamily="34" charset="-122"/>
+                <a:cs typeface="Montserrat" pitchFamily="34" charset="-120"/>
               </a:rPr>
               <a:t>4</a:t>
             </a:r>
@@ -4675,7 +4771,7 @@
       </p:sp>
       <p:sp>
         <p:nvSpPr>
-          <p:cNvPr id="23" name="Text 21"/>
+          <p:cNvPr id="24" name="Text 21"/>
           <p:cNvSpPr txBox="1"/>
           <p:nvPr/>
         </p:nvSpPr>
@@ -4702,9 +4798,9 @@
                 <a:solidFill>
                   <a:srgbClr val="FFFFFF"/>
                 </a:solidFill>
-                <a:latin typeface="Cambria" pitchFamily="34" charset="0"/>
-                <a:ea typeface="Cambria" pitchFamily="34" charset="-122"/>
-                <a:cs typeface="Cambria" pitchFamily="34" charset="-120"/>
+                <a:latin typeface="Montserrat" pitchFamily="34" charset="0"/>
+                <a:ea typeface="Montserrat" pitchFamily="34" charset="-122"/>
+                <a:cs typeface="Montserrat" pitchFamily="34" charset="-120"/>
               </a:rPr>
               <a:t>O ganho para a empresa</a:t>
             </a:r>
@@ -4714,7 +4810,7 @@
       </p:sp>
       <p:sp>
         <p:nvSpPr>
-          <p:cNvPr id="24" name="Text 22"/>
+          <p:cNvPr id="25" name="Text 22"/>
           <p:cNvSpPr txBox="1"/>
           <p:nvPr/>
         </p:nvSpPr>
@@ -4742,11 +4838,11 @@
             <a:r>
               <a:rPr lang="en-US" sz="1250" dirty="0">
                 <a:solidFill>
-                  <a:srgbClr val="D6E4EE"/>
-                </a:solidFill>
-                <a:latin typeface="Calibri" pitchFamily="34" charset="0"/>
-                <a:ea typeface="Calibri" pitchFamily="34" charset="-122"/>
-                <a:cs typeface="Calibri" pitchFamily="34" charset="-120"/>
+                  <a:srgbClr val="DCDCDC"/>
+                </a:solidFill>
+                <a:latin typeface="Montserrat" pitchFamily="34" charset="0"/>
+                <a:ea typeface="Montserrat" pitchFamily="34" charset="-122"/>
+                <a:cs typeface="Montserrat" pitchFamily="34" charset="-120"/>
               </a:rPr>
               <a:t>Na simulação, o risco cai de 23,7% para 6,8%. Isso significa menos multa por atraso, menos retrabalho e cliente mais satisfeito.</a:t>
             </a:r>
@@ -4756,7 +4852,7 @@
       </p:sp>
       <p:sp>
         <p:nvSpPr>
-          <p:cNvPr id="25" name="Text 23"/>
+          <p:cNvPr id="26" name="Text 23"/>
           <p:cNvSpPr txBox="1"/>
           <p:nvPr/>
         </p:nvSpPr>
@@ -4781,11 +4877,11 @@
             <a:r>
               <a:rPr lang="en-US" sz="1300" i="1" dirty="0">
                 <a:solidFill>
-                  <a:srgbClr val="9EC6DC"/>
-                </a:solidFill>
-                <a:latin typeface="Calibri" pitchFamily="34" charset="0"/>
-                <a:ea typeface="Calibri" pitchFamily="34" charset="-122"/>
-                <a:cs typeface="Calibri" pitchFamily="34" charset="-120"/>
+                  <a:srgbClr val="F0A8C4"/>
+                </a:solidFill>
+                <a:latin typeface="Montserrat" pitchFamily="34" charset="0"/>
+                <a:ea typeface="Montserrat" pitchFamily="34" charset="-122"/>
+                <a:cs typeface="Montserrat" pitchFamily="34" charset="-120"/>
               </a:rPr>
               <a:t>Como próximo passo, o mesmo modelo poderia ser testado com dados reais da empresa e comparado com outros métodos.</a:t>
             </a:r>
@@ -4840,7 +4936,7 @@
             <a:avLst/>
           </a:prstGeom>
           <a:solidFill>
-            <a:srgbClr val="1C7293"/>
+            <a:srgbClr val="1A1A1A"/>
           </a:solidFill>
           <a:ln/>
         </p:spPr>
@@ -4874,9 +4970,9 @@
                 <a:solidFill>
                   <a:srgbClr val="FFFFFF"/>
                 </a:solidFill>
-                <a:latin typeface="Cambria" pitchFamily="34" charset="0"/>
-                <a:ea typeface="Cambria" pitchFamily="34" charset="-122"/>
-                <a:cs typeface="Cambria" pitchFamily="34" charset="-120"/>
+                <a:latin typeface="Montserrat" pitchFamily="34" charset="0"/>
+                <a:ea typeface="Montserrat" pitchFamily="34" charset="-122"/>
+                <a:cs typeface="Montserrat" pitchFamily="34" charset="-120"/>
               </a:rPr>
               <a:t>11</a:t>
             </a:r>
@@ -4893,7 +4989,7 @@
         <p:spPr>
           <a:xfrm>
             <a:off x="1298448" y="329184"/>
-            <a:ext cx="10332720" cy="658368"/>
+            <a:ext cx="9235440" cy="658368"/>
           </a:xfrm>
           <a:prstGeom prst="rect">
             <a:avLst/>
@@ -4911,11 +5007,11 @@
             <a:r>
               <a:rPr lang="en-US" sz="3000" b="1" dirty="0">
                 <a:solidFill>
-                  <a:srgbClr val="21295C"/>
-                </a:solidFill>
-                <a:latin typeface="Cambria" pitchFamily="34" charset="0"/>
-                <a:ea typeface="Cambria" pitchFamily="34" charset="-122"/>
-                <a:cs typeface="Cambria" pitchFamily="34" charset="-120"/>
+                  <a:srgbClr val="1A1A1A"/>
+                </a:solidFill>
+                <a:latin typeface="Montserrat" pitchFamily="34" charset="0"/>
+                <a:ea typeface="Montserrat" pitchFamily="34" charset="-122"/>
+                <a:cs typeface="Montserrat" pitchFamily="34" charset="-120"/>
               </a:rPr>
               <a:t>Bibliografia</a:t>
             </a:r>
@@ -4923,9 +5019,33 @@
           </a:p>
         </p:txBody>
       </p:sp>
-      <p:sp>
-        <p:nvSpPr>
-          <p:cNvPr id="5" name="Text 3"/>
+      <p:pic>
+        <p:nvPicPr>
+          <p:cNvPr id="5" name="Image 0" descr="/home/user/Projeto-Python/.claude/skills/fiap-doc/assets/header-logo.png">    </p:cNvPr>
+          <p:cNvPicPr>
+            <a:picLocks noChangeAspect="1"/>
+          </p:cNvPicPr>
+          <p:nvPr/>
+        </p:nvPicPr>
+        <p:blipFill>
+          <a:blip r:embed="rId1"/>
+          <a:stretch>
+            <a:fillRect/>
+          </a:stretch>
+        </p:blipFill>
+        <p:spPr>
+          <a:xfrm>
+            <a:off x="10716768" y="402336"/>
+            <a:ext cx="896112" cy="422453"/>
+          </a:xfrm>
+          <a:prstGeom prst="rect">
+            <a:avLst/>
+          </a:prstGeom>
+        </p:spPr>
+      </p:pic>
+      <p:sp>
+        <p:nvSpPr>
+          <p:cNvPr id="6" name="Text 3"/>
           <p:cNvSpPr txBox="1"/>
           <p:nvPr/>
         </p:nvSpPr>
@@ -4950,11 +5070,11 @@
             <a:r>
               <a:rPr lang="en-US" sz="1400" i="1" dirty="0">
                 <a:solidFill>
-                  <a:srgbClr val="5A6B7B"/>
-                </a:solidFill>
-                <a:latin typeface="Calibri" pitchFamily="34" charset="0"/>
-                <a:ea typeface="Calibri" pitchFamily="34" charset="-122"/>
-                <a:cs typeface="Calibri" pitchFamily="34" charset="-120"/>
+                  <a:srgbClr val="6E6E6E"/>
+                </a:solidFill>
+                <a:latin typeface="Montserrat" pitchFamily="34" charset="0"/>
+                <a:ea typeface="Montserrat" pitchFamily="34" charset="-122"/>
+                <a:cs typeface="Montserrat" pitchFamily="34" charset="-120"/>
               </a:rPr>
               <a:t>Referências segundo as normas da ABNT (NBR 6023)</a:t>
             </a:r>
@@ -4964,7 +5084,7 @@
       </p:sp>
       <p:sp>
         <p:nvSpPr>
-          <p:cNvPr id="6" name="Shape 4"/>
+          <p:cNvPr id="7" name="Shape 4"/>
           <p:cNvSpPr/>
           <p:nvPr/>
         </p:nvSpPr>
@@ -4979,11 +5099,11 @@
             </a:avLst>
           </a:prstGeom>
           <a:solidFill>
-            <a:srgbClr val="F4F8FB"/>
+            <a:srgbClr val="F5F5F5"/>
           </a:solidFill>
           <a:ln w="12700">
             <a:solidFill>
-              <a:srgbClr val="F4F8FB"/>
+              <a:srgbClr val="F5F5F5"/>
             </a:solidFill>
             <a:prstDash val="solid"/>
           </a:ln>
@@ -4991,7 +5111,7 @@
       </p:sp>
       <p:sp>
         <p:nvSpPr>
-          <p:cNvPr id="7" name="Text 5"/>
+          <p:cNvPr id="8" name="Text 5"/>
           <p:cNvSpPr txBox="1"/>
           <p:nvPr/>
         </p:nvSpPr>
@@ -5016,11 +5136,11 @@
             <a:r>
               <a:rPr lang="en-US" sz="1150" dirty="0">
                 <a:solidFill>
-                  <a:srgbClr val="1B2A3A"/>
-                </a:solidFill>
-                <a:latin typeface="Calibri" pitchFamily="34" charset="0"/>
-                <a:ea typeface="Calibri" pitchFamily="34" charset="-122"/>
-                <a:cs typeface="Calibri" pitchFamily="34" charset="-120"/>
+                  <a:srgbClr val="333333"/>
+                </a:solidFill>
+                <a:latin typeface="Montserrat" pitchFamily="34" charset="0"/>
+                <a:ea typeface="Montserrat" pitchFamily="34" charset="-122"/>
+                <a:cs typeface="Montserrat" pitchFamily="34" charset="-120"/>
               </a:rPr>
               <a:t>BUSSAB, Wilson de O.; MORETTIN, Pedro A. Estatística básica. 9. ed. São Paulo: Saraiva, 2017.</a:t>
             </a:r>
@@ -5030,7 +5150,7 @@
       </p:sp>
       <p:sp>
         <p:nvSpPr>
-          <p:cNvPr id="8" name="Text 6"/>
+          <p:cNvPr id="9" name="Text 6"/>
           <p:cNvSpPr txBox="1"/>
           <p:nvPr/>
         </p:nvSpPr>
@@ -5055,11 +5175,11 @@
             <a:r>
               <a:rPr lang="en-US" sz="1150" dirty="0">
                 <a:solidFill>
-                  <a:srgbClr val="1B2A3A"/>
-                </a:solidFill>
-                <a:latin typeface="Calibri" pitchFamily="34" charset="0"/>
-                <a:ea typeface="Calibri" pitchFamily="34" charset="-122"/>
-                <a:cs typeface="Calibri" pitchFamily="34" charset="-120"/>
+                  <a:srgbClr val="333333"/>
+                </a:solidFill>
+                <a:latin typeface="Montserrat" pitchFamily="34" charset="0"/>
+                <a:ea typeface="Montserrat" pitchFamily="34" charset="-122"/>
+                <a:cs typeface="Montserrat" pitchFamily="34" charset="-120"/>
               </a:rPr>
               <a:t>MONTGOMERY, Douglas C.; RUNGER, George C. Estatística aplicada e probabilidade para engenheiros. 7. ed. Rio de Janeiro: LTC, 2021.</a:t>
             </a:r>
@@ -5069,7 +5189,7 @@
       </p:sp>
       <p:sp>
         <p:nvSpPr>
-          <p:cNvPr id="9" name="Shape 7"/>
+          <p:cNvPr id="10" name="Shape 7"/>
           <p:cNvSpPr/>
           <p:nvPr/>
         </p:nvSpPr>
@@ -5084,11 +5204,11 @@
             </a:avLst>
           </a:prstGeom>
           <a:solidFill>
-            <a:srgbClr val="F4F8FB"/>
+            <a:srgbClr val="F5F5F5"/>
           </a:solidFill>
           <a:ln w="12700">
             <a:solidFill>
-              <a:srgbClr val="F4F8FB"/>
+              <a:srgbClr val="F5F5F5"/>
             </a:solidFill>
             <a:prstDash val="solid"/>
           </a:ln>
@@ -5096,7 +5216,7 @@
       </p:sp>
       <p:sp>
         <p:nvSpPr>
-          <p:cNvPr id="10" name="Text 8"/>
+          <p:cNvPr id="11" name="Text 8"/>
           <p:cNvSpPr txBox="1"/>
           <p:nvPr/>
         </p:nvSpPr>
@@ -5121,11 +5241,11 @@
             <a:r>
               <a:rPr lang="en-US" sz="1150" dirty="0">
                 <a:solidFill>
-                  <a:srgbClr val="1B2A3A"/>
-                </a:solidFill>
-                <a:latin typeface="Calibri" pitchFamily="34" charset="0"/>
-                <a:ea typeface="Calibri" pitchFamily="34" charset="-122"/>
-                <a:cs typeface="Calibri" pitchFamily="34" charset="-120"/>
+                  <a:srgbClr val="333333"/>
+                </a:solidFill>
+                <a:latin typeface="Montserrat" pitchFamily="34" charset="0"/>
+                <a:ea typeface="Montserrat" pitchFamily="34" charset="-122"/>
+                <a:cs typeface="Montserrat" pitchFamily="34" charset="-120"/>
               </a:rPr>
               <a:t>FÁVERO, Luiz Paulo; BELFIORE, Patrícia. Manual de análise de dados: estatística e modelagem multivariada. Rio de Janeiro: LTC, 2017.</a:t>
             </a:r>
@@ -5135,7 +5255,7 @@
       </p:sp>
       <p:sp>
         <p:nvSpPr>
-          <p:cNvPr id="11" name="Text 9"/>
+          <p:cNvPr id="12" name="Text 9"/>
           <p:cNvSpPr txBox="1"/>
           <p:nvPr/>
         </p:nvSpPr>
@@ -5160,11 +5280,11 @@
             <a:r>
               <a:rPr lang="en-US" sz="1150" dirty="0">
                 <a:solidFill>
-                  <a:srgbClr val="1B2A3A"/>
-                </a:solidFill>
-                <a:latin typeface="Calibri" pitchFamily="34" charset="0"/>
-                <a:ea typeface="Calibri" pitchFamily="34" charset="-122"/>
-                <a:cs typeface="Calibri" pitchFamily="34" charset="-120"/>
+                  <a:srgbClr val="333333"/>
+                </a:solidFill>
+                <a:latin typeface="Montserrat" pitchFamily="34" charset="0"/>
+                <a:ea typeface="Montserrat" pitchFamily="34" charset="-122"/>
+                <a:cs typeface="Montserrat" pitchFamily="34" charset="-120"/>
               </a:rPr>
               <a:t>JAMES, Gareth et al. An introduction to statistical learning: with applications in Python. Cham: Springer, 2023.</a:t>
             </a:r>
@@ -5174,7 +5294,7 @@
       </p:sp>
       <p:sp>
         <p:nvSpPr>
-          <p:cNvPr id="12" name="Shape 10"/>
+          <p:cNvPr id="13" name="Shape 10"/>
           <p:cNvSpPr/>
           <p:nvPr/>
         </p:nvSpPr>
@@ -5189,11 +5309,11 @@
             </a:avLst>
           </a:prstGeom>
           <a:solidFill>
-            <a:srgbClr val="F4F8FB"/>
+            <a:srgbClr val="F5F5F5"/>
           </a:solidFill>
           <a:ln w="12700">
             <a:solidFill>
-              <a:srgbClr val="F4F8FB"/>
+              <a:srgbClr val="F5F5F5"/>
             </a:solidFill>
             <a:prstDash val="solid"/>
           </a:ln>
@@ -5201,7 +5321,7 @@
       </p:sp>
       <p:sp>
         <p:nvSpPr>
-          <p:cNvPr id="13" name="Text 11"/>
+          <p:cNvPr id="14" name="Text 11"/>
           <p:cNvSpPr txBox="1"/>
           <p:nvPr/>
         </p:nvSpPr>
@@ -5226,11 +5346,11 @@
             <a:r>
               <a:rPr lang="en-US" sz="1150" dirty="0">
                 <a:solidFill>
-                  <a:srgbClr val="1B2A3A"/>
-                </a:solidFill>
-                <a:latin typeface="Calibri" pitchFamily="34" charset="0"/>
-                <a:ea typeface="Calibri" pitchFamily="34" charset="-122"/>
-                <a:cs typeface="Calibri" pitchFamily="34" charset="-120"/>
+                  <a:srgbClr val="333333"/>
+                </a:solidFill>
+                <a:latin typeface="Montserrat" pitchFamily="34" charset="0"/>
+                <a:ea typeface="Montserrat" pitchFamily="34" charset="-122"/>
+                <a:cs typeface="Montserrat" pitchFamily="34" charset="-120"/>
               </a:rPr>
               <a:t>GÉRON, Aurélien. Mãos à obra: aprendizado de máquina com Scikit-Learn, Keras &amp; TensorFlow. 2. ed. Rio de Janeiro: Alta Books, 2021.</a:t>
             </a:r>
@@ -5240,7 +5360,7 @@
       </p:sp>
       <p:sp>
         <p:nvSpPr>
-          <p:cNvPr id="14" name="Text 12"/>
+          <p:cNvPr id="15" name="Text 12"/>
           <p:cNvSpPr txBox="1"/>
           <p:nvPr/>
         </p:nvSpPr>
@@ -5265,11 +5385,11 @@
             <a:r>
               <a:rPr lang="en-US" sz="1150" dirty="0">
                 <a:solidFill>
-                  <a:srgbClr val="1B2A3A"/>
-                </a:solidFill>
-                <a:latin typeface="Calibri" pitchFamily="34" charset="0"/>
-                <a:ea typeface="Calibri" pitchFamily="34" charset="-122"/>
-                <a:cs typeface="Calibri" pitchFamily="34" charset="-120"/>
+                  <a:srgbClr val="333333"/>
+                </a:solidFill>
+                <a:latin typeface="Montserrat" pitchFamily="34" charset="0"/>
+                <a:ea typeface="Montserrat" pitchFamily="34" charset="-122"/>
+                <a:cs typeface="Montserrat" pitchFamily="34" charset="-120"/>
               </a:rPr>
               <a:t>MCKINNEY, Wes. Python para análise de dados: tratamento de dados com Pandas, NumPy e Jupyter. 3. ed. São Paulo: Novatec, 2023.</a:t>
             </a:r>
@@ -5279,7 +5399,7 @@
       </p:sp>
       <p:sp>
         <p:nvSpPr>
-          <p:cNvPr id="15" name="Shape 13"/>
+          <p:cNvPr id="16" name="Shape 13"/>
           <p:cNvSpPr/>
           <p:nvPr/>
         </p:nvSpPr>
@@ -5294,11 +5414,11 @@
             </a:avLst>
           </a:prstGeom>
           <a:solidFill>
-            <a:srgbClr val="F4F8FB"/>
+            <a:srgbClr val="F5F5F5"/>
           </a:solidFill>
           <a:ln w="12700">
             <a:solidFill>
-              <a:srgbClr val="F4F8FB"/>
+              <a:srgbClr val="F5F5F5"/>
             </a:solidFill>
             <a:prstDash val="solid"/>
           </a:ln>
@@ -5306,7 +5426,7 @@
       </p:sp>
       <p:sp>
         <p:nvSpPr>
-          <p:cNvPr id="16" name="Text 14"/>
+          <p:cNvPr id="17" name="Text 14"/>
           <p:cNvSpPr txBox="1"/>
           <p:nvPr/>
         </p:nvSpPr>
@@ -5331,11 +5451,11 @@
             <a:r>
               <a:rPr lang="en-US" sz="1150" dirty="0">
                 <a:solidFill>
-                  <a:srgbClr val="1B2A3A"/>
-                </a:solidFill>
-                <a:latin typeface="Calibri" pitchFamily="34" charset="0"/>
-                <a:ea typeface="Calibri" pitchFamily="34" charset="-122"/>
-                <a:cs typeface="Calibri" pitchFamily="34" charset="-120"/>
+                  <a:srgbClr val="333333"/>
+                </a:solidFill>
+                <a:latin typeface="Montserrat" pitchFamily="34" charset="0"/>
+                <a:ea typeface="Montserrat" pitchFamily="34" charset="-122"/>
+                <a:cs typeface="Montserrat" pitchFamily="34" charset="-120"/>
               </a:rPr>
               <a:t>NUMPY DEVELOPERS. NumPy documentation: random sampling (numpy.random). Disponível em: https://numpy.org/doc/stable/reference/random/index.html. Acesso em: 10 set. 2026.</a:t>
             </a:r>
@@ -5345,7 +5465,7 @@
       </p:sp>
       <p:sp>
         <p:nvSpPr>
-          <p:cNvPr id="17" name="Text 15"/>
+          <p:cNvPr id="18" name="Text 15"/>
           <p:cNvSpPr txBox="1"/>
           <p:nvPr/>
         </p:nvSpPr>
@@ -5370,11 +5490,11 @@
             <a:r>
               <a:rPr lang="en-US" sz="1150" dirty="0">
                 <a:solidFill>
-                  <a:srgbClr val="1B2A3A"/>
-                </a:solidFill>
-                <a:latin typeface="Calibri" pitchFamily="34" charset="0"/>
-                <a:ea typeface="Calibri" pitchFamily="34" charset="-122"/>
-                <a:cs typeface="Calibri" pitchFamily="34" charset="-120"/>
+                  <a:srgbClr val="333333"/>
+                </a:solidFill>
+                <a:latin typeface="Montserrat" pitchFamily="34" charset="0"/>
+                <a:ea typeface="Montserrat" pitchFamily="34" charset="-122"/>
+                <a:cs typeface="Montserrat" pitchFamily="34" charset="-120"/>
               </a:rPr>
               <a:t>SCIPY COMMUNITY. SciPy documentation: statistical functions (scipy.stats). Disponível em: https://docs.scipy.org/doc/scipy/reference/stats.html. Acesso em: 10 set. 2026.</a:t>
             </a:r>
@@ -5384,7 +5504,7 @@
       </p:sp>
       <p:sp>
         <p:nvSpPr>
-          <p:cNvPr id="18" name="Shape 16"/>
+          <p:cNvPr id="19" name="Shape 16"/>
           <p:cNvSpPr/>
           <p:nvPr/>
         </p:nvSpPr>
@@ -5399,11 +5519,11 @@
             </a:avLst>
           </a:prstGeom>
           <a:solidFill>
-            <a:srgbClr val="F4F8FB"/>
+            <a:srgbClr val="F5F5F5"/>
           </a:solidFill>
           <a:ln w="12700">
             <a:solidFill>
-              <a:srgbClr val="F4F8FB"/>
+              <a:srgbClr val="F5F5F5"/>
             </a:solidFill>
             <a:prstDash val="solid"/>
           </a:ln>
@@ -5411,7 +5531,7 @@
       </p:sp>
       <p:sp>
         <p:nvSpPr>
-          <p:cNvPr id="19" name="Text 17"/>
+          <p:cNvPr id="20" name="Text 17"/>
           <p:cNvSpPr txBox="1"/>
           <p:nvPr/>
         </p:nvSpPr>
@@ -5436,11 +5556,11 @@
             <a:r>
               <a:rPr lang="en-US" sz="1150" dirty="0">
                 <a:solidFill>
-                  <a:srgbClr val="1B2A3A"/>
-                </a:solidFill>
-                <a:latin typeface="Calibri" pitchFamily="34" charset="0"/>
-                <a:ea typeface="Calibri" pitchFamily="34" charset="-122"/>
-                <a:cs typeface="Calibri" pitchFamily="34" charset="-120"/>
+                  <a:srgbClr val="333333"/>
+                </a:solidFill>
+                <a:latin typeface="Montserrat" pitchFamily="34" charset="0"/>
+                <a:ea typeface="Montserrat" pitchFamily="34" charset="-122"/>
+                <a:cs typeface="Montserrat" pitchFamily="34" charset="-120"/>
               </a:rPr>
               <a:t>ANTHROPIC. Claude: modelo de linguagem de grande porte. Versão Opus 5. San Francisco: Anthropic, 2026. Disponível em: https://claude.ai. Acesso em: 10 set. 2026. Utilizado como apoio na estruturação da apresentação e na revisão do código.</a:t>
             </a:r>
@@ -5450,7 +5570,7 @@
       </p:sp>
       <p:sp>
         <p:nvSpPr>
-          <p:cNvPr id="20" name="Text 18"/>
+          <p:cNvPr id="21" name="Text 18"/>
           <p:cNvSpPr txBox="1"/>
           <p:nvPr/>
         </p:nvSpPr>
@@ -5475,11 +5595,11 @@
             <a:r>
               <a:rPr lang="en-US" sz="1200" i="1" dirty="0">
                 <a:solidFill>
-                  <a:srgbClr val="5A6B7B"/>
-                </a:solidFill>
-                <a:latin typeface="Calibri" pitchFamily="34" charset="0"/>
-                <a:ea typeface="Calibri" pitchFamily="34" charset="-122"/>
-                <a:cs typeface="Calibri" pitchFamily="34" charset="-120"/>
+                  <a:srgbClr val="6E6E6E"/>
+                </a:solidFill>
+                <a:latin typeface="Montserrat" pitchFamily="34" charset="0"/>
+                <a:ea typeface="Montserrat" pitchFamily="34" charset="-122"/>
+                <a:cs typeface="Montserrat" pitchFamily="34" charset="-120"/>
               </a:rPr>
               <a:t>Código-fonte completo no arquivo codigo_cp4.py, executado em Python 3.11 com NumPy, pandas, SciPy e Matplotlib.</a:t>
             </a:r>
@@ -5534,7 +5654,7 @@
             <a:avLst/>
           </a:prstGeom>
           <a:solidFill>
-            <a:srgbClr val="1C7293"/>
+            <a:srgbClr val="1A1A1A"/>
           </a:solidFill>
           <a:ln/>
         </p:spPr>
@@ -5568,9 +5688,9 @@
                 <a:solidFill>
                   <a:srgbClr val="FFFFFF"/>
                 </a:solidFill>
-                <a:latin typeface="Cambria" pitchFamily="34" charset="0"/>
-                <a:ea typeface="Cambria" pitchFamily="34" charset="-122"/>
-                <a:cs typeface="Cambria" pitchFamily="34" charset="-120"/>
+                <a:latin typeface="Montserrat" pitchFamily="34" charset="0"/>
+                <a:ea typeface="Montserrat" pitchFamily="34" charset="-122"/>
+                <a:cs typeface="Montserrat" pitchFamily="34" charset="-120"/>
               </a:rPr>
               <a:t>1</a:t>
             </a:r>
@@ -5587,7 +5707,7 @@
         <p:spPr>
           <a:xfrm>
             <a:off x="1298448" y="329184"/>
-            <a:ext cx="10332720" cy="658368"/>
+            <a:ext cx="9235440" cy="658368"/>
           </a:xfrm>
           <a:prstGeom prst="rect">
             <a:avLst/>
@@ -5605,11 +5725,11 @@
             <a:r>
               <a:rPr lang="en-US" sz="3000" b="1" dirty="0">
                 <a:solidFill>
-                  <a:srgbClr val="21295C"/>
-                </a:solidFill>
-                <a:latin typeface="Cambria" pitchFamily="34" charset="0"/>
-                <a:ea typeface="Cambria" pitchFamily="34" charset="-122"/>
-                <a:cs typeface="Cambria" pitchFamily="34" charset="-120"/>
+                  <a:srgbClr val="1A1A1A"/>
+                </a:solidFill>
+                <a:latin typeface="Montserrat" pitchFamily="34" charset="0"/>
+                <a:ea typeface="Montserrat" pitchFamily="34" charset="-122"/>
+                <a:cs typeface="Montserrat" pitchFamily="34" charset="-120"/>
               </a:rPr>
               <a:t>Introdução e Justificativa</a:t>
             </a:r>
@@ -5617,9 +5737,33 @@
           </a:p>
         </p:txBody>
       </p:sp>
-      <p:sp>
-        <p:nvSpPr>
-          <p:cNvPr id="5" name="Text 3"/>
+      <p:pic>
+        <p:nvPicPr>
+          <p:cNvPr id="5" name="Image 0" descr="/home/user/Projeto-Python/.claude/skills/fiap-doc/assets/header-logo.png">    </p:cNvPr>
+          <p:cNvPicPr>
+            <a:picLocks noChangeAspect="1"/>
+          </p:cNvPicPr>
+          <p:nvPr/>
+        </p:nvPicPr>
+        <p:blipFill>
+          <a:blip r:embed="rId1"/>
+          <a:stretch>
+            <a:fillRect/>
+          </a:stretch>
+        </p:blipFill>
+        <p:spPr>
+          <a:xfrm>
+            <a:off x="10716768" y="402336"/>
+            <a:ext cx="896112" cy="422453"/>
+          </a:xfrm>
+          <a:prstGeom prst="rect">
+            <a:avLst/>
+          </a:prstGeom>
+        </p:spPr>
+      </p:pic>
+      <p:sp>
+        <p:nvSpPr>
+          <p:cNvPr id="6" name="Text 3"/>
           <p:cNvSpPr txBox="1"/>
           <p:nvPr/>
         </p:nvSpPr>
@@ -5644,11 +5788,11 @@
             <a:r>
               <a:rPr lang="en-US" sz="1400" i="1" dirty="0">
                 <a:solidFill>
-                  <a:srgbClr val="5A6B7B"/>
-                </a:solidFill>
-                <a:latin typeface="Calibri" pitchFamily="34" charset="0"/>
-                <a:ea typeface="Calibri" pitchFamily="34" charset="-122"/>
-                <a:cs typeface="Calibri" pitchFamily="34" charset="-120"/>
+                  <a:srgbClr val="6E6E6E"/>
+                </a:solidFill>
+                <a:latin typeface="Montserrat" pitchFamily="34" charset="0"/>
+                <a:ea typeface="Montserrat" pitchFamily="34" charset="-122"/>
+                <a:cs typeface="Montserrat" pitchFamily="34" charset="-120"/>
               </a:rPr>
               <a:t>Qual problema escolhemos e por que ele precisa de probabilidade</a:t>
             </a:r>
@@ -5658,7 +5802,7 @@
       </p:sp>
       <p:sp>
         <p:nvSpPr>
-          <p:cNvPr id="6" name="Text 4"/>
+          <p:cNvPr id="7" name="Text 4"/>
           <p:cNvSpPr txBox="1"/>
           <p:nvPr/>
         </p:nvSpPr>
@@ -5686,11 +5830,11 @@
             <a:r>
               <a:rPr lang="en-US" sz="1500" dirty="0">
                 <a:solidFill>
-                  <a:srgbClr val="1B2A3A"/>
-                </a:solidFill>
-                <a:latin typeface="Calibri" pitchFamily="34" charset="0"/>
-                <a:ea typeface="Calibri" pitchFamily="34" charset="-122"/>
-                <a:cs typeface="Calibri" pitchFamily="34" charset="-120"/>
+                  <a:srgbClr val="333333"/>
+                </a:solidFill>
+                <a:latin typeface="Montserrat" pitchFamily="34" charset="0"/>
+                <a:ea typeface="Montserrat" pitchFamily="34" charset="-122"/>
+                <a:cs typeface="Montserrat" pitchFamily="34" charset="-120"/>
               </a:rPr>
               <a:t>Uma transportadora promete entregar em até 60 minutos. Só que trânsito, chuva e distância mudam esse tempo, então ninguém tem certeza se vai dar. Quando a certeza não existe, a saída é calcular a chance de acontecer. É isso que os dois temas fazem, e é assim que um programa de computador consegue prever.</a:t>
             </a:r>
@@ -5700,7 +5844,7 @@
       </p:sp>
       <p:sp>
         <p:nvSpPr>
-          <p:cNvPr id="7" name="Shape 5"/>
+          <p:cNvPr id="8" name="Shape 5"/>
           <p:cNvSpPr/>
           <p:nvPr/>
         </p:nvSpPr>
@@ -5715,11 +5859,11 @@
             </a:avLst>
           </a:prstGeom>
           <a:solidFill>
-            <a:srgbClr val="EDF3F7"/>
+            <a:srgbClr val="F5F5F5"/>
           </a:solidFill>
           <a:ln w="12700">
             <a:solidFill>
-              <a:srgbClr val="EDF3F7"/>
+              <a:srgbClr val="F5F5F5"/>
             </a:solidFill>
             <a:prstDash val="solid"/>
           </a:ln>
@@ -5727,7 +5871,7 @@
       </p:sp>
       <p:sp>
         <p:nvSpPr>
-          <p:cNvPr id="8" name="Shape 6"/>
+          <p:cNvPr id="9" name="Shape 6"/>
           <p:cNvSpPr/>
           <p:nvPr/>
         </p:nvSpPr>
@@ -5740,14 +5884,14 @@
             <a:avLst/>
           </a:prstGeom>
           <a:solidFill>
-            <a:srgbClr val="1C7293"/>
+            <a:srgbClr val="1A1A1A"/>
           </a:solidFill>
           <a:ln/>
         </p:spPr>
       </p:sp>
       <p:sp>
         <p:nvSpPr>
-          <p:cNvPr id="9" name="Text 7"/>
+          <p:cNvPr id="10" name="Text 7"/>
           <p:cNvSpPr txBox="1"/>
           <p:nvPr/>
         </p:nvSpPr>
@@ -5774,9 +5918,9 @@
                 <a:solidFill>
                   <a:srgbClr val="FFFFFF"/>
                 </a:solidFill>
-                <a:latin typeface="Calibri" pitchFamily="34" charset="0"/>
-                <a:ea typeface="Calibri" pitchFamily="34" charset="-122"/>
-                <a:cs typeface="Calibri" pitchFamily="34" charset="-120"/>
+                <a:latin typeface="Montserrat" pitchFamily="34" charset="0"/>
+                <a:ea typeface="Montserrat" pitchFamily="34" charset="-122"/>
+                <a:cs typeface="Montserrat" pitchFamily="34" charset="-120"/>
               </a:rPr>
               <a:t>1</a:t>
             </a:r>
@@ -5786,7 +5930,7 @@
       </p:sp>
       <p:sp>
         <p:nvSpPr>
-          <p:cNvPr id="10" name="Text 8"/>
+          <p:cNvPr id="11" name="Text 8"/>
           <p:cNvSpPr txBox="1"/>
           <p:nvPr/>
         </p:nvSpPr>
@@ -5811,11 +5955,11 @@
             <a:r>
               <a:rPr lang="en-US" sz="1300" b="1" dirty="0">
                 <a:solidFill>
-                  <a:srgbClr val="21295C"/>
-                </a:solidFill>
-                <a:latin typeface="Calibri" pitchFamily="34" charset="0"/>
-                <a:ea typeface="Calibri" pitchFamily="34" charset="-122"/>
-                <a:cs typeface="Calibri" pitchFamily="34" charset="-120"/>
+                  <a:srgbClr val="1A1A1A"/>
+                </a:solidFill>
+                <a:latin typeface="Montserrat" pitchFamily="34" charset="0"/>
+                <a:ea typeface="Montserrat" pitchFamily="34" charset="-122"/>
+                <a:cs typeface="Montserrat" pitchFamily="34" charset="-120"/>
               </a:rPr>
               <a:t>Contexto: </a:t>
             </a:r>
@@ -5825,11 +5969,11 @@
             <a:r>
               <a:rPr lang="en-US" sz="1300" dirty="0">
                 <a:solidFill>
-                  <a:srgbClr val="1B2A3A"/>
-                </a:solidFill>
-                <a:latin typeface="Calibri" pitchFamily="34" charset="0"/>
-                <a:ea typeface="Calibri" pitchFamily="34" charset="-122"/>
-                <a:cs typeface="Calibri" pitchFamily="34" charset="-120"/>
+                  <a:srgbClr val="333333"/>
+                </a:solidFill>
+                <a:latin typeface="Montserrat" pitchFamily="34" charset="0"/>
+                <a:ea typeface="Montserrat" pitchFamily="34" charset="-122"/>
+                <a:cs typeface="Montserrat" pitchFamily="34" charset="-120"/>
               </a:rPr>
               <a:t>Transportadora urbana com SLA de 60 minutos por entrega.</a:t>
             </a:r>
@@ -5839,7 +5983,7 @@
       </p:sp>
       <p:sp>
         <p:nvSpPr>
-          <p:cNvPr id="11" name="Shape 9"/>
+          <p:cNvPr id="12" name="Shape 9"/>
           <p:cNvSpPr/>
           <p:nvPr/>
         </p:nvSpPr>
@@ -5854,11 +5998,11 @@
             </a:avLst>
           </a:prstGeom>
           <a:solidFill>
-            <a:srgbClr val="EDF3F7"/>
+            <a:srgbClr val="F5F5F5"/>
           </a:solidFill>
           <a:ln w="12700">
             <a:solidFill>
-              <a:srgbClr val="EDF3F7"/>
+              <a:srgbClr val="F5F5F5"/>
             </a:solidFill>
             <a:prstDash val="solid"/>
           </a:ln>
@@ -5866,7 +6010,7 @@
       </p:sp>
       <p:sp>
         <p:nvSpPr>
-          <p:cNvPr id="12" name="Shape 10"/>
+          <p:cNvPr id="13" name="Shape 10"/>
           <p:cNvSpPr/>
           <p:nvPr/>
         </p:nvSpPr>
@@ -5879,14 +6023,14 @@
             <a:avLst/>
           </a:prstGeom>
           <a:solidFill>
-            <a:srgbClr val="D1495B"/>
+            <a:srgbClr val="ED1165"/>
           </a:solidFill>
           <a:ln/>
         </p:spPr>
       </p:sp>
       <p:sp>
         <p:nvSpPr>
-          <p:cNvPr id="13" name="Text 11"/>
+          <p:cNvPr id="14" name="Text 11"/>
           <p:cNvSpPr txBox="1"/>
           <p:nvPr/>
         </p:nvSpPr>
@@ -5913,9 +6057,9 @@
                 <a:solidFill>
                   <a:srgbClr val="FFFFFF"/>
                 </a:solidFill>
-                <a:latin typeface="Calibri" pitchFamily="34" charset="0"/>
-                <a:ea typeface="Calibri" pitchFamily="34" charset="-122"/>
-                <a:cs typeface="Calibri" pitchFamily="34" charset="-120"/>
+                <a:latin typeface="Montserrat" pitchFamily="34" charset="0"/>
+                <a:ea typeface="Montserrat" pitchFamily="34" charset="-122"/>
+                <a:cs typeface="Montserrat" pitchFamily="34" charset="-120"/>
               </a:rPr>
               <a:t>2</a:t>
             </a:r>
@@ -5925,7 +6069,7 @@
       </p:sp>
       <p:sp>
         <p:nvSpPr>
-          <p:cNvPr id="14" name="Text 12"/>
+          <p:cNvPr id="15" name="Text 12"/>
           <p:cNvSpPr txBox="1"/>
           <p:nvPr/>
         </p:nvSpPr>
@@ -5950,11 +6094,11 @@
             <a:r>
               <a:rPr lang="en-US" sz="1300" b="1" dirty="0">
                 <a:solidFill>
-                  <a:srgbClr val="21295C"/>
-                </a:solidFill>
-                <a:latin typeface="Calibri" pitchFamily="34" charset="0"/>
-                <a:ea typeface="Calibri" pitchFamily="34" charset="-122"/>
-                <a:cs typeface="Calibri" pitchFamily="34" charset="-120"/>
+                  <a:srgbClr val="1A1A1A"/>
+                </a:solidFill>
+                <a:latin typeface="Montserrat" pitchFamily="34" charset="0"/>
+                <a:ea typeface="Montserrat" pitchFamily="34" charset="-122"/>
+                <a:cs typeface="Montserrat" pitchFamily="34" charset="-120"/>
               </a:rPr>
               <a:t>Problema: </a:t>
             </a:r>
@@ -5964,11 +6108,11 @@
             <a:r>
               <a:rPr lang="en-US" sz="1300" dirty="0">
                 <a:solidFill>
-                  <a:srgbClr val="1B2A3A"/>
-                </a:solidFill>
-                <a:latin typeface="Calibri" pitchFamily="34" charset="0"/>
-                <a:ea typeface="Calibri" pitchFamily="34" charset="-122"/>
-                <a:cs typeface="Calibri" pitchFamily="34" charset="-120"/>
+                  <a:srgbClr val="333333"/>
+                </a:solidFill>
+                <a:latin typeface="Montserrat" pitchFamily="34" charset="0"/>
+                <a:ea typeface="Montserrat" pitchFamily="34" charset="-122"/>
+                <a:cs typeface="Montserrat" pitchFamily="34" charset="-120"/>
               </a:rPr>
               <a:t>Quais fatores elevam o risco de atraso e qual a chance de estourar o prazo?</a:t>
             </a:r>
@@ -5978,7 +6122,7 @@
       </p:sp>
       <p:sp>
         <p:nvSpPr>
-          <p:cNvPr id="15" name="Shape 13"/>
+          <p:cNvPr id="16" name="Shape 13"/>
           <p:cNvSpPr/>
           <p:nvPr/>
         </p:nvSpPr>
@@ -5993,11 +6137,11 @@
             </a:avLst>
           </a:prstGeom>
           <a:solidFill>
-            <a:srgbClr val="EDF3F7"/>
+            <a:srgbClr val="F5F5F5"/>
           </a:solidFill>
           <a:ln w="12700">
             <a:solidFill>
-              <a:srgbClr val="EDF3F7"/>
+              <a:srgbClr val="F5F5F5"/>
             </a:solidFill>
             <a:prstDash val="solid"/>
           </a:ln>
@@ -6005,7 +6149,7 @@
       </p:sp>
       <p:sp>
         <p:nvSpPr>
-          <p:cNvPr id="16" name="Shape 14"/>
+          <p:cNvPr id="17" name="Shape 14"/>
           <p:cNvSpPr/>
           <p:nvPr/>
         </p:nvSpPr>
@@ -6018,14 +6162,14 @@
             <a:avLst/>
           </a:prstGeom>
           <a:solidFill>
-            <a:srgbClr val="1C7293"/>
+            <a:srgbClr val="1A1A1A"/>
           </a:solidFill>
           <a:ln/>
         </p:spPr>
       </p:sp>
       <p:sp>
         <p:nvSpPr>
-          <p:cNvPr id="17" name="Text 15"/>
+          <p:cNvPr id="18" name="Text 15"/>
           <p:cNvSpPr txBox="1"/>
           <p:nvPr/>
         </p:nvSpPr>
@@ -6052,9 +6196,9 @@
                 <a:solidFill>
                   <a:srgbClr val="FFFFFF"/>
                 </a:solidFill>
-                <a:latin typeface="Calibri" pitchFamily="34" charset="0"/>
-                <a:ea typeface="Calibri" pitchFamily="34" charset="-122"/>
-                <a:cs typeface="Calibri" pitchFamily="34" charset="-120"/>
+                <a:latin typeface="Montserrat" pitchFamily="34" charset="0"/>
+                <a:ea typeface="Montserrat" pitchFamily="34" charset="-122"/>
+                <a:cs typeface="Montserrat" pitchFamily="34" charset="-120"/>
               </a:rPr>
               <a:t>3</a:t>
             </a:r>
@@ -6064,7 +6208,7 @@
       </p:sp>
       <p:sp>
         <p:nvSpPr>
-          <p:cNvPr id="18" name="Text 16"/>
+          <p:cNvPr id="19" name="Text 16"/>
           <p:cNvSpPr txBox="1"/>
           <p:nvPr/>
         </p:nvSpPr>
@@ -6089,11 +6233,11 @@
             <a:r>
               <a:rPr lang="en-US" sz="1300" b="1" dirty="0">
                 <a:solidFill>
-                  <a:srgbClr val="21295C"/>
-                </a:solidFill>
-                <a:latin typeface="Calibri" pitchFamily="34" charset="0"/>
-                <a:ea typeface="Calibri" pitchFamily="34" charset="-122"/>
-                <a:cs typeface="Calibri" pitchFamily="34" charset="-120"/>
+                  <a:srgbClr val="1A1A1A"/>
+                </a:solidFill>
+                <a:latin typeface="Montserrat" pitchFamily="34" charset="0"/>
+                <a:ea typeface="Montserrat" pitchFamily="34" charset="-122"/>
+                <a:cs typeface="Montserrat" pitchFamily="34" charset="-120"/>
               </a:rPr>
               <a:t>Solução: </a:t>
             </a:r>
@@ -6103,11 +6247,11 @@
             <a:r>
               <a:rPr lang="en-US" sz="1300" dirty="0">
                 <a:solidFill>
-                  <a:srgbClr val="1B2A3A"/>
-                </a:solidFill>
-                <a:latin typeface="Calibri" pitchFamily="34" charset="0"/>
-                <a:ea typeface="Calibri" pitchFamily="34" charset="-122"/>
-                <a:cs typeface="Calibri" pitchFamily="34" charset="-120"/>
+                  <a:srgbClr val="333333"/>
+                </a:solidFill>
+                <a:latin typeface="Montserrat" pitchFamily="34" charset="0"/>
+                <a:ea typeface="Montserrat" pitchFamily="34" charset="-122"/>
+                <a:cs typeface="Montserrat" pitchFamily="34" charset="-120"/>
               </a:rPr>
               <a:t>Um programa em Python que calcula a chance de atraso de cada entrega.</a:t>
             </a:r>
@@ -6117,7 +6261,7 @@
       </p:sp>
       <p:sp>
         <p:nvSpPr>
-          <p:cNvPr id="19" name="Shape 17"/>
+          <p:cNvPr id="20" name="Shape 17"/>
           <p:cNvSpPr/>
           <p:nvPr/>
         </p:nvSpPr>
@@ -6132,11 +6276,11 @@
             </a:avLst>
           </a:prstGeom>
           <a:solidFill>
-            <a:srgbClr val="EDF3F7"/>
+            <a:srgbClr val="F5F5F5"/>
           </a:solidFill>
           <a:ln w="12700">
             <a:solidFill>
-              <a:srgbClr val="EDF3F7"/>
+              <a:srgbClr val="F5F5F5"/>
             </a:solidFill>
             <a:prstDash val="solid"/>
           </a:ln>
@@ -6144,7 +6288,7 @@
       </p:sp>
       <p:sp>
         <p:nvSpPr>
-          <p:cNvPr id="20" name="Shape 18"/>
+          <p:cNvPr id="21" name="Shape 18"/>
           <p:cNvSpPr/>
           <p:nvPr/>
         </p:nvSpPr>
@@ -6157,14 +6301,14 @@
             <a:avLst/>
           </a:prstGeom>
           <a:solidFill>
-            <a:srgbClr val="D1495B"/>
+            <a:srgbClr val="ED1165"/>
           </a:solidFill>
           <a:ln/>
         </p:spPr>
       </p:sp>
       <p:sp>
         <p:nvSpPr>
-          <p:cNvPr id="21" name="Text 19"/>
+          <p:cNvPr id="22" name="Text 19"/>
           <p:cNvSpPr txBox="1"/>
           <p:nvPr/>
         </p:nvSpPr>
@@ -6191,9 +6335,9 @@
                 <a:solidFill>
                   <a:srgbClr val="FFFFFF"/>
                 </a:solidFill>
-                <a:latin typeface="Calibri" pitchFamily="34" charset="0"/>
-                <a:ea typeface="Calibri" pitchFamily="34" charset="-122"/>
-                <a:cs typeface="Calibri" pitchFamily="34" charset="-120"/>
+                <a:latin typeface="Montserrat" pitchFamily="34" charset="0"/>
+                <a:ea typeface="Montserrat" pitchFamily="34" charset="-122"/>
+                <a:cs typeface="Montserrat" pitchFamily="34" charset="-120"/>
               </a:rPr>
               <a:t>4</a:t>
             </a:r>
@@ -6203,7 +6347,7 @@
       </p:sp>
       <p:sp>
         <p:nvSpPr>
-          <p:cNvPr id="22" name="Text 20"/>
+          <p:cNvPr id="23" name="Text 20"/>
           <p:cNvSpPr txBox="1"/>
           <p:nvPr/>
         </p:nvSpPr>
@@ -6228,11 +6372,11 @@
             <a:r>
               <a:rPr lang="en-US" sz="1300" b="1" dirty="0">
                 <a:solidFill>
-                  <a:srgbClr val="21295C"/>
-                </a:solidFill>
-                <a:latin typeface="Calibri" pitchFamily="34" charset="0"/>
-                <a:ea typeface="Calibri" pitchFamily="34" charset="-122"/>
-                <a:cs typeface="Calibri" pitchFamily="34" charset="-120"/>
+                  <a:srgbClr val="1A1A1A"/>
+                </a:solidFill>
+                <a:latin typeface="Montserrat" pitchFamily="34" charset="0"/>
+                <a:ea typeface="Montserrat" pitchFamily="34" charset="-122"/>
+                <a:cs typeface="Montserrat" pitchFamily="34" charset="-120"/>
               </a:rPr>
               <a:t>Dados: </a:t>
             </a:r>
@@ -6242,11 +6386,11 @@
             <a:r>
               <a:rPr lang="en-US" sz="1300" dirty="0">
                 <a:solidFill>
-                  <a:srgbClr val="1B2A3A"/>
-                </a:solidFill>
-                <a:latin typeface="Calibri" pitchFamily="34" charset="0"/>
-                <a:ea typeface="Calibri" pitchFamily="34" charset="-122"/>
-                <a:cs typeface="Calibri" pitchFamily="34" charset="-120"/>
+                  <a:srgbClr val="333333"/>
+                </a:solidFill>
+                <a:latin typeface="Montserrat" pitchFamily="34" charset="0"/>
+                <a:ea typeface="Montserrat" pitchFamily="34" charset="-122"/>
+                <a:cs typeface="Montserrat" pitchFamily="34" charset="-120"/>
               </a:rPr>
               <a:t>Mil entregas criadas pelo próprio código, sempre iguais por causa da semente fixa.</a:t>
             </a:r>
@@ -6256,7 +6400,7 @@
       </p:sp>
       <p:sp>
         <p:nvSpPr>
-          <p:cNvPr id="23" name="Shape 21"/>
+          <p:cNvPr id="24" name="Shape 21"/>
           <p:cNvSpPr/>
           <p:nvPr/>
         </p:nvSpPr>
@@ -6271,11 +6415,11 @@
             </a:avLst>
           </a:prstGeom>
           <a:solidFill>
-            <a:srgbClr val="21295C"/>
+            <a:srgbClr val="1A1A1A"/>
           </a:solidFill>
           <a:ln w="12700">
             <a:solidFill>
-              <a:srgbClr val="21295C"/>
+              <a:srgbClr val="1A1A1A"/>
             </a:solidFill>
             <a:prstDash val="solid"/>
           </a:ln>
@@ -6283,7 +6427,7 @@
       </p:sp>
       <p:sp>
         <p:nvSpPr>
-          <p:cNvPr id="24" name="Text 22"/>
+          <p:cNvPr id="25" name="Text 22"/>
           <p:cNvSpPr txBox="1"/>
           <p:nvPr/>
         </p:nvSpPr>
@@ -6308,11 +6452,11 @@
             <a:r>
               <a:rPr lang="en-US" sz="1100" b="1" spc="150" kern="0" dirty="0">
                 <a:solidFill>
-                  <a:srgbClr val="9EC6DC"/>
-                </a:solidFill>
-                <a:latin typeface="Calibri" pitchFamily="34" charset="0"/>
-                <a:ea typeface="Calibri" pitchFamily="34" charset="-122"/>
-                <a:cs typeface="Calibri" pitchFamily="34" charset="-120"/>
+                  <a:srgbClr val="F0A8C4"/>
+                </a:solidFill>
+                <a:latin typeface="Montserrat" pitchFamily="34" charset="0"/>
+                <a:ea typeface="Montserrat" pitchFamily="34" charset="-122"/>
+                <a:cs typeface="Montserrat" pitchFamily="34" charset="-120"/>
               </a:rPr>
               <a:t>O QUE VAMOS RESPONDER</a:t>
             </a:r>
@@ -6322,7 +6466,7 @@
       </p:sp>
       <p:sp>
         <p:nvSpPr>
-          <p:cNvPr id="25" name="Text 23"/>
+          <p:cNvPr id="26" name="Text 23"/>
           <p:cNvSpPr txBox="1"/>
           <p:nvPr/>
         </p:nvSpPr>
@@ -6352,9 +6496,9 @@
                 <a:solidFill>
                   <a:srgbClr val="FFFFFF"/>
                 </a:solidFill>
-                <a:latin typeface="Calibri" pitchFamily="34" charset="0"/>
-                <a:ea typeface="Calibri" pitchFamily="34" charset="-122"/>
-                <a:cs typeface="Calibri" pitchFamily="34" charset="-120"/>
+                <a:latin typeface="Montserrat" pitchFamily="34" charset="0"/>
+                <a:ea typeface="Montserrat" pitchFamily="34" charset="-122"/>
+                <a:cs typeface="Montserrat" pitchFamily="34" charset="-120"/>
               </a:rPr>
               <a:t>1.  Qual a probabilidade de uma entrega atrasar?</a:t>
             </a:r>
@@ -6372,9 +6516,9 @@
                 <a:solidFill>
                   <a:srgbClr val="FFFFFF"/>
                 </a:solidFill>
-                <a:latin typeface="Calibri" pitchFamily="34" charset="0"/>
-                <a:ea typeface="Calibri" pitchFamily="34" charset="-122"/>
-                <a:cs typeface="Calibri" pitchFamily="34" charset="-120"/>
+                <a:latin typeface="Montserrat" pitchFamily="34" charset="0"/>
+                <a:ea typeface="Montserrat" pitchFamily="34" charset="-122"/>
+                <a:cs typeface="Montserrat" pitchFamily="34" charset="-120"/>
               </a:rPr>
               <a:t>2.  Quanto a chuva aumenta esse risco?</a:t>
             </a:r>
@@ -6392,9 +6536,9 @@
                 <a:solidFill>
                   <a:srgbClr val="FFFFFF"/>
                 </a:solidFill>
-                <a:latin typeface="Calibri" pitchFamily="34" charset="0"/>
-                <a:ea typeface="Calibri" pitchFamily="34" charset="-122"/>
-                <a:cs typeface="Calibri" pitchFamily="34" charset="-120"/>
+                <a:latin typeface="Montserrat" pitchFamily="34" charset="0"/>
+                <a:ea typeface="Montserrat" pitchFamily="34" charset="-122"/>
+                <a:cs typeface="Montserrat" pitchFamily="34" charset="-120"/>
               </a:rPr>
               <a:t>3.  O tempo de entrega segue uma Normal?</a:t>
             </a:r>
@@ -6412,9 +6556,9 @@
                 <a:solidFill>
                   <a:srgbClr val="FFFFFF"/>
                 </a:solidFill>
-                <a:latin typeface="Calibri" pitchFamily="34" charset="0"/>
-                <a:ea typeface="Calibri" pitchFamily="34" charset="-122"/>
-                <a:cs typeface="Calibri" pitchFamily="34" charset="-120"/>
+                <a:latin typeface="Montserrat" pitchFamily="34" charset="0"/>
+                <a:ea typeface="Montserrat" pitchFamily="34" charset="-122"/>
+                <a:cs typeface="Montserrat" pitchFamily="34" charset="-120"/>
               </a:rPr>
               <a:t>4.  Dá para prever o atraso antes de ele acontecer?</a:t>
             </a:r>
@@ -6432,9 +6576,9 @@
                 <a:solidFill>
                   <a:srgbClr val="FFFFFF"/>
                 </a:solidFill>
-                <a:latin typeface="Calibri" pitchFamily="34" charset="0"/>
-                <a:ea typeface="Calibri" pitchFamily="34" charset="-122"/>
-                <a:cs typeface="Calibri" pitchFamily="34" charset="-120"/>
+                <a:latin typeface="Montserrat" pitchFamily="34" charset="0"/>
+                <a:ea typeface="Montserrat" pitchFamily="34" charset="-122"/>
+                <a:cs typeface="Montserrat" pitchFamily="34" charset="-120"/>
               </a:rPr>
               <a:t>5.  Qual mudança na operação reduz mais o risco?</a:t>
             </a:r>
@@ -6489,7 +6633,7 @@
             <a:avLst/>
           </a:prstGeom>
           <a:solidFill>
-            <a:srgbClr val="1C7293"/>
+            <a:srgbClr val="1A1A1A"/>
           </a:solidFill>
           <a:ln/>
         </p:spPr>
@@ -6523,9 +6667,9 @@
                 <a:solidFill>
                   <a:srgbClr val="FFFFFF"/>
                 </a:solidFill>
-                <a:latin typeface="Cambria" pitchFamily="34" charset="0"/>
-                <a:ea typeface="Cambria" pitchFamily="34" charset="-122"/>
-                <a:cs typeface="Cambria" pitchFamily="34" charset="-120"/>
+                <a:latin typeface="Montserrat" pitchFamily="34" charset="0"/>
+                <a:ea typeface="Montserrat" pitchFamily="34" charset="-122"/>
+                <a:cs typeface="Montserrat" pitchFamily="34" charset="-120"/>
               </a:rPr>
               <a:t>2</a:t>
             </a:r>
@@ -6542,7 +6686,7 @@
         <p:spPr>
           <a:xfrm>
             <a:off x="1298448" y="329184"/>
-            <a:ext cx="10332720" cy="658368"/>
+            <a:ext cx="9235440" cy="658368"/>
           </a:xfrm>
           <a:prstGeom prst="rect">
             <a:avLst/>
@@ -6560,11 +6704,11 @@
             <a:r>
               <a:rPr lang="en-US" sz="3000" b="1" dirty="0">
                 <a:solidFill>
-                  <a:srgbClr val="21295C"/>
-                </a:solidFill>
-                <a:latin typeface="Cambria" pitchFamily="34" charset="0"/>
-                <a:ea typeface="Cambria" pitchFamily="34" charset="-122"/>
-                <a:cs typeface="Cambria" pitchFamily="34" charset="-120"/>
+                  <a:srgbClr val="1A1A1A"/>
+                </a:solidFill>
+                <a:latin typeface="Montserrat" pitchFamily="34" charset="0"/>
+                <a:ea typeface="Montserrat" pitchFamily="34" charset="-122"/>
+                <a:cs typeface="Montserrat" pitchFamily="34" charset="-120"/>
               </a:rPr>
               <a:t>Probabilidade: conceitos e fórmulas</a:t>
             </a:r>
@@ -6572,9 +6716,33 @@
           </a:p>
         </p:txBody>
       </p:sp>
-      <p:sp>
-        <p:nvSpPr>
-          <p:cNvPr id="5" name="Text 3"/>
+      <p:pic>
+        <p:nvPicPr>
+          <p:cNvPr id="5" name="Image 0" descr="/home/user/Projeto-Python/.claude/skills/fiap-doc/assets/header-logo.png">    </p:cNvPr>
+          <p:cNvPicPr>
+            <a:picLocks noChangeAspect="1"/>
+          </p:cNvPicPr>
+          <p:nvPr/>
+        </p:nvPicPr>
+        <p:blipFill>
+          <a:blip r:embed="rId1"/>
+          <a:stretch>
+            <a:fillRect/>
+          </a:stretch>
+        </p:blipFill>
+        <p:spPr>
+          <a:xfrm>
+            <a:off x="10716768" y="402336"/>
+            <a:ext cx="896112" cy="422453"/>
+          </a:xfrm>
+          <a:prstGeom prst="rect">
+            <a:avLst/>
+          </a:prstGeom>
+        </p:spPr>
+      </p:pic>
+      <p:sp>
+        <p:nvSpPr>
+          <p:cNvPr id="6" name="Text 3"/>
           <p:cNvSpPr txBox="1"/>
           <p:nvPr/>
         </p:nvSpPr>
@@ -6599,11 +6767,11 @@
             <a:r>
               <a:rPr lang="en-US" sz="1400" i="1" dirty="0">
                 <a:solidFill>
-                  <a:srgbClr val="5A6B7B"/>
-                </a:solidFill>
-                <a:latin typeface="Calibri" pitchFamily="34" charset="0"/>
-                <a:ea typeface="Calibri" pitchFamily="34" charset="-122"/>
-                <a:cs typeface="Calibri" pitchFamily="34" charset="-120"/>
+                  <a:srgbClr val="6E6E6E"/>
+                </a:solidFill>
+                <a:latin typeface="Montserrat" pitchFamily="34" charset="0"/>
+                <a:ea typeface="Montserrat" pitchFamily="34" charset="-122"/>
+                <a:cs typeface="Montserrat" pitchFamily="34" charset="-120"/>
               </a:rPr>
               <a:t>Tema 1: as três fórmulas que usamos no trabalho</a:t>
             </a:r>
@@ -6613,7 +6781,7 @@
       </p:sp>
       <p:sp>
         <p:nvSpPr>
-          <p:cNvPr id="6" name="Shape 4"/>
+          <p:cNvPr id="7" name="Shape 4"/>
           <p:cNvSpPr/>
           <p:nvPr/>
         </p:nvSpPr>
@@ -6628,11 +6796,11 @@
             </a:avLst>
           </a:prstGeom>
           <a:solidFill>
-            <a:srgbClr val="EDF3F7"/>
+            <a:srgbClr val="F5F5F5"/>
           </a:solidFill>
           <a:ln w="12700">
             <a:solidFill>
-              <a:srgbClr val="EDF3F7"/>
+              <a:srgbClr val="F5F5F5"/>
             </a:solidFill>
             <a:prstDash val="solid"/>
           </a:ln>
@@ -6640,7 +6808,7 @@
       </p:sp>
       <p:sp>
         <p:nvSpPr>
-          <p:cNvPr id="7" name="Text 5"/>
+          <p:cNvPr id="8" name="Text 5"/>
           <p:cNvSpPr txBox="1"/>
           <p:nvPr/>
         </p:nvSpPr>
@@ -6665,11 +6833,11 @@
             <a:r>
               <a:rPr lang="en-US" sz="1700" b="1" dirty="0">
                 <a:solidFill>
-                  <a:srgbClr val="21295C"/>
-                </a:solidFill>
-                <a:latin typeface="Cambria" pitchFamily="34" charset="0"/>
-                <a:ea typeface="Cambria" pitchFamily="34" charset="-122"/>
-                <a:cs typeface="Cambria" pitchFamily="34" charset="-120"/>
+                  <a:srgbClr val="1A1A1A"/>
+                </a:solidFill>
+                <a:latin typeface="Montserrat" pitchFamily="34" charset="0"/>
+                <a:ea typeface="Montserrat" pitchFamily="34" charset="-122"/>
+                <a:cs typeface="Montserrat" pitchFamily="34" charset="-120"/>
               </a:rPr>
               <a:t>Probabilidade</a:t>
             </a:r>
@@ -6679,7 +6847,7 @@
       </p:sp>
       <p:sp>
         <p:nvSpPr>
-          <p:cNvPr id="8" name="Text 6"/>
+          <p:cNvPr id="9" name="Text 6"/>
           <p:cNvSpPr txBox="1"/>
           <p:nvPr/>
         </p:nvSpPr>
@@ -6704,7 +6872,7 @@
             <a:r>
               <a:rPr lang="en-US" sz="1450" b="1" dirty="0">
                 <a:solidFill>
-                  <a:srgbClr val="D1495B"/>
+                  <a:srgbClr val="ED1165"/>
                 </a:solidFill>
                 <a:latin typeface="Courier New" pitchFamily="34" charset="0"/>
                 <a:ea typeface="Courier New" pitchFamily="34" charset="-122"/>
@@ -6718,7 +6886,7 @@
       </p:sp>
       <p:sp>
         <p:nvSpPr>
-          <p:cNvPr id="9" name="Text 7"/>
+          <p:cNvPr id="10" name="Text 7"/>
           <p:cNvSpPr txBox="1"/>
           <p:nvPr/>
         </p:nvSpPr>
@@ -6743,11 +6911,11 @@
             <a:r>
               <a:rPr lang="en-US" sz="1250" dirty="0">
                 <a:solidFill>
-                  <a:srgbClr val="5A6B7B"/>
-                </a:solidFill>
-                <a:latin typeface="Calibri" pitchFamily="34" charset="0"/>
-                <a:ea typeface="Calibri" pitchFamily="34" charset="-122"/>
-                <a:cs typeface="Calibri" pitchFamily="34" charset="-120"/>
+                  <a:srgbClr val="6E6E6E"/>
+                </a:solidFill>
+                <a:latin typeface="Montserrat" pitchFamily="34" charset="0"/>
+                <a:ea typeface="Montserrat" pitchFamily="34" charset="-122"/>
+                <a:cs typeface="Montserrat" pitchFamily="34" charset="-120"/>
               </a:rPr>
               <a:t>Quantas vezes o evento aconteceu, dividido pelo total.</a:t>
             </a:r>
@@ -6757,7 +6925,7 @@
       </p:sp>
       <p:sp>
         <p:nvSpPr>
-          <p:cNvPr id="10" name="Text 8"/>
+          <p:cNvPr id="11" name="Text 8"/>
           <p:cNvSpPr txBox="1"/>
           <p:nvPr/>
         </p:nvSpPr>
@@ -6782,11 +6950,11 @@
             <a:r>
               <a:rPr lang="en-US" sz="1250" b="1" dirty="0">
                 <a:solidFill>
-                  <a:srgbClr val="1C7293"/>
-                </a:solidFill>
-                <a:latin typeface="Calibri" pitchFamily="34" charset="0"/>
-                <a:ea typeface="Calibri" pitchFamily="34" charset="-122"/>
-                <a:cs typeface="Calibri" pitchFamily="34" charset="-120"/>
+                  <a:srgbClr val="1A1A1A"/>
+                </a:solidFill>
+                <a:latin typeface="Montserrat" pitchFamily="34" charset="0"/>
+                <a:ea typeface="Montserrat" pitchFamily="34" charset="-122"/>
+                <a:cs typeface="Montserrat" pitchFamily="34" charset="-120"/>
               </a:rPr>
               <a:t>Exemplo: </a:t>
             </a:r>
@@ -6796,11 +6964,11 @@
             <a:r>
               <a:rPr lang="en-US" sz="1250" dirty="0">
                 <a:solidFill>
-                  <a:srgbClr val="1B2A3A"/>
-                </a:solidFill>
-                <a:latin typeface="Calibri" pitchFamily="34" charset="0"/>
-                <a:ea typeface="Calibri" pitchFamily="34" charset="-122"/>
-                <a:cs typeface="Calibri" pitchFamily="34" charset="-120"/>
+                  <a:srgbClr val="333333"/>
+                </a:solidFill>
+                <a:latin typeface="Montserrat" pitchFamily="34" charset="0"/>
+                <a:ea typeface="Montserrat" pitchFamily="34" charset="-122"/>
+                <a:cs typeface="Montserrat" pitchFamily="34" charset="-120"/>
               </a:rPr>
               <a:t>Num dado comum, a chance de sair 6 é 1 em 6, ou seja, 16,7%.</a:t>
             </a:r>
@@ -6810,7 +6978,7 @@
       </p:sp>
       <p:sp>
         <p:nvSpPr>
-          <p:cNvPr id="11" name="Shape 9"/>
+          <p:cNvPr id="12" name="Shape 9"/>
           <p:cNvSpPr/>
           <p:nvPr/>
         </p:nvSpPr>
@@ -6825,11 +6993,11 @@
             </a:avLst>
           </a:prstGeom>
           <a:solidFill>
-            <a:srgbClr val="EDF3F7"/>
+            <a:srgbClr val="F5F5F5"/>
           </a:solidFill>
           <a:ln w="12700">
             <a:solidFill>
-              <a:srgbClr val="EDF3F7"/>
+              <a:srgbClr val="F5F5F5"/>
             </a:solidFill>
             <a:prstDash val="solid"/>
           </a:ln>
@@ -6837,7 +7005,7 @@
       </p:sp>
       <p:sp>
         <p:nvSpPr>
-          <p:cNvPr id="12" name="Text 10"/>
+          <p:cNvPr id="13" name="Text 10"/>
           <p:cNvSpPr txBox="1"/>
           <p:nvPr/>
         </p:nvSpPr>
@@ -6862,11 +7030,11 @@
             <a:r>
               <a:rPr lang="en-US" sz="1700" b="1" dirty="0">
                 <a:solidFill>
-                  <a:srgbClr val="21295C"/>
-                </a:solidFill>
-                <a:latin typeface="Cambria" pitchFamily="34" charset="0"/>
-                <a:ea typeface="Cambria" pitchFamily="34" charset="-122"/>
-                <a:cs typeface="Cambria" pitchFamily="34" charset="-120"/>
+                  <a:srgbClr val="1A1A1A"/>
+                </a:solidFill>
+                <a:latin typeface="Montserrat" pitchFamily="34" charset="0"/>
+                <a:ea typeface="Montserrat" pitchFamily="34" charset="-122"/>
+                <a:cs typeface="Montserrat" pitchFamily="34" charset="-120"/>
               </a:rPr>
               <a:t>Probabilidade condicional</a:t>
             </a:r>
@@ -6876,7 +7044,7 @@
       </p:sp>
       <p:sp>
         <p:nvSpPr>
-          <p:cNvPr id="13" name="Text 11"/>
+          <p:cNvPr id="14" name="Text 11"/>
           <p:cNvSpPr txBox="1"/>
           <p:nvPr/>
         </p:nvSpPr>
@@ -6901,7 +7069,7 @@
             <a:r>
               <a:rPr lang="en-US" sz="1450" b="1" dirty="0">
                 <a:solidFill>
-                  <a:srgbClr val="D1495B"/>
+                  <a:srgbClr val="ED1165"/>
                 </a:solidFill>
                 <a:latin typeface="Courier New" pitchFamily="34" charset="0"/>
                 <a:ea typeface="Courier New" pitchFamily="34" charset="-122"/>
@@ -6915,7 +7083,7 @@
       </p:sp>
       <p:sp>
         <p:nvSpPr>
-          <p:cNvPr id="14" name="Text 12"/>
+          <p:cNvPr id="15" name="Text 12"/>
           <p:cNvSpPr txBox="1"/>
           <p:nvPr/>
         </p:nvSpPr>
@@ -6940,11 +7108,11 @@
             <a:r>
               <a:rPr lang="en-US" sz="1250" dirty="0">
                 <a:solidFill>
-                  <a:srgbClr val="5A6B7B"/>
-                </a:solidFill>
-                <a:latin typeface="Calibri" pitchFamily="34" charset="0"/>
-                <a:ea typeface="Calibri" pitchFamily="34" charset="-122"/>
-                <a:cs typeface="Calibri" pitchFamily="34" charset="-120"/>
+                  <a:srgbClr val="6E6E6E"/>
+                </a:solidFill>
+                <a:latin typeface="Montserrat" pitchFamily="34" charset="0"/>
+                <a:ea typeface="Montserrat" pitchFamily="34" charset="-122"/>
+                <a:cs typeface="Montserrat" pitchFamily="34" charset="-120"/>
               </a:rPr>
               <a:t>A chance de algo acontecer quando já sabemos que outra coisa aconteceu.</a:t>
             </a:r>
@@ -6954,7 +7122,7 @@
       </p:sp>
       <p:sp>
         <p:nvSpPr>
-          <p:cNvPr id="15" name="Text 13"/>
+          <p:cNvPr id="16" name="Text 13"/>
           <p:cNvSpPr txBox="1"/>
           <p:nvPr/>
         </p:nvSpPr>
@@ -6979,11 +7147,11 @@
             <a:r>
               <a:rPr lang="en-US" sz="1250" b="1" dirty="0">
                 <a:solidFill>
-                  <a:srgbClr val="1C7293"/>
-                </a:solidFill>
-                <a:latin typeface="Calibri" pitchFamily="34" charset="0"/>
-                <a:ea typeface="Calibri" pitchFamily="34" charset="-122"/>
-                <a:cs typeface="Calibri" pitchFamily="34" charset="-120"/>
+                  <a:srgbClr val="1A1A1A"/>
+                </a:solidFill>
+                <a:latin typeface="Montserrat" pitchFamily="34" charset="0"/>
+                <a:ea typeface="Montserrat" pitchFamily="34" charset="-122"/>
+                <a:cs typeface="Montserrat" pitchFamily="34" charset="-120"/>
               </a:rPr>
               <a:t>Exemplo: </a:t>
             </a:r>
@@ -6993,11 +7161,11 @@
             <a:r>
               <a:rPr lang="en-US" sz="1250" dirty="0">
                 <a:solidFill>
-                  <a:srgbClr val="1B2A3A"/>
-                </a:solidFill>
-                <a:latin typeface="Calibri" pitchFamily="34" charset="0"/>
-                <a:ea typeface="Calibri" pitchFamily="34" charset="-122"/>
-                <a:cs typeface="Calibri" pitchFamily="34" charset="-120"/>
+                  <a:srgbClr val="333333"/>
+                </a:solidFill>
+                <a:latin typeface="Montserrat" pitchFamily="34" charset="0"/>
+                <a:ea typeface="Montserrat" pitchFamily="34" charset="-122"/>
+                <a:cs typeface="Montserrat" pitchFamily="34" charset="-120"/>
               </a:rPr>
               <a:t>Se alguém já disse que saiu número par, a chance de ser 6 sobe para 1 em 3.</a:t>
             </a:r>
@@ -7007,7 +7175,7 @@
       </p:sp>
       <p:sp>
         <p:nvSpPr>
-          <p:cNvPr id="16" name="Shape 14"/>
+          <p:cNvPr id="17" name="Shape 14"/>
           <p:cNvSpPr/>
           <p:nvPr/>
         </p:nvSpPr>
@@ -7022,11 +7190,11 @@
             </a:avLst>
           </a:prstGeom>
           <a:solidFill>
-            <a:srgbClr val="EDF3F7"/>
+            <a:srgbClr val="F5F5F5"/>
           </a:solidFill>
           <a:ln w="12700">
             <a:solidFill>
-              <a:srgbClr val="EDF3F7"/>
+              <a:srgbClr val="F5F5F5"/>
             </a:solidFill>
             <a:prstDash val="solid"/>
           </a:ln>
@@ -7034,7 +7202,7 @@
       </p:sp>
       <p:sp>
         <p:nvSpPr>
-          <p:cNvPr id="17" name="Text 15"/>
+          <p:cNvPr id="18" name="Text 15"/>
           <p:cNvSpPr txBox="1"/>
           <p:nvPr/>
         </p:nvSpPr>
@@ -7059,11 +7227,11 @@
             <a:r>
               <a:rPr lang="en-US" sz="1700" b="1" dirty="0">
                 <a:solidFill>
-                  <a:srgbClr val="21295C"/>
-                </a:solidFill>
-                <a:latin typeface="Cambria" pitchFamily="34" charset="0"/>
-                <a:ea typeface="Cambria" pitchFamily="34" charset="-122"/>
-                <a:cs typeface="Cambria" pitchFamily="34" charset="-120"/>
+                  <a:srgbClr val="1A1A1A"/>
+                </a:solidFill>
+                <a:latin typeface="Montserrat" pitchFamily="34" charset="0"/>
+                <a:ea typeface="Montserrat" pitchFamily="34" charset="-122"/>
+                <a:cs typeface="Montserrat" pitchFamily="34" charset="-120"/>
               </a:rPr>
               <a:t>Teorema de Bayes</a:t>
             </a:r>
@@ -7073,7 +7241,7 @@
       </p:sp>
       <p:sp>
         <p:nvSpPr>
-          <p:cNvPr id="18" name="Text 16"/>
+          <p:cNvPr id="19" name="Text 16"/>
           <p:cNvSpPr txBox="1"/>
           <p:nvPr/>
         </p:nvSpPr>
@@ -7098,7 +7266,7 @@
             <a:r>
               <a:rPr lang="en-US" sz="1450" b="1" dirty="0">
                 <a:solidFill>
-                  <a:srgbClr val="D1495B"/>
+                  <a:srgbClr val="ED1165"/>
                 </a:solidFill>
                 <a:latin typeface="Courier New" pitchFamily="34" charset="0"/>
                 <a:ea typeface="Courier New" pitchFamily="34" charset="-122"/>
@@ -7112,7 +7280,7 @@
       </p:sp>
       <p:sp>
         <p:nvSpPr>
-          <p:cNvPr id="19" name="Text 17"/>
+          <p:cNvPr id="20" name="Text 17"/>
           <p:cNvSpPr txBox="1"/>
           <p:nvPr/>
         </p:nvSpPr>
@@ -7137,11 +7305,11 @@
             <a:r>
               <a:rPr lang="en-US" sz="1250" dirty="0">
                 <a:solidFill>
-                  <a:srgbClr val="5A6B7B"/>
-                </a:solidFill>
-                <a:latin typeface="Calibri" pitchFamily="34" charset="0"/>
-                <a:ea typeface="Calibri" pitchFamily="34" charset="-122"/>
-                <a:cs typeface="Calibri" pitchFamily="34" charset="-120"/>
+                  <a:srgbClr val="6E6E6E"/>
+                </a:solidFill>
+                <a:latin typeface="Montserrat" pitchFamily="34" charset="0"/>
+                <a:ea typeface="Montserrat" pitchFamily="34" charset="-122"/>
+                <a:cs typeface="Montserrat" pitchFamily="34" charset="-120"/>
               </a:rPr>
               <a:t>Vira a pergunta do avesso: a partir do resultado, descobre a causa provável.</a:t>
             </a:r>
@@ -7151,7 +7319,7 @@
       </p:sp>
       <p:sp>
         <p:nvSpPr>
-          <p:cNvPr id="20" name="Text 18"/>
+          <p:cNvPr id="21" name="Text 18"/>
           <p:cNvSpPr txBox="1"/>
           <p:nvPr/>
         </p:nvSpPr>
@@ -7176,11 +7344,11 @@
             <a:r>
               <a:rPr lang="en-US" sz="1250" b="1" dirty="0">
                 <a:solidFill>
-                  <a:srgbClr val="1C7293"/>
-                </a:solidFill>
-                <a:latin typeface="Calibri" pitchFamily="34" charset="0"/>
-                <a:ea typeface="Calibri" pitchFamily="34" charset="-122"/>
-                <a:cs typeface="Calibri" pitchFamily="34" charset="-120"/>
+                  <a:srgbClr val="1A1A1A"/>
+                </a:solidFill>
+                <a:latin typeface="Montserrat" pitchFamily="34" charset="0"/>
+                <a:ea typeface="Montserrat" pitchFamily="34" charset="-122"/>
+                <a:cs typeface="Montserrat" pitchFamily="34" charset="-120"/>
               </a:rPr>
               <a:t>Exemplo: </a:t>
             </a:r>
@@ -7190,11 +7358,11 @@
             <a:r>
               <a:rPr lang="en-US" sz="1250" dirty="0">
                 <a:solidFill>
-                  <a:srgbClr val="1B2A3A"/>
-                </a:solidFill>
-                <a:latin typeface="Calibri" pitchFamily="34" charset="0"/>
-                <a:ea typeface="Calibri" pitchFamily="34" charset="-122"/>
-                <a:cs typeface="Calibri" pitchFamily="34" charset="-120"/>
+                  <a:srgbClr val="333333"/>
+                </a:solidFill>
+                <a:latin typeface="Montserrat" pitchFamily="34" charset="0"/>
+                <a:ea typeface="Montserrat" pitchFamily="34" charset="-122"/>
+                <a:cs typeface="Montserrat" pitchFamily="34" charset="-120"/>
               </a:rPr>
               <a:t>O médico vê a febre e calcula qual doença é a causa mais provável.</a:t>
             </a:r>
@@ -7204,7 +7372,7 @@
       </p:sp>
       <p:sp>
         <p:nvSpPr>
-          <p:cNvPr id="21" name="Shape 19"/>
+          <p:cNvPr id="22" name="Shape 19"/>
           <p:cNvSpPr/>
           <p:nvPr/>
         </p:nvSpPr>
@@ -7219,11 +7387,11 @@
             </a:avLst>
           </a:prstGeom>
           <a:solidFill>
-            <a:srgbClr val="21295C"/>
+            <a:srgbClr val="1A1A1A"/>
           </a:solidFill>
           <a:ln w="12700">
             <a:solidFill>
-              <a:srgbClr val="21295C"/>
+              <a:srgbClr val="1A1A1A"/>
             </a:solidFill>
             <a:prstDash val="solid"/>
           </a:ln>
@@ -7231,7 +7399,7 @@
       </p:sp>
       <p:sp>
         <p:nvSpPr>
-          <p:cNvPr id="22" name="Text 20"/>
+          <p:cNvPr id="23" name="Text 20"/>
           <p:cNvSpPr txBox="1"/>
           <p:nvPr/>
         </p:nvSpPr>
@@ -7256,11 +7424,11 @@
             <a:r>
               <a:rPr lang="en-US" sz="1050" b="1" spc="120" kern="0" dirty="0">
                 <a:solidFill>
-                  <a:srgbClr val="9EC6DC"/>
-                </a:solidFill>
-                <a:latin typeface="Calibri" pitchFamily="34" charset="0"/>
-                <a:ea typeface="Calibri" pitchFamily="34" charset="-122"/>
-                <a:cs typeface="Calibri" pitchFamily="34" charset="-120"/>
+                  <a:srgbClr val="F0A8C4"/>
+                </a:solidFill>
+                <a:latin typeface="Montserrat" pitchFamily="34" charset="0"/>
+                <a:ea typeface="Montserrat" pitchFamily="34" charset="-122"/>
+                <a:cs typeface="Montserrat" pitchFamily="34" charset="-120"/>
               </a:rPr>
               <a:t>REGRAS BÁSICAS</a:t>
             </a:r>
@@ -7270,7 +7438,7 @@
       </p:sp>
       <p:sp>
         <p:nvSpPr>
-          <p:cNvPr id="23" name="Text 21"/>
+          <p:cNvPr id="24" name="Text 21"/>
           <p:cNvSpPr txBox="1"/>
           <p:nvPr/>
         </p:nvSpPr>
@@ -7300,9 +7468,9 @@
                 <a:solidFill>
                   <a:srgbClr val="FFFFFF"/>
                 </a:solidFill>
-                <a:latin typeface="Calibri" pitchFamily="34" charset="0"/>
-                <a:ea typeface="Calibri" pitchFamily="34" charset="-122"/>
-                <a:cs typeface="Calibri" pitchFamily="34" charset="-120"/>
+                <a:latin typeface="Montserrat" pitchFamily="34" charset="0"/>
+                <a:ea typeface="Montserrat" pitchFamily="34" charset="-122"/>
+                <a:cs typeface="Montserrat" pitchFamily="34" charset="-120"/>
               </a:rPr>
               <a:t>Toda chance fica entre 0 e 1 (0% e 100%)</a:t>
             </a:r>
@@ -7320,9 +7488,9 @@
                 <a:solidFill>
                   <a:srgbClr val="FFFFFF"/>
                 </a:solidFill>
-                <a:latin typeface="Calibri" pitchFamily="34" charset="0"/>
-                <a:ea typeface="Calibri" pitchFamily="34" charset="-122"/>
-                <a:cs typeface="Calibri" pitchFamily="34" charset="-120"/>
+                <a:latin typeface="Montserrat" pitchFamily="34" charset="0"/>
+                <a:ea typeface="Montserrat" pitchFamily="34" charset="-122"/>
+                <a:cs typeface="Montserrat" pitchFamily="34" charset="-120"/>
               </a:rPr>
               <a:t>A soma de todas as possibilidades dá 1</a:t>
             </a:r>
@@ -7340,9 +7508,9 @@
                 <a:solidFill>
                   <a:srgbClr val="FFFFFF"/>
                 </a:solidFill>
-                <a:latin typeface="Calibri" pitchFamily="34" charset="0"/>
-                <a:ea typeface="Calibri" pitchFamily="34" charset="-122"/>
-                <a:cs typeface="Calibri" pitchFamily="34" charset="-120"/>
+                <a:latin typeface="Montserrat" pitchFamily="34" charset="0"/>
+                <a:ea typeface="Montserrat" pitchFamily="34" charset="-122"/>
+                <a:cs typeface="Montserrat" pitchFamily="34" charset="-120"/>
               </a:rPr>
               <a:t>Se A e B não acontecem juntos, somam-se as chances</a:t>
             </a:r>
@@ -7352,7 +7520,7 @@
       </p:sp>
       <p:sp>
         <p:nvSpPr>
-          <p:cNvPr id="24" name="Text 22"/>
+          <p:cNvPr id="25" name="Text 22"/>
           <p:cNvSpPr txBox="1"/>
           <p:nvPr/>
         </p:nvSpPr>
@@ -7377,11 +7545,11 @@
             <a:r>
               <a:rPr lang="en-US" sz="1700" b="1" dirty="0">
                 <a:solidFill>
-                  <a:srgbClr val="21295C"/>
-                </a:solidFill>
-                <a:latin typeface="Cambria" pitchFamily="34" charset="0"/>
-                <a:ea typeface="Cambria" pitchFamily="34" charset="-122"/>
-                <a:cs typeface="Cambria" pitchFamily="34" charset="-120"/>
+                  <a:srgbClr val="1A1A1A"/>
+                </a:solidFill>
+                <a:latin typeface="Montserrat" pitchFamily="34" charset="0"/>
+                <a:ea typeface="Montserrat" pitchFamily="34" charset="-122"/>
+                <a:cs typeface="Montserrat" pitchFamily="34" charset="-120"/>
               </a:rPr>
               <a:t>Onde isso é usado</a:t>
             </a:r>
@@ -7391,7 +7559,7 @@
       </p:sp>
       <p:sp>
         <p:nvSpPr>
-          <p:cNvPr id="25" name="Text 23"/>
+          <p:cNvPr id="26" name="Text 23"/>
           <p:cNvSpPr txBox="1"/>
           <p:nvPr/>
         </p:nvSpPr>
@@ -7423,11 +7591,11 @@
             <a:r>
               <a:rPr lang="en-US" sz="1350" dirty="0">
                 <a:solidFill>
-                  <a:srgbClr val="1B2A3A"/>
-                </a:solidFill>
-                <a:latin typeface="Calibri" pitchFamily="34" charset="0"/>
-                <a:ea typeface="Calibri" pitchFamily="34" charset="-122"/>
-                <a:cs typeface="Calibri" pitchFamily="34" charset="-120"/>
+                  <a:srgbClr val="333333"/>
+                </a:solidFill>
+                <a:latin typeface="Montserrat" pitchFamily="34" charset="0"/>
+                <a:ea typeface="Montserrat" pitchFamily="34" charset="-122"/>
+                <a:cs typeface="Montserrat" pitchFamily="34" charset="-120"/>
               </a:rPr>
               <a:t>Aplicativo que avisa se vai chover hoje</a:t>
             </a:r>
@@ -7447,11 +7615,11 @@
             <a:r>
               <a:rPr lang="en-US" sz="1350" dirty="0">
                 <a:solidFill>
-                  <a:srgbClr val="1B2A3A"/>
-                </a:solidFill>
-                <a:latin typeface="Calibri" pitchFamily="34" charset="0"/>
-                <a:ea typeface="Calibri" pitchFamily="34" charset="-122"/>
-                <a:cs typeface="Calibri" pitchFamily="34" charset="-120"/>
+                  <a:srgbClr val="333333"/>
+                </a:solidFill>
+                <a:latin typeface="Montserrat" pitchFamily="34" charset="0"/>
+                <a:ea typeface="Montserrat" pitchFamily="34" charset="-122"/>
+                <a:cs typeface="Montserrat" pitchFamily="34" charset="-120"/>
               </a:rPr>
               <a:t>Filtro que separa e-mail de spam</a:t>
             </a:r>
@@ -7471,11 +7639,11 @@
             <a:r>
               <a:rPr lang="en-US" sz="1350" dirty="0">
                 <a:solidFill>
-                  <a:srgbClr val="1B2A3A"/>
-                </a:solidFill>
-                <a:latin typeface="Calibri" pitchFamily="34" charset="0"/>
-                <a:ea typeface="Calibri" pitchFamily="34" charset="-122"/>
-                <a:cs typeface="Calibri" pitchFamily="34" charset="-120"/>
+                  <a:srgbClr val="333333"/>
+                </a:solidFill>
+                <a:latin typeface="Montserrat" pitchFamily="34" charset="0"/>
+                <a:ea typeface="Montserrat" pitchFamily="34" charset="-122"/>
+                <a:cs typeface="Montserrat" pitchFamily="34" charset="-120"/>
               </a:rPr>
               <a:t>Banco que avalia risco de um empréstimo</a:t>
             </a:r>
@@ -7495,11 +7663,11 @@
             <a:r>
               <a:rPr lang="en-US" sz="1350" dirty="0">
                 <a:solidFill>
-                  <a:srgbClr val="1B2A3A"/>
-                </a:solidFill>
-                <a:latin typeface="Calibri" pitchFamily="34" charset="0"/>
-                <a:ea typeface="Calibri" pitchFamily="34" charset="-122"/>
-                <a:cs typeface="Calibri" pitchFamily="34" charset="-120"/>
+                  <a:srgbClr val="333333"/>
+                </a:solidFill>
+                <a:latin typeface="Montserrat" pitchFamily="34" charset="0"/>
+                <a:ea typeface="Montserrat" pitchFamily="34" charset="-122"/>
+                <a:cs typeface="Montserrat" pitchFamily="34" charset="-120"/>
               </a:rPr>
               <a:t>Netflix e YouTube sugerindo o próximo vídeo</a:t>
             </a:r>
@@ -7554,7 +7722,7 @@
             <a:avLst/>
           </a:prstGeom>
           <a:solidFill>
-            <a:srgbClr val="1C7293"/>
+            <a:srgbClr val="1A1A1A"/>
           </a:solidFill>
           <a:ln/>
         </p:spPr>
@@ -7588,9 +7756,9 @@
                 <a:solidFill>
                   <a:srgbClr val="FFFFFF"/>
                 </a:solidFill>
-                <a:latin typeface="Cambria" pitchFamily="34" charset="0"/>
-                <a:ea typeface="Cambria" pitchFamily="34" charset="-122"/>
-                <a:cs typeface="Cambria" pitchFamily="34" charset="-120"/>
+                <a:latin typeface="Montserrat" pitchFamily="34" charset="0"/>
+                <a:ea typeface="Montserrat" pitchFamily="34" charset="-122"/>
+                <a:cs typeface="Montserrat" pitchFamily="34" charset="-120"/>
               </a:rPr>
               <a:t>3</a:t>
             </a:r>
@@ -7607,7 +7775,7 @@
         <p:spPr>
           <a:xfrm>
             <a:off x="1298448" y="329184"/>
-            <a:ext cx="10332720" cy="658368"/>
+            <a:ext cx="9235440" cy="658368"/>
           </a:xfrm>
           <a:prstGeom prst="rect">
             <a:avLst/>
@@ -7625,11 +7793,11 @@
             <a:r>
               <a:rPr lang="en-US" sz="3000" b="1" dirty="0">
                 <a:solidFill>
-                  <a:srgbClr val="21295C"/>
-                </a:solidFill>
-                <a:latin typeface="Cambria" pitchFamily="34" charset="0"/>
-                <a:ea typeface="Cambria" pitchFamily="34" charset="-122"/>
-                <a:cs typeface="Cambria" pitchFamily="34" charset="-120"/>
+                  <a:srgbClr val="1A1A1A"/>
+                </a:solidFill>
+                <a:latin typeface="Montserrat" pitchFamily="34" charset="0"/>
+                <a:ea typeface="Montserrat" pitchFamily="34" charset="-122"/>
+                <a:cs typeface="Montserrat" pitchFamily="34" charset="-120"/>
               </a:rPr>
               <a:t>A base de dados: números pseudoaleatórios</a:t>
             </a:r>
@@ -7637,9 +7805,33 @@
           </a:p>
         </p:txBody>
       </p:sp>
-      <p:sp>
-        <p:nvSpPr>
-          <p:cNvPr id="5" name="Text 3"/>
+      <p:pic>
+        <p:nvPicPr>
+          <p:cNvPr id="5" name="Image 0" descr="/home/user/Projeto-Python/.claude/skills/fiap-doc/assets/header-logo.png">    </p:cNvPr>
+          <p:cNvPicPr>
+            <a:picLocks noChangeAspect="1"/>
+          </p:cNvPicPr>
+          <p:nvPr/>
+        </p:nvPicPr>
+        <p:blipFill>
+          <a:blip r:embed="rId1"/>
+          <a:stretch>
+            <a:fillRect/>
+          </a:stretch>
+        </p:blipFill>
+        <p:spPr>
+          <a:xfrm>
+            <a:off x="10716768" y="402336"/>
+            <a:ext cx="896112" cy="422453"/>
+          </a:xfrm>
+          <a:prstGeom prst="rect">
+            <a:avLst/>
+          </a:prstGeom>
+        </p:spPr>
+      </p:pic>
+      <p:sp>
+        <p:nvSpPr>
+          <p:cNvPr id="6" name="Text 3"/>
           <p:cNvSpPr txBox="1"/>
           <p:nvPr/>
         </p:nvSpPr>
@@ -7664,11 +7856,11 @@
             <a:r>
               <a:rPr lang="en-US" sz="1400" i="1" dirty="0">
                 <a:solidFill>
-                  <a:srgbClr val="5A6B7B"/>
-                </a:solidFill>
-                <a:latin typeface="Calibri" pitchFamily="34" charset="0"/>
-                <a:ea typeface="Calibri" pitchFamily="34" charset="-122"/>
-                <a:cs typeface="Calibri" pitchFamily="34" charset="-120"/>
+                  <a:srgbClr val="6E6E6E"/>
+                </a:solidFill>
+                <a:latin typeface="Montserrat" pitchFamily="34" charset="0"/>
+                <a:ea typeface="Montserrat" pitchFamily="34" charset="-122"/>
+                <a:cs typeface="Montserrat" pitchFamily="34" charset="-120"/>
               </a:rPr>
               <a:t>Mil entregas criadas pelo próprio programa</a:t>
             </a:r>
@@ -7678,7 +7870,7 @@
       </p:sp>
       <p:sp>
         <p:nvSpPr>
-          <p:cNvPr id="6" name="Text 4"/>
+          <p:cNvPr id="7" name="Text 4"/>
           <p:cNvSpPr txBox="1"/>
           <p:nvPr/>
         </p:nvSpPr>
@@ -7706,11 +7898,11 @@
             <a:r>
               <a:rPr lang="en-US" sz="1400" dirty="0">
                 <a:solidFill>
-                  <a:srgbClr val="1B2A3A"/>
-                </a:solidFill>
-                <a:latin typeface="Calibri" pitchFamily="34" charset="0"/>
-                <a:ea typeface="Calibri" pitchFamily="34" charset="-122"/>
-                <a:cs typeface="Calibri" pitchFamily="34" charset="-120"/>
+                  <a:srgbClr val="333333"/>
+                </a:solidFill>
+                <a:latin typeface="Montserrat" pitchFamily="34" charset="0"/>
+                <a:ea typeface="Montserrat" pitchFamily="34" charset="-122"/>
+                <a:cs typeface="Montserrat" pitchFamily="34" charset="-120"/>
               </a:rPr>
               <a:t>O computador não sorteia de verdade. Ele segue uma conta que parte de um número inicial, a semente, e devolve valores que parecem sorteados. Como a semente está fixa em 42, rodar o código hoje ou amanhã dá exatamente o mesmo resultado.</a:t>
             </a:r>
@@ -7720,7 +7912,7 @@
       </p:sp>
       <p:sp>
         <p:nvSpPr>
-          <p:cNvPr id="7" name="Shape 5"/>
+          <p:cNvPr id="8" name="Shape 5"/>
           <p:cNvSpPr/>
           <p:nvPr/>
         </p:nvSpPr>
@@ -7735,11 +7927,11 @@
             </a:avLst>
           </a:prstGeom>
           <a:solidFill>
-            <a:srgbClr val="0E2233"/>
+            <a:srgbClr val="1A1A1A"/>
           </a:solidFill>
           <a:ln w="12700">
             <a:solidFill>
-              <a:srgbClr val="0E2233"/>
+              <a:srgbClr val="1A1A1A"/>
             </a:solidFill>
             <a:prstDash val="solid"/>
           </a:ln>
@@ -7747,7 +7939,7 @@
       </p:sp>
       <p:sp>
         <p:nvSpPr>
-          <p:cNvPr id="8" name="Text 6"/>
+          <p:cNvPr id="9" name="Text 6"/>
           <p:cNvSpPr txBox="1"/>
           <p:nvPr/>
         </p:nvSpPr>
@@ -7772,7 +7964,7 @@
             <a:r>
               <a:rPr lang="en-US" sz="1150" dirty="0">
                 <a:solidFill>
-                  <a:srgbClr val="DCE9F2"/>
+                  <a:srgbClr val="EDEDED"/>
                 </a:solidFill>
                 <a:latin typeface="Courier New" pitchFamily="34" charset="0"/>
                 <a:ea typeface="Courier New" pitchFamily="34" charset="-122"/>
@@ -7795,7 +7987,7 @@
             <a:r>
               <a:rPr lang="en-US" sz="1150" dirty="0">
                 <a:solidFill>
-                  <a:srgbClr val="DCE9F2"/>
+                  <a:srgbClr val="EDEDED"/>
                 </a:solidFill>
                 <a:latin typeface="Courier New" pitchFamily="34" charset="0"/>
                 <a:ea typeface="Courier New" pitchFamily="34" charset="-122"/>
@@ -7812,7 +8004,7 @@
             <a:r>
               <a:rPr lang="en-US" sz="1150" dirty="0">
                 <a:solidFill>
-                  <a:srgbClr val="DCE9F2"/>
+                  <a:srgbClr val="EDEDED"/>
                 </a:solidFill>
                 <a:latin typeface="Courier New" pitchFamily="34" charset="0"/>
                 <a:ea typeface="Courier New" pitchFamily="34" charset="-122"/>
@@ -7829,7 +8021,7 @@
             <a:r>
               <a:rPr lang="en-US" sz="1150" dirty="0">
                 <a:solidFill>
-                  <a:srgbClr val="DCE9F2"/>
+                  <a:srgbClr val="EDEDED"/>
                 </a:solidFill>
                 <a:latin typeface="Courier New" pitchFamily="34" charset="0"/>
                 <a:ea typeface="Courier New" pitchFamily="34" charset="-122"/>
@@ -7852,7 +8044,7 @@
             <a:r>
               <a:rPr lang="en-US" sz="1150" dirty="0">
                 <a:solidFill>
-                  <a:srgbClr val="DCE9F2"/>
+                  <a:srgbClr val="EDEDED"/>
                 </a:solidFill>
                 <a:latin typeface="Courier New" pitchFamily="34" charset="0"/>
                 <a:ea typeface="Courier New" pitchFamily="34" charset="-122"/>
@@ -7869,7 +8061,7 @@
             <a:r>
               <a:rPr lang="en-US" sz="1150" dirty="0">
                 <a:solidFill>
-                  <a:srgbClr val="DCE9F2"/>
+                  <a:srgbClr val="EDEDED"/>
                 </a:solidFill>
                 <a:latin typeface="Courier New" pitchFamily="34" charset="0"/>
                 <a:ea typeface="Courier New" pitchFamily="34" charset="-122"/>
@@ -7892,7 +8084,7 @@
             <a:r>
               <a:rPr lang="en-US" sz="1150" dirty="0">
                 <a:solidFill>
-                  <a:srgbClr val="DCE9F2"/>
+                  <a:srgbClr val="EDEDED"/>
                 </a:solidFill>
                 <a:latin typeface="Courier New" pitchFamily="34" charset="0"/>
                 <a:ea typeface="Courier New" pitchFamily="34" charset="-122"/>
@@ -7906,7 +8098,7 @@
       </p:sp>
       <p:sp>
         <p:nvSpPr>
-          <p:cNvPr id="9" name="Text 7"/>
+          <p:cNvPr id="10" name="Text 7"/>
           <p:cNvSpPr txBox="1"/>
           <p:nvPr/>
         </p:nvSpPr>
@@ -7931,11 +8123,11 @@
             <a:r>
               <a:rPr lang="en-US" sz="1500" b="1" dirty="0">
                 <a:solidFill>
-                  <a:srgbClr val="21295C"/>
-                </a:solidFill>
-                <a:latin typeface="Cambria" pitchFamily="34" charset="0"/>
-                <a:ea typeface="Cambria" pitchFamily="34" charset="-122"/>
-                <a:cs typeface="Cambria" pitchFamily="34" charset="-120"/>
+                  <a:srgbClr val="1A1A1A"/>
+                </a:solidFill>
+                <a:latin typeface="Montserrat" pitchFamily="34" charset="0"/>
+                <a:ea typeface="Montserrat" pitchFamily="34" charset="-122"/>
+                <a:cs typeface="Montserrat" pitchFamily="34" charset="-120"/>
               </a:rPr>
               <a:t>Parece sorteio, mas é repetível</a:t>
             </a:r>
@@ -7945,7 +8137,7 @@
       </p:sp>
       <p:sp>
         <p:nvSpPr>
-          <p:cNvPr id="10" name="Text 8"/>
+          <p:cNvPr id="11" name="Text 8"/>
           <p:cNvSpPr txBox="1"/>
           <p:nvPr/>
         </p:nvSpPr>
@@ -7970,11 +8162,11 @@
             <a:r>
               <a:rPr lang="en-US" sz="1250" dirty="0">
                 <a:solidFill>
-                  <a:srgbClr val="5A6B7B"/>
-                </a:solidFill>
-                <a:latin typeface="Calibri" pitchFamily="34" charset="0"/>
-                <a:ea typeface="Calibri" pitchFamily="34" charset="-122"/>
-                <a:cs typeface="Calibri" pitchFamily="34" charset="-120"/>
+                  <a:srgbClr val="6E6E6E"/>
+                </a:solidFill>
+                <a:latin typeface="Montserrat" pitchFamily="34" charset="0"/>
+                <a:ea typeface="Montserrat" pitchFamily="34" charset="-122"/>
+                <a:cs typeface="Montserrat" pitchFamily="34" charset="-120"/>
               </a:rPr>
               <a:t>É como um baralho embaralhado sempre da mesma forma: o resultado parece sorteado, mas qualquer pessoa consegue repetir o mesmo embaralhamento e conferir nossas contas.</a:t>
             </a:r>
@@ -7984,7 +8176,7 @@
       </p:sp>
       <p:sp>
         <p:nvSpPr>
-          <p:cNvPr id="11" name="Shape 9"/>
+          <p:cNvPr id="12" name="Shape 9"/>
           <p:cNvSpPr/>
           <p:nvPr/>
         </p:nvSpPr>
@@ -7999,11 +8191,11 @@
             </a:avLst>
           </a:prstGeom>
           <a:solidFill>
-            <a:srgbClr val="EDF3F7"/>
+            <a:srgbClr val="F5F5F5"/>
           </a:solidFill>
           <a:ln w="12700">
             <a:solidFill>
-              <a:srgbClr val="EDF3F7"/>
+              <a:srgbClr val="F5F5F5"/>
             </a:solidFill>
             <a:prstDash val="solid"/>
           </a:ln>
@@ -8011,7 +8203,7 @@
       </p:sp>
       <p:sp>
         <p:nvSpPr>
-          <p:cNvPr id="12" name="Text 10"/>
+          <p:cNvPr id="13" name="Text 10"/>
           <p:cNvSpPr txBox="1"/>
           <p:nvPr/>
         </p:nvSpPr>
@@ -8036,11 +8228,11 @@
             <a:r>
               <a:rPr lang="en-US" sz="3400" b="1" dirty="0">
                 <a:solidFill>
-                  <a:srgbClr val="065A82"/>
-                </a:solidFill>
-                <a:latin typeface="Cambria" pitchFamily="34" charset="0"/>
-                <a:ea typeface="Cambria" pitchFamily="34" charset="-122"/>
-                <a:cs typeface="Cambria" pitchFamily="34" charset="-120"/>
+                  <a:srgbClr val="ED1165"/>
+                </a:solidFill>
+                <a:latin typeface="Montserrat" pitchFamily="34" charset="0"/>
+                <a:ea typeface="Montserrat" pitchFamily="34" charset="-122"/>
+                <a:cs typeface="Montserrat" pitchFamily="34" charset="-120"/>
               </a:rPr>
               <a:t>1.000</a:t>
             </a:r>
@@ -8050,7 +8242,7 @@
       </p:sp>
       <p:sp>
         <p:nvSpPr>
-          <p:cNvPr id="13" name="Text 11"/>
+          <p:cNvPr id="14" name="Text 11"/>
           <p:cNvSpPr txBox="1"/>
           <p:nvPr/>
         </p:nvSpPr>
@@ -8075,11 +8267,11 @@
             <a:r>
               <a:rPr lang="en-US" sz="1150" dirty="0">
                 <a:solidFill>
-                  <a:srgbClr val="5A6B7B"/>
-                </a:solidFill>
-                <a:latin typeface="Calibri" pitchFamily="34" charset="0"/>
-                <a:ea typeface="Calibri" pitchFamily="34" charset="-122"/>
-                <a:cs typeface="Calibri" pitchFamily="34" charset="-120"/>
+                  <a:srgbClr val="6E6E6E"/>
+                </a:solidFill>
+                <a:latin typeface="Montserrat" pitchFamily="34" charset="0"/>
+                <a:ea typeface="Montserrat" pitchFamily="34" charset="-122"/>
+                <a:cs typeface="Montserrat" pitchFamily="34" charset="-120"/>
               </a:rPr>
               <a:t>entregas simuladas</a:t>
             </a:r>
@@ -8089,7 +8281,7 @@
       </p:sp>
       <p:sp>
         <p:nvSpPr>
-          <p:cNvPr id="14" name="Text 12"/>
+          <p:cNvPr id="15" name="Text 12"/>
           <p:cNvSpPr txBox="1"/>
           <p:nvPr/>
         </p:nvSpPr>
@@ -8114,11 +8306,11 @@
             <a:r>
               <a:rPr lang="en-US" sz="3400" b="1" dirty="0">
                 <a:solidFill>
-                  <a:srgbClr val="1C7293"/>
-                </a:solidFill>
-                <a:latin typeface="Cambria" pitchFamily="34" charset="0"/>
-                <a:ea typeface="Cambria" pitchFamily="34" charset="-122"/>
-                <a:cs typeface="Cambria" pitchFamily="34" charset="-120"/>
+                  <a:srgbClr val="1A1A1A"/>
+                </a:solidFill>
+                <a:latin typeface="Montserrat" pitchFamily="34" charset="0"/>
+                <a:ea typeface="Montserrat" pitchFamily="34" charset="-122"/>
+                <a:cs typeface="Montserrat" pitchFamily="34" charset="-120"/>
               </a:rPr>
               <a:t>42</a:t>
             </a:r>
@@ -8128,7 +8320,7 @@
       </p:sp>
       <p:sp>
         <p:nvSpPr>
-          <p:cNvPr id="15" name="Text 13"/>
+          <p:cNvPr id="16" name="Text 13"/>
           <p:cNvSpPr txBox="1"/>
           <p:nvPr/>
         </p:nvSpPr>
@@ -8153,11 +8345,11 @@
             <a:r>
               <a:rPr lang="en-US" sz="1150" dirty="0">
                 <a:solidFill>
-                  <a:srgbClr val="5A6B7B"/>
-                </a:solidFill>
-                <a:latin typeface="Calibri" pitchFamily="34" charset="0"/>
-                <a:ea typeface="Calibri" pitchFamily="34" charset="-122"/>
-                <a:cs typeface="Calibri" pitchFamily="34" charset="-120"/>
+                  <a:srgbClr val="6E6E6E"/>
+                </a:solidFill>
+                <a:latin typeface="Montserrat" pitchFamily="34" charset="0"/>
+                <a:ea typeface="Montserrat" pitchFamily="34" charset="-122"/>
+                <a:cs typeface="Montserrat" pitchFamily="34" charset="-120"/>
               </a:rPr>
               <a:t>semente (seed)</a:t>
             </a:r>
@@ -8167,7 +8359,7 @@
       </p:sp>
       <p:sp>
         <p:nvSpPr>
-          <p:cNvPr id="16" name="Text 14"/>
+          <p:cNvPr id="17" name="Text 14"/>
           <p:cNvSpPr txBox="1"/>
           <p:nvPr/>
         </p:nvSpPr>
@@ -8192,11 +8384,11 @@
             <a:r>
               <a:rPr lang="en-US" sz="3400" b="1" dirty="0">
                 <a:solidFill>
-                  <a:srgbClr val="D1495B"/>
-                </a:solidFill>
-                <a:latin typeface="Cambria" pitchFamily="34" charset="0"/>
-                <a:ea typeface="Cambria" pitchFamily="34" charset="-122"/>
-                <a:cs typeface="Cambria" pitchFamily="34" charset="-120"/>
+                  <a:srgbClr val="ED1165"/>
+                </a:solidFill>
+                <a:latin typeface="Montserrat" pitchFamily="34" charset="0"/>
+                <a:ea typeface="Montserrat" pitchFamily="34" charset="-122"/>
+                <a:cs typeface="Montserrat" pitchFamily="34" charset="-120"/>
               </a:rPr>
               <a:t>5</a:t>
             </a:r>
@@ -8206,7 +8398,7 @@
       </p:sp>
       <p:sp>
         <p:nvSpPr>
-          <p:cNvPr id="17" name="Text 15"/>
+          <p:cNvPr id="18" name="Text 15"/>
           <p:cNvSpPr txBox="1"/>
           <p:nvPr/>
         </p:nvSpPr>
@@ -8231,11 +8423,11 @@
             <a:r>
               <a:rPr lang="en-US" sz="1150" dirty="0">
                 <a:solidFill>
-                  <a:srgbClr val="5A6B7B"/>
-                </a:solidFill>
-                <a:latin typeface="Calibri" pitchFamily="34" charset="0"/>
-                <a:ea typeface="Calibri" pitchFamily="34" charset="-122"/>
-                <a:cs typeface="Calibri" pitchFamily="34" charset="-120"/>
+                  <a:srgbClr val="6E6E6E"/>
+                </a:solidFill>
+                <a:latin typeface="Montserrat" pitchFamily="34" charset="0"/>
+                <a:ea typeface="Montserrat" pitchFamily="34" charset="-122"/>
+                <a:cs typeface="Montserrat" pitchFamily="34" charset="-120"/>
               </a:rPr>
               <a:t>variáveis</a:t>
             </a:r>
@@ -8245,7 +8437,7 @@
       </p:sp>
       <p:sp>
         <p:nvSpPr>
-          <p:cNvPr id="18" name="Text 16"/>
+          <p:cNvPr id="19" name="Text 16"/>
           <p:cNvSpPr txBox="1"/>
           <p:nvPr/>
         </p:nvSpPr>
@@ -8270,11 +8462,11 @@
             <a:r>
               <a:rPr lang="en-US" sz="1200" i="1" dirty="0">
                 <a:solidFill>
-                  <a:srgbClr val="5A6B7B"/>
-                </a:solidFill>
-                <a:latin typeface="Calibri" pitchFamily="34" charset="0"/>
-                <a:ea typeface="Calibri" pitchFamily="34" charset="-122"/>
-                <a:cs typeface="Calibri" pitchFamily="34" charset="-120"/>
+                  <a:srgbClr val="6E6E6E"/>
+                </a:solidFill>
+                <a:latin typeface="Montserrat" pitchFamily="34" charset="0"/>
+                <a:ea typeface="Montserrat" pitchFamily="34" charset="-122"/>
+                <a:cs typeface="Montserrat" pitchFamily="34" charset="-120"/>
               </a:rPr>
               <a:t>Amostra da base gerada (df.head)</a:t>
             </a:r>
@@ -8325,23 +8517,23 @@
                           <a:solidFill>
                             <a:srgbClr val="FFFFFF"/>
                           </a:solidFill>
-                          <a:latin typeface="Calibri" pitchFamily="34" charset="0"/>
-                          <a:ea typeface="Calibri" pitchFamily="34" charset="-122"/>
-                          <a:cs typeface="Calibri" pitchFamily="34" charset="-120"/>
+                          <a:latin typeface="Montserrat" pitchFamily="34" charset="0"/>
+                          <a:ea typeface="Montserrat" pitchFamily="34" charset="-122"/>
+                          <a:cs typeface="Montserrat" pitchFamily="34" charset="-120"/>
                         </a:rPr>
                         <a:t>distância</a:t>
                       </a:r>
                       <a:endParaRPr lang="en-US" sz="1200" dirty="0">
-                        <a:latin typeface="Calibri" charset="0"/>
-                        <a:ea typeface="Calibri" charset="0"/>
-                        <a:cs typeface="Calibri" charset="0"/>
+                        <a:latin typeface="Montserrat" charset="0"/>
+                        <a:ea typeface="Montserrat" charset="0"/>
+                        <a:cs typeface="Montserrat" charset="0"/>
                       </a:endParaRPr>
                     </a:p>
                   </a:txBody>
                   <a:tcPr marL="91440" marR="91440" marT="45720" marB="45720">
                     <a:lnL w="6350" cap="flat" cmpd="sng" algn="ctr">
                       <a:solidFill>
-                        <a:srgbClr val="D8E3EB"/>
+                        <a:srgbClr val="DCDCDC"/>
                       </a:solidFill>
                       <a:prstDash val="solid"/>
                       <a:round/>
@@ -8350,7 +8542,7 @@
                     </a:lnL>
                     <a:lnR w="6350" cap="flat" cmpd="sng" algn="ctr">
                       <a:solidFill>
-                        <a:srgbClr val="D8E3EB"/>
+                        <a:srgbClr val="DCDCDC"/>
                       </a:solidFill>
                       <a:prstDash val="solid"/>
                       <a:round/>
@@ -8359,7 +8551,7 @@
                     </a:lnR>
                     <a:lnT w="6350" cap="flat" cmpd="sng" algn="ctr">
                       <a:solidFill>
-                        <a:srgbClr val="D8E3EB"/>
+                        <a:srgbClr val="DCDCDC"/>
                       </a:solidFill>
                       <a:prstDash val="solid"/>
                       <a:round/>
@@ -8368,7 +8560,7 @@
                     </a:lnT>
                     <a:lnB w="6350" cap="flat" cmpd="sng" algn="ctr">
                       <a:solidFill>
-                        <a:srgbClr val="D8E3EB"/>
+                        <a:srgbClr val="DCDCDC"/>
                       </a:solidFill>
                       <a:prstDash val="solid"/>
                       <a:round/>
@@ -8376,7 +8568,7 @@
                       <a:tailEnd type="none" w="med" len="med"/>
                     </a:lnB>
                     <a:solidFill>
-                      <a:srgbClr val="21295C"/>
+                      <a:srgbClr val="1A1A1A"/>
                     </a:solidFill>
                   </a:tcPr>
                 </a:tc>
@@ -8393,23 +8585,23 @@
                           <a:solidFill>
                             <a:srgbClr val="FFFFFF"/>
                           </a:solidFill>
-                          <a:latin typeface="Calibri" pitchFamily="34" charset="0"/>
-                          <a:ea typeface="Calibri" pitchFamily="34" charset="-122"/>
-                          <a:cs typeface="Calibri" pitchFamily="34" charset="-120"/>
+                          <a:latin typeface="Montserrat" pitchFamily="34" charset="0"/>
+                          <a:ea typeface="Montserrat" pitchFamily="34" charset="-122"/>
+                          <a:cs typeface="Montserrat" pitchFamily="34" charset="-120"/>
                         </a:rPr>
                         <a:t>chuva</a:t>
                       </a:r>
                       <a:endParaRPr lang="en-US" sz="1200" dirty="0">
-                        <a:latin typeface="Calibri" charset="0"/>
-                        <a:ea typeface="Calibri" charset="0"/>
-                        <a:cs typeface="Calibri" charset="0"/>
+                        <a:latin typeface="Montserrat" charset="0"/>
+                        <a:ea typeface="Montserrat" charset="0"/>
+                        <a:cs typeface="Montserrat" charset="0"/>
                       </a:endParaRPr>
                     </a:p>
                   </a:txBody>
                   <a:tcPr marL="91440" marR="91440" marT="45720" marB="45720">
                     <a:lnL w="6350" cap="flat" cmpd="sng" algn="ctr">
                       <a:solidFill>
-                        <a:srgbClr val="D8E3EB"/>
+                        <a:srgbClr val="DCDCDC"/>
                       </a:solidFill>
                       <a:prstDash val="solid"/>
                       <a:round/>
@@ -8418,7 +8610,7 @@
                     </a:lnL>
                     <a:lnR w="6350" cap="flat" cmpd="sng" algn="ctr">
                       <a:solidFill>
-                        <a:srgbClr val="D8E3EB"/>
+                        <a:srgbClr val="DCDCDC"/>
                       </a:solidFill>
                       <a:prstDash val="solid"/>
                       <a:round/>
@@ -8427,7 +8619,7 @@
                     </a:lnR>
                     <a:lnT w="6350" cap="flat" cmpd="sng" algn="ctr">
                       <a:solidFill>
-                        <a:srgbClr val="D8E3EB"/>
+                        <a:srgbClr val="DCDCDC"/>
                       </a:solidFill>
                       <a:prstDash val="solid"/>
                       <a:round/>
@@ -8436,7 +8628,7 @@
                     </a:lnT>
                     <a:lnB w="6350" cap="flat" cmpd="sng" algn="ctr">
                       <a:solidFill>
-                        <a:srgbClr val="D8E3EB"/>
+                        <a:srgbClr val="DCDCDC"/>
                       </a:solidFill>
                       <a:prstDash val="solid"/>
                       <a:round/>
@@ -8444,7 +8636,7 @@
                       <a:tailEnd type="none" w="med" len="med"/>
                     </a:lnB>
                     <a:solidFill>
-                      <a:srgbClr val="21295C"/>
+                      <a:srgbClr val="1A1A1A"/>
                     </a:solidFill>
                   </a:tcPr>
                 </a:tc>
@@ -8461,23 +8653,23 @@
                           <a:solidFill>
                             <a:srgbClr val="FFFFFF"/>
                           </a:solidFill>
-                          <a:latin typeface="Calibri" pitchFamily="34" charset="0"/>
-                          <a:ea typeface="Calibri" pitchFamily="34" charset="-122"/>
-                          <a:cs typeface="Calibri" pitchFamily="34" charset="-120"/>
+                          <a:latin typeface="Montserrat" pitchFamily="34" charset="0"/>
+                          <a:ea typeface="Montserrat" pitchFamily="34" charset="-122"/>
+                          <a:cs typeface="Montserrat" pitchFamily="34" charset="-120"/>
                         </a:rPr>
                         <a:t>pico</a:t>
                       </a:r>
                       <a:endParaRPr lang="en-US" sz="1200" dirty="0">
-                        <a:latin typeface="Calibri" charset="0"/>
-                        <a:ea typeface="Calibri" charset="0"/>
-                        <a:cs typeface="Calibri" charset="0"/>
+                        <a:latin typeface="Montserrat" charset="0"/>
+                        <a:ea typeface="Montserrat" charset="0"/>
+                        <a:cs typeface="Montserrat" charset="0"/>
                       </a:endParaRPr>
                     </a:p>
                   </a:txBody>
                   <a:tcPr marL="91440" marR="91440" marT="45720" marB="45720">
                     <a:lnL w="6350" cap="flat" cmpd="sng" algn="ctr">
                       <a:solidFill>
-                        <a:srgbClr val="D8E3EB"/>
+                        <a:srgbClr val="DCDCDC"/>
                       </a:solidFill>
                       <a:prstDash val="solid"/>
                       <a:round/>
@@ -8486,7 +8678,7 @@
                     </a:lnL>
                     <a:lnR w="6350" cap="flat" cmpd="sng" algn="ctr">
                       <a:solidFill>
-                        <a:srgbClr val="D8E3EB"/>
+                        <a:srgbClr val="DCDCDC"/>
                       </a:solidFill>
                       <a:prstDash val="solid"/>
                       <a:round/>
@@ -8495,7 +8687,7 @@
                     </a:lnR>
                     <a:lnT w="6350" cap="flat" cmpd="sng" algn="ctr">
                       <a:solidFill>
-                        <a:srgbClr val="D8E3EB"/>
+                        <a:srgbClr val="DCDCDC"/>
                       </a:solidFill>
                       <a:prstDash val="solid"/>
                       <a:round/>
@@ -8504,7 +8696,7 @@
                     </a:lnT>
                     <a:lnB w="6350" cap="flat" cmpd="sng" algn="ctr">
                       <a:solidFill>
-                        <a:srgbClr val="D8E3EB"/>
+                        <a:srgbClr val="DCDCDC"/>
                       </a:solidFill>
                       <a:prstDash val="solid"/>
                       <a:round/>
@@ -8512,7 +8704,7 @@
                       <a:tailEnd type="none" w="med" len="med"/>
                     </a:lnB>
                     <a:solidFill>
-                      <a:srgbClr val="21295C"/>
+                      <a:srgbClr val="1A1A1A"/>
                     </a:solidFill>
                   </a:tcPr>
                 </a:tc>
@@ -8529,23 +8721,23 @@
                           <a:solidFill>
                             <a:srgbClr val="FFFFFF"/>
                           </a:solidFill>
-                          <a:latin typeface="Calibri" pitchFamily="34" charset="0"/>
-                          <a:ea typeface="Calibri" pitchFamily="34" charset="-122"/>
-                          <a:cs typeface="Calibri" pitchFamily="34" charset="-120"/>
+                          <a:latin typeface="Montserrat" pitchFamily="34" charset="0"/>
+                          <a:ea typeface="Montserrat" pitchFamily="34" charset="-122"/>
+                          <a:cs typeface="Montserrat" pitchFamily="34" charset="-120"/>
                         </a:rPr>
                         <a:t>tempo</a:t>
                       </a:r>
                       <a:endParaRPr lang="en-US" sz="1200" dirty="0">
-                        <a:latin typeface="Calibri" charset="0"/>
-                        <a:ea typeface="Calibri" charset="0"/>
-                        <a:cs typeface="Calibri" charset="0"/>
+                        <a:latin typeface="Montserrat" charset="0"/>
+                        <a:ea typeface="Montserrat" charset="0"/>
+                        <a:cs typeface="Montserrat" charset="0"/>
                       </a:endParaRPr>
                     </a:p>
                   </a:txBody>
                   <a:tcPr marL="91440" marR="91440" marT="45720" marB="45720">
                     <a:lnL w="6350" cap="flat" cmpd="sng" algn="ctr">
                       <a:solidFill>
-                        <a:srgbClr val="D8E3EB"/>
+                        <a:srgbClr val="DCDCDC"/>
                       </a:solidFill>
                       <a:prstDash val="solid"/>
                       <a:round/>
@@ -8554,7 +8746,7 @@
                     </a:lnL>
                     <a:lnR w="6350" cap="flat" cmpd="sng" algn="ctr">
                       <a:solidFill>
-                        <a:srgbClr val="D8E3EB"/>
+                        <a:srgbClr val="DCDCDC"/>
                       </a:solidFill>
                       <a:prstDash val="solid"/>
                       <a:round/>
@@ -8563,7 +8755,7 @@
                     </a:lnR>
                     <a:lnT w="6350" cap="flat" cmpd="sng" algn="ctr">
                       <a:solidFill>
-                        <a:srgbClr val="D8E3EB"/>
+                        <a:srgbClr val="DCDCDC"/>
                       </a:solidFill>
                       <a:prstDash val="solid"/>
                       <a:round/>
@@ -8572,7 +8764,7 @@
                     </a:lnT>
                     <a:lnB w="6350" cap="flat" cmpd="sng" algn="ctr">
                       <a:solidFill>
-                        <a:srgbClr val="D8E3EB"/>
+                        <a:srgbClr val="DCDCDC"/>
                       </a:solidFill>
                       <a:prstDash val="solid"/>
                       <a:round/>
@@ -8580,7 +8772,7 @@
                       <a:tailEnd type="none" w="med" len="med"/>
                     </a:lnB>
                     <a:solidFill>
-                      <a:srgbClr val="21295C"/>
+                      <a:srgbClr val="1A1A1A"/>
                     </a:solidFill>
                   </a:tcPr>
                 </a:tc>
@@ -8597,23 +8789,23 @@
                           <a:solidFill>
                             <a:srgbClr val="FFFFFF"/>
                           </a:solidFill>
-                          <a:latin typeface="Calibri" pitchFamily="34" charset="0"/>
-                          <a:ea typeface="Calibri" pitchFamily="34" charset="-122"/>
-                          <a:cs typeface="Calibri" pitchFamily="34" charset="-120"/>
+                          <a:latin typeface="Montserrat" pitchFamily="34" charset="0"/>
+                          <a:ea typeface="Montserrat" pitchFamily="34" charset="-122"/>
+                          <a:cs typeface="Montserrat" pitchFamily="34" charset="-120"/>
                         </a:rPr>
                         <a:t>atraso</a:t>
                       </a:r>
                       <a:endParaRPr lang="en-US" sz="1200" dirty="0">
-                        <a:latin typeface="Calibri" charset="0"/>
-                        <a:ea typeface="Calibri" charset="0"/>
-                        <a:cs typeface="Calibri" charset="0"/>
+                        <a:latin typeface="Montserrat" charset="0"/>
+                        <a:ea typeface="Montserrat" charset="0"/>
+                        <a:cs typeface="Montserrat" charset="0"/>
                       </a:endParaRPr>
                     </a:p>
                   </a:txBody>
                   <a:tcPr marL="91440" marR="91440" marT="45720" marB="45720">
                     <a:lnL w="6350" cap="flat" cmpd="sng" algn="ctr">
                       <a:solidFill>
-                        <a:srgbClr val="D8E3EB"/>
+                        <a:srgbClr val="DCDCDC"/>
                       </a:solidFill>
                       <a:prstDash val="solid"/>
                       <a:round/>
@@ -8622,7 +8814,7 @@
                     </a:lnL>
                     <a:lnR w="6350" cap="flat" cmpd="sng" algn="ctr">
                       <a:solidFill>
-                        <a:srgbClr val="D8E3EB"/>
+                        <a:srgbClr val="DCDCDC"/>
                       </a:solidFill>
                       <a:prstDash val="solid"/>
                       <a:round/>
@@ -8631,7 +8823,7 @@
                     </a:lnR>
                     <a:lnT w="6350" cap="flat" cmpd="sng" algn="ctr">
                       <a:solidFill>
-                        <a:srgbClr val="D8E3EB"/>
+                        <a:srgbClr val="DCDCDC"/>
                       </a:solidFill>
                       <a:prstDash val="solid"/>
                       <a:round/>
@@ -8640,7 +8832,7 @@
                     </a:lnT>
                     <a:lnB w="6350" cap="flat" cmpd="sng" algn="ctr">
                       <a:solidFill>
-                        <a:srgbClr val="D8E3EB"/>
+                        <a:srgbClr val="DCDCDC"/>
                       </a:solidFill>
                       <a:prstDash val="solid"/>
                       <a:round/>
@@ -8648,7 +8840,7 @@
                       <a:tailEnd type="none" w="med" len="med"/>
                     </a:lnB>
                     <a:solidFill>
-                      <a:srgbClr val="21295C"/>
+                      <a:srgbClr val="1A1A1A"/>
                     </a:solidFill>
                   </a:tcPr>
                 </a:tc>
@@ -8665,25 +8857,25 @@
                       <a:r>
                         <a:rPr lang="en-US" sz="1200" dirty="0">
                           <a:solidFill>
-                            <a:srgbClr val="1B2A3A"/>
+                            <a:srgbClr val="333333"/>
                           </a:solidFill>
-                          <a:latin typeface="Calibri" pitchFamily="34" charset="0"/>
-                          <a:ea typeface="Calibri" pitchFamily="34" charset="-122"/>
-                          <a:cs typeface="Calibri" pitchFamily="34" charset="-120"/>
+                          <a:latin typeface="Montserrat" pitchFamily="34" charset="0"/>
+                          <a:ea typeface="Montserrat" pitchFamily="34" charset="-122"/>
+                          <a:cs typeface="Montserrat" pitchFamily="34" charset="-120"/>
                         </a:rPr>
                         <a:t>13,22 km</a:t>
                       </a:r>
                       <a:endParaRPr lang="en-US" sz="1200" dirty="0">
-                        <a:latin typeface="Calibri" charset="0"/>
-                        <a:ea typeface="Calibri" charset="0"/>
-                        <a:cs typeface="Calibri" charset="0"/>
+                        <a:latin typeface="Montserrat" charset="0"/>
+                        <a:ea typeface="Montserrat" charset="0"/>
+                        <a:cs typeface="Montserrat" charset="0"/>
                       </a:endParaRPr>
                     </a:p>
                   </a:txBody>
                   <a:tcPr marL="91440" marR="91440" marT="45720" marB="45720">
                     <a:lnL w="6350" cap="flat" cmpd="sng" algn="ctr">
                       <a:solidFill>
-                        <a:srgbClr val="D8E3EB"/>
+                        <a:srgbClr val="DCDCDC"/>
                       </a:solidFill>
                       <a:prstDash val="solid"/>
                       <a:round/>
@@ -8692,7 +8884,7 @@
                     </a:lnL>
                     <a:lnR w="6350" cap="flat" cmpd="sng" algn="ctr">
                       <a:solidFill>
-                        <a:srgbClr val="D8E3EB"/>
+                        <a:srgbClr val="DCDCDC"/>
                       </a:solidFill>
                       <a:prstDash val="solid"/>
                       <a:round/>
@@ -8701,7 +8893,7 @@
                     </a:lnR>
                     <a:lnT w="6350" cap="flat" cmpd="sng" algn="ctr">
                       <a:solidFill>
-                        <a:srgbClr val="D8E3EB"/>
+                        <a:srgbClr val="DCDCDC"/>
                       </a:solidFill>
                       <a:prstDash val="solid"/>
                       <a:round/>
@@ -8710,7 +8902,7 @@
                     </a:lnT>
                     <a:lnB w="6350" cap="flat" cmpd="sng" algn="ctr">
                       <a:solidFill>
-                        <a:srgbClr val="D8E3EB"/>
+                        <a:srgbClr val="DCDCDC"/>
                       </a:solidFill>
                       <a:prstDash val="solid"/>
                       <a:round/>
@@ -8718,7 +8910,7 @@
                       <a:tailEnd type="none" w="med" len="med"/>
                     </a:lnB>
                     <a:solidFill>
-                      <a:srgbClr val="F4F8FB"/>
+                      <a:srgbClr val="F5F5F5"/>
                     </a:solidFill>
                   </a:tcPr>
                 </a:tc>
@@ -8733,25 +8925,25 @@
                       <a:r>
                         <a:rPr lang="en-US" sz="1200" dirty="0">
                           <a:solidFill>
-                            <a:srgbClr val="1B2A3A"/>
+                            <a:srgbClr val="333333"/>
                           </a:solidFill>
-                          <a:latin typeface="Calibri" pitchFamily="34" charset="0"/>
-                          <a:ea typeface="Calibri" pitchFamily="34" charset="-122"/>
-                          <a:cs typeface="Calibri" pitchFamily="34" charset="-120"/>
+                          <a:latin typeface="Montserrat" pitchFamily="34" charset="0"/>
+                          <a:ea typeface="Montserrat" pitchFamily="34" charset="-122"/>
+                          <a:cs typeface="Montserrat" pitchFamily="34" charset="-120"/>
                         </a:rPr>
                         <a:t>0</a:t>
                       </a:r>
                       <a:endParaRPr lang="en-US" sz="1200" dirty="0">
-                        <a:latin typeface="Calibri" charset="0"/>
-                        <a:ea typeface="Calibri" charset="0"/>
-                        <a:cs typeface="Calibri" charset="0"/>
+                        <a:latin typeface="Montserrat" charset="0"/>
+                        <a:ea typeface="Montserrat" charset="0"/>
+                        <a:cs typeface="Montserrat" charset="0"/>
                       </a:endParaRPr>
                     </a:p>
                   </a:txBody>
                   <a:tcPr marL="91440" marR="91440" marT="45720" marB="45720">
                     <a:lnL w="6350" cap="flat" cmpd="sng" algn="ctr">
                       <a:solidFill>
-                        <a:srgbClr val="D8E3EB"/>
+                        <a:srgbClr val="DCDCDC"/>
                       </a:solidFill>
                       <a:prstDash val="solid"/>
                       <a:round/>
@@ -8760,7 +8952,7 @@
                     </a:lnL>
                     <a:lnR w="6350" cap="flat" cmpd="sng" algn="ctr">
                       <a:solidFill>
-                        <a:srgbClr val="D8E3EB"/>
+                        <a:srgbClr val="DCDCDC"/>
                       </a:solidFill>
                       <a:prstDash val="solid"/>
                       <a:round/>
@@ -8769,7 +8961,7 @@
                     </a:lnR>
                     <a:lnT w="6350" cap="flat" cmpd="sng" algn="ctr">
                       <a:solidFill>
-                        <a:srgbClr val="D8E3EB"/>
+                        <a:srgbClr val="DCDCDC"/>
                       </a:solidFill>
                       <a:prstDash val="solid"/>
                       <a:round/>
@@ -8778,7 +8970,7 @@
                     </a:lnT>
                     <a:lnB w="6350" cap="flat" cmpd="sng" algn="ctr">
                       <a:solidFill>
-                        <a:srgbClr val="D8E3EB"/>
+                        <a:srgbClr val="DCDCDC"/>
                       </a:solidFill>
                       <a:prstDash val="solid"/>
                       <a:round/>
@@ -8786,7 +8978,7 @@
                       <a:tailEnd type="none" w="med" len="med"/>
                     </a:lnB>
                     <a:solidFill>
-                      <a:srgbClr val="F4F8FB"/>
+                      <a:srgbClr val="F5F5F5"/>
                     </a:solidFill>
                   </a:tcPr>
                 </a:tc>
@@ -8801,25 +8993,25 @@
                       <a:r>
                         <a:rPr lang="en-US" sz="1200" dirty="0">
                           <a:solidFill>
-                            <a:srgbClr val="1B2A3A"/>
+                            <a:srgbClr val="333333"/>
                           </a:solidFill>
-                          <a:latin typeface="Calibri" pitchFamily="34" charset="0"/>
-                          <a:ea typeface="Calibri" pitchFamily="34" charset="-122"/>
-                          <a:cs typeface="Calibri" pitchFamily="34" charset="-120"/>
+                          <a:latin typeface="Montserrat" pitchFamily="34" charset="0"/>
+                          <a:ea typeface="Montserrat" pitchFamily="34" charset="-122"/>
+                          <a:cs typeface="Montserrat" pitchFamily="34" charset="-120"/>
                         </a:rPr>
                         <a:t>1</a:t>
                       </a:r>
                       <a:endParaRPr lang="en-US" sz="1200" dirty="0">
-                        <a:latin typeface="Calibri" charset="0"/>
-                        <a:ea typeface="Calibri" charset="0"/>
-                        <a:cs typeface="Calibri" charset="0"/>
+                        <a:latin typeface="Montserrat" charset="0"/>
+                        <a:ea typeface="Montserrat" charset="0"/>
+                        <a:cs typeface="Montserrat" charset="0"/>
                       </a:endParaRPr>
                     </a:p>
                   </a:txBody>
                   <a:tcPr marL="91440" marR="91440" marT="45720" marB="45720">
                     <a:lnL w="6350" cap="flat" cmpd="sng" algn="ctr">
                       <a:solidFill>
-                        <a:srgbClr val="D8E3EB"/>
+                        <a:srgbClr val="DCDCDC"/>
                       </a:solidFill>
                       <a:prstDash val="solid"/>
                       <a:round/>
@@ -8828,7 +9020,7 @@
                     </a:lnL>
                     <a:lnR w="6350" cap="flat" cmpd="sng" algn="ctr">
                       <a:solidFill>
-                        <a:srgbClr val="D8E3EB"/>
+                        <a:srgbClr val="DCDCDC"/>
                       </a:solidFill>
                       <a:prstDash val="solid"/>
                       <a:round/>
@@ -8837,7 +9029,7 @@
                     </a:lnR>
                     <a:lnT w="6350" cap="flat" cmpd="sng" algn="ctr">
                       <a:solidFill>
-                        <a:srgbClr val="D8E3EB"/>
+                        <a:srgbClr val="DCDCDC"/>
                       </a:solidFill>
                       <a:prstDash val="solid"/>
                       <a:round/>
@@ -8846,7 +9038,7 @@
                     </a:lnT>
                     <a:lnB w="6350" cap="flat" cmpd="sng" algn="ctr">
                       <a:solidFill>
-                        <a:srgbClr val="D8E3EB"/>
+                        <a:srgbClr val="DCDCDC"/>
                       </a:solidFill>
                       <a:prstDash val="solid"/>
                       <a:round/>
@@ -8854,7 +9046,7 @@
                       <a:tailEnd type="none" w="med" len="med"/>
                     </a:lnB>
                     <a:solidFill>
-                      <a:srgbClr val="F4F8FB"/>
+                      <a:srgbClr val="F5F5F5"/>
                     </a:solidFill>
                   </a:tcPr>
                 </a:tc>
@@ -8869,25 +9061,25 @@
                       <a:r>
                         <a:rPr lang="en-US" sz="1200" dirty="0">
                           <a:solidFill>
-                            <a:srgbClr val="1B2A3A"/>
+                            <a:srgbClr val="333333"/>
                           </a:solidFill>
-                          <a:latin typeface="Calibri" pitchFamily="34" charset="0"/>
-                          <a:ea typeface="Calibri" pitchFamily="34" charset="-122"/>
-                          <a:cs typeface="Calibri" pitchFamily="34" charset="-120"/>
+                          <a:latin typeface="Montserrat" pitchFamily="34" charset="0"/>
+                          <a:ea typeface="Montserrat" pitchFamily="34" charset="-122"/>
+                          <a:cs typeface="Montserrat" pitchFamily="34" charset="-120"/>
                         </a:rPr>
                         <a:t>49,9</a:t>
                       </a:r>
                       <a:endParaRPr lang="en-US" sz="1200" dirty="0">
-                        <a:latin typeface="Calibri" charset="0"/>
-                        <a:ea typeface="Calibri" charset="0"/>
-                        <a:cs typeface="Calibri" charset="0"/>
+                        <a:latin typeface="Montserrat" charset="0"/>
+                        <a:ea typeface="Montserrat" charset="0"/>
+                        <a:cs typeface="Montserrat" charset="0"/>
                       </a:endParaRPr>
                     </a:p>
                   </a:txBody>
                   <a:tcPr marL="91440" marR="91440" marT="45720" marB="45720">
                     <a:lnL w="6350" cap="flat" cmpd="sng" algn="ctr">
                       <a:solidFill>
-                        <a:srgbClr val="D8E3EB"/>
+                        <a:srgbClr val="DCDCDC"/>
                       </a:solidFill>
                       <a:prstDash val="solid"/>
                       <a:round/>
@@ -8896,7 +9088,7 @@
                     </a:lnL>
                     <a:lnR w="6350" cap="flat" cmpd="sng" algn="ctr">
                       <a:solidFill>
-                        <a:srgbClr val="D8E3EB"/>
+                        <a:srgbClr val="DCDCDC"/>
                       </a:solidFill>
                       <a:prstDash val="solid"/>
                       <a:round/>
@@ -8905,7 +9097,7 @@
                     </a:lnR>
                     <a:lnT w="6350" cap="flat" cmpd="sng" algn="ctr">
                       <a:solidFill>
-                        <a:srgbClr val="D8E3EB"/>
+                        <a:srgbClr val="DCDCDC"/>
                       </a:solidFill>
                       <a:prstDash val="solid"/>
                       <a:round/>
@@ -8914,7 +9106,7 @@
                     </a:lnT>
                     <a:lnB w="6350" cap="flat" cmpd="sng" algn="ctr">
                       <a:solidFill>
-                        <a:srgbClr val="D8E3EB"/>
+                        <a:srgbClr val="DCDCDC"/>
                       </a:solidFill>
                       <a:prstDash val="solid"/>
                       <a:round/>
@@ -8922,7 +9114,7 @@
                       <a:tailEnd type="none" w="med" len="med"/>
                     </a:lnB>
                     <a:solidFill>
-                      <a:srgbClr val="F4F8FB"/>
+                      <a:srgbClr val="F5F5F5"/>
                     </a:solidFill>
                   </a:tcPr>
                 </a:tc>
@@ -8937,25 +9129,25 @@
                       <a:r>
                         <a:rPr lang="en-US" sz="1200" dirty="0">
                           <a:solidFill>
-                            <a:srgbClr val="1B2A3A"/>
+                            <a:srgbClr val="333333"/>
                           </a:solidFill>
-                          <a:latin typeface="Calibri" pitchFamily="34" charset="0"/>
-                          <a:ea typeface="Calibri" pitchFamily="34" charset="-122"/>
-                          <a:cs typeface="Calibri" pitchFamily="34" charset="-120"/>
+                          <a:latin typeface="Montserrat" pitchFamily="34" charset="0"/>
+                          <a:ea typeface="Montserrat" pitchFamily="34" charset="-122"/>
+                          <a:cs typeface="Montserrat" pitchFamily="34" charset="-120"/>
                         </a:rPr>
                         <a:t>0</a:t>
                       </a:r>
                       <a:endParaRPr lang="en-US" sz="1200" dirty="0">
-                        <a:latin typeface="Calibri" charset="0"/>
-                        <a:ea typeface="Calibri" charset="0"/>
-                        <a:cs typeface="Calibri" charset="0"/>
+                        <a:latin typeface="Montserrat" charset="0"/>
+                        <a:ea typeface="Montserrat" charset="0"/>
+                        <a:cs typeface="Montserrat" charset="0"/>
                       </a:endParaRPr>
                     </a:p>
                   </a:txBody>
                   <a:tcPr marL="91440" marR="91440" marT="45720" marB="45720">
                     <a:lnL w="6350" cap="flat" cmpd="sng" algn="ctr">
                       <a:solidFill>
-                        <a:srgbClr val="D8E3EB"/>
+                        <a:srgbClr val="DCDCDC"/>
                       </a:solidFill>
                       <a:prstDash val="solid"/>
                       <a:round/>
@@ -8964,7 +9156,7 @@
                     </a:lnL>
                     <a:lnR w="6350" cap="flat" cmpd="sng" algn="ctr">
                       <a:solidFill>
-                        <a:srgbClr val="D8E3EB"/>
+                        <a:srgbClr val="DCDCDC"/>
                       </a:solidFill>
                       <a:prstDash val="solid"/>
                       <a:round/>
@@ -8973,7 +9165,7 @@
                     </a:lnR>
                     <a:lnT w="6350" cap="flat" cmpd="sng" algn="ctr">
                       <a:solidFill>
-                        <a:srgbClr val="D8E3EB"/>
+                        <a:srgbClr val="DCDCDC"/>
                       </a:solidFill>
                       <a:prstDash val="solid"/>
                       <a:round/>
@@ -8982,7 +9174,7 @@
                     </a:lnT>
                     <a:lnB w="6350" cap="flat" cmpd="sng" algn="ctr">
                       <a:solidFill>
-                        <a:srgbClr val="D8E3EB"/>
+                        <a:srgbClr val="DCDCDC"/>
                       </a:solidFill>
                       <a:prstDash val="solid"/>
                       <a:round/>
@@ -8990,7 +9182,7 @@
                       <a:tailEnd type="none" w="med" len="med"/>
                     </a:lnB>
                     <a:solidFill>
-                      <a:srgbClr val="F4F8FB"/>
+                      <a:srgbClr val="F5F5F5"/>
                     </a:solidFill>
                   </a:tcPr>
                 </a:tc>
@@ -9007,25 +9199,25 @@
                       <a:r>
                         <a:rPr lang="en-US" sz="1200" dirty="0">
                           <a:solidFill>
-                            <a:srgbClr val="1B2A3A"/>
+                            <a:srgbClr val="333333"/>
                           </a:solidFill>
-                          <a:latin typeface="Calibri" pitchFamily="34" charset="0"/>
-                          <a:ea typeface="Calibri" pitchFamily="34" charset="-122"/>
-                          <a:cs typeface="Calibri" pitchFamily="34" charset="-120"/>
+                          <a:latin typeface="Montserrat" pitchFamily="34" charset="0"/>
+                          <a:ea typeface="Montserrat" pitchFamily="34" charset="-122"/>
+                          <a:cs typeface="Montserrat" pitchFamily="34" charset="-120"/>
                         </a:rPr>
                         <a:t>15,76 km</a:t>
                       </a:r>
                       <a:endParaRPr lang="en-US" sz="1200" dirty="0">
-                        <a:latin typeface="Calibri" charset="0"/>
-                        <a:ea typeface="Calibri" charset="0"/>
-                        <a:cs typeface="Calibri" charset="0"/>
+                        <a:latin typeface="Montserrat" charset="0"/>
+                        <a:ea typeface="Montserrat" charset="0"/>
+                        <a:cs typeface="Montserrat" charset="0"/>
                       </a:endParaRPr>
                     </a:p>
                   </a:txBody>
                   <a:tcPr marL="91440" marR="91440" marT="45720" marB="45720">
                     <a:lnL w="6350" cap="flat" cmpd="sng" algn="ctr">
                       <a:solidFill>
-                        <a:srgbClr val="D8E3EB"/>
+                        <a:srgbClr val="DCDCDC"/>
                       </a:solidFill>
                       <a:prstDash val="solid"/>
                       <a:round/>
@@ -9034,7 +9226,7 @@
                     </a:lnL>
                     <a:lnR w="6350" cap="flat" cmpd="sng" algn="ctr">
                       <a:solidFill>
-                        <a:srgbClr val="D8E3EB"/>
+                        <a:srgbClr val="DCDCDC"/>
                       </a:solidFill>
                       <a:prstDash val="solid"/>
                       <a:round/>
@@ -9043,7 +9235,7 @@
                     </a:lnR>
                     <a:lnT w="6350" cap="flat" cmpd="sng" algn="ctr">
                       <a:solidFill>
-                        <a:srgbClr val="D8E3EB"/>
+                        <a:srgbClr val="DCDCDC"/>
                       </a:solidFill>
                       <a:prstDash val="solid"/>
                       <a:round/>
@@ -9052,7 +9244,7 @@
                     </a:lnT>
                     <a:lnB w="6350" cap="flat" cmpd="sng" algn="ctr">
                       <a:solidFill>
-                        <a:srgbClr val="D8E3EB"/>
+                        <a:srgbClr val="DCDCDC"/>
                       </a:solidFill>
                       <a:prstDash val="solid"/>
                       <a:round/>
@@ -9075,25 +9267,25 @@
                       <a:r>
                         <a:rPr lang="en-US" sz="1200" dirty="0">
                           <a:solidFill>
-                            <a:srgbClr val="1B2A3A"/>
+                            <a:srgbClr val="333333"/>
                           </a:solidFill>
-                          <a:latin typeface="Calibri" pitchFamily="34" charset="0"/>
-                          <a:ea typeface="Calibri" pitchFamily="34" charset="-122"/>
-                          <a:cs typeface="Calibri" pitchFamily="34" charset="-120"/>
+                          <a:latin typeface="Montserrat" pitchFamily="34" charset="0"/>
+                          <a:ea typeface="Montserrat" pitchFamily="34" charset="-122"/>
+                          <a:cs typeface="Montserrat" pitchFamily="34" charset="-120"/>
                         </a:rPr>
                         <a:t>0</a:t>
                       </a:r>
                       <a:endParaRPr lang="en-US" sz="1200" dirty="0">
-                        <a:latin typeface="Calibri" charset="0"/>
-                        <a:ea typeface="Calibri" charset="0"/>
-                        <a:cs typeface="Calibri" charset="0"/>
+                        <a:latin typeface="Montserrat" charset="0"/>
+                        <a:ea typeface="Montserrat" charset="0"/>
+                        <a:cs typeface="Montserrat" charset="0"/>
                       </a:endParaRPr>
                     </a:p>
                   </a:txBody>
                   <a:tcPr marL="91440" marR="91440" marT="45720" marB="45720">
                     <a:lnL w="6350" cap="flat" cmpd="sng" algn="ctr">
                       <a:solidFill>
-                        <a:srgbClr val="D8E3EB"/>
+                        <a:srgbClr val="DCDCDC"/>
                       </a:solidFill>
                       <a:prstDash val="solid"/>
                       <a:round/>
@@ -9102,7 +9294,7 @@
                     </a:lnL>
                     <a:lnR w="6350" cap="flat" cmpd="sng" algn="ctr">
                       <a:solidFill>
-                        <a:srgbClr val="D8E3EB"/>
+                        <a:srgbClr val="DCDCDC"/>
                       </a:solidFill>
                       <a:prstDash val="solid"/>
                       <a:round/>
@@ -9111,7 +9303,7 @@
                     </a:lnR>
                     <a:lnT w="6350" cap="flat" cmpd="sng" algn="ctr">
                       <a:solidFill>
-                        <a:srgbClr val="D8E3EB"/>
+                        <a:srgbClr val="DCDCDC"/>
                       </a:solidFill>
                       <a:prstDash val="solid"/>
                       <a:round/>
@@ -9120,7 +9312,7 @@
                     </a:lnT>
                     <a:lnB w="6350" cap="flat" cmpd="sng" algn="ctr">
                       <a:solidFill>
-                        <a:srgbClr val="D8E3EB"/>
+                        <a:srgbClr val="DCDCDC"/>
                       </a:solidFill>
                       <a:prstDash val="solid"/>
                       <a:round/>
@@ -9143,25 +9335,25 @@
                       <a:r>
                         <a:rPr lang="en-US" sz="1200" dirty="0">
                           <a:solidFill>
-                            <a:srgbClr val="1B2A3A"/>
+                            <a:srgbClr val="333333"/>
                           </a:solidFill>
-                          <a:latin typeface="Calibri" pitchFamily="34" charset="0"/>
-                          <a:ea typeface="Calibri" pitchFamily="34" charset="-122"/>
-                          <a:cs typeface="Calibri" pitchFamily="34" charset="-120"/>
+                          <a:latin typeface="Montserrat" pitchFamily="34" charset="0"/>
+                          <a:ea typeface="Montserrat" pitchFamily="34" charset="-122"/>
+                          <a:cs typeface="Montserrat" pitchFamily="34" charset="-120"/>
                         </a:rPr>
                         <a:t>1</a:t>
                       </a:r>
                       <a:endParaRPr lang="en-US" sz="1200" dirty="0">
-                        <a:latin typeface="Calibri" charset="0"/>
-                        <a:ea typeface="Calibri" charset="0"/>
-                        <a:cs typeface="Calibri" charset="0"/>
+                        <a:latin typeface="Montserrat" charset="0"/>
+                        <a:ea typeface="Montserrat" charset="0"/>
+                        <a:cs typeface="Montserrat" charset="0"/>
                       </a:endParaRPr>
                     </a:p>
                   </a:txBody>
                   <a:tcPr marL="91440" marR="91440" marT="45720" marB="45720">
                     <a:lnL w="6350" cap="flat" cmpd="sng" algn="ctr">
                       <a:solidFill>
-                        <a:srgbClr val="D8E3EB"/>
+                        <a:srgbClr val="DCDCDC"/>
                       </a:solidFill>
                       <a:prstDash val="solid"/>
                       <a:round/>
@@ -9170,7 +9362,7 @@
                     </a:lnL>
                     <a:lnR w="6350" cap="flat" cmpd="sng" algn="ctr">
                       <a:solidFill>
-                        <a:srgbClr val="D8E3EB"/>
+                        <a:srgbClr val="DCDCDC"/>
                       </a:solidFill>
                       <a:prstDash val="solid"/>
                       <a:round/>
@@ -9179,7 +9371,7 @@
                     </a:lnR>
                     <a:lnT w="6350" cap="flat" cmpd="sng" algn="ctr">
                       <a:solidFill>
-                        <a:srgbClr val="D8E3EB"/>
+                        <a:srgbClr val="DCDCDC"/>
                       </a:solidFill>
                       <a:prstDash val="solid"/>
                       <a:round/>
@@ -9188,7 +9380,7 @@
                     </a:lnT>
                     <a:lnB w="6350" cap="flat" cmpd="sng" algn="ctr">
                       <a:solidFill>
-                        <a:srgbClr val="D8E3EB"/>
+                        <a:srgbClr val="DCDCDC"/>
                       </a:solidFill>
                       <a:prstDash val="solid"/>
                       <a:round/>
@@ -9211,25 +9403,25 @@
                       <a:r>
                         <a:rPr lang="en-US" sz="1200" dirty="0">
                           <a:solidFill>
-                            <a:srgbClr val="1B2A3A"/>
+                            <a:srgbClr val="333333"/>
                           </a:solidFill>
-                          <a:latin typeface="Calibri" pitchFamily="34" charset="0"/>
-                          <a:ea typeface="Calibri" pitchFamily="34" charset="-122"/>
-                          <a:cs typeface="Calibri" pitchFamily="34" charset="-120"/>
+                          <a:latin typeface="Montserrat" pitchFamily="34" charset="0"/>
+                          <a:ea typeface="Montserrat" pitchFamily="34" charset="-122"/>
+                          <a:cs typeface="Montserrat" pitchFamily="34" charset="-120"/>
                         </a:rPr>
                         <a:t>69,5</a:t>
                       </a:r>
                       <a:endParaRPr lang="en-US" sz="1200" dirty="0">
-                        <a:latin typeface="Calibri" charset="0"/>
-                        <a:ea typeface="Calibri" charset="0"/>
-                        <a:cs typeface="Calibri" charset="0"/>
+                        <a:latin typeface="Montserrat" charset="0"/>
+                        <a:ea typeface="Montserrat" charset="0"/>
+                        <a:cs typeface="Montserrat" charset="0"/>
                       </a:endParaRPr>
                     </a:p>
                   </a:txBody>
                   <a:tcPr marL="91440" marR="91440" marT="45720" marB="45720">
                     <a:lnL w="6350" cap="flat" cmpd="sng" algn="ctr">
                       <a:solidFill>
-                        <a:srgbClr val="D8E3EB"/>
+                        <a:srgbClr val="DCDCDC"/>
                       </a:solidFill>
                       <a:prstDash val="solid"/>
                       <a:round/>
@@ -9238,7 +9430,7 @@
                     </a:lnL>
                     <a:lnR w="6350" cap="flat" cmpd="sng" algn="ctr">
                       <a:solidFill>
-                        <a:srgbClr val="D8E3EB"/>
+                        <a:srgbClr val="DCDCDC"/>
                       </a:solidFill>
                       <a:prstDash val="solid"/>
                       <a:round/>
@@ -9247,7 +9439,7 @@
                     </a:lnR>
                     <a:lnT w="6350" cap="flat" cmpd="sng" algn="ctr">
                       <a:solidFill>
-                        <a:srgbClr val="D8E3EB"/>
+                        <a:srgbClr val="DCDCDC"/>
                       </a:solidFill>
                       <a:prstDash val="solid"/>
                       <a:round/>
@@ -9256,7 +9448,7 @@
                     </a:lnT>
                     <a:lnB w="6350" cap="flat" cmpd="sng" algn="ctr">
                       <a:solidFill>
-                        <a:srgbClr val="D8E3EB"/>
+                        <a:srgbClr val="DCDCDC"/>
                       </a:solidFill>
                       <a:prstDash val="solid"/>
                       <a:round/>
@@ -9279,25 +9471,25 @@
                       <a:r>
                         <a:rPr lang="en-US" sz="1200" dirty="0">
                           <a:solidFill>
-                            <a:srgbClr val="1B2A3A"/>
+                            <a:srgbClr val="333333"/>
                           </a:solidFill>
-                          <a:latin typeface="Calibri" pitchFamily="34" charset="0"/>
-                          <a:ea typeface="Calibri" pitchFamily="34" charset="-122"/>
-                          <a:cs typeface="Calibri" pitchFamily="34" charset="-120"/>
+                          <a:latin typeface="Montserrat" pitchFamily="34" charset="0"/>
+                          <a:ea typeface="Montserrat" pitchFamily="34" charset="-122"/>
+                          <a:cs typeface="Montserrat" pitchFamily="34" charset="-120"/>
                         </a:rPr>
                         <a:t>1</a:t>
                       </a:r>
                       <a:endParaRPr lang="en-US" sz="1200" dirty="0">
-                        <a:latin typeface="Calibri" charset="0"/>
-                        <a:ea typeface="Calibri" charset="0"/>
-                        <a:cs typeface="Calibri" charset="0"/>
+                        <a:latin typeface="Montserrat" charset="0"/>
+                        <a:ea typeface="Montserrat" charset="0"/>
+                        <a:cs typeface="Montserrat" charset="0"/>
                       </a:endParaRPr>
                     </a:p>
                   </a:txBody>
                   <a:tcPr marL="91440" marR="91440" marT="45720" marB="45720">
                     <a:lnL w="6350" cap="flat" cmpd="sng" algn="ctr">
                       <a:solidFill>
-                        <a:srgbClr val="D8E3EB"/>
+                        <a:srgbClr val="DCDCDC"/>
                       </a:solidFill>
                       <a:prstDash val="solid"/>
                       <a:round/>
@@ -9306,7 +9498,7 @@
                     </a:lnL>
                     <a:lnR w="6350" cap="flat" cmpd="sng" algn="ctr">
                       <a:solidFill>
-                        <a:srgbClr val="D8E3EB"/>
+                        <a:srgbClr val="DCDCDC"/>
                       </a:solidFill>
                       <a:prstDash val="solid"/>
                       <a:round/>
@@ -9315,7 +9507,7 @@
                     </a:lnR>
                     <a:lnT w="6350" cap="flat" cmpd="sng" algn="ctr">
                       <a:solidFill>
-                        <a:srgbClr val="D8E3EB"/>
+                        <a:srgbClr val="DCDCDC"/>
                       </a:solidFill>
                       <a:prstDash val="solid"/>
                       <a:round/>
@@ -9324,7 +9516,7 @@
                     </a:lnT>
                     <a:lnB w="6350" cap="flat" cmpd="sng" algn="ctr">
                       <a:solidFill>
-                        <a:srgbClr val="D8E3EB"/>
+                        <a:srgbClr val="DCDCDC"/>
                       </a:solidFill>
                       <a:prstDash val="solid"/>
                       <a:round/>
@@ -9349,25 +9541,25 @@
                       <a:r>
                         <a:rPr lang="en-US" sz="1200" dirty="0">
                           <a:solidFill>
-                            <a:srgbClr val="1B2A3A"/>
+                            <a:srgbClr val="333333"/>
                           </a:solidFill>
-                          <a:latin typeface="Calibri" pitchFamily="34" charset="0"/>
-                          <a:ea typeface="Calibri" pitchFamily="34" charset="-122"/>
-                          <a:cs typeface="Calibri" pitchFamily="34" charset="-120"/>
+                          <a:latin typeface="Montserrat" pitchFamily="34" charset="0"/>
+                          <a:ea typeface="Montserrat" pitchFamily="34" charset="-122"/>
+                          <a:cs typeface="Montserrat" pitchFamily="34" charset="-120"/>
                         </a:rPr>
                         <a:t>4,20 km</a:t>
                       </a:r>
                       <a:endParaRPr lang="en-US" sz="1200" dirty="0">
-                        <a:latin typeface="Calibri" charset="0"/>
-                        <a:ea typeface="Calibri" charset="0"/>
-                        <a:cs typeface="Calibri" charset="0"/>
+                        <a:latin typeface="Montserrat" charset="0"/>
+                        <a:ea typeface="Montserrat" charset="0"/>
+                        <a:cs typeface="Montserrat" charset="0"/>
                       </a:endParaRPr>
                     </a:p>
                   </a:txBody>
                   <a:tcPr marL="91440" marR="91440" marT="45720" marB="45720">
                     <a:lnL w="6350" cap="flat" cmpd="sng" algn="ctr">
                       <a:solidFill>
-                        <a:srgbClr val="D8E3EB"/>
+                        <a:srgbClr val="DCDCDC"/>
                       </a:solidFill>
                       <a:prstDash val="solid"/>
                       <a:round/>
@@ -9376,7 +9568,7 @@
                     </a:lnL>
                     <a:lnR w="6350" cap="flat" cmpd="sng" algn="ctr">
                       <a:solidFill>
-                        <a:srgbClr val="D8E3EB"/>
+                        <a:srgbClr val="DCDCDC"/>
                       </a:solidFill>
                       <a:prstDash val="solid"/>
                       <a:round/>
@@ -9385,7 +9577,7 @@
                     </a:lnR>
                     <a:lnT w="6350" cap="flat" cmpd="sng" algn="ctr">
                       <a:solidFill>
-                        <a:srgbClr val="D8E3EB"/>
+                        <a:srgbClr val="DCDCDC"/>
                       </a:solidFill>
                       <a:prstDash val="solid"/>
                       <a:round/>
@@ -9394,7 +9586,7 @@
                     </a:lnT>
                     <a:lnB w="6350" cap="flat" cmpd="sng" algn="ctr">
                       <a:solidFill>
-                        <a:srgbClr val="D8E3EB"/>
+                        <a:srgbClr val="DCDCDC"/>
                       </a:solidFill>
                       <a:prstDash val="solid"/>
                       <a:round/>
@@ -9402,7 +9594,7 @@
                       <a:tailEnd type="none" w="med" len="med"/>
                     </a:lnB>
                     <a:solidFill>
-                      <a:srgbClr val="F4F8FB"/>
+                      <a:srgbClr val="F5F5F5"/>
                     </a:solidFill>
                   </a:tcPr>
                 </a:tc>
@@ -9417,25 +9609,25 @@
                       <a:r>
                         <a:rPr lang="en-US" sz="1200" dirty="0">
                           <a:solidFill>
-                            <a:srgbClr val="1B2A3A"/>
+                            <a:srgbClr val="333333"/>
                           </a:solidFill>
-                          <a:latin typeface="Calibri" pitchFamily="34" charset="0"/>
-                          <a:ea typeface="Calibri" pitchFamily="34" charset="-122"/>
-                          <a:cs typeface="Calibri" pitchFamily="34" charset="-120"/>
+                          <a:latin typeface="Montserrat" pitchFamily="34" charset="0"/>
+                          <a:ea typeface="Montserrat" pitchFamily="34" charset="-122"/>
+                          <a:cs typeface="Montserrat" pitchFamily="34" charset="-120"/>
                         </a:rPr>
                         <a:t>0</a:t>
                       </a:r>
                       <a:endParaRPr lang="en-US" sz="1200" dirty="0">
-                        <a:latin typeface="Calibri" charset="0"/>
-                        <a:ea typeface="Calibri" charset="0"/>
-                        <a:cs typeface="Calibri" charset="0"/>
+                        <a:latin typeface="Montserrat" charset="0"/>
+                        <a:ea typeface="Montserrat" charset="0"/>
+                        <a:cs typeface="Montserrat" charset="0"/>
                       </a:endParaRPr>
                     </a:p>
                   </a:txBody>
                   <a:tcPr marL="91440" marR="91440" marT="45720" marB="45720">
                     <a:lnL w="6350" cap="flat" cmpd="sng" algn="ctr">
                       <a:solidFill>
-                        <a:srgbClr val="D8E3EB"/>
+                        <a:srgbClr val="DCDCDC"/>
                       </a:solidFill>
                       <a:prstDash val="solid"/>
                       <a:round/>
@@ -9444,7 +9636,7 @@
                     </a:lnL>
                     <a:lnR w="6350" cap="flat" cmpd="sng" algn="ctr">
                       <a:solidFill>
-                        <a:srgbClr val="D8E3EB"/>
+                        <a:srgbClr val="DCDCDC"/>
                       </a:solidFill>
                       <a:prstDash val="solid"/>
                       <a:round/>
@@ -9453,7 +9645,7 @@
                     </a:lnR>
                     <a:lnT w="6350" cap="flat" cmpd="sng" algn="ctr">
                       <a:solidFill>
-                        <a:srgbClr val="D8E3EB"/>
+                        <a:srgbClr val="DCDCDC"/>
                       </a:solidFill>
                       <a:prstDash val="solid"/>
                       <a:round/>
@@ -9462,7 +9654,7 @@
                     </a:lnT>
                     <a:lnB w="6350" cap="flat" cmpd="sng" algn="ctr">
                       <a:solidFill>
-                        <a:srgbClr val="D8E3EB"/>
+                        <a:srgbClr val="DCDCDC"/>
                       </a:solidFill>
                       <a:prstDash val="solid"/>
                       <a:round/>
@@ -9470,7 +9662,7 @@
                       <a:tailEnd type="none" w="med" len="med"/>
                     </a:lnB>
                     <a:solidFill>
-                      <a:srgbClr val="F4F8FB"/>
+                      <a:srgbClr val="F5F5F5"/>
                     </a:solidFill>
                   </a:tcPr>
                 </a:tc>
@@ -9485,25 +9677,25 @@
                       <a:r>
                         <a:rPr lang="en-US" sz="1200" dirty="0">
                           <a:solidFill>
-                            <a:srgbClr val="1B2A3A"/>
+                            <a:srgbClr val="333333"/>
                           </a:solidFill>
-                          <a:latin typeface="Calibri" pitchFamily="34" charset="0"/>
-                          <a:ea typeface="Calibri" pitchFamily="34" charset="-122"/>
-                          <a:cs typeface="Calibri" pitchFamily="34" charset="-120"/>
+                          <a:latin typeface="Montserrat" pitchFamily="34" charset="0"/>
+                          <a:ea typeface="Montserrat" pitchFamily="34" charset="-122"/>
+                          <a:cs typeface="Montserrat" pitchFamily="34" charset="-120"/>
                         </a:rPr>
                         <a:t>1</a:t>
                       </a:r>
                       <a:endParaRPr lang="en-US" sz="1200" dirty="0">
-                        <a:latin typeface="Calibri" charset="0"/>
-                        <a:ea typeface="Calibri" charset="0"/>
-                        <a:cs typeface="Calibri" charset="0"/>
+                        <a:latin typeface="Montserrat" charset="0"/>
+                        <a:ea typeface="Montserrat" charset="0"/>
+                        <a:cs typeface="Montserrat" charset="0"/>
                       </a:endParaRPr>
                     </a:p>
                   </a:txBody>
                   <a:tcPr marL="91440" marR="91440" marT="45720" marB="45720">
                     <a:lnL w="6350" cap="flat" cmpd="sng" algn="ctr">
                       <a:solidFill>
-                        <a:srgbClr val="D8E3EB"/>
+                        <a:srgbClr val="DCDCDC"/>
                       </a:solidFill>
                       <a:prstDash val="solid"/>
                       <a:round/>
@@ -9512,7 +9704,7 @@
                     </a:lnL>
                     <a:lnR w="6350" cap="flat" cmpd="sng" algn="ctr">
                       <a:solidFill>
-                        <a:srgbClr val="D8E3EB"/>
+                        <a:srgbClr val="DCDCDC"/>
                       </a:solidFill>
                       <a:prstDash val="solid"/>
                       <a:round/>
@@ -9521,7 +9713,7 @@
                     </a:lnR>
                     <a:lnT w="6350" cap="flat" cmpd="sng" algn="ctr">
                       <a:solidFill>
-                        <a:srgbClr val="D8E3EB"/>
+                        <a:srgbClr val="DCDCDC"/>
                       </a:solidFill>
                       <a:prstDash val="solid"/>
                       <a:round/>
@@ -9530,7 +9722,7 @@
                     </a:lnT>
                     <a:lnB w="6350" cap="flat" cmpd="sng" algn="ctr">
                       <a:solidFill>
-                        <a:srgbClr val="D8E3EB"/>
+                        <a:srgbClr val="DCDCDC"/>
                       </a:solidFill>
                       <a:prstDash val="solid"/>
                       <a:round/>
@@ -9538,7 +9730,7 @@
                       <a:tailEnd type="none" w="med" len="med"/>
                     </a:lnB>
                     <a:solidFill>
-                      <a:srgbClr val="F4F8FB"/>
+                      <a:srgbClr val="F5F5F5"/>
                     </a:solidFill>
                   </a:tcPr>
                 </a:tc>
@@ -9553,25 +9745,25 @@
                       <a:r>
                         <a:rPr lang="en-US" sz="1200" dirty="0">
                           <a:solidFill>
-                            <a:srgbClr val="1B2A3A"/>
+                            <a:srgbClr val="333333"/>
                           </a:solidFill>
-                          <a:latin typeface="Calibri" pitchFamily="34" charset="0"/>
-                          <a:ea typeface="Calibri" pitchFamily="34" charset="-122"/>
-                          <a:cs typeface="Calibri" pitchFamily="34" charset="-120"/>
+                          <a:latin typeface="Montserrat" pitchFamily="34" charset="0"/>
+                          <a:ea typeface="Montserrat" pitchFamily="34" charset="-122"/>
+                          <a:cs typeface="Montserrat" pitchFamily="34" charset="-120"/>
                         </a:rPr>
                         <a:t>27,2</a:t>
                       </a:r>
                       <a:endParaRPr lang="en-US" sz="1200" dirty="0">
-                        <a:latin typeface="Calibri" charset="0"/>
-                        <a:ea typeface="Calibri" charset="0"/>
-                        <a:cs typeface="Calibri" charset="0"/>
+                        <a:latin typeface="Montserrat" charset="0"/>
+                        <a:ea typeface="Montserrat" charset="0"/>
+                        <a:cs typeface="Montserrat" charset="0"/>
                       </a:endParaRPr>
                     </a:p>
                   </a:txBody>
                   <a:tcPr marL="91440" marR="91440" marT="45720" marB="45720">
                     <a:lnL w="6350" cap="flat" cmpd="sng" algn="ctr">
                       <a:solidFill>
-                        <a:srgbClr val="D8E3EB"/>
+                        <a:srgbClr val="DCDCDC"/>
                       </a:solidFill>
                       <a:prstDash val="solid"/>
                       <a:round/>
@@ -9580,7 +9772,7 @@
                     </a:lnL>
                     <a:lnR w="6350" cap="flat" cmpd="sng" algn="ctr">
                       <a:solidFill>
-                        <a:srgbClr val="D8E3EB"/>
+                        <a:srgbClr val="DCDCDC"/>
                       </a:solidFill>
                       <a:prstDash val="solid"/>
                       <a:round/>
@@ -9589,7 +9781,7 @@
                     </a:lnR>
                     <a:lnT w="6350" cap="flat" cmpd="sng" algn="ctr">
                       <a:solidFill>
-                        <a:srgbClr val="D8E3EB"/>
+                        <a:srgbClr val="DCDCDC"/>
                       </a:solidFill>
                       <a:prstDash val="solid"/>
                       <a:round/>
@@ -9598,7 +9790,7 @@
                     </a:lnT>
                     <a:lnB w="6350" cap="flat" cmpd="sng" algn="ctr">
                       <a:solidFill>
-                        <a:srgbClr val="D8E3EB"/>
+                        <a:srgbClr val="DCDCDC"/>
                       </a:solidFill>
                       <a:prstDash val="solid"/>
                       <a:round/>
@@ -9606,7 +9798,7 @@
                       <a:tailEnd type="none" w="med" len="med"/>
                     </a:lnB>
                     <a:solidFill>
-                      <a:srgbClr val="F4F8FB"/>
+                      <a:srgbClr val="F5F5F5"/>
                     </a:solidFill>
                   </a:tcPr>
                 </a:tc>
@@ -9621,25 +9813,25 @@
                       <a:r>
                         <a:rPr lang="en-US" sz="1200" dirty="0">
                           <a:solidFill>
-                            <a:srgbClr val="1B2A3A"/>
+                            <a:srgbClr val="333333"/>
                           </a:solidFill>
-                          <a:latin typeface="Calibri" pitchFamily="34" charset="0"/>
-                          <a:ea typeface="Calibri" pitchFamily="34" charset="-122"/>
-                          <a:cs typeface="Calibri" pitchFamily="34" charset="-120"/>
+                          <a:latin typeface="Montserrat" pitchFamily="34" charset="0"/>
+                          <a:ea typeface="Montserrat" pitchFamily="34" charset="-122"/>
+                          <a:cs typeface="Montserrat" pitchFamily="34" charset="-120"/>
                         </a:rPr>
                         <a:t>0</a:t>
                       </a:r>
                       <a:endParaRPr lang="en-US" sz="1200" dirty="0">
-                        <a:latin typeface="Calibri" charset="0"/>
-                        <a:ea typeface="Calibri" charset="0"/>
-                        <a:cs typeface="Calibri" charset="0"/>
+                        <a:latin typeface="Montserrat" charset="0"/>
+                        <a:ea typeface="Montserrat" charset="0"/>
+                        <a:cs typeface="Montserrat" charset="0"/>
                       </a:endParaRPr>
                     </a:p>
                   </a:txBody>
                   <a:tcPr marL="91440" marR="91440" marT="45720" marB="45720">
                     <a:lnL w="6350" cap="flat" cmpd="sng" algn="ctr">
                       <a:solidFill>
-                        <a:srgbClr val="D8E3EB"/>
+                        <a:srgbClr val="DCDCDC"/>
                       </a:solidFill>
                       <a:prstDash val="solid"/>
                       <a:round/>
@@ -9648,7 +9840,7 @@
                     </a:lnL>
                     <a:lnR w="6350" cap="flat" cmpd="sng" algn="ctr">
                       <a:solidFill>
-                        <a:srgbClr val="D8E3EB"/>
+                        <a:srgbClr val="DCDCDC"/>
                       </a:solidFill>
                       <a:prstDash val="solid"/>
                       <a:round/>
@@ -9657,7 +9849,7 @@
                     </a:lnR>
                     <a:lnT w="6350" cap="flat" cmpd="sng" algn="ctr">
                       <a:solidFill>
-                        <a:srgbClr val="D8E3EB"/>
+                        <a:srgbClr val="DCDCDC"/>
                       </a:solidFill>
                       <a:prstDash val="solid"/>
                       <a:round/>
@@ -9666,7 +9858,7 @@
                     </a:lnT>
                     <a:lnB w="6350" cap="flat" cmpd="sng" algn="ctr">
                       <a:solidFill>
-                        <a:srgbClr val="D8E3EB"/>
+                        <a:srgbClr val="DCDCDC"/>
                       </a:solidFill>
                       <a:prstDash val="solid"/>
                       <a:round/>
@@ -9674,7 +9866,7 @@
                       <a:tailEnd type="none" w="med" len="med"/>
                     </a:lnB>
                     <a:solidFill>
-                      <a:srgbClr val="F4F8FB"/>
+                      <a:srgbClr val="F5F5F5"/>
                     </a:solidFill>
                   </a:tcPr>
                 </a:tc>
@@ -9691,25 +9883,25 @@
                       <a:r>
                         <a:rPr lang="en-US" sz="1200" dirty="0">
                           <a:solidFill>
-                            <a:srgbClr val="1B2A3A"/>
+                            <a:srgbClr val="333333"/>
                           </a:solidFill>
-                          <a:latin typeface="Calibri" pitchFamily="34" charset="0"/>
-                          <a:ea typeface="Calibri" pitchFamily="34" charset="-122"/>
-                          <a:cs typeface="Calibri" pitchFamily="34" charset="-120"/>
+                          <a:latin typeface="Montserrat" pitchFamily="34" charset="0"/>
+                          <a:ea typeface="Montserrat" pitchFamily="34" charset="-122"/>
+                          <a:cs typeface="Montserrat" pitchFamily="34" charset="-120"/>
                         </a:rPr>
                         <a:t>12,51 km</a:t>
                       </a:r>
                       <a:endParaRPr lang="en-US" sz="1200" dirty="0">
-                        <a:latin typeface="Calibri" charset="0"/>
-                        <a:ea typeface="Calibri" charset="0"/>
-                        <a:cs typeface="Calibri" charset="0"/>
+                        <a:latin typeface="Montserrat" charset="0"/>
+                        <a:ea typeface="Montserrat" charset="0"/>
+                        <a:cs typeface="Montserrat" charset="0"/>
                       </a:endParaRPr>
                     </a:p>
                   </a:txBody>
                   <a:tcPr marL="91440" marR="91440" marT="45720" marB="45720">
                     <a:lnL w="6350" cap="flat" cmpd="sng" algn="ctr">
                       <a:solidFill>
-                        <a:srgbClr val="D8E3EB"/>
+                        <a:srgbClr val="DCDCDC"/>
                       </a:solidFill>
                       <a:prstDash val="solid"/>
                       <a:round/>
@@ -9718,7 +9910,7 @@
                     </a:lnL>
                     <a:lnR w="6350" cap="flat" cmpd="sng" algn="ctr">
                       <a:solidFill>
-                        <a:srgbClr val="D8E3EB"/>
+                        <a:srgbClr val="DCDCDC"/>
                       </a:solidFill>
                       <a:prstDash val="solid"/>
                       <a:round/>
@@ -9727,7 +9919,7 @@
                     </a:lnR>
                     <a:lnT w="6350" cap="flat" cmpd="sng" algn="ctr">
                       <a:solidFill>
-                        <a:srgbClr val="D8E3EB"/>
+                        <a:srgbClr val="DCDCDC"/>
                       </a:solidFill>
                       <a:prstDash val="solid"/>
                       <a:round/>
@@ -9736,7 +9928,7 @@
                     </a:lnT>
                     <a:lnB w="6350" cap="flat" cmpd="sng" algn="ctr">
                       <a:solidFill>
-                        <a:srgbClr val="D8E3EB"/>
+                        <a:srgbClr val="DCDCDC"/>
                       </a:solidFill>
                       <a:prstDash val="solid"/>
                       <a:round/>
@@ -9759,25 +9951,25 @@
                       <a:r>
                         <a:rPr lang="en-US" sz="1200" dirty="0">
                           <a:solidFill>
-                            <a:srgbClr val="1B2A3A"/>
+                            <a:srgbClr val="333333"/>
                           </a:solidFill>
-                          <a:latin typeface="Calibri" pitchFamily="34" charset="0"/>
-                          <a:ea typeface="Calibri" pitchFamily="34" charset="-122"/>
-                          <a:cs typeface="Calibri" pitchFamily="34" charset="-120"/>
+                          <a:latin typeface="Montserrat" pitchFamily="34" charset="0"/>
+                          <a:ea typeface="Montserrat" pitchFamily="34" charset="-122"/>
+                          <a:cs typeface="Montserrat" pitchFamily="34" charset="-120"/>
                         </a:rPr>
                         <a:t>0</a:t>
                       </a:r>
                       <a:endParaRPr lang="en-US" sz="1200" dirty="0">
-                        <a:latin typeface="Calibri" charset="0"/>
-                        <a:ea typeface="Calibri" charset="0"/>
-                        <a:cs typeface="Calibri" charset="0"/>
+                        <a:latin typeface="Montserrat" charset="0"/>
+                        <a:ea typeface="Montserrat" charset="0"/>
+                        <a:cs typeface="Montserrat" charset="0"/>
                       </a:endParaRPr>
                     </a:p>
                   </a:txBody>
                   <a:tcPr marL="91440" marR="91440" marT="45720" marB="45720">
                     <a:lnL w="6350" cap="flat" cmpd="sng" algn="ctr">
                       <a:solidFill>
-                        <a:srgbClr val="D8E3EB"/>
+                        <a:srgbClr val="DCDCDC"/>
                       </a:solidFill>
                       <a:prstDash val="solid"/>
                       <a:round/>
@@ -9786,7 +9978,7 @@
                     </a:lnL>
                     <a:lnR w="6350" cap="flat" cmpd="sng" algn="ctr">
                       <a:solidFill>
-                        <a:srgbClr val="D8E3EB"/>
+                        <a:srgbClr val="DCDCDC"/>
                       </a:solidFill>
                       <a:prstDash val="solid"/>
                       <a:round/>
@@ -9795,7 +9987,7 @@
                     </a:lnR>
                     <a:lnT w="6350" cap="flat" cmpd="sng" algn="ctr">
                       <a:solidFill>
-                        <a:srgbClr val="D8E3EB"/>
+                        <a:srgbClr val="DCDCDC"/>
                       </a:solidFill>
                       <a:prstDash val="solid"/>
                       <a:round/>
@@ -9804,7 +9996,7 @@
                     </a:lnT>
                     <a:lnB w="6350" cap="flat" cmpd="sng" algn="ctr">
                       <a:solidFill>
-                        <a:srgbClr val="D8E3EB"/>
+                        <a:srgbClr val="DCDCDC"/>
                       </a:solidFill>
                       <a:prstDash val="solid"/>
                       <a:round/>
@@ -9827,25 +10019,25 @@
                       <a:r>
                         <a:rPr lang="en-US" sz="1200" dirty="0">
                           <a:solidFill>
-                            <a:srgbClr val="1B2A3A"/>
+                            <a:srgbClr val="333333"/>
                           </a:solidFill>
-                          <a:latin typeface="Calibri" pitchFamily="34" charset="0"/>
-                          <a:ea typeface="Calibri" pitchFamily="34" charset="-122"/>
-                          <a:cs typeface="Calibri" pitchFamily="34" charset="-120"/>
+                          <a:latin typeface="Montserrat" pitchFamily="34" charset="0"/>
+                          <a:ea typeface="Montserrat" pitchFamily="34" charset="-122"/>
+                          <a:cs typeface="Montserrat" pitchFamily="34" charset="-120"/>
                         </a:rPr>
                         <a:t>1</a:t>
                       </a:r>
                       <a:endParaRPr lang="en-US" sz="1200" dirty="0">
-                        <a:latin typeface="Calibri" charset="0"/>
-                        <a:ea typeface="Calibri" charset="0"/>
-                        <a:cs typeface="Calibri" charset="0"/>
+                        <a:latin typeface="Montserrat" charset="0"/>
+                        <a:ea typeface="Montserrat" charset="0"/>
+                        <a:cs typeface="Montserrat" charset="0"/>
                       </a:endParaRPr>
                     </a:p>
                   </a:txBody>
                   <a:tcPr marL="91440" marR="91440" marT="45720" marB="45720">
                     <a:lnL w="6350" cap="flat" cmpd="sng" algn="ctr">
                       <a:solidFill>
-                        <a:srgbClr val="D8E3EB"/>
+                        <a:srgbClr val="DCDCDC"/>
                       </a:solidFill>
                       <a:prstDash val="solid"/>
                       <a:round/>
@@ -9854,7 +10046,7 @@
                     </a:lnL>
                     <a:lnR w="6350" cap="flat" cmpd="sng" algn="ctr">
                       <a:solidFill>
-                        <a:srgbClr val="D8E3EB"/>
+                        <a:srgbClr val="DCDCDC"/>
                       </a:solidFill>
                       <a:prstDash val="solid"/>
                       <a:round/>
@@ -9863,7 +10055,7 @@
                     </a:lnR>
                     <a:lnT w="6350" cap="flat" cmpd="sng" algn="ctr">
                       <a:solidFill>
-                        <a:srgbClr val="D8E3EB"/>
+                        <a:srgbClr val="DCDCDC"/>
                       </a:solidFill>
                       <a:prstDash val="solid"/>
                       <a:round/>
@@ -9872,7 +10064,7 @@
                     </a:lnT>
                     <a:lnB w="6350" cap="flat" cmpd="sng" algn="ctr">
                       <a:solidFill>
-                        <a:srgbClr val="D8E3EB"/>
+                        <a:srgbClr val="DCDCDC"/>
                       </a:solidFill>
                       <a:prstDash val="solid"/>
                       <a:round/>
@@ -9895,25 +10087,25 @@
                       <a:r>
                         <a:rPr lang="en-US" sz="1200" dirty="0">
                           <a:solidFill>
-                            <a:srgbClr val="1B2A3A"/>
+                            <a:srgbClr val="333333"/>
                           </a:solidFill>
-                          <a:latin typeface="Calibri" pitchFamily="34" charset="0"/>
-                          <a:ea typeface="Calibri" pitchFamily="34" charset="-122"/>
-                          <a:cs typeface="Calibri" pitchFamily="34" charset="-120"/>
+                          <a:latin typeface="Montserrat" pitchFamily="34" charset="0"/>
+                          <a:ea typeface="Montserrat" pitchFamily="34" charset="-122"/>
+                          <a:cs typeface="Montserrat" pitchFamily="34" charset="-120"/>
                         </a:rPr>
                         <a:t>48,4</a:t>
                       </a:r>
                       <a:endParaRPr lang="en-US" sz="1200" dirty="0">
-                        <a:latin typeface="Calibri" charset="0"/>
-                        <a:ea typeface="Calibri" charset="0"/>
-                        <a:cs typeface="Calibri" charset="0"/>
+                        <a:latin typeface="Montserrat" charset="0"/>
+                        <a:ea typeface="Montserrat" charset="0"/>
+                        <a:cs typeface="Montserrat" charset="0"/>
                       </a:endParaRPr>
                     </a:p>
                   </a:txBody>
                   <a:tcPr marL="91440" marR="91440" marT="45720" marB="45720">
                     <a:lnL w="6350" cap="flat" cmpd="sng" algn="ctr">
                       <a:solidFill>
-                        <a:srgbClr val="D8E3EB"/>
+                        <a:srgbClr val="DCDCDC"/>
                       </a:solidFill>
                       <a:prstDash val="solid"/>
                       <a:round/>
@@ -9922,7 +10114,7 @@
                     </a:lnL>
                     <a:lnR w="6350" cap="flat" cmpd="sng" algn="ctr">
                       <a:solidFill>
-                        <a:srgbClr val="D8E3EB"/>
+                        <a:srgbClr val="DCDCDC"/>
                       </a:solidFill>
                       <a:prstDash val="solid"/>
                       <a:round/>
@@ -9931,7 +10123,7 @@
                     </a:lnR>
                     <a:lnT w="6350" cap="flat" cmpd="sng" algn="ctr">
                       <a:solidFill>
-                        <a:srgbClr val="D8E3EB"/>
+                        <a:srgbClr val="DCDCDC"/>
                       </a:solidFill>
                       <a:prstDash val="solid"/>
                       <a:round/>
@@ -9940,7 +10132,7 @@
                     </a:lnT>
                     <a:lnB w="6350" cap="flat" cmpd="sng" algn="ctr">
                       <a:solidFill>
-                        <a:srgbClr val="D8E3EB"/>
+                        <a:srgbClr val="DCDCDC"/>
                       </a:solidFill>
                       <a:prstDash val="solid"/>
                       <a:round/>
@@ -9963,25 +10155,25 @@
                       <a:r>
                         <a:rPr lang="en-US" sz="1200" dirty="0">
                           <a:solidFill>
-                            <a:srgbClr val="1B2A3A"/>
+                            <a:srgbClr val="333333"/>
                           </a:solidFill>
-                          <a:latin typeface="Calibri" pitchFamily="34" charset="0"/>
-                          <a:ea typeface="Calibri" pitchFamily="34" charset="-122"/>
-                          <a:cs typeface="Calibri" pitchFamily="34" charset="-120"/>
+                          <a:latin typeface="Montserrat" pitchFamily="34" charset="0"/>
+                          <a:ea typeface="Montserrat" pitchFamily="34" charset="-122"/>
+                          <a:cs typeface="Montserrat" pitchFamily="34" charset="-120"/>
                         </a:rPr>
                         <a:t>0</a:t>
                       </a:r>
                       <a:endParaRPr lang="en-US" sz="1200" dirty="0">
-                        <a:latin typeface="Calibri" charset="0"/>
-                        <a:ea typeface="Calibri" charset="0"/>
-                        <a:cs typeface="Calibri" charset="0"/>
+                        <a:latin typeface="Montserrat" charset="0"/>
+                        <a:ea typeface="Montserrat" charset="0"/>
+                        <a:cs typeface="Montserrat" charset="0"/>
                       </a:endParaRPr>
                     </a:p>
                   </a:txBody>
                   <a:tcPr marL="91440" marR="91440" marT="45720" marB="45720">
                     <a:lnL w="6350" cap="flat" cmpd="sng" algn="ctr">
                       <a:solidFill>
-                        <a:srgbClr val="D8E3EB"/>
+                        <a:srgbClr val="DCDCDC"/>
                       </a:solidFill>
                       <a:prstDash val="solid"/>
                       <a:round/>
@@ -9990,7 +10182,7 @@
                     </a:lnL>
                     <a:lnR w="6350" cap="flat" cmpd="sng" algn="ctr">
                       <a:solidFill>
-                        <a:srgbClr val="D8E3EB"/>
+                        <a:srgbClr val="DCDCDC"/>
                       </a:solidFill>
                       <a:prstDash val="solid"/>
                       <a:round/>
@@ -9999,7 +10191,7 @@
                     </a:lnR>
                     <a:lnT w="6350" cap="flat" cmpd="sng" algn="ctr">
                       <a:solidFill>
-                        <a:srgbClr val="D8E3EB"/>
+                        <a:srgbClr val="DCDCDC"/>
                       </a:solidFill>
                       <a:prstDash val="solid"/>
                       <a:round/>
@@ -10008,7 +10200,7 @@
                     </a:lnT>
                     <a:lnB w="6350" cap="flat" cmpd="sng" algn="ctr">
                       <a:solidFill>
-                        <a:srgbClr val="D8E3EB"/>
+                        <a:srgbClr val="DCDCDC"/>
                       </a:solidFill>
                       <a:prstDash val="solid"/>
                       <a:round/>
@@ -10027,7 +10219,7 @@
       </p:graphicFrame>
       <p:sp>
         <p:nvSpPr>
-          <p:cNvPr id="20" name="Text 17"/>
+          <p:cNvPr id="21" name="Text 17"/>
           <p:cNvSpPr txBox="1"/>
           <p:nvPr/>
         </p:nvSpPr>
@@ -10052,11 +10244,11 @@
             <a:r>
               <a:rPr lang="en-US" sz="1250" i="1" dirty="0">
                 <a:solidFill>
-                  <a:srgbClr val="5A6B7B"/>
-                </a:solidFill>
-                <a:latin typeface="Calibri" pitchFamily="34" charset="0"/>
-                <a:ea typeface="Calibri" pitchFamily="34" charset="-122"/>
-                <a:cs typeface="Calibri" pitchFamily="34" charset="-120"/>
+                  <a:srgbClr val="6E6E6E"/>
+                </a:solidFill>
+                <a:latin typeface="Montserrat" pitchFamily="34" charset="0"/>
+                <a:ea typeface="Montserrat" pitchFamily="34" charset="-122"/>
+                <a:cs typeface="Montserrat" pitchFamily="34" charset="-120"/>
               </a:rPr>
               <a:t>A última coluna é o que queremos prever: vale 1 quando o tempo passa de 60 minutos.</a:t>
             </a:r>
@@ -10111,7 +10303,7 @@
             <a:avLst/>
           </a:prstGeom>
           <a:solidFill>
-            <a:srgbClr val="1C7293"/>
+            <a:srgbClr val="1A1A1A"/>
           </a:solidFill>
           <a:ln/>
         </p:spPr>
@@ -10145,9 +10337,9 @@
                 <a:solidFill>
                   <a:srgbClr val="FFFFFF"/>
                 </a:solidFill>
-                <a:latin typeface="Cambria" pitchFamily="34" charset="0"/>
-                <a:ea typeface="Cambria" pitchFamily="34" charset="-122"/>
-                <a:cs typeface="Cambria" pitchFamily="34" charset="-120"/>
+                <a:latin typeface="Montserrat" pitchFamily="34" charset="0"/>
+                <a:ea typeface="Montserrat" pitchFamily="34" charset="-122"/>
+                <a:cs typeface="Montserrat" pitchFamily="34" charset="-120"/>
               </a:rPr>
               <a:t>4</a:t>
             </a:r>
@@ -10164,7 +10356,7 @@
         <p:spPr>
           <a:xfrm>
             <a:off x="1298448" y="329184"/>
-            <a:ext cx="10332720" cy="658368"/>
+            <a:ext cx="9235440" cy="658368"/>
           </a:xfrm>
           <a:prstGeom prst="rect">
             <a:avLst/>
@@ -10182,60 +10374,21 @@
             <a:r>
               <a:rPr lang="en-US" sz="3000" b="1" dirty="0">
                 <a:solidFill>
-                  <a:srgbClr val="21295C"/>
-                </a:solidFill>
-                <a:latin typeface="Cambria" pitchFamily="34" charset="0"/>
-                <a:ea typeface="Cambria" pitchFamily="34" charset="-122"/>
-                <a:cs typeface="Cambria" pitchFamily="34" charset="-120"/>
+                  <a:srgbClr val="1A1A1A"/>
+                </a:solidFill>
+                <a:latin typeface="Montserrat" pitchFamily="34" charset="0"/>
+                <a:ea typeface="Montserrat" pitchFamily="34" charset="-122"/>
+                <a:cs typeface="Montserrat" pitchFamily="34" charset="-120"/>
               </a:rPr>
               <a:t>Probabilidade condicional na prática</a:t>
             </a:r>
             <a:endParaRPr lang="en-US" sz="3000" dirty="0"/>
-          </a:p>
-        </p:txBody>
-      </p:sp>
-      <p:sp>
-        <p:nvSpPr>
-          <p:cNvPr id="5" name="Text 3"/>
-          <p:cNvSpPr txBox="1"/>
-          <p:nvPr/>
-        </p:nvSpPr>
-        <p:spPr>
-          <a:xfrm>
-            <a:off x="1298448" y="969264"/>
-            <a:ext cx="10332720" cy="347472"/>
-          </a:xfrm>
-          <a:prstGeom prst="rect">
-            <a:avLst/>
-          </a:prstGeom>
-          <a:noFill/>
-          <a:ln/>
-        </p:spPr>
-        <p:txBody>
-          <a:bodyPr wrap="square" lIns="0" tIns="0" rIns="0" bIns="0" rtlCol="0" anchor="ctr"/>
-          <a:lstStyle/>
-          <a:p>
-            <a:pPr indent="0" marL="0">
-              <a:buNone/>
-            </a:pPr>
-            <a:r>
-              <a:rPr lang="en-US" sz="1400" i="1" dirty="0">
-                <a:solidFill>
-                  <a:srgbClr val="5A6B7B"/>
-                </a:solidFill>
-                <a:latin typeface="Calibri" pitchFamily="34" charset="0"/>
-                <a:ea typeface="Calibri" pitchFamily="34" charset="-122"/>
-                <a:cs typeface="Calibri" pitchFamily="34" charset="-120"/>
-              </a:rPr>
-              <a:t>Rodando o código: o risco muda muito de um cenário para outro</a:t>
-            </a:r>
-            <a:endParaRPr lang="en-US" sz="1400" dirty="0"/>
           </a:p>
         </p:txBody>
       </p:sp>
       <p:pic>
         <p:nvPicPr>
-          <p:cNvPr id="6" name="Image 0" descr="/home/user/Projeto-Python/checkpoint4/graficos/g1_probabilidade_condicional.png">    </p:cNvPr>
+          <p:cNvPr id="5" name="Image 0" descr="/home/user/Projeto-Python/.claude/skills/fiap-doc/assets/header-logo.png">    </p:cNvPr>
           <p:cNvPicPr>
             <a:picLocks noChangeAspect="1"/>
           </p:cNvPicPr>
@@ -10249,6 +10402,69 @@
         </p:blipFill>
         <p:spPr>
           <a:xfrm>
+            <a:off x="10716768" y="402336"/>
+            <a:ext cx="896112" cy="422453"/>
+          </a:xfrm>
+          <a:prstGeom prst="rect">
+            <a:avLst/>
+          </a:prstGeom>
+        </p:spPr>
+      </p:pic>
+      <p:sp>
+        <p:nvSpPr>
+          <p:cNvPr id="6" name="Text 3"/>
+          <p:cNvSpPr txBox="1"/>
+          <p:nvPr/>
+        </p:nvSpPr>
+        <p:spPr>
+          <a:xfrm>
+            <a:off x="1298448" y="969264"/>
+            <a:ext cx="10332720" cy="347472"/>
+          </a:xfrm>
+          <a:prstGeom prst="rect">
+            <a:avLst/>
+          </a:prstGeom>
+          <a:noFill/>
+          <a:ln/>
+        </p:spPr>
+        <p:txBody>
+          <a:bodyPr wrap="square" lIns="0" tIns="0" rIns="0" bIns="0" rtlCol="0" anchor="ctr"/>
+          <a:lstStyle/>
+          <a:p>
+            <a:pPr indent="0" marL="0">
+              <a:buNone/>
+            </a:pPr>
+            <a:r>
+              <a:rPr lang="en-US" sz="1400" i="1" dirty="0">
+                <a:solidFill>
+                  <a:srgbClr val="6E6E6E"/>
+                </a:solidFill>
+                <a:latin typeface="Montserrat" pitchFamily="34" charset="0"/>
+                <a:ea typeface="Montserrat" pitchFamily="34" charset="-122"/>
+                <a:cs typeface="Montserrat" pitchFamily="34" charset="-120"/>
+              </a:rPr>
+              <a:t>Rodando o código: o risco muda muito de um cenário para outro</a:t>
+            </a:r>
+            <a:endParaRPr lang="en-US" sz="1400" dirty="0"/>
+          </a:p>
+        </p:txBody>
+      </p:sp>
+      <p:pic>
+        <p:nvPicPr>
+          <p:cNvPr id="7" name="Image 1" descr="/home/user/Projeto-Python/checkpoint4/graficos/g1_probabilidade_condicional.png">    </p:cNvPr>
+          <p:cNvPicPr>
+            <a:picLocks noChangeAspect="1"/>
+          </p:cNvPicPr>
+          <p:nvPr/>
+        </p:nvPicPr>
+        <p:blipFill>
+          <a:blip r:embed="rId2"/>
+          <a:stretch>
+            <a:fillRect/>
+          </a:stretch>
+        </p:blipFill>
+        <p:spPr>
+          <a:xfrm>
             <a:off x="502920" y="1481328"/>
             <a:ext cx="6858000" cy="3840480"/>
           </a:xfrm>
@@ -10259,7 +10475,7 @@
       </p:pic>
       <p:sp>
         <p:nvSpPr>
-          <p:cNvPr id="7" name="Shape 4"/>
+          <p:cNvPr id="8" name="Shape 4"/>
           <p:cNvSpPr/>
           <p:nvPr/>
         </p:nvSpPr>
@@ -10274,11 +10490,11 @@
             </a:avLst>
           </a:prstGeom>
           <a:solidFill>
-            <a:srgbClr val="0E2233"/>
+            <a:srgbClr val="1A1A1A"/>
           </a:solidFill>
           <a:ln w="12700">
             <a:solidFill>
-              <a:srgbClr val="0E2233"/>
+              <a:srgbClr val="1A1A1A"/>
             </a:solidFill>
             <a:prstDash val="solid"/>
           </a:ln>
@@ -10286,7 +10502,7 @@
       </p:sp>
       <p:sp>
         <p:nvSpPr>
-          <p:cNvPr id="8" name="Text 5"/>
+          <p:cNvPr id="9" name="Text 5"/>
           <p:cNvSpPr txBox="1"/>
           <p:nvPr/>
         </p:nvSpPr>
@@ -10311,7 +10527,7 @@
             <a:r>
               <a:rPr lang="en-US" sz="1100" dirty="0">
                 <a:solidFill>
-                  <a:srgbClr val="DCE9F2"/>
+                  <a:srgbClr val="EDEDED"/>
                 </a:solidFill>
                 <a:latin typeface="Courier New" pitchFamily="34" charset="0"/>
                 <a:ea typeface="Courier New" pitchFamily="34" charset="-122"/>
@@ -10325,7 +10541,7 @@
       </p:sp>
       <p:sp>
         <p:nvSpPr>
-          <p:cNvPr id="9" name="Shape 6"/>
+          <p:cNvPr id="10" name="Shape 6"/>
           <p:cNvSpPr/>
           <p:nvPr/>
         </p:nvSpPr>
@@ -10340,11 +10556,11 @@
             </a:avLst>
           </a:prstGeom>
           <a:solidFill>
-            <a:srgbClr val="EDF3F7"/>
+            <a:srgbClr val="F5F5F5"/>
           </a:solidFill>
           <a:ln w="12700">
             <a:solidFill>
-              <a:srgbClr val="EDF3F7"/>
+              <a:srgbClr val="F5F5F5"/>
             </a:solidFill>
             <a:prstDash val="solid"/>
           </a:ln>
@@ -10352,7 +10568,7 @@
       </p:sp>
       <p:sp>
         <p:nvSpPr>
-          <p:cNvPr id="10" name="Text 7"/>
+          <p:cNvPr id="11" name="Text 7"/>
           <p:cNvSpPr txBox="1"/>
           <p:nvPr/>
         </p:nvSpPr>
@@ -10377,11 +10593,11 @@
             <a:r>
               <a:rPr lang="en-US" sz="1050" b="1" spc="120" kern="0" dirty="0">
                 <a:solidFill>
-                  <a:srgbClr val="1C7293"/>
-                </a:solidFill>
-                <a:latin typeface="Calibri" pitchFamily="34" charset="0"/>
-                <a:ea typeface="Calibri" pitchFamily="34" charset="-122"/>
-                <a:cs typeface="Calibri" pitchFamily="34" charset="-120"/>
+                  <a:srgbClr val="1A1A1A"/>
+                </a:solidFill>
+                <a:latin typeface="Montserrat" pitchFamily="34" charset="0"/>
+                <a:ea typeface="Montserrat" pitchFamily="34" charset="-122"/>
+                <a:cs typeface="Montserrat" pitchFamily="34" charset="-120"/>
               </a:rPr>
               <a:t>LEITURA DOS RESULTADOS</a:t>
             </a:r>
@@ -10391,7 +10607,7 @@
       </p:sp>
       <p:sp>
         <p:nvSpPr>
-          <p:cNvPr id="11" name="Text 8"/>
+          <p:cNvPr id="12" name="Text 8"/>
           <p:cNvSpPr txBox="1"/>
           <p:nvPr/>
         </p:nvSpPr>
@@ -10416,11 +10632,11 @@
             <a:r>
               <a:rPr lang="en-US" sz="1300" dirty="0">
                 <a:solidFill>
-                  <a:srgbClr val="1B2A3A"/>
-                </a:solidFill>
-                <a:latin typeface="Calibri" pitchFamily="34" charset="0"/>
-                <a:ea typeface="Calibri" pitchFamily="34" charset="-122"/>
-                <a:cs typeface="Calibri" pitchFamily="34" charset="-120"/>
+                  <a:srgbClr val="333333"/>
+                </a:solidFill>
+                <a:latin typeface="Montserrat" pitchFamily="34" charset="0"/>
+                <a:ea typeface="Montserrat" pitchFamily="34" charset="-122"/>
+                <a:cs typeface="Montserrat" pitchFamily="34" charset="-120"/>
               </a:rPr>
               <a:t>P(atraso)</a:t>
             </a:r>
@@ -10430,7 +10646,7 @@
       </p:sp>
       <p:sp>
         <p:nvSpPr>
-          <p:cNvPr id="12" name="Text 9"/>
+          <p:cNvPr id="13" name="Text 9"/>
           <p:cNvSpPr txBox="1"/>
           <p:nvPr/>
         </p:nvSpPr>
@@ -10455,11 +10671,11 @@
             <a:r>
               <a:rPr lang="en-US" sz="1500" b="1" dirty="0">
                 <a:solidFill>
-                  <a:srgbClr val="065A82"/>
-                </a:solidFill>
-                <a:latin typeface="Cambria" pitchFamily="34" charset="0"/>
-                <a:ea typeface="Cambria" pitchFamily="34" charset="-122"/>
-                <a:cs typeface="Cambria" pitchFamily="34" charset="-120"/>
+                  <a:srgbClr val="ED1165"/>
+                </a:solidFill>
+                <a:latin typeface="Montserrat" pitchFamily="34" charset="0"/>
+                <a:ea typeface="Montserrat" pitchFamily="34" charset="-122"/>
+                <a:cs typeface="Montserrat" pitchFamily="34" charset="-120"/>
               </a:rPr>
               <a:t>22,5%</a:t>
             </a:r>
@@ -10469,7 +10685,7 @@
       </p:sp>
       <p:sp>
         <p:nvSpPr>
-          <p:cNvPr id="13" name="Text 10"/>
+          <p:cNvPr id="14" name="Text 10"/>
           <p:cNvSpPr txBox="1"/>
           <p:nvPr/>
         </p:nvSpPr>
@@ -10494,11 +10710,11 @@
             <a:r>
               <a:rPr lang="en-US" sz="1300" dirty="0">
                 <a:solidFill>
-                  <a:srgbClr val="1B2A3A"/>
-                </a:solidFill>
-                <a:latin typeface="Calibri" pitchFamily="34" charset="0"/>
-                <a:ea typeface="Calibri" pitchFamily="34" charset="-122"/>
-                <a:cs typeface="Calibri" pitchFamily="34" charset="-120"/>
+                  <a:srgbClr val="333333"/>
+                </a:solidFill>
+                <a:latin typeface="Montserrat" pitchFamily="34" charset="0"/>
+                <a:ea typeface="Montserrat" pitchFamily="34" charset="-122"/>
+                <a:cs typeface="Montserrat" pitchFamily="34" charset="-120"/>
               </a:rPr>
               <a:t>P(atraso | sem chuva)</a:t>
             </a:r>
@@ -10508,7 +10724,7 @@
       </p:sp>
       <p:sp>
         <p:nvSpPr>
-          <p:cNvPr id="14" name="Text 11"/>
+          <p:cNvPr id="15" name="Text 11"/>
           <p:cNvSpPr txBox="1"/>
           <p:nvPr/>
         </p:nvSpPr>
@@ -10533,11 +10749,11 @@
             <a:r>
               <a:rPr lang="en-US" sz="1500" b="1" dirty="0">
                 <a:solidFill>
-                  <a:srgbClr val="065A82"/>
-                </a:solidFill>
-                <a:latin typeface="Cambria" pitchFamily="34" charset="0"/>
-                <a:ea typeface="Cambria" pitchFamily="34" charset="-122"/>
-                <a:cs typeface="Cambria" pitchFamily="34" charset="-120"/>
+                  <a:srgbClr val="ED1165"/>
+                </a:solidFill>
+                <a:latin typeface="Montserrat" pitchFamily="34" charset="0"/>
+                <a:ea typeface="Montserrat" pitchFamily="34" charset="-122"/>
+                <a:cs typeface="Montserrat" pitchFamily="34" charset="-120"/>
               </a:rPr>
               <a:t>14,3%</a:t>
             </a:r>
@@ -10547,7 +10763,7 @@
       </p:sp>
       <p:sp>
         <p:nvSpPr>
-          <p:cNvPr id="15" name="Text 12"/>
+          <p:cNvPr id="16" name="Text 12"/>
           <p:cNvSpPr txBox="1"/>
           <p:nvPr/>
         </p:nvSpPr>
@@ -10572,11 +10788,11 @@
             <a:r>
               <a:rPr lang="en-US" sz="1300" dirty="0">
                 <a:solidFill>
-                  <a:srgbClr val="1B2A3A"/>
-                </a:solidFill>
-                <a:latin typeface="Calibri" pitchFamily="34" charset="0"/>
-                <a:ea typeface="Calibri" pitchFamily="34" charset="-122"/>
-                <a:cs typeface="Calibri" pitchFamily="34" charset="-120"/>
+                  <a:srgbClr val="333333"/>
+                </a:solidFill>
+                <a:latin typeface="Montserrat" pitchFamily="34" charset="0"/>
+                <a:ea typeface="Montserrat" pitchFamily="34" charset="-122"/>
+                <a:cs typeface="Montserrat" pitchFamily="34" charset="-120"/>
               </a:rPr>
               <a:t>P(atraso | chuva)</a:t>
             </a:r>
@@ -10586,7 +10802,7 @@
       </p:sp>
       <p:sp>
         <p:nvSpPr>
-          <p:cNvPr id="16" name="Text 13"/>
+          <p:cNvPr id="17" name="Text 13"/>
           <p:cNvSpPr txBox="1"/>
           <p:nvPr/>
         </p:nvSpPr>
@@ -10611,11 +10827,11 @@
             <a:r>
               <a:rPr lang="en-US" sz="1500" b="1" dirty="0">
                 <a:solidFill>
-                  <a:srgbClr val="D1495B"/>
-                </a:solidFill>
-                <a:latin typeface="Cambria" pitchFamily="34" charset="0"/>
-                <a:ea typeface="Cambria" pitchFamily="34" charset="-122"/>
-                <a:cs typeface="Cambria" pitchFamily="34" charset="-120"/>
+                  <a:srgbClr val="ED1165"/>
+                </a:solidFill>
+                <a:latin typeface="Montserrat" pitchFamily="34" charset="0"/>
+                <a:ea typeface="Montserrat" pitchFamily="34" charset="-122"/>
+                <a:cs typeface="Montserrat" pitchFamily="34" charset="-120"/>
               </a:rPr>
               <a:t>41,0%</a:t>
             </a:r>
@@ -10625,7 +10841,7 @@
       </p:sp>
       <p:sp>
         <p:nvSpPr>
-          <p:cNvPr id="17" name="Text 14"/>
+          <p:cNvPr id="18" name="Text 14"/>
           <p:cNvSpPr txBox="1"/>
           <p:nvPr/>
         </p:nvSpPr>
@@ -10650,11 +10866,11 @@
             <a:r>
               <a:rPr lang="en-US" sz="1300" dirty="0">
                 <a:solidFill>
-                  <a:srgbClr val="1B2A3A"/>
-                </a:solidFill>
-                <a:latin typeface="Calibri" pitchFamily="34" charset="0"/>
-                <a:ea typeface="Calibri" pitchFamily="34" charset="-122"/>
-                <a:cs typeface="Calibri" pitchFamily="34" charset="-120"/>
+                  <a:srgbClr val="333333"/>
+                </a:solidFill>
+                <a:latin typeface="Montserrat" pitchFamily="34" charset="0"/>
+                <a:ea typeface="Montserrat" pitchFamily="34" charset="-122"/>
+                <a:cs typeface="Montserrat" pitchFamily="34" charset="-120"/>
               </a:rPr>
               <a:t>P(atraso | pico)</a:t>
             </a:r>
@@ -10664,7 +10880,7 @@
       </p:sp>
       <p:sp>
         <p:nvSpPr>
-          <p:cNvPr id="18" name="Text 15"/>
+          <p:cNvPr id="19" name="Text 15"/>
           <p:cNvSpPr txBox="1"/>
           <p:nvPr/>
         </p:nvSpPr>
@@ -10689,11 +10905,11 @@
             <a:r>
               <a:rPr lang="en-US" sz="1500" b="1" dirty="0">
                 <a:solidFill>
-                  <a:srgbClr val="D1495B"/>
-                </a:solidFill>
-                <a:latin typeface="Cambria" pitchFamily="34" charset="0"/>
-                <a:ea typeface="Cambria" pitchFamily="34" charset="-122"/>
-                <a:cs typeface="Cambria" pitchFamily="34" charset="-120"/>
+                  <a:srgbClr val="ED1165"/>
+                </a:solidFill>
+                <a:latin typeface="Montserrat" pitchFamily="34" charset="0"/>
+                <a:ea typeface="Montserrat" pitchFamily="34" charset="-122"/>
+                <a:cs typeface="Montserrat" pitchFamily="34" charset="-120"/>
               </a:rPr>
               <a:t>36,1%</a:t>
             </a:r>
@@ -10703,7 +10919,7 @@
       </p:sp>
       <p:sp>
         <p:nvSpPr>
-          <p:cNvPr id="19" name="Text 16"/>
+          <p:cNvPr id="20" name="Text 16"/>
           <p:cNvSpPr txBox="1"/>
           <p:nvPr/>
         </p:nvSpPr>
@@ -10728,11 +10944,11 @@
             <a:r>
               <a:rPr lang="en-US" sz="1300" b="1" dirty="0">
                 <a:solidFill>
-                  <a:srgbClr val="1B2A3A"/>
-                </a:solidFill>
-                <a:latin typeface="Calibri" pitchFamily="34" charset="0"/>
-                <a:ea typeface="Calibri" pitchFamily="34" charset="-122"/>
-                <a:cs typeface="Calibri" pitchFamily="34" charset="-120"/>
+                  <a:srgbClr val="333333"/>
+                </a:solidFill>
+                <a:latin typeface="Montserrat" pitchFamily="34" charset="0"/>
+                <a:ea typeface="Montserrat" pitchFamily="34" charset="-122"/>
+                <a:cs typeface="Montserrat" pitchFamily="34" charset="-120"/>
               </a:rPr>
               <a:t>P(atraso | chuva e pico)</a:t>
             </a:r>
@@ -10742,7 +10958,7 @@
       </p:sp>
       <p:sp>
         <p:nvSpPr>
-          <p:cNvPr id="20" name="Text 17"/>
+          <p:cNvPr id="21" name="Text 17"/>
           <p:cNvSpPr txBox="1"/>
           <p:nvPr/>
         </p:nvSpPr>
@@ -10767,11 +10983,11 @@
             <a:r>
               <a:rPr lang="en-US" sz="1500" b="1" dirty="0">
                 <a:solidFill>
-                  <a:srgbClr val="D1495B"/>
-                </a:solidFill>
-                <a:latin typeface="Cambria" pitchFamily="34" charset="0"/>
-                <a:ea typeface="Cambria" pitchFamily="34" charset="-122"/>
-                <a:cs typeface="Cambria" pitchFamily="34" charset="-120"/>
+                  <a:srgbClr val="ED1165"/>
+                </a:solidFill>
+                <a:latin typeface="Montserrat" pitchFamily="34" charset="0"/>
+                <a:ea typeface="Montserrat" pitchFamily="34" charset="-122"/>
+                <a:cs typeface="Montserrat" pitchFamily="34" charset="-120"/>
               </a:rPr>
               <a:t>64,7%</a:t>
             </a:r>
@@ -10781,7 +10997,7 @@
       </p:sp>
       <p:sp>
         <p:nvSpPr>
-          <p:cNvPr id="21" name="Text 18"/>
+          <p:cNvPr id="22" name="Text 18"/>
           <p:cNvSpPr txBox="1"/>
           <p:nvPr/>
         </p:nvSpPr>
@@ -10806,11 +11022,11 @@
             <a:r>
               <a:rPr lang="en-US" sz="1250" dirty="0">
                 <a:solidFill>
-                  <a:srgbClr val="5A6B7B"/>
-                </a:solidFill>
-                <a:latin typeface="Calibri" pitchFamily="34" charset="0"/>
-                <a:ea typeface="Calibri" pitchFamily="34" charset="-122"/>
-                <a:cs typeface="Calibri" pitchFamily="34" charset="-120"/>
+                  <a:srgbClr val="6E6E6E"/>
+                </a:solidFill>
+                <a:latin typeface="Montserrat" pitchFamily="34" charset="0"/>
+                <a:ea typeface="Montserrat" pitchFamily="34" charset="-122"/>
+                <a:cs typeface="Montserrat" pitchFamily="34" charset="-120"/>
               </a:rPr>
               <a:t>Risco relativo da chuva</a:t>
             </a:r>
@@ -10820,7 +11036,7 @@
       </p:sp>
       <p:sp>
         <p:nvSpPr>
-          <p:cNvPr id="22" name="Text 19"/>
+          <p:cNvPr id="23" name="Text 19"/>
           <p:cNvSpPr txBox="1"/>
           <p:nvPr/>
         </p:nvSpPr>
@@ -10845,11 +11061,11 @@
             <a:r>
               <a:rPr lang="en-US" sz="3200" b="1" dirty="0">
                 <a:solidFill>
-                  <a:srgbClr val="D1495B"/>
-                </a:solidFill>
-                <a:latin typeface="Cambria" pitchFamily="34" charset="0"/>
-                <a:ea typeface="Cambria" pitchFamily="34" charset="-122"/>
-                <a:cs typeface="Cambria" pitchFamily="34" charset="-120"/>
+                  <a:srgbClr val="ED1165"/>
+                </a:solidFill>
+                <a:latin typeface="Montserrat" pitchFamily="34" charset="0"/>
+                <a:ea typeface="Montserrat" pitchFamily="34" charset="-122"/>
+                <a:cs typeface="Montserrat" pitchFamily="34" charset="-120"/>
               </a:rPr>
               <a:t>2,87×</a:t>
             </a:r>
@@ -10859,7 +11075,7 @@
       </p:sp>
       <p:sp>
         <p:nvSpPr>
-          <p:cNvPr id="23" name="Text 20"/>
+          <p:cNvPr id="24" name="Text 20"/>
           <p:cNvSpPr txBox="1"/>
           <p:nvPr/>
         </p:nvSpPr>
@@ -10884,11 +11100,11 @@
             <a:r>
               <a:rPr lang="en-US" sz="1250" dirty="0">
                 <a:solidFill>
-                  <a:srgbClr val="1B2A3A"/>
-                </a:solidFill>
-                <a:latin typeface="Calibri" pitchFamily="34" charset="0"/>
-                <a:ea typeface="Calibri" pitchFamily="34" charset="-122"/>
-                <a:cs typeface="Calibri" pitchFamily="34" charset="-120"/>
+                  <a:srgbClr val="333333"/>
+                </a:solidFill>
+                <a:latin typeface="Montserrat" pitchFamily="34" charset="0"/>
+                <a:ea typeface="Montserrat" pitchFamily="34" charset="-122"/>
+                <a:cs typeface="Montserrat" pitchFamily="34" charset="-120"/>
               </a:rPr>
               <a:t>Com chuva, a chance de perder o prazo quase triplica.</a:t>
             </a:r>
@@ -10943,7 +11159,7 @@
             <a:avLst/>
           </a:prstGeom>
           <a:solidFill>
-            <a:srgbClr val="1C7293"/>
+            <a:srgbClr val="1A1A1A"/>
           </a:solidFill>
           <a:ln/>
         </p:spPr>
@@ -10977,9 +11193,9 @@
                 <a:solidFill>
                   <a:srgbClr val="FFFFFF"/>
                 </a:solidFill>
-                <a:latin typeface="Cambria" pitchFamily="34" charset="0"/>
-                <a:ea typeface="Cambria" pitchFamily="34" charset="-122"/>
-                <a:cs typeface="Cambria" pitchFamily="34" charset="-120"/>
+                <a:latin typeface="Montserrat" pitchFamily="34" charset="0"/>
+                <a:ea typeface="Montserrat" pitchFamily="34" charset="-122"/>
+                <a:cs typeface="Montserrat" pitchFamily="34" charset="-120"/>
               </a:rPr>
               <a:t>5</a:t>
             </a:r>
@@ -10996,7 +11212,7 @@
         <p:spPr>
           <a:xfrm>
             <a:off x="1298448" y="329184"/>
-            <a:ext cx="10332720" cy="658368"/>
+            <a:ext cx="9235440" cy="658368"/>
           </a:xfrm>
           <a:prstGeom prst="rect">
             <a:avLst/>
@@ -11014,11 +11230,11 @@
             <a:r>
               <a:rPr lang="en-US" sz="3000" b="1" dirty="0">
                 <a:solidFill>
-                  <a:srgbClr val="21295C"/>
-                </a:solidFill>
-                <a:latin typeface="Cambria" pitchFamily="34" charset="0"/>
-                <a:ea typeface="Cambria" pitchFamily="34" charset="-122"/>
-                <a:cs typeface="Cambria" pitchFamily="34" charset="-120"/>
+                  <a:srgbClr val="1A1A1A"/>
+                </a:solidFill>
+                <a:latin typeface="Montserrat" pitchFamily="34" charset="0"/>
+                <a:ea typeface="Montserrat" pitchFamily="34" charset="-122"/>
+                <a:cs typeface="Montserrat" pitchFamily="34" charset="-120"/>
               </a:rPr>
               <a:t>Teorema de Bayes na prática</a:t>
             </a:r>
@@ -11026,9 +11242,33 @@
           </a:p>
         </p:txBody>
       </p:sp>
-      <p:sp>
-        <p:nvSpPr>
-          <p:cNvPr id="5" name="Text 3"/>
+      <p:pic>
+        <p:nvPicPr>
+          <p:cNvPr id="5" name="Image 0" descr="/home/user/Projeto-Python/.claude/skills/fiap-doc/assets/header-logo.png">    </p:cNvPr>
+          <p:cNvPicPr>
+            <a:picLocks noChangeAspect="1"/>
+          </p:cNvPicPr>
+          <p:nvPr/>
+        </p:nvPicPr>
+        <p:blipFill>
+          <a:blip r:embed="rId1"/>
+          <a:stretch>
+            <a:fillRect/>
+          </a:stretch>
+        </p:blipFill>
+        <p:spPr>
+          <a:xfrm>
+            <a:off x="10716768" y="402336"/>
+            <a:ext cx="896112" cy="422453"/>
+          </a:xfrm>
+          <a:prstGeom prst="rect">
+            <a:avLst/>
+          </a:prstGeom>
+        </p:spPr>
+      </p:pic>
+      <p:sp>
+        <p:nvSpPr>
+          <p:cNvPr id="6" name="Text 3"/>
           <p:cNvSpPr txBox="1"/>
           <p:nvPr/>
         </p:nvSpPr>
@@ -11053,11 +11293,11 @@
             <a:r>
               <a:rPr lang="en-US" sz="1400" i="1" dirty="0">
                 <a:solidFill>
-                  <a:srgbClr val="5A6B7B"/>
-                </a:solidFill>
-                <a:latin typeface="Calibri" pitchFamily="34" charset="0"/>
-                <a:ea typeface="Calibri" pitchFamily="34" charset="-122"/>
-                <a:cs typeface="Calibri" pitchFamily="34" charset="-120"/>
+                  <a:srgbClr val="6E6E6E"/>
+                </a:solidFill>
+                <a:latin typeface="Montserrat" pitchFamily="34" charset="0"/>
+                <a:ea typeface="Montserrat" pitchFamily="34" charset="-122"/>
+                <a:cs typeface="Montserrat" pitchFamily="34" charset="-120"/>
               </a:rPr>
               <a:t>De “está chovendo, qual a chance de atrasar?” para “atrasou, o que provavelmente aconteceu?”</a:t>
             </a:r>
@@ -11067,7 +11307,7 @@
       </p:sp>
       <p:sp>
         <p:nvSpPr>
-          <p:cNvPr id="6" name="Shape 4"/>
+          <p:cNvPr id="7" name="Shape 4"/>
           <p:cNvSpPr/>
           <p:nvPr/>
         </p:nvSpPr>
@@ -11082,11 +11322,11 @@
             </a:avLst>
           </a:prstGeom>
           <a:solidFill>
-            <a:srgbClr val="21295C"/>
+            <a:srgbClr val="1A1A1A"/>
           </a:solidFill>
           <a:ln w="12700">
             <a:solidFill>
-              <a:srgbClr val="21295C"/>
+              <a:srgbClr val="1A1A1A"/>
             </a:solidFill>
             <a:prstDash val="solid"/>
           </a:ln>
@@ -11094,7 +11334,7 @@
       </p:sp>
       <p:sp>
         <p:nvSpPr>
-          <p:cNvPr id="7" name="Text 5"/>
+          <p:cNvPr id="8" name="Text 5"/>
           <p:cNvSpPr txBox="1"/>
           <p:nvPr/>
         </p:nvSpPr>
@@ -11133,7 +11373,7 @@
       </p:sp>
       <p:sp>
         <p:nvSpPr>
-          <p:cNvPr id="8" name="Shape 6"/>
+          <p:cNvPr id="9" name="Shape 6"/>
           <p:cNvSpPr/>
           <p:nvPr/>
         </p:nvSpPr>
@@ -11148,11 +11388,11 @@
             </a:avLst>
           </a:prstGeom>
           <a:solidFill>
-            <a:srgbClr val="EDF3F7"/>
+            <a:srgbClr val="F5F5F5"/>
           </a:solidFill>
           <a:ln w="12700">
             <a:solidFill>
-              <a:srgbClr val="EDF3F7"/>
+              <a:srgbClr val="F5F5F5"/>
             </a:solidFill>
             <a:prstDash val="solid"/>
           </a:ln>
@@ -11160,7 +11400,7 @@
       </p:sp>
       <p:sp>
         <p:nvSpPr>
-          <p:cNvPr id="9" name="Text 7"/>
+          <p:cNvPr id="10" name="Text 7"/>
           <p:cNvSpPr txBox="1"/>
           <p:nvPr/>
         </p:nvSpPr>
@@ -11185,11 +11425,11 @@
             <a:r>
               <a:rPr lang="en-US" sz="1500" b="1" dirty="0">
                 <a:solidFill>
-                  <a:srgbClr val="21295C"/>
-                </a:solidFill>
-                <a:latin typeface="Cambria" pitchFamily="34" charset="0"/>
-                <a:ea typeface="Cambria" pitchFamily="34" charset="-122"/>
-                <a:cs typeface="Cambria" pitchFamily="34" charset="-120"/>
+                  <a:srgbClr val="1A1A1A"/>
+                </a:solidFill>
+                <a:latin typeface="Montserrat" pitchFamily="34" charset="0"/>
+                <a:ea typeface="Montserrat" pitchFamily="34" charset="-122"/>
+                <a:cs typeface="Montserrat" pitchFamily="34" charset="-120"/>
               </a:rPr>
               <a:t>O que já sabemos</a:t>
             </a:r>
@@ -11199,7 +11439,7 @@
       </p:sp>
       <p:sp>
         <p:nvSpPr>
-          <p:cNvPr id="10" name="Text 8"/>
+          <p:cNvPr id="11" name="Text 8"/>
           <p:cNvSpPr txBox="1"/>
           <p:nvPr/>
         </p:nvSpPr>
@@ -11224,7 +11464,7 @@
             <a:r>
               <a:rPr lang="en-US" sz="1200" dirty="0">
                 <a:solidFill>
-                  <a:srgbClr val="1B2A3A"/>
+                  <a:srgbClr val="333333"/>
                 </a:solidFill>
                 <a:latin typeface="Courier New" pitchFamily="34" charset="0"/>
                 <a:ea typeface="Courier New" pitchFamily="34" charset="-122"/>
@@ -11238,7 +11478,7 @@
       </p:sp>
       <p:sp>
         <p:nvSpPr>
-          <p:cNvPr id="11" name="Text 9"/>
+          <p:cNvPr id="12" name="Text 9"/>
           <p:cNvSpPr txBox="1"/>
           <p:nvPr/>
         </p:nvSpPr>
@@ -11263,11 +11503,11 @@
             <a:r>
               <a:rPr lang="en-US" sz="1200" dirty="0">
                 <a:solidFill>
-                  <a:srgbClr val="5A6B7B"/>
-                </a:solidFill>
-                <a:latin typeface="Calibri" pitchFamily="34" charset="0"/>
-                <a:ea typeface="Calibri" pitchFamily="34" charset="-122"/>
-                <a:cs typeface="Calibri" pitchFamily="34" charset="-120"/>
+                  <a:srgbClr val="6E6E6E"/>
+                </a:solidFill>
+                <a:latin typeface="Montserrat" pitchFamily="34" charset="0"/>
+                <a:ea typeface="Montserrat" pitchFamily="34" charset="-122"/>
+                <a:cs typeface="Montserrat" pitchFamily="34" charset="-120"/>
               </a:rPr>
               <a:t>Das entregas com chuva, 41% atrasaram.</a:t>
             </a:r>
@@ -11277,7 +11517,7 @@
       </p:sp>
       <p:sp>
         <p:nvSpPr>
-          <p:cNvPr id="12" name="Shape 10"/>
+          <p:cNvPr id="13" name="Shape 10"/>
           <p:cNvSpPr/>
           <p:nvPr/>
         </p:nvSpPr>
@@ -11292,11 +11532,11 @@
             </a:avLst>
           </a:prstGeom>
           <a:solidFill>
-            <a:srgbClr val="EDF3F7"/>
+            <a:srgbClr val="F5F5F5"/>
           </a:solidFill>
           <a:ln w="12700">
             <a:solidFill>
-              <a:srgbClr val="EDF3F7"/>
+              <a:srgbClr val="F5F5F5"/>
             </a:solidFill>
             <a:prstDash val="solid"/>
           </a:ln>
@@ -11304,7 +11544,7 @@
       </p:sp>
       <p:sp>
         <p:nvSpPr>
-          <p:cNvPr id="13" name="Text 11"/>
+          <p:cNvPr id="14" name="Text 11"/>
           <p:cNvSpPr txBox="1"/>
           <p:nvPr/>
         </p:nvSpPr>
@@ -11329,11 +11569,11 @@
             <a:r>
               <a:rPr lang="en-US" sz="1500" b="1" dirty="0">
                 <a:solidFill>
-                  <a:srgbClr val="21295C"/>
-                </a:solidFill>
-                <a:latin typeface="Cambria" pitchFamily="34" charset="0"/>
-                <a:ea typeface="Cambria" pitchFamily="34" charset="-122"/>
-                <a:cs typeface="Cambria" pitchFamily="34" charset="-120"/>
+                  <a:srgbClr val="1A1A1A"/>
+                </a:solidFill>
+                <a:latin typeface="Montserrat" pitchFamily="34" charset="0"/>
+                <a:ea typeface="Montserrat" pitchFamily="34" charset="-122"/>
+                <a:cs typeface="Montserrat" pitchFamily="34" charset="-120"/>
               </a:rPr>
               <a:t>Chance de chover</a:t>
             </a:r>
@@ -11343,7 +11583,7 @@
       </p:sp>
       <p:sp>
         <p:nvSpPr>
-          <p:cNvPr id="14" name="Text 12"/>
+          <p:cNvPr id="15" name="Text 12"/>
           <p:cNvSpPr txBox="1"/>
           <p:nvPr/>
         </p:nvSpPr>
@@ -11368,7 +11608,7 @@
             <a:r>
               <a:rPr lang="en-US" sz="1200" dirty="0">
                 <a:solidFill>
-                  <a:srgbClr val="1B2A3A"/>
+                  <a:srgbClr val="333333"/>
                 </a:solidFill>
                 <a:latin typeface="Courier New" pitchFamily="34" charset="0"/>
                 <a:ea typeface="Courier New" pitchFamily="34" charset="-122"/>
@@ -11382,7 +11622,7 @@
       </p:sp>
       <p:sp>
         <p:nvSpPr>
-          <p:cNvPr id="15" name="Text 13"/>
+          <p:cNvPr id="16" name="Text 13"/>
           <p:cNvSpPr txBox="1"/>
           <p:nvPr/>
         </p:nvSpPr>
@@ -11407,11 +11647,11 @@
             <a:r>
               <a:rPr lang="en-US" sz="1200" dirty="0">
                 <a:solidFill>
-                  <a:srgbClr val="5A6B7B"/>
-                </a:solidFill>
-                <a:latin typeface="Calibri" pitchFamily="34" charset="0"/>
-                <a:ea typeface="Calibri" pitchFamily="34" charset="-122"/>
-                <a:cs typeface="Calibri" pitchFamily="34" charset="-120"/>
+                  <a:srgbClr val="6E6E6E"/>
+                </a:solidFill>
+                <a:latin typeface="Montserrat" pitchFamily="34" charset="0"/>
+                <a:ea typeface="Montserrat" pitchFamily="34" charset="-122"/>
+                <a:cs typeface="Montserrat" pitchFamily="34" charset="-120"/>
               </a:rPr>
               <a:t>Choveu em 30,7% das entregas da base.</a:t>
             </a:r>
@@ -11421,7 +11661,7 @@
       </p:sp>
       <p:sp>
         <p:nvSpPr>
-          <p:cNvPr id="16" name="Shape 14"/>
+          <p:cNvPr id="17" name="Shape 14"/>
           <p:cNvSpPr/>
           <p:nvPr/>
         </p:nvSpPr>
@@ -11436,11 +11676,11 @@
             </a:avLst>
           </a:prstGeom>
           <a:solidFill>
-            <a:srgbClr val="EDF3F7"/>
+            <a:srgbClr val="F5F5F5"/>
           </a:solidFill>
           <a:ln w="12700">
             <a:solidFill>
-              <a:srgbClr val="EDF3F7"/>
+              <a:srgbClr val="F5F5F5"/>
             </a:solidFill>
             <a:prstDash val="solid"/>
           </a:ln>
@@ -11448,7 +11688,7 @@
       </p:sp>
       <p:sp>
         <p:nvSpPr>
-          <p:cNvPr id="17" name="Text 15"/>
+          <p:cNvPr id="18" name="Text 15"/>
           <p:cNvSpPr txBox="1"/>
           <p:nvPr/>
         </p:nvSpPr>
@@ -11473,11 +11713,11 @@
             <a:r>
               <a:rPr lang="en-US" sz="1500" b="1" dirty="0">
                 <a:solidFill>
-                  <a:srgbClr val="21295C"/>
-                </a:solidFill>
-                <a:latin typeface="Cambria" pitchFamily="34" charset="0"/>
-                <a:ea typeface="Cambria" pitchFamily="34" charset="-122"/>
-                <a:cs typeface="Cambria" pitchFamily="34" charset="-120"/>
+                  <a:srgbClr val="1A1A1A"/>
+                </a:solidFill>
+                <a:latin typeface="Montserrat" pitchFamily="34" charset="0"/>
+                <a:ea typeface="Montserrat" pitchFamily="34" charset="-122"/>
+                <a:cs typeface="Montserrat" pitchFamily="34" charset="-120"/>
               </a:rPr>
               <a:t>Chance de atrasar</a:t>
             </a:r>
@@ -11487,7 +11727,7 @@
       </p:sp>
       <p:sp>
         <p:nvSpPr>
-          <p:cNvPr id="18" name="Text 16"/>
+          <p:cNvPr id="19" name="Text 16"/>
           <p:cNvSpPr txBox="1"/>
           <p:nvPr/>
         </p:nvSpPr>
@@ -11512,7 +11752,7 @@
             <a:r>
               <a:rPr lang="en-US" sz="1200" dirty="0">
                 <a:solidFill>
-                  <a:srgbClr val="1B2A3A"/>
+                  <a:srgbClr val="333333"/>
                 </a:solidFill>
                 <a:latin typeface="Courier New" pitchFamily="34" charset="0"/>
                 <a:ea typeface="Courier New" pitchFamily="34" charset="-122"/>
@@ -11526,7 +11766,7 @@
       </p:sp>
       <p:sp>
         <p:nvSpPr>
-          <p:cNvPr id="19" name="Text 17"/>
+          <p:cNvPr id="20" name="Text 17"/>
           <p:cNvSpPr txBox="1"/>
           <p:nvPr/>
         </p:nvSpPr>
@@ -11551,11 +11791,11 @@
             <a:r>
               <a:rPr lang="en-US" sz="1200" dirty="0">
                 <a:solidFill>
-                  <a:srgbClr val="5A6B7B"/>
-                </a:solidFill>
-                <a:latin typeface="Calibri" pitchFamily="34" charset="0"/>
-                <a:ea typeface="Calibri" pitchFamily="34" charset="-122"/>
-                <a:cs typeface="Calibri" pitchFamily="34" charset="-120"/>
+                  <a:srgbClr val="6E6E6E"/>
+                </a:solidFill>
+                <a:latin typeface="Montserrat" pitchFamily="34" charset="0"/>
+                <a:ea typeface="Montserrat" pitchFamily="34" charset="-122"/>
+                <a:cs typeface="Montserrat" pitchFamily="34" charset="-120"/>
               </a:rPr>
               <a:t>22,5% de todas as entregas atrasaram.</a:t>
             </a:r>
@@ -11565,7 +11805,7 @@
       </p:sp>
       <p:sp>
         <p:nvSpPr>
-          <p:cNvPr id="20" name="Shape 18"/>
+          <p:cNvPr id="21" name="Shape 18"/>
           <p:cNvSpPr/>
           <p:nvPr/>
         </p:nvSpPr>
@@ -11580,11 +11820,11 @@
             </a:avLst>
           </a:prstGeom>
           <a:solidFill>
-            <a:srgbClr val="FBE9EC"/>
+            <a:srgbClr val="FDE7EF"/>
           </a:solidFill>
           <a:ln w="12700">
             <a:solidFill>
-              <a:srgbClr val="FBE9EC"/>
+              <a:srgbClr val="FDE7EF"/>
             </a:solidFill>
             <a:prstDash val="solid"/>
           </a:ln>
@@ -11592,7 +11832,7 @@
       </p:sp>
       <p:sp>
         <p:nvSpPr>
-          <p:cNvPr id="21" name="Text 19"/>
+          <p:cNvPr id="22" name="Text 19"/>
           <p:cNvSpPr txBox="1"/>
           <p:nvPr/>
         </p:nvSpPr>
@@ -11617,11 +11857,11 @@
             <a:r>
               <a:rPr lang="en-US" sz="1500" b="1" dirty="0">
                 <a:solidFill>
-                  <a:srgbClr val="D1495B"/>
-                </a:solidFill>
-                <a:latin typeface="Cambria" pitchFamily="34" charset="0"/>
-                <a:ea typeface="Cambria" pitchFamily="34" charset="-122"/>
-                <a:cs typeface="Cambria" pitchFamily="34" charset="-120"/>
+                  <a:srgbClr val="ED1165"/>
+                </a:solidFill>
+                <a:latin typeface="Montserrat" pitchFamily="34" charset="0"/>
+                <a:ea typeface="Montserrat" pitchFamily="34" charset="-122"/>
+                <a:cs typeface="Montserrat" pitchFamily="34" charset="-120"/>
               </a:rPr>
               <a:t>Resposta</a:t>
             </a:r>
@@ -11631,7 +11871,7 @@
       </p:sp>
       <p:sp>
         <p:nvSpPr>
-          <p:cNvPr id="22" name="Text 20"/>
+          <p:cNvPr id="23" name="Text 20"/>
           <p:cNvSpPr txBox="1"/>
           <p:nvPr/>
         </p:nvSpPr>
@@ -11656,7 +11896,7 @@
             <a:r>
               <a:rPr lang="en-US" sz="1200" dirty="0">
                 <a:solidFill>
-                  <a:srgbClr val="1B2A3A"/>
+                  <a:srgbClr val="333333"/>
                 </a:solidFill>
                 <a:latin typeface="Courier New" pitchFamily="34" charset="0"/>
                 <a:ea typeface="Courier New" pitchFamily="34" charset="-122"/>
@@ -11670,7 +11910,7 @@
       </p:sp>
       <p:sp>
         <p:nvSpPr>
-          <p:cNvPr id="23" name="Text 21"/>
+          <p:cNvPr id="24" name="Text 21"/>
           <p:cNvSpPr txBox="1"/>
           <p:nvPr/>
         </p:nvSpPr>
@@ -11695,11 +11935,11 @@
             <a:r>
               <a:rPr lang="en-US" sz="1200" dirty="0">
                 <a:solidFill>
-                  <a:srgbClr val="5A6B7B"/>
-                </a:solidFill>
-                <a:latin typeface="Calibri" pitchFamily="34" charset="0"/>
-                <a:ea typeface="Calibri" pitchFamily="34" charset="-122"/>
-                <a:cs typeface="Calibri" pitchFamily="34" charset="-120"/>
+                  <a:srgbClr val="6E6E6E"/>
+                </a:solidFill>
+                <a:latin typeface="Montserrat" pitchFamily="34" charset="0"/>
+                <a:ea typeface="Montserrat" pitchFamily="34" charset="-122"/>
+                <a:cs typeface="Montserrat" pitchFamily="34" charset="-120"/>
               </a:rPr>
               <a:t>Das entregas que atrasaram, 56% foram em dia de chuva.</a:t>
             </a:r>
@@ -11709,7 +11949,7 @@
       </p:sp>
       <p:sp>
         <p:nvSpPr>
-          <p:cNvPr id="24" name="Text 22"/>
+          <p:cNvPr id="25" name="Text 22"/>
           <p:cNvSpPr txBox="1"/>
           <p:nvPr/>
         </p:nvSpPr>
@@ -11737,11 +11977,11 @@
             <a:r>
               <a:rPr lang="en-US" sz="1400" b="1" dirty="0">
                 <a:solidFill>
-                  <a:srgbClr val="21295C"/>
-                </a:solidFill>
-                <a:latin typeface="Calibri" pitchFamily="34" charset="0"/>
-                <a:ea typeface="Calibri" pitchFamily="34" charset="-122"/>
-                <a:cs typeface="Calibri" pitchFamily="34" charset="-120"/>
+                  <a:srgbClr val="1A1A1A"/>
+                </a:solidFill>
+                <a:latin typeface="Montserrat" pitchFamily="34" charset="0"/>
+                <a:ea typeface="Montserrat" pitchFamily="34" charset="-122"/>
+                <a:cs typeface="Montserrat" pitchFamily="34" charset="-120"/>
               </a:rPr>
               <a:t>Conferindo no código: </a:t>
             </a:r>
@@ -11754,11 +11994,11 @@
             <a:r>
               <a:rPr lang="en-US" sz="1400" dirty="0">
                 <a:solidFill>
-                  <a:srgbClr val="1B2A3A"/>
-                </a:solidFill>
-                <a:latin typeface="Calibri" pitchFamily="34" charset="0"/>
-                <a:ea typeface="Calibri" pitchFamily="34" charset="-122"/>
-                <a:cs typeface="Calibri" pitchFamily="34" charset="-120"/>
+                  <a:srgbClr val="333333"/>
+                </a:solidFill>
+                <a:latin typeface="Montserrat" pitchFamily="34" charset="0"/>
+                <a:ea typeface="Montserrat" pitchFamily="34" charset="-122"/>
+                <a:cs typeface="Montserrat" pitchFamily="34" charset="-120"/>
               </a:rPr>
               <a:t>contamos na base quantas entregas atrasadas tiveram chuva e deu 0,560, exatamente o mesmo valor da fórmula.</a:t>
             </a:r>
@@ -11813,7 +12053,7 @@
             <a:avLst/>
           </a:prstGeom>
           <a:solidFill>
-            <a:srgbClr val="1C7293"/>
+            <a:srgbClr val="1A1A1A"/>
           </a:solidFill>
           <a:ln/>
         </p:spPr>
@@ -11847,9 +12087,9 @@
                 <a:solidFill>
                   <a:srgbClr val="FFFFFF"/>
                 </a:solidFill>
-                <a:latin typeface="Cambria" pitchFamily="34" charset="0"/>
-                <a:ea typeface="Cambria" pitchFamily="34" charset="-122"/>
-                <a:cs typeface="Cambria" pitchFamily="34" charset="-120"/>
+                <a:latin typeface="Montserrat" pitchFamily="34" charset="0"/>
+                <a:ea typeface="Montserrat" pitchFamily="34" charset="-122"/>
+                <a:cs typeface="Montserrat" pitchFamily="34" charset="-120"/>
               </a:rPr>
               <a:t>6</a:t>
             </a:r>
@@ -11866,7 +12106,7 @@
         <p:spPr>
           <a:xfrm>
             <a:off x="1298448" y="329184"/>
-            <a:ext cx="10332720" cy="658368"/>
+            <a:ext cx="9235440" cy="658368"/>
           </a:xfrm>
           <a:prstGeom prst="rect">
             <a:avLst/>
@@ -11884,60 +12124,21 @@
             <a:r>
               <a:rPr lang="en-US" sz="3000" b="1" dirty="0">
                 <a:solidFill>
-                  <a:srgbClr val="21295C"/>
-                </a:solidFill>
-                <a:latin typeface="Cambria" pitchFamily="34" charset="0"/>
-                <a:ea typeface="Cambria" pitchFamily="34" charset="-122"/>
-                <a:cs typeface="Cambria" pitchFamily="34" charset="-120"/>
+                  <a:srgbClr val="1A1A1A"/>
+                </a:solidFill>
+                <a:latin typeface="Montserrat" pitchFamily="34" charset="0"/>
+                <a:ea typeface="Montserrat" pitchFamily="34" charset="-122"/>
+                <a:cs typeface="Montserrat" pitchFamily="34" charset="-120"/>
               </a:rPr>
               <a:t>Distribuição Normal do tempo de entrega</a:t>
             </a:r>
             <a:endParaRPr lang="en-US" sz="3000" dirty="0"/>
-          </a:p>
-        </p:txBody>
-      </p:sp>
-      <p:sp>
-        <p:nvSpPr>
-          <p:cNvPr id="5" name="Text 3"/>
-          <p:cNvSpPr txBox="1"/>
-          <p:nvPr/>
-        </p:nvSpPr>
-        <p:spPr>
-          <a:xfrm>
-            <a:off x="1298448" y="969264"/>
-            <a:ext cx="10332720" cy="347472"/>
-          </a:xfrm>
-          <a:prstGeom prst="rect">
-            <a:avLst/>
-          </a:prstGeom>
-          <a:noFill/>
-          <a:ln/>
-        </p:spPr>
-        <p:txBody>
-          <a:bodyPr wrap="square" lIns="0" tIns="0" rIns="0" bIns="0" rtlCol="0" anchor="ctr"/>
-          <a:lstStyle/>
-          <a:p>
-            <a:pPr indent="0" marL="0">
-              <a:buNone/>
-            </a:pPr>
-            <a:r>
-              <a:rPr lang="en-US" sz="1400" i="1" dirty="0">
-                <a:solidFill>
-                  <a:srgbClr val="5A6B7B"/>
-                </a:solidFill>
-                <a:latin typeface="Calibri" pitchFamily="34" charset="0"/>
-                <a:ea typeface="Calibri" pitchFamily="34" charset="-122"/>
-                <a:cs typeface="Calibri" pitchFamily="34" charset="-120"/>
-              </a:rPr>
-              <a:t>Tema 2: a curva em formato de sino</a:t>
-            </a:r>
-            <a:endParaRPr lang="en-US" sz="1400" dirty="0"/>
           </a:p>
         </p:txBody>
       </p:sp>
       <p:pic>
         <p:nvPicPr>
-          <p:cNvPr id="6" name="Image 0" descr="/home/user/Projeto-Python/checkpoint4/graficos/g2_normal_ajustada.png">    </p:cNvPr>
+          <p:cNvPr id="5" name="Image 0" descr="/home/user/Projeto-Python/.claude/skills/fiap-doc/assets/header-logo.png">    </p:cNvPr>
           <p:cNvPicPr>
             <a:picLocks noChangeAspect="1"/>
           </p:cNvPicPr>
@@ -11951,6 +12152,69 @@
         </p:blipFill>
         <p:spPr>
           <a:xfrm>
+            <a:off x="10716768" y="402336"/>
+            <a:ext cx="896112" cy="422453"/>
+          </a:xfrm>
+          <a:prstGeom prst="rect">
+            <a:avLst/>
+          </a:prstGeom>
+        </p:spPr>
+      </p:pic>
+      <p:sp>
+        <p:nvSpPr>
+          <p:cNvPr id="6" name="Text 3"/>
+          <p:cNvSpPr txBox="1"/>
+          <p:nvPr/>
+        </p:nvSpPr>
+        <p:spPr>
+          <a:xfrm>
+            <a:off x="1298448" y="969264"/>
+            <a:ext cx="10332720" cy="347472"/>
+          </a:xfrm>
+          <a:prstGeom prst="rect">
+            <a:avLst/>
+          </a:prstGeom>
+          <a:noFill/>
+          <a:ln/>
+        </p:spPr>
+        <p:txBody>
+          <a:bodyPr wrap="square" lIns="0" tIns="0" rIns="0" bIns="0" rtlCol="0" anchor="ctr"/>
+          <a:lstStyle/>
+          <a:p>
+            <a:pPr indent="0" marL="0">
+              <a:buNone/>
+            </a:pPr>
+            <a:r>
+              <a:rPr lang="en-US" sz="1400" i="1" dirty="0">
+                <a:solidFill>
+                  <a:srgbClr val="6E6E6E"/>
+                </a:solidFill>
+                <a:latin typeface="Montserrat" pitchFamily="34" charset="0"/>
+                <a:ea typeface="Montserrat" pitchFamily="34" charset="-122"/>
+                <a:cs typeface="Montserrat" pitchFamily="34" charset="-120"/>
+              </a:rPr>
+              <a:t>Tema 2: a curva em formato de sino</a:t>
+            </a:r>
+            <a:endParaRPr lang="en-US" sz="1400" dirty="0"/>
+          </a:p>
+        </p:txBody>
+      </p:sp>
+      <p:pic>
+        <p:nvPicPr>
+          <p:cNvPr id="7" name="Image 1" descr="/home/user/Projeto-Python/checkpoint4/graficos/g2_normal_ajustada.png">    </p:cNvPr>
+          <p:cNvPicPr>
+            <a:picLocks noChangeAspect="1"/>
+          </p:cNvPicPr>
+          <p:nvPr/>
+        </p:nvPicPr>
+        <p:blipFill>
+          <a:blip r:embed="rId2"/>
+          <a:stretch>
+            <a:fillRect/>
+          </a:stretch>
+        </p:blipFill>
+        <p:spPr>
+          <a:xfrm>
             <a:off x="502920" y="1536192"/>
             <a:ext cx="6903720" cy="3794760"/>
           </a:xfrm>
@@ -11961,7 +12225,7 @@
       </p:pic>
       <p:sp>
         <p:nvSpPr>
-          <p:cNvPr id="7" name="Text 4"/>
+          <p:cNvPr id="8" name="Text 4"/>
           <p:cNvSpPr txBox="1"/>
           <p:nvPr/>
         </p:nvSpPr>
@@ -11986,11 +12250,11 @@
             <a:r>
               <a:rPr lang="en-US" sz="1250" i="1" dirty="0">
                 <a:solidFill>
-                  <a:srgbClr val="5A6B7B"/>
-                </a:solidFill>
-                <a:latin typeface="Calibri" pitchFamily="34" charset="0"/>
-                <a:ea typeface="Calibri" pitchFamily="34" charset="-122"/>
-                <a:cs typeface="Calibri" pitchFamily="34" charset="-120"/>
+                  <a:srgbClr val="6E6E6E"/>
+                </a:solidFill>
+                <a:latin typeface="Montserrat" pitchFamily="34" charset="0"/>
+                <a:ea typeface="Montserrat" pitchFamily="34" charset="-122"/>
+                <a:cs typeface="Montserrat" pitchFamily="34" charset="-120"/>
               </a:rPr>
               <a:t>A altura das pessoas e as notas de uma prova se comportam assim: a maioria fica perto da média e poucos ficam nos extremos. Com o tempo de entrega acontece o mesmo.</a:t>
             </a:r>
@@ -12000,7 +12264,7 @@
       </p:sp>
       <p:sp>
         <p:nvSpPr>
-          <p:cNvPr id="8" name="Shape 5"/>
+          <p:cNvPr id="9" name="Shape 5"/>
           <p:cNvSpPr/>
           <p:nvPr/>
         </p:nvSpPr>
@@ -12015,11 +12279,11 @@
             </a:avLst>
           </a:prstGeom>
           <a:solidFill>
-            <a:srgbClr val="21295C"/>
+            <a:srgbClr val="1A1A1A"/>
           </a:solidFill>
           <a:ln w="12700">
             <a:solidFill>
-              <a:srgbClr val="21295C"/>
+              <a:srgbClr val="1A1A1A"/>
             </a:solidFill>
             <a:prstDash val="solid"/>
           </a:ln>
@@ -12027,7 +12291,7 @@
       </p:sp>
       <p:sp>
         <p:nvSpPr>
-          <p:cNvPr id="9" name="Text 6"/>
+          <p:cNvPr id="10" name="Text 6"/>
           <p:cNvSpPr txBox="1"/>
           <p:nvPr/>
         </p:nvSpPr>
@@ -12066,7 +12330,7 @@
       </p:sp>
       <p:sp>
         <p:nvSpPr>
-          <p:cNvPr id="10" name="Shape 7"/>
+          <p:cNvPr id="11" name="Shape 7"/>
           <p:cNvSpPr/>
           <p:nvPr/>
         </p:nvSpPr>
@@ -12081,11 +12345,11 @@
             </a:avLst>
           </a:prstGeom>
           <a:solidFill>
-            <a:srgbClr val="EDF3F7"/>
+            <a:srgbClr val="F5F5F5"/>
           </a:solidFill>
           <a:ln w="12700">
             <a:solidFill>
-              <a:srgbClr val="EDF3F7"/>
+              <a:srgbClr val="F5F5F5"/>
             </a:solidFill>
             <a:prstDash val="solid"/>
           </a:ln>
@@ -12093,7 +12357,7 @@
       </p:sp>
       <p:sp>
         <p:nvSpPr>
-          <p:cNvPr id="11" name="Text 8"/>
+          <p:cNvPr id="12" name="Text 8"/>
           <p:cNvSpPr txBox="1"/>
           <p:nvPr/>
         </p:nvSpPr>
@@ -12118,11 +12382,11 @@
             <a:r>
               <a:rPr lang="en-US" sz="3400" b="1" dirty="0">
                 <a:solidFill>
-                  <a:srgbClr val="065A82"/>
-                </a:solidFill>
-                <a:latin typeface="Cambria" pitchFamily="34" charset="0"/>
-                <a:ea typeface="Cambria" pitchFamily="34" charset="-122"/>
-                <a:cs typeface="Cambria" pitchFamily="34" charset="-120"/>
+                  <a:srgbClr val="ED1165"/>
+                </a:solidFill>
+                <a:latin typeface="Montserrat" pitchFamily="34" charset="0"/>
+                <a:ea typeface="Montserrat" pitchFamily="34" charset="-122"/>
+                <a:cs typeface="Montserrat" pitchFamily="34" charset="-120"/>
               </a:rPr>
               <a:t>48,9</a:t>
             </a:r>
@@ -12132,7 +12396,7 @@
       </p:sp>
       <p:sp>
         <p:nvSpPr>
-          <p:cNvPr id="12" name="Text 9"/>
+          <p:cNvPr id="13" name="Text 9"/>
           <p:cNvSpPr txBox="1"/>
           <p:nvPr/>
         </p:nvSpPr>
@@ -12157,11 +12421,11 @@
             <a:r>
               <a:rPr lang="en-US" sz="1150" dirty="0">
                 <a:solidFill>
-                  <a:srgbClr val="5A6B7B"/>
-                </a:solidFill>
-                <a:latin typeface="Calibri" pitchFamily="34" charset="0"/>
-                <a:ea typeface="Calibri" pitchFamily="34" charset="-122"/>
-                <a:cs typeface="Calibri" pitchFamily="34" charset="-120"/>
+                  <a:srgbClr val="6E6E6E"/>
+                </a:solidFill>
+                <a:latin typeface="Montserrat" pitchFamily="34" charset="0"/>
+                <a:ea typeface="Montserrat" pitchFamily="34" charset="-122"/>
+                <a:cs typeface="Montserrat" pitchFamily="34" charset="-120"/>
               </a:rPr>
               <a:t>média μ (min)</a:t>
             </a:r>
@@ -12171,7 +12435,7 @@
       </p:sp>
       <p:sp>
         <p:nvSpPr>
-          <p:cNvPr id="13" name="Text 10"/>
+          <p:cNvPr id="14" name="Text 10"/>
           <p:cNvSpPr txBox="1"/>
           <p:nvPr/>
         </p:nvSpPr>
@@ -12196,11 +12460,11 @@
             <a:r>
               <a:rPr lang="en-US" sz="3400" b="1" dirty="0">
                 <a:solidFill>
-                  <a:srgbClr val="1C7293"/>
-                </a:solidFill>
-                <a:latin typeface="Cambria" pitchFamily="34" charset="0"/>
-                <a:ea typeface="Cambria" pitchFamily="34" charset="-122"/>
-                <a:cs typeface="Cambria" pitchFamily="34" charset="-120"/>
+                  <a:srgbClr val="1A1A1A"/>
+                </a:solidFill>
+                <a:latin typeface="Montserrat" pitchFamily="34" charset="0"/>
+                <a:ea typeface="Montserrat" pitchFamily="34" charset="-122"/>
+                <a:cs typeface="Montserrat" pitchFamily="34" charset="-120"/>
               </a:rPr>
               <a:t>15,4</a:t>
             </a:r>
@@ -12210,7 +12474,7 @@
       </p:sp>
       <p:sp>
         <p:nvSpPr>
-          <p:cNvPr id="14" name="Text 11"/>
+          <p:cNvPr id="15" name="Text 11"/>
           <p:cNvSpPr txBox="1"/>
           <p:nvPr/>
         </p:nvSpPr>
@@ -12235,11 +12499,11 @@
             <a:r>
               <a:rPr lang="en-US" sz="1150" dirty="0">
                 <a:solidFill>
-                  <a:srgbClr val="5A6B7B"/>
-                </a:solidFill>
-                <a:latin typeface="Calibri" pitchFamily="34" charset="0"/>
-                <a:ea typeface="Calibri" pitchFamily="34" charset="-122"/>
-                <a:cs typeface="Calibri" pitchFamily="34" charset="-120"/>
+                  <a:srgbClr val="6E6E6E"/>
+                </a:solidFill>
+                <a:latin typeface="Montserrat" pitchFamily="34" charset="0"/>
+                <a:ea typeface="Montserrat" pitchFamily="34" charset="-122"/>
+                <a:cs typeface="Montserrat" pitchFamily="34" charset="-120"/>
               </a:rPr>
               <a:t>desvio σ (min)</a:t>
             </a:r>
@@ -12249,7 +12513,7 @@
       </p:sp>
       <p:sp>
         <p:nvSpPr>
-          <p:cNvPr id="15" name="Text 12"/>
+          <p:cNvPr id="16" name="Text 12"/>
           <p:cNvSpPr txBox="1"/>
           <p:nvPr/>
         </p:nvSpPr>
@@ -12274,11 +12538,11 @@
             <a:r>
               <a:rPr lang="en-US" sz="1600" b="1" dirty="0">
                 <a:solidFill>
-                  <a:srgbClr val="21295C"/>
-                </a:solidFill>
-                <a:latin typeface="Cambria" pitchFamily="34" charset="0"/>
-                <a:ea typeface="Cambria" pitchFamily="34" charset="-122"/>
-                <a:cs typeface="Cambria" pitchFamily="34" charset="-120"/>
+                  <a:srgbClr val="1A1A1A"/>
+                </a:solidFill>
+                <a:latin typeface="Montserrat" pitchFamily="34" charset="0"/>
+                <a:ea typeface="Montserrat" pitchFamily="34" charset="-122"/>
+                <a:cs typeface="Montserrat" pitchFamily="34" charset="-120"/>
               </a:rPr>
               <a:t>Chance de passar dos 60 minutos</a:t>
             </a:r>
@@ -12288,7 +12552,7 @@
       </p:sp>
       <p:sp>
         <p:nvSpPr>
-          <p:cNvPr id="16" name="Shape 13"/>
+          <p:cNvPr id="17" name="Shape 13"/>
           <p:cNvSpPr/>
           <p:nvPr/>
         </p:nvSpPr>
@@ -12303,11 +12567,11 @@
             </a:avLst>
           </a:prstGeom>
           <a:solidFill>
-            <a:srgbClr val="0E2233"/>
+            <a:srgbClr val="1A1A1A"/>
           </a:solidFill>
           <a:ln w="12700">
             <a:solidFill>
-              <a:srgbClr val="0E2233"/>
+              <a:srgbClr val="1A1A1A"/>
             </a:solidFill>
             <a:prstDash val="solid"/>
           </a:ln>
@@ -12315,7 +12579,7 @@
       </p:sp>
       <p:sp>
         <p:nvSpPr>
-          <p:cNvPr id="17" name="Text 14"/>
+          <p:cNvPr id="18" name="Text 14"/>
           <p:cNvSpPr txBox="1"/>
           <p:nvPr/>
         </p:nvSpPr>
@@ -12340,7 +12604,7 @@
             <a:r>
               <a:rPr lang="en-US" sz="1100" dirty="0">
                 <a:solidFill>
-                  <a:srgbClr val="DCE9F2"/>
+                  <a:srgbClr val="EDEDED"/>
                 </a:solidFill>
                 <a:latin typeface="Courier New" pitchFamily="34" charset="0"/>
                 <a:ea typeface="Courier New" pitchFamily="34" charset="-122"/>
@@ -12357,7 +12621,7 @@
             <a:r>
               <a:rPr lang="en-US" sz="1100" dirty="0">
                 <a:solidFill>
-                  <a:srgbClr val="DCE9F2"/>
+                  <a:srgbClr val="EDEDED"/>
                 </a:solidFill>
                 <a:latin typeface="Courier New" pitchFamily="34" charset="0"/>
                 <a:ea typeface="Courier New" pitchFamily="34" charset="-122"/>
@@ -12374,7 +12638,7 @@
             <a:r>
               <a:rPr lang="en-US" sz="1100" dirty="0">
                 <a:solidFill>
-                  <a:srgbClr val="DCE9F2"/>
+                  <a:srgbClr val="EDEDED"/>
                 </a:solidFill>
                 <a:latin typeface="Courier New" pitchFamily="34" charset="0"/>
                 <a:ea typeface="Courier New" pitchFamily="34" charset="-122"/>
@@ -12388,7 +12652,7 @@
       </p:sp>
       <p:sp>
         <p:nvSpPr>
-          <p:cNvPr id="18" name="Text 15"/>
+          <p:cNvPr id="19" name="Text 15"/>
           <p:cNvSpPr txBox="1"/>
           <p:nvPr/>
         </p:nvSpPr>
@@ -12413,11 +12677,11 @@
             <a:r>
               <a:rPr lang="en-US" sz="1250" dirty="0">
                 <a:solidFill>
-                  <a:srgbClr val="1B2A3A"/>
-                </a:solidFill>
-                <a:latin typeface="Calibri" pitchFamily="34" charset="0"/>
-                <a:ea typeface="Calibri" pitchFamily="34" charset="-122"/>
-                <a:cs typeface="Calibri" pitchFamily="34" charset="-120"/>
+                  <a:srgbClr val="333333"/>
+                </a:solidFill>
+                <a:latin typeface="Montserrat" pitchFamily="34" charset="0"/>
+                <a:ea typeface="Montserrat" pitchFamily="34" charset="-122"/>
+                <a:cs typeface="Montserrat" pitchFamily="34" charset="-120"/>
               </a:rPr>
               <a:t>A curva também mostra que prometer 75 minutos daria conta de 95% das entregas.</a:t>
             </a:r>
@@ -12472,7 +12736,7 @@
             <a:avLst/>
           </a:prstGeom>
           <a:solidFill>
-            <a:srgbClr val="1C7293"/>
+            <a:srgbClr val="1A1A1A"/>
           </a:solidFill>
           <a:ln/>
         </p:spPr>
@@ -12506,9 +12770,9 @@
                 <a:solidFill>
                   <a:srgbClr val="FFFFFF"/>
                 </a:solidFill>
-                <a:latin typeface="Cambria" pitchFamily="34" charset="0"/>
-                <a:ea typeface="Cambria" pitchFamily="34" charset="-122"/>
-                <a:cs typeface="Cambria" pitchFamily="34" charset="-120"/>
+                <a:latin typeface="Montserrat" pitchFamily="34" charset="0"/>
+                <a:ea typeface="Montserrat" pitchFamily="34" charset="-122"/>
+                <a:cs typeface="Montserrat" pitchFamily="34" charset="-120"/>
               </a:rPr>
               <a:t>7</a:t>
             </a:r>
@@ -12525,7 +12789,7 @@
         <p:spPr>
           <a:xfrm>
             <a:off x="1298448" y="329184"/>
-            <a:ext cx="10332720" cy="658368"/>
+            <a:ext cx="9235440" cy="658368"/>
           </a:xfrm>
           <a:prstGeom prst="rect">
             <a:avLst/>
@@ -12543,60 +12807,21 @@
             <a:r>
               <a:rPr lang="en-US" sz="3000" b="1" dirty="0">
                 <a:solidFill>
-                  <a:srgbClr val="21295C"/>
-                </a:solidFill>
-                <a:latin typeface="Cambria" pitchFamily="34" charset="0"/>
-                <a:ea typeface="Cambria" pitchFamily="34" charset="-122"/>
-                <a:cs typeface="Cambria" pitchFamily="34" charset="-120"/>
+                  <a:srgbClr val="1A1A1A"/>
+                </a:solidFill>
+                <a:latin typeface="Montserrat" pitchFamily="34" charset="0"/>
+                <a:ea typeface="Montserrat" pitchFamily="34" charset="-122"/>
+                <a:cs typeface="Montserrat" pitchFamily="34" charset="-120"/>
               </a:rPr>
               <a:t>Por que essa curva aparece tanto?</a:t>
             </a:r>
             <a:endParaRPr lang="en-US" sz="3000" dirty="0"/>
-          </a:p>
-        </p:txBody>
-      </p:sp>
-      <p:sp>
-        <p:nvSpPr>
-          <p:cNvPr id="5" name="Text 3"/>
-          <p:cNvSpPr txBox="1"/>
-          <p:nvPr/>
-        </p:nvSpPr>
-        <p:spPr>
-          <a:xfrm>
-            <a:off x="1298448" y="969264"/>
-            <a:ext cx="10332720" cy="347472"/>
-          </a:xfrm>
-          <a:prstGeom prst="rect">
-            <a:avLst/>
-          </a:prstGeom>
-          <a:noFill/>
-          <a:ln/>
-        </p:spPr>
-        <p:txBody>
-          <a:bodyPr wrap="square" lIns="0" tIns="0" rIns="0" bIns="0" rtlCol="0" anchor="ctr"/>
-          <a:lstStyle/>
-          <a:p>
-            <a:pPr indent="0" marL="0">
-              <a:buNone/>
-            </a:pPr>
-            <a:r>
-              <a:rPr lang="en-US" sz="1400" i="1" dirty="0">
-                <a:solidFill>
-                  <a:srgbClr val="5A6B7B"/>
-                </a:solidFill>
-                <a:latin typeface="Calibri" pitchFamily="34" charset="0"/>
-                <a:ea typeface="Calibri" pitchFamily="34" charset="-122"/>
-                <a:cs typeface="Calibri" pitchFamily="34" charset="-120"/>
-              </a:rPr>
-              <a:t>Conferindo se os dados realmente seguem a curva Normal</a:t>
-            </a:r>
-            <a:endParaRPr lang="en-US" sz="1400" dirty="0"/>
           </a:p>
         </p:txBody>
       </p:sp>
       <p:pic>
         <p:nvPicPr>
-          <p:cNvPr id="6" name="Image 0" descr="/home/user/Projeto-Python/checkpoint4/graficos/g3_teorema_central_limite.png">    </p:cNvPr>
+          <p:cNvPr id="5" name="Image 0" descr="/home/user/Projeto-Python/.claude/skills/fiap-doc/assets/header-logo.png">    </p:cNvPr>
           <p:cNvPicPr>
             <a:picLocks noChangeAspect="1"/>
           </p:cNvPicPr>
@@ -12610,6 +12835,69 @@
         </p:blipFill>
         <p:spPr>
           <a:xfrm>
+            <a:off x="10716768" y="402336"/>
+            <a:ext cx="896112" cy="422453"/>
+          </a:xfrm>
+          <a:prstGeom prst="rect">
+            <a:avLst/>
+          </a:prstGeom>
+        </p:spPr>
+      </p:pic>
+      <p:sp>
+        <p:nvSpPr>
+          <p:cNvPr id="6" name="Text 3"/>
+          <p:cNvSpPr txBox="1"/>
+          <p:nvPr/>
+        </p:nvSpPr>
+        <p:spPr>
+          <a:xfrm>
+            <a:off x="1298448" y="969264"/>
+            <a:ext cx="10332720" cy="347472"/>
+          </a:xfrm>
+          <a:prstGeom prst="rect">
+            <a:avLst/>
+          </a:prstGeom>
+          <a:noFill/>
+          <a:ln/>
+        </p:spPr>
+        <p:txBody>
+          <a:bodyPr wrap="square" lIns="0" tIns="0" rIns="0" bIns="0" rtlCol="0" anchor="ctr"/>
+          <a:lstStyle/>
+          <a:p>
+            <a:pPr indent="0" marL="0">
+              <a:buNone/>
+            </a:pPr>
+            <a:r>
+              <a:rPr lang="en-US" sz="1400" i="1" dirty="0">
+                <a:solidFill>
+                  <a:srgbClr val="6E6E6E"/>
+                </a:solidFill>
+                <a:latin typeface="Montserrat" pitchFamily="34" charset="0"/>
+                <a:ea typeface="Montserrat" pitchFamily="34" charset="-122"/>
+                <a:cs typeface="Montserrat" pitchFamily="34" charset="-120"/>
+              </a:rPr>
+              <a:t>Conferindo se os dados realmente seguem a curva Normal</a:t>
+            </a:r>
+            <a:endParaRPr lang="en-US" sz="1400" dirty="0"/>
+          </a:p>
+        </p:txBody>
+      </p:sp>
+      <p:pic>
+        <p:nvPicPr>
+          <p:cNvPr id="7" name="Image 1" descr="/home/user/Projeto-Python/checkpoint4/graficos/g3_teorema_central_limite.png">    </p:cNvPr>
+          <p:cNvPicPr>
+            <a:picLocks noChangeAspect="1"/>
+          </p:cNvPicPr>
+          <p:nvPr/>
+        </p:nvPicPr>
+        <p:blipFill>
+          <a:blip r:embed="rId2"/>
+          <a:stretch>
+            <a:fillRect/>
+          </a:stretch>
+        </p:blipFill>
+        <p:spPr>
+          <a:xfrm>
             <a:off x="502920" y="1554480"/>
             <a:ext cx="7315200" cy="2267712"/>
           </a:xfrm>
@@ -12620,7 +12908,7 @@
       </p:pic>
       <p:sp>
         <p:nvSpPr>
-          <p:cNvPr id="7" name="Text 4"/>
+          <p:cNvPr id="8" name="Text 4"/>
           <p:cNvSpPr txBox="1"/>
           <p:nvPr/>
         </p:nvSpPr>
@@ -12648,11 +12936,11 @@
             <a:r>
               <a:rPr lang="en-US" sz="1400" dirty="0">
                 <a:solidFill>
-                  <a:srgbClr val="1B2A3A"/>
-                </a:solidFill>
-                <a:latin typeface="Calibri" pitchFamily="34" charset="0"/>
-                <a:ea typeface="Calibri" pitchFamily="34" charset="-122"/>
-                <a:cs typeface="Calibri" pitchFamily="34" charset="-120"/>
+                  <a:srgbClr val="333333"/>
+                </a:solidFill>
+                <a:latin typeface="Montserrat" pitchFamily="34" charset="0"/>
+                <a:ea typeface="Montserrat" pitchFamily="34" charset="-122"/>
+                <a:cs typeface="Montserrat" pitchFamily="34" charset="-120"/>
               </a:rPr>
               <a:t>No primeiro gráfico os dados são bem tortos, nada parecido com um sino. Mas quando tiramos médias de grupos de 5 e depois de 50, o desenho vai virando o sino da Normal. Por isso essa curva aparece em quase tudo.</a:t>
             </a:r>
@@ -12662,7 +12950,7 @@
       </p:sp>
       <p:sp>
         <p:nvSpPr>
-          <p:cNvPr id="8" name="Text 5"/>
+          <p:cNvPr id="9" name="Text 5"/>
           <p:cNvSpPr txBox="1"/>
           <p:nvPr/>
         </p:nvSpPr>
@@ -12687,11 +12975,11 @@
             <a:r>
               <a:rPr lang="en-US" sz="1600" b="1" dirty="0">
                 <a:solidFill>
-                  <a:srgbClr val="21295C"/>
-                </a:solidFill>
-                <a:latin typeface="Cambria" pitchFamily="34" charset="0"/>
-                <a:ea typeface="Cambria" pitchFamily="34" charset="-122"/>
-                <a:cs typeface="Cambria" pitchFamily="34" charset="-120"/>
+                  <a:srgbClr val="1A1A1A"/>
+                </a:solidFill>
+                <a:latin typeface="Montserrat" pitchFamily="34" charset="0"/>
+                <a:ea typeface="Montserrat" pitchFamily="34" charset="-122"/>
+                <a:cs typeface="Montserrat" pitchFamily="34" charset="-120"/>
               </a:rPr>
               <a:t>Regra empírica 68-95-99,7</a:t>
             </a:r>
@@ -12740,23 +13028,23 @@
                           <a:solidFill>
                             <a:srgbClr val="FFFFFF"/>
                           </a:solidFill>
-                          <a:latin typeface="Calibri" pitchFamily="34" charset="0"/>
-                          <a:ea typeface="Calibri" pitchFamily="34" charset="-122"/>
-                          <a:cs typeface="Calibri" pitchFamily="34" charset="-120"/>
+                          <a:latin typeface="Montserrat" pitchFamily="34" charset="0"/>
+                          <a:ea typeface="Montserrat" pitchFamily="34" charset="-122"/>
+                          <a:cs typeface="Montserrat" pitchFamily="34" charset="-120"/>
                         </a:rPr>
                         <a:t>Intervalo</a:t>
                       </a:r>
                       <a:endParaRPr lang="en-US" sz="1250" dirty="0">
-                        <a:latin typeface="Calibri" charset="0"/>
-                        <a:ea typeface="Calibri" charset="0"/>
-                        <a:cs typeface="Calibri" charset="0"/>
+                        <a:latin typeface="Montserrat" charset="0"/>
+                        <a:ea typeface="Montserrat" charset="0"/>
+                        <a:cs typeface="Montserrat" charset="0"/>
                       </a:endParaRPr>
                     </a:p>
                   </a:txBody>
                   <a:tcPr marL="91440" marR="91440" marT="45720" marB="45720">
                     <a:lnL w="6350" cap="flat" cmpd="sng" algn="ctr">
                       <a:solidFill>
-                        <a:srgbClr val="D8E3EB"/>
+                        <a:srgbClr val="DCDCDC"/>
                       </a:solidFill>
                       <a:prstDash val="solid"/>
                       <a:round/>
@@ -12765,7 +13053,7 @@
                     </a:lnL>
                     <a:lnR w="6350" cap="flat" cmpd="sng" algn="ctr">
                       <a:solidFill>
-                        <a:srgbClr val="D8E3EB"/>
+                        <a:srgbClr val="DCDCDC"/>
                       </a:solidFill>
                       <a:prstDash val="solid"/>
                       <a:round/>
@@ -12774,7 +13062,7 @@
                     </a:lnR>
                     <a:lnT w="6350" cap="flat" cmpd="sng" algn="ctr">
                       <a:solidFill>
-                        <a:srgbClr val="D8E3EB"/>
+                        <a:srgbClr val="DCDCDC"/>
                       </a:solidFill>
                       <a:prstDash val="solid"/>
                       <a:round/>
@@ -12783,7 +13071,7 @@
                     </a:lnT>
                     <a:lnB w="6350" cap="flat" cmpd="sng" algn="ctr">
                       <a:solidFill>
-                        <a:srgbClr val="D8E3EB"/>
+                        <a:srgbClr val="DCDCDC"/>
                       </a:solidFill>
                       <a:prstDash val="solid"/>
                       <a:round/>
@@ -12791,7 +13079,7 @@
                       <a:tailEnd type="none" w="med" len="med"/>
                     </a:lnB>
                     <a:solidFill>
-                      <a:srgbClr val="21295C"/>
+                      <a:srgbClr val="1A1A1A"/>
                     </a:solidFill>
                   </a:tcPr>
                 </a:tc>
@@ -12808,23 +13096,23 @@
                           <a:solidFill>
                             <a:srgbClr val="FFFFFF"/>
                           </a:solidFill>
-                          <a:latin typeface="Calibri" pitchFamily="34" charset="0"/>
-                          <a:ea typeface="Calibri" pitchFamily="34" charset="-122"/>
-                          <a:cs typeface="Calibri" pitchFamily="34" charset="-120"/>
+                          <a:latin typeface="Montserrat" pitchFamily="34" charset="0"/>
+                          <a:ea typeface="Montserrat" pitchFamily="34" charset="-122"/>
+                          <a:cs typeface="Montserrat" pitchFamily="34" charset="-120"/>
                         </a:rPr>
                         <a:t>Teórico</a:t>
                       </a:r>
                       <a:endParaRPr lang="en-US" sz="1250" dirty="0">
-                        <a:latin typeface="Calibri" charset="0"/>
-                        <a:ea typeface="Calibri" charset="0"/>
-                        <a:cs typeface="Calibri" charset="0"/>
+                        <a:latin typeface="Montserrat" charset="0"/>
+                        <a:ea typeface="Montserrat" charset="0"/>
+                        <a:cs typeface="Montserrat" charset="0"/>
                       </a:endParaRPr>
                     </a:p>
                   </a:txBody>
                   <a:tcPr marL="91440" marR="91440" marT="45720" marB="45720">
                     <a:lnL w="6350" cap="flat" cmpd="sng" algn="ctr">
                       <a:solidFill>
-                        <a:srgbClr val="D8E3EB"/>
+                        <a:srgbClr val="DCDCDC"/>
                       </a:solidFill>
                       <a:prstDash val="solid"/>
                       <a:round/>
@@ -12833,7 +13121,7 @@
                     </a:lnL>
                     <a:lnR w="6350" cap="flat" cmpd="sng" algn="ctr">
                       <a:solidFill>
-                        <a:srgbClr val="D8E3EB"/>
+                        <a:srgbClr val="DCDCDC"/>
                       </a:solidFill>
                       <a:prstDash val="solid"/>
                       <a:round/>
@@ -12842,7 +13130,7 @@
                     </a:lnR>
                     <a:lnT w="6350" cap="flat" cmpd="sng" algn="ctr">
                       <a:solidFill>
-                        <a:srgbClr val="D8E3EB"/>
+                        <a:srgbClr val="DCDCDC"/>
                       </a:solidFill>
                       <a:prstDash val="solid"/>
                       <a:round/>
@@ -12851,7 +13139,7 @@
                     </a:lnT>
                     <a:lnB w="6350" cap="flat" cmpd="sng" algn="ctr">
                       <a:solidFill>
-                        <a:srgbClr val="D8E3EB"/>
+                        <a:srgbClr val="DCDCDC"/>
                       </a:solidFill>
                       <a:prstDash val="solid"/>
                       <a:round/>
@@ -12859,7 +13147,7 @@
                       <a:tailEnd type="none" w="med" len="med"/>
                     </a:lnB>
                     <a:solidFill>
-                      <a:srgbClr val="21295C"/>
+                      <a:srgbClr val="1A1A1A"/>
                     </a:solidFill>
                   </a:tcPr>
                 </a:tc>
@@ -12876,23 +13164,23 @@
                           <a:solidFill>
                             <a:srgbClr val="FFFFFF"/>
                           </a:solidFill>
-                          <a:latin typeface="Calibri" pitchFamily="34" charset="0"/>
-                          <a:ea typeface="Calibri" pitchFamily="34" charset="-122"/>
-                          <a:cs typeface="Calibri" pitchFamily="34" charset="-120"/>
+                          <a:latin typeface="Montserrat" pitchFamily="34" charset="0"/>
+                          <a:ea typeface="Montserrat" pitchFamily="34" charset="-122"/>
+                          <a:cs typeface="Montserrat" pitchFamily="34" charset="-120"/>
                         </a:rPr>
                         <a:t>Observado</a:t>
                       </a:r>
                       <a:endParaRPr lang="en-US" sz="1250" dirty="0">
-                        <a:latin typeface="Calibri" charset="0"/>
-                        <a:ea typeface="Calibri" charset="0"/>
-                        <a:cs typeface="Calibri" charset="0"/>
+                        <a:latin typeface="Montserrat" charset="0"/>
+                        <a:ea typeface="Montserrat" charset="0"/>
+                        <a:cs typeface="Montserrat" charset="0"/>
                       </a:endParaRPr>
                     </a:p>
                   </a:txBody>
                   <a:tcPr marL="91440" marR="91440" marT="45720" marB="45720">
                     <a:lnL w="6350" cap="flat" cmpd="sng" algn="ctr">
                       <a:solidFill>
-                        <a:srgbClr val="D8E3EB"/>
+                        <a:srgbClr val="DCDCDC"/>
                       </a:solidFill>
                       <a:prstDash val="solid"/>
                       <a:round/>
@@ -12901,7 +13189,7 @@
                     </a:lnL>
                     <a:lnR w="6350" cap="flat" cmpd="sng" algn="ctr">
                       <a:solidFill>
-                        <a:srgbClr val="D8E3EB"/>
+                        <a:srgbClr val="DCDCDC"/>
                       </a:solidFill>
                       <a:prstDash val="solid"/>
                       <a:round/>
@@ -12910,7 +13198,7 @@
                     </a:lnR>
                     <a:lnT w="6350" cap="flat" cmpd="sng" algn="ctr">
                       <a:solidFill>
-                        <a:srgbClr val="D8E3EB"/>
+                        <a:srgbClr val="DCDCDC"/>
                       </a:solidFill>
                       <a:prstDash val="solid"/>
                       <a:round/>
@@ -12919,7 +13207,7 @@
                     </a:lnT>
                     <a:lnB w="6350" cap="flat" cmpd="sng" algn="ctr">
                       <a:solidFill>
-                        <a:srgbClr val="D8E3EB"/>
+                        <a:srgbClr val="DCDCDC"/>
                       </a:solidFill>
                       <a:prstDash val="solid"/>
                       <a:round/>
@@ -12927,7 +13215,7 @@
                       <a:tailEnd type="none" w="med" len="med"/>
                     </a:lnB>
                     <a:solidFill>
-                      <a:srgbClr val="21295C"/>
+                      <a:srgbClr val="1A1A1A"/>
                     </a:solidFill>
                   </a:tcPr>
                 </a:tc>
@@ -12944,25 +13232,25 @@
                       <a:r>
                         <a:rPr lang="en-US" sz="1250" dirty="0">
                           <a:solidFill>
-                            <a:srgbClr val="1B2A3A"/>
+                            <a:srgbClr val="333333"/>
                           </a:solidFill>
-                          <a:latin typeface="Calibri" pitchFamily="34" charset="0"/>
-                          <a:ea typeface="Calibri" pitchFamily="34" charset="-122"/>
-                          <a:cs typeface="Calibri" pitchFamily="34" charset="-120"/>
+                          <a:latin typeface="Montserrat" pitchFamily="34" charset="0"/>
+                          <a:ea typeface="Montserrat" pitchFamily="34" charset="-122"/>
+                          <a:cs typeface="Montserrat" pitchFamily="34" charset="-120"/>
                         </a:rPr>
                         <a:t>μ ± 1σ</a:t>
                       </a:r>
                       <a:endParaRPr lang="en-US" sz="1250" dirty="0">
-                        <a:latin typeface="Calibri" charset="0"/>
-                        <a:ea typeface="Calibri" charset="0"/>
-                        <a:cs typeface="Calibri" charset="0"/>
+                        <a:latin typeface="Montserrat" charset="0"/>
+                        <a:ea typeface="Montserrat" charset="0"/>
+                        <a:cs typeface="Montserrat" charset="0"/>
                       </a:endParaRPr>
                     </a:p>
                   </a:txBody>
                   <a:tcPr marL="91440" marR="91440" marT="45720" marB="45720">
                     <a:lnL w="6350" cap="flat" cmpd="sng" algn="ctr">
                       <a:solidFill>
-                        <a:srgbClr val="D8E3EB"/>
+                        <a:srgbClr val="DCDCDC"/>
                       </a:solidFill>
                       <a:prstDash val="solid"/>
                       <a:round/>
@@ -12971,7 +13259,7 @@
                     </a:lnL>
                     <a:lnR w="6350" cap="flat" cmpd="sng" algn="ctr">
                       <a:solidFill>
-                        <a:srgbClr val="D8E3EB"/>
+                        <a:srgbClr val="DCDCDC"/>
                       </a:solidFill>
                       <a:prstDash val="solid"/>
                       <a:round/>
@@ -12980,7 +13268,7 @@
                     </a:lnR>
                     <a:lnT w="6350" cap="flat" cmpd="sng" algn="ctr">
                       <a:solidFill>
-                        <a:srgbClr val="D8E3EB"/>
+                        <a:srgbClr val="DCDCDC"/>
                       </a:solidFill>
                       <a:prstDash val="solid"/>
                       <a:round/>
@@ -12989,7 +13277,7 @@
                     </a:lnT>
                     <a:lnB w="6350" cap="flat" cmpd="sng" algn="ctr">
                       <a:solidFill>
-                        <a:srgbClr val="D8E3EB"/>
+                        <a:srgbClr val="DCDCDC"/>
                       </a:solidFill>
                       <a:prstDash val="solid"/>
                       <a:round/>
@@ -12997,7 +13285,7 @@
                       <a:tailEnd type="none" w="med" len="med"/>
                     </a:lnB>
                     <a:solidFill>
-                      <a:srgbClr val="F4F8FB"/>
+                      <a:srgbClr val="F5F5F5"/>
                     </a:solidFill>
                   </a:tcPr>
                 </a:tc>
@@ -13012,25 +13300,25 @@
                       <a:r>
                         <a:rPr lang="en-US" sz="1250" dirty="0">
                           <a:solidFill>
-                            <a:srgbClr val="1B2A3A"/>
+                            <a:srgbClr val="333333"/>
                           </a:solidFill>
-                          <a:latin typeface="Calibri" pitchFamily="34" charset="0"/>
-                          <a:ea typeface="Calibri" pitchFamily="34" charset="-122"/>
-                          <a:cs typeface="Calibri" pitchFamily="34" charset="-120"/>
+                          <a:latin typeface="Montserrat" pitchFamily="34" charset="0"/>
+                          <a:ea typeface="Montserrat" pitchFamily="34" charset="-122"/>
+                          <a:cs typeface="Montserrat" pitchFamily="34" charset="-120"/>
                         </a:rPr>
                         <a:t>68,27%</a:t>
                       </a:r>
                       <a:endParaRPr lang="en-US" sz="1250" dirty="0">
-                        <a:latin typeface="Calibri" charset="0"/>
-                        <a:ea typeface="Calibri" charset="0"/>
-                        <a:cs typeface="Calibri" charset="0"/>
+                        <a:latin typeface="Montserrat" charset="0"/>
+                        <a:ea typeface="Montserrat" charset="0"/>
+                        <a:cs typeface="Montserrat" charset="0"/>
                       </a:endParaRPr>
                     </a:p>
                   </a:txBody>
                   <a:tcPr marL="91440" marR="91440" marT="45720" marB="45720">
                     <a:lnL w="6350" cap="flat" cmpd="sng" algn="ctr">
                       <a:solidFill>
-                        <a:srgbClr val="D8E3EB"/>
+                        <a:srgbClr val="DCDCDC"/>
                       </a:solidFill>
                       <a:prstDash val="solid"/>
                       <a:round/>
@@ -13039,7 +13327,7 @@
                     </a:lnL>
                     <a:lnR w="6350" cap="flat" cmpd="sng" algn="ctr">
                       <a:solidFill>
-                        <a:srgbClr val="D8E3EB"/>
+                        <a:srgbClr val="DCDCDC"/>
                       </a:solidFill>
                       <a:prstDash val="solid"/>
                       <a:round/>
@@ -13048,7 +13336,7 @@
                     </a:lnR>
                     <a:lnT w="6350" cap="flat" cmpd="sng" algn="ctr">
                       <a:solidFill>
-                        <a:srgbClr val="D8E3EB"/>
+                        <a:srgbClr val="DCDCDC"/>
                       </a:solidFill>
                       <a:prstDash val="solid"/>
                       <a:round/>
@@ -13057,7 +13345,7 @@
                     </a:lnT>
                     <a:lnB w="6350" cap="flat" cmpd="sng" algn="ctr">
                       <a:solidFill>
-                        <a:srgbClr val="D8E3EB"/>
+                        <a:srgbClr val="DCDCDC"/>
                       </a:solidFill>
                       <a:prstDash val="solid"/>
                       <a:round/>
@@ -13065,7 +13353,7 @@
                       <a:tailEnd type="none" w="med" len="med"/>
                     </a:lnB>
                     <a:solidFill>
-                      <a:srgbClr val="F4F8FB"/>
+                      <a:srgbClr val="F5F5F5"/>
                     </a:solidFill>
                   </a:tcPr>
                 </a:tc>
@@ -13080,25 +13368,25 @@
                       <a:r>
                         <a:rPr lang="en-US" sz="1250" dirty="0">
                           <a:solidFill>
-                            <a:srgbClr val="1B2A3A"/>
+                            <a:srgbClr val="333333"/>
                           </a:solidFill>
-                          <a:latin typeface="Calibri" pitchFamily="34" charset="0"/>
-                          <a:ea typeface="Calibri" pitchFamily="34" charset="-122"/>
-                          <a:cs typeface="Calibri" pitchFamily="34" charset="-120"/>
+                          <a:latin typeface="Montserrat" pitchFamily="34" charset="0"/>
+                          <a:ea typeface="Montserrat" pitchFamily="34" charset="-122"/>
+                          <a:cs typeface="Montserrat" pitchFamily="34" charset="-120"/>
                         </a:rPr>
                         <a:t>67,00%</a:t>
                       </a:r>
                       <a:endParaRPr lang="en-US" sz="1250" dirty="0">
-                        <a:latin typeface="Calibri" charset="0"/>
-                        <a:ea typeface="Calibri" charset="0"/>
-                        <a:cs typeface="Calibri" charset="0"/>
+                        <a:latin typeface="Montserrat" charset="0"/>
+                        <a:ea typeface="Montserrat" charset="0"/>
+                        <a:cs typeface="Montserrat" charset="0"/>
                       </a:endParaRPr>
                     </a:p>
                   </a:txBody>
                   <a:tcPr marL="91440" marR="91440" marT="45720" marB="45720">
                     <a:lnL w="6350" cap="flat" cmpd="sng" algn="ctr">
                       <a:solidFill>
-                        <a:srgbClr val="D8E3EB"/>
+                        <a:srgbClr val="DCDCDC"/>
                       </a:solidFill>
                       <a:prstDash val="solid"/>
                       <a:round/>
@@ -13107,7 +13395,7 @@
                     </a:lnL>
                     <a:lnR w="6350" cap="flat" cmpd="sng" algn="ctr">
                       <a:solidFill>
-                        <a:srgbClr val="D8E3EB"/>
+                        <a:srgbClr val="DCDCDC"/>
                       </a:solidFill>
                       <a:prstDash val="solid"/>
                       <a:round/>
@@ -13116,7 +13404,7 @@
                     </a:lnR>
                     <a:lnT w="6350" cap="flat" cmpd="sng" algn="ctr">
                       <a:solidFill>
-                        <a:srgbClr val="D8E3EB"/>
+                        <a:srgbClr val="DCDCDC"/>
                       </a:solidFill>
                       <a:prstDash val="solid"/>
                       <a:round/>
@@ -13125,7 +13413,7 @@
                     </a:lnT>
                     <a:lnB w="6350" cap="flat" cmpd="sng" algn="ctr">
                       <a:solidFill>
-                        <a:srgbClr val="D8E3EB"/>
+                        <a:srgbClr val="DCDCDC"/>
                       </a:solidFill>
                       <a:prstDash val="solid"/>
                       <a:round/>
@@ -13133,7 +13421,7 @@
                       <a:tailEnd type="none" w="med" len="med"/>
                     </a:lnB>
                     <a:solidFill>
-                      <a:srgbClr val="F4F8FB"/>
+                      <a:srgbClr val="F5F5F5"/>
                     </a:solidFill>
                   </a:tcPr>
                 </a:tc>
@@ -13150,25 +13438,25 @@
                       <a:r>
                         <a:rPr lang="en-US" sz="1250" dirty="0">
                           <a:solidFill>
-                            <a:srgbClr val="1B2A3A"/>
+                            <a:srgbClr val="333333"/>
                           </a:solidFill>
-                          <a:latin typeface="Calibri" pitchFamily="34" charset="0"/>
-                          <a:ea typeface="Calibri" pitchFamily="34" charset="-122"/>
-                          <a:cs typeface="Calibri" pitchFamily="34" charset="-120"/>
+                          <a:latin typeface="Montserrat" pitchFamily="34" charset="0"/>
+                          <a:ea typeface="Montserrat" pitchFamily="34" charset="-122"/>
+                          <a:cs typeface="Montserrat" pitchFamily="34" charset="-120"/>
                         </a:rPr>
                         <a:t>μ ± 2σ</a:t>
                       </a:r>
                       <a:endParaRPr lang="en-US" sz="1250" dirty="0">
-                        <a:latin typeface="Calibri" charset="0"/>
-                        <a:ea typeface="Calibri" charset="0"/>
-                        <a:cs typeface="Calibri" charset="0"/>
+                        <a:latin typeface="Montserrat" charset="0"/>
+                        <a:ea typeface="Montserrat" charset="0"/>
+                        <a:cs typeface="Montserrat" charset="0"/>
                       </a:endParaRPr>
                     </a:p>
                   </a:txBody>
                   <a:tcPr marL="91440" marR="91440" marT="45720" marB="45720">
                     <a:lnL w="6350" cap="flat" cmpd="sng" algn="ctr">
                       <a:solidFill>
-                        <a:srgbClr val="D8E3EB"/>
+                        <a:srgbClr val="DCDCDC"/>
                       </a:solidFill>
                       <a:prstDash val="solid"/>
                       <a:round/>
@@ -13177,7 +13465,7 @@
                     </a:lnL>
                     <a:lnR w="6350" cap="flat" cmpd="sng" algn="ctr">
                       <a:solidFill>
-                        <a:srgbClr val="D8E3EB"/>
+                        <a:srgbClr val="DCDCDC"/>
                       </a:solidFill>
                       <a:prstDash val="solid"/>
                       <a:round/>
@@ -13186,7 +13474,7 @@
                     </a:lnR>
                     <a:lnT w="6350" cap="flat" cmpd="sng" algn="ctr">
                       <a:solidFill>
-                        <a:srgbClr val="D8E3EB"/>
+                        <a:srgbClr val="DCDCDC"/>
                       </a:solidFill>
                       <a:prstDash val="solid"/>
                       <a:round/>
@@ -13195,7 +13483,7 @@
                     </a:lnT>
                     <a:lnB w="6350" cap="flat" cmpd="sng" algn="ctr">
                       <a:solidFill>
-                        <a:srgbClr val="D8E3EB"/>
+                        <a:srgbClr val="DCDCDC"/>
                       </a:solidFill>
                       <a:prstDash val="solid"/>
                       <a:round/>
@@ -13218,25 +13506,25 @@
                       <a:r>
                         <a:rPr lang="en-US" sz="1250" dirty="0">
                           <a:solidFill>
-                            <a:srgbClr val="1B2A3A"/>
+                            <a:srgbClr val="333333"/>
                           </a:solidFill>
-                          <a:latin typeface="Calibri" pitchFamily="34" charset="0"/>
-                          <a:ea typeface="Calibri" pitchFamily="34" charset="-122"/>
-                          <a:cs typeface="Calibri" pitchFamily="34" charset="-120"/>
+                          <a:latin typeface="Montserrat" pitchFamily="34" charset="0"/>
+                          <a:ea typeface="Montserrat" pitchFamily="34" charset="-122"/>
+                          <a:cs typeface="Montserrat" pitchFamily="34" charset="-120"/>
                         </a:rPr>
                         <a:t>95,45%</a:t>
                       </a:r>
                       <a:endParaRPr lang="en-US" sz="1250" dirty="0">
-                        <a:latin typeface="Calibri" charset="0"/>
-                        <a:ea typeface="Calibri" charset="0"/>
-                        <a:cs typeface="Calibri" charset="0"/>
+                        <a:latin typeface="Montserrat" charset="0"/>
+                        <a:ea typeface="Montserrat" charset="0"/>
+                        <a:cs typeface="Montserrat" charset="0"/>
                       </a:endParaRPr>
                     </a:p>
                   </a:txBody>
                   <a:tcPr marL="91440" marR="91440" marT="45720" marB="45720">
                     <a:lnL w="6350" cap="flat" cmpd="sng" algn="ctr">
                       <a:solidFill>
-                        <a:srgbClr val="D8E3EB"/>
+                        <a:srgbClr val="DCDCDC"/>
                       </a:solidFill>
                       <a:prstDash val="solid"/>
                       <a:round/>
@@ -13245,7 +13533,7 @@
                     </a:lnL>
                     <a:lnR w="6350" cap="flat" cmpd="sng" algn="ctr">
                       <a:solidFill>
-                        <a:srgbClr val="D8E3EB"/>
+                        <a:srgbClr val="DCDCDC"/>
                       </a:solidFill>
                       <a:prstDash val="solid"/>
                       <a:round/>
@@ -13254,7 +13542,7 @@
                     </a:lnR>
                     <a:lnT w="6350" cap="flat" cmpd="sng" algn="ctr">
                       <a:solidFill>
-                        <a:srgbClr val="D8E3EB"/>
+                        <a:srgbClr val="DCDCDC"/>
                       </a:solidFill>
                       <a:prstDash val="solid"/>
                       <a:round/>
@@ -13263,7 +13551,7 @@
                     </a:lnT>
                     <a:lnB w="6350" cap="flat" cmpd="sng" algn="ctr">
                       <a:solidFill>
-                        <a:srgbClr val="D8E3EB"/>
+                        <a:srgbClr val="DCDCDC"/>
                       </a:solidFill>
                       <a:prstDash val="solid"/>
                       <a:round/>
@@ -13286,25 +13574,25 @@
                       <a:r>
                         <a:rPr lang="en-US" sz="1250" dirty="0">
                           <a:solidFill>
-                            <a:srgbClr val="1B2A3A"/>
+                            <a:srgbClr val="333333"/>
                           </a:solidFill>
-                          <a:latin typeface="Calibri" pitchFamily="34" charset="0"/>
-                          <a:ea typeface="Calibri" pitchFamily="34" charset="-122"/>
-                          <a:cs typeface="Calibri" pitchFamily="34" charset="-120"/>
+                          <a:latin typeface="Montserrat" pitchFamily="34" charset="0"/>
+                          <a:ea typeface="Montserrat" pitchFamily="34" charset="-122"/>
+                          <a:cs typeface="Montserrat" pitchFamily="34" charset="-120"/>
                         </a:rPr>
                         <a:t>95,90%</a:t>
                       </a:r>
                       <a:endParaRPr lang="en-US" sz="1250" dirty="0">
-                        <a:latin typeface="Calibri" charset="0"/>
-                        <a:ea typeface="Calibri" charset="0"/>
-                        <a:cs typeface="Calibri" charset="0"/>
+                        <a:latin typeface="Montserrat" charset="0"/>
+                        <a:ea typeface="Montserrat" charset="0"/>
+                        <a:cs typeface="Montserrat" charset="0"/>
                       </a:endParaRPr>
                     </a:p>
                   </a:txBody>
                   <a:tcPr marL="91440" marR="91440" marT="45720" marB="45720">
                     <a:lnL w="6350" cap="flat" cmpd="sng" algn="ctr">
                       <a:solidFill>
-                        <a:srgbClr val="D8E3EB"/>
+                        <a:srgbClr val="DCDCDC"/>
                       </a:solidFill>
                       <a:prstDash val="solid"/>
                       <a:round/>
@@ -13313,7 +13601,7 @@
                     </a:lnL>
                     <a:lnR w="6350" cap="flat" cmpd="sng" algn="ctr">
                       <a:solidFill>
-                        <a:srgbClr val="D8E3EB"/>
+                        <a:srgbClr val="DCDCDC"/>
                       </a:solidFill>
                       <a:prstDash val="solid"/>
                       <a:round/>
@@ -13322,7 +13610,7 @@
                     </a:lnR>
                     <a:lnT w="6350" cap="flat" cmpd="sng" algn="ctr">
                       <a:solidFill>
-                        <a:srgbClr val="D8E3EB"/>
+                        <a:srgbClr val="DCDCDC"/>
                       </a:solidFill>
                       <a:prstDash val="solid"/>
                       <a:round/>
@@ -13331,7 +13619,7 @@
                     </a:lnT>
                     <a:lnB w="6350" cap="flat" cmpd="sng" algn="ctr">
                       <a:solidFill>
-                        <a:srgbClr val="D8E3EB"/>
+                        <a:srgbClr val="DCDCDC"/>
                       </a:solidFill>
                       <a:prstDash val="solid"/>
                       <a:round/>
@@ -13356,25 +13644,25 @@
                       <a:r>
                         <a:rPr lang="en-US" sz="1250" dirty="0">
                           <a:solidFill>
-                            <a:srgbClr val="1B2A3A"/>
+                            <a:srgbClr val="333333"/>
                           </a:solidFill>
-                          <a:latin typeface="Calibri" pitchFamily="34" charset="0"/>
-                          <a:ea typeface="Calibri" pitchFamily="34" charset="-122"/>
-                          <a:cs typeface="Calibri" pitchFamily="34" charset="-120"/>
+                          <a:latin typeface="Montserrat" pitchFamily="34" charset="0"/>
+                          <a:ea typeface="Montserrat" pitchFamily="34" charset="-122"/>
+                          <a:cs typeface="Montserrat" pitchFamily="34" charset="-120"/>
                         </a:rPr>
                         <a:t>μ ± 3σ</a:t>
                       </a:r>
                       <a:endParaRPr lang="en-US" sz="1250" dirty="0">
-                        <a:latin typeface="Calibri" charset="0"/>
-                        <a:ea typeface="Calibri" charset="0"/>
-                        <a:cs typeface="Calibri" charset="0"/>
+                        <a:latin typeface="Montserrat" charset="0"/>
+                        <a:ea typeface="Montserrat" charset="0"/>
+                        <a:cs typeface="Montserrat" charset="0"/>
                       </a:endParaRPr>
                     </a:p>
                   </a:txBody>
                   <a:tcPr marL="91440" marR="91440" marT="45720" marB="45720">
                     <a:lnL w="6350" cap="flat" cmpd="sng" algn="ctr">
                       <a:solidFill>
-                        <a:srgbClr val="D8E3EB"/>
+                        <a:srgbClr val="DCDCDC"/>
                       </a:solidFill>
                       <a:prstDash val="solid"/>
                       <a:round/>
@@ -13383,7 +13671,7 @@
                     </a:lnL>
                     <a:lnR w="6350" cap="flat" cmpd="sng" algn="ctr">
                       <a:solidFill>
-                        <a:srgbClr val="D8E3EB"/>
+                        <a:srgbClr val="DCDCDC"/>
                       </a:solidFill>
                       <a:prstDash val="solid"/>
                       <a:round/>
@@ -13392,7 +13680,7 @@
                     </a:lnR>
                     <a:lnT w="6350" cap="flat" cmpd="sng" algn="ctr">
                       <a:solidFill>
-                        <a:srgbClr val="D8E3EB"/>
+                        <a:srgbClr val="DCDCDC"/>
                       </a:solidFill>
                       <a:prstDash val="solid"/>
                       <a:round/>
@@ -13401,7 +13689,7 @@
                     </a:lnT>
                     <a:lnB w="6350" cap="flat" cmpd="sng" algn="ctr">
                       <a:solidFill>
-                        <a:srgbClr val="D8E3EB"/>
+                        <a:srgbClr val="DCDCDC"/>
                       </a:solidFill>
                       <a:prstDash val="solid"/>
                       <a:round/>
@@ -13409,7 +13697,7 @@
                       <a:tailEnd type="none" w="med" len="med"/>
                     </a:lnB>
                     <a:solidFill>
-                      <a:srgbClr val="F4F8FB"/>
+                      <a:srgbClr val="F5F5F5"/>
                     </a:solidFill>
                   </a:tcPr>
                 </a:tc>
@@ -13424,25 +13712,25 @@
                       <a:r>
                         <a:rPr lang="en-US" sz="1250" dirty="0">
                           <a:solidFill>
-                            <a:srgbClr val="1B2A3A"/>
+                            <a:srgbClr val="333333"/>
                           </a:solidFill>
-                          <a:latin typeface="Calibri" pitchFamily="34" charset="0"/>
-                          <a:ea typeface="Calibri" pitchFamily="34" charset="-122"/>
-                          <a:cs typeface="Calibri" pitchFamily="34" charset="-120"/>
+                          <a:latin typeface="Montserrat" pitchFamily="34" charset="0"/>
+                          <a:ea typeface="Montserrat" pitchFamily="34" charset="-122"/>
+                          <a:cs typeface="Montserrat" pitchFamily="34" charset="-120"/>
                         </a:rPr>
                         <a:t>99,73%</a:t>
                       </a:r>
                       <a:endParaRPr lang="en-US" sz="1250" dirty="0">
-                        <a:latin typeface="Calibri" charset="0"/>
-                        <a:ea typeface="Calibri" charset="0"/>
-                        <a:cs typeface="Calibri" charset="0"/>
+                        <a:latin typeface="Montserrat" charset="0"/>
+                        <a:ea typeface="Montserrat" charset="0"/>
+                        <a:cs typeface="Montserrat" charset="0"/>
                       </a:endParaRPr>
                     </a:p>
                   </a:txBody>
                   <a:tcPr marL="91440" marR="91440" marT="45720" marB="45720">
                     <a:lnL w="6350" cap="flat" cmpd="sng" algn="ctr">
                       <a:solidFill>
-                        <a:srgbClr val="D8E3EB"/>
+                        <a:srgbClr val="DCDCDC"/>
                       </a:solidFill>
                       <a:prstDash val="solid"/>
                       <a:round/>
@@ -13451,7 +13739,7 @@
                     </a:lnL>
                     <a:lnR w="6350" cap="flat" cmpd="sng" algn="ctr">
                       <a:solidFill>
-                        <a:srgbClr val="D8E3EB"/>
+                        <a:srgbClr val="DCDCDC"/>
                       </a:solidFill>
                       <a:prstDash val="solid"/>
                       <a:round/>
@@ -13460,7 +13748,7 @@
                     </a:lnR>
                     <a:lnT w="6350" cap="flat" cmpd="sng" algn="ctr">
                       <a:solidFill>
-                        <a:srgbClr val="D8E3EB"/>
+                        <a:srgbClr val="DCDCDC"/>
                       </a:solidFill>
                       <a:prstDash val="solid"/>
                       <a:round/>
@@ -13469,7 +13757,7 @@
                     </a:lnT>
                     <a:lnB w="6350" cap="flat" cmpd="sng" algn="ctr">
                       <a:solidFill>
-                        <a:srgbClr val="D8E3EB"/>
+                        <a:srgbClr val="DCDCDC"/>
                       </a:solidFill>
                       <a:prstDash val="solid"/>
                       <a:round/>
@@ -13477,7 +13765,7 @@
                       <a:tailEnd type="none" w="med" len="med"/>
                     </a:lnB>
                     <a:solidFill>
-                      <a:srgbClr val="F4F8FB"/>
+                      <a:srgbClr val="F5F5F5"/>
                     </a:solidFill>
                   </a:tcPr>
                 </a:tc>
@@ -13492,25 +13780,25 @@
                       <a:r>
                         <a:rPr lang="en-US" sz="1250" dirty="0">
                           <a:solidFill>
-                            <a:srgbClr val="1B2A3A"/>
+                            <a:srgbClr val="333333"/>
                           </a:solidFill>
-                          <a:latin typeface="Calibri" pitchFamily="34" charset="0"/>
-                          <a:ea typeface="Calibri" pitchFamily="34" charset="-122"/>
-                          <a:cs typeface="Calibri" pitchFamily="34" charset="-120"/>
+                          <a:latin typeface="Montserrat" pitchFamily="34" charset="0"/>
+                          <a:ea typeface="Montserrat" pitchFamily="34" charset="-122"/>
+                          <a:cs typeface="Montserrat" pitchFamily="34" charset="-120"/>
                         </a:rPr>
                         <a:t>99,80%</a:t>
                       </a:r>
                       <a:endParaRPr lang="en-US" sz="1250" dirty="0">
-                        <a:latin typeface="Calibri" charset="0"/>
-                        <a:ea typeface="Calibri" charset="0"/>
-                        <a:cs typeface="Calibri" charset="0"/>
+                        <a:latin typeface="Montserrat" charset="0"/>
+                        <a:ea typeface="Montserrat" charset="0"/>
+                        <a:cs typeface="Montserrat" charset="0"/>
                       </a:endParaRPr>
                     </a:p>
                   </a:txBody>
                   <a:tcPr marL="91440" marR="91440" marT="45720" marB="45720">
                     <a:lnL w="6350" cap="flat" cmpd="sng" algn="ctr">
                       <a:solidFill>
-                        <a:srgbClr val="D8E3EB"/>
+                        <a:srgbClr val="DCDCDC"/>
                       </a:solidFill>
                       <a:prstDash val="solid"/>
                       <a:round/>
@@ -13519,7 +13807,7 @@
                     </a:lnL>
                     <a:lnR w="6350" cap="flat" cmpd="sng" algn="ctr">
                       <a:solidFill>
-                        <a:srgbClr val="D8E3EB"/>
+                        <a:srgbClr val="DCDCDC"/>
                       </a:solidFill>
                       <a:prstDash val="solid"/>
                       <a:round/>
@@ -13528,7 +13816,7 @@
                     </a:lnR>
                     <a:lnT w="6350" cap="flat" cmpd="sng" algn="ctr">
                       <a:solidFill>
-                        <a:srgbClr val="D8E3EB"/>
+                        <a:srgbClr val="DCDCDC"/>
                       </a:solidFill>
                       <a:prstDash val="solid"/>
                       <a:round/>
@@ -13537,7 +13825,7 @@
                     </a:lnT>
                     <a:lnB w="6350" cap="flat" cmpd="sng" algn="ctr">
                       <a:solidFill>
-                        <a:srgbClr val="D8E3EB"/>
+                        <a:srgbClr val="DCDCDC"/>
                       </a:solidFill>
                       <a:prstDash val="solid"/>
                       <a:round/>
@@ -13545,7 +13833,7 @@
                       <a:tailEnd type="none" w="med" len="med"/>
                     </a:lnB>
                     <a:solidFill>
-                      <a:srgbClr val="F4F8FB"/>
+                      <a:srgbClr val="F5F5F5"/>
                     </a:solidFill>
                   </a:tcPr>
                 </a:tc>
@@ -13556,7 +13844,7 @@
       </p:graphicFrame>
       <p:sp>
         <p:nvSpPr>
-          <p:cNvPr id="10" name="Shape 6"/>
+          <p:cNvPr id="11" name="Shape 6"/>
           <p:cNvSpPr/>
           <p:nvPr/>
         </p:nvSpPr>
@@ -13571,11 +13859,11 @@
             </a:avLst>
           </a:prstGeom>
           <a:solidFill>
-            <a:srgbClr val="EDF3F7"/>
+            <a:srgbClr val="F5F5F5"/>
           </a:solidFill>
           <a:ln w="12700">
             <a:solidFill>
-              <a:srgbClr val="EDF3F7"/>
+              <a:srgbClr val="F5F5F5"/>
             </a:solidFill>
             <a:prstDash val="solid"/>
           </a:ln>
@@ -13583,7 +13871,7 @@
       </p:sp>
       <p:sp>
         <p:nvSpPr>
-          <p:cNvPr id="11" name="Text 7"/>
+          <p:cNvPr id="12" name="Text 7"/>
           <p:cNvSpPr txBox="1"/>
           <p:nvPr/>
         </p:nvSpPr>
@@ -13608,11 +13896,11 @@
             <a:r>
               <a:rPr lang="en-US" sz="1400" b="1" dirty="0">
                 <a:solidFill>
-                  <a:srgbClr val="21295C"/>
-                </a:solidFill>
-                <a:latin typeface="Cambria" pitchFamily="34" charset="0"/>
-                <a:ea typeface="Cambria" pitchFamily="34" charset="-122"/>
-                <a:cs typeface="Cambria" pitchFamily="34" charset="-120"/>
+                  <a:srgbClr val="1A1A1A"/>
+                </a:solidFill>
+                <a:latin typeface="Montserrat" pitchFamily="34" charset="0"/>
+                <a:ea typeface="Montserrat" pitchFamily="34" charset="-122"/>
+                <a:cs typeface="Montserrat" pitchFamily="34" charset="-120"/>
               </a:rPr>
               <a:t>Shapiro-Wilk</a:t>
             </a:r>
@@ -13622,7 +13910,7 @@
       </p:sp>
       <p:sp>
         <p:nvSpPr>
-          <p:cNvPr id="12" name="Text 8"/>
+          <p:cNvPr id="13" name="Text 8"/>
           <p:cNvSpPr txBox="1"/>
           <p:nvPr/>
         </p:nvSpPr>
@@ -13647,7 +13935,7 @@
             <a:r>
               <a:rPr lang="en-US" sz="1150" dirty="0">
                 <a:solidFill>
-                  <a:srgbClr val="1B2A3A"/>
+                  <a:srgbClr val="333333"/>
                 </a:solidFill>
                 <a:latin typeface="Courier New" pitchFamily="34" charset="0"/>
                 <a:ea typeface="Courier New" pitchFamily="34" charset="-122"/>
@@ -13661,7 +13949,7 @@
       </p:sp>
       <p:sp>
         <p:nvSpPr>
-          <p:cNvPr id="13" name="Text 9"/>
+          <p:cNvPr id="14" name="Text 9"/>
           <p:cNvSpPr txBox="1"/>
           <p:nvPr/>
         </p:nvSpPr>
@@ -13686,11 +13974,11 @@
             <a:r>
               <a:rPr lang="en-US" sz="1150" dirty="0">
                 <a:solidFill>
-                  <a:srgbClr val="5A6B7B"/>
-                </a:solidFill>
-                <a:latin typeface="Calibri" pitchFamily="34" charset="0"/>
-                <a:ea typeface="Calibri" pitchFamily="34" charset="-122"/>
-                <a:cs typeface="Calibri" pitchFamily="34" charset="-120"/>
+                  <a:srgbClr val="6E6E6E"/>
+                </a:solidFill>
+                <a:latin typeface="Montserrat" pitchFamily="34" charset="0"/>
+                <a:ea typeface="Montserrat" pitchFamily="34" charset="-122"/>
+                <a:cs typeface="Montserrat" pitchFamily="34" charset="-120"/>
               </a:rPr>
               <a:t>O valor de p ficou acima de 0,05, então os dados combinam com a Normal.</a:t>
             </a:r>
@@ -13700,7 +13988,7 @@
       </p:sp>
       <p:sp>
         <p:nvSpPr>
-          <p:cNvPr id="14" name="Shape 10"/>
+          <p:cNvPr id="15" name="Shape 10"/>
           <p:cNvSpPr/>
           <p:nvPr/>
         </p:nvSpPr>
@@ -13715,11 +14003,11 @@
             </a:avLst>
           </a:prstGeom>
           <a:solidFill>
-            <a:srgbClr val="21295C"/>
+            <a:srgbClr val="1A1A1A"/>
           </a:solidFill>
           <a:ln w="12700">
             <a:solidFill>
-              <a:srgbClr val="21295C"/>
+              <a:srgbClr val="1A1A1A"/>
             </a:solidFill>
             <a:prstDash val="solid"/>
           </a:ln>
@@ -13727,7 +14015,7 @@
       </p:sp>
       <p:sp>
         <p:nvSpPr>
-          <p:cNvPr id="15" name="Text 11"/>
+          <p:cNvPr id="16" name="Text 11"/>
           <p:cNvSpPr txBox="1"/>
           <p:nvPr/>
         </p:nvSpPr>
@@ -13752,11 +14040,11 @@
             <a:r>
               <a:rPr lang="en-US" sz="1050" b="1" spc="120" kern="0" dirty="0">
                 <a:solidFill>
-                  <a:srgbClr val="9EC6DC"/>
-                </a:solidFill>
-                <a:latin typeface="Calibri" pitchFamily="34" charset="0"/>
-                <a:ea typeface="Calibri" pitchFamily="34" charset="-122"/>
-                <a:cs typeface="Calibri" pitchFamily="34" charset="-120"/>
+                  <a:srgbClr val="F0A8C4"/>
+                </a:solidFill>
+                <a:latin typeface="Montserrat" pitchFamily="34" charset="0"/>
+                <a:ea typeface="Montserrat" pitchFamily="34" charset="-122"/>
+                <a:cs typeface="Montserrat" pitchFamily="34" charset="-120"/>
               </a:rPr>
               <a:t>ONDE A CURVA NORMAL É USADA</a:t>
             </a:r>
@@ -13766,7 +14054,7 @@
       </p:sp>
       <p:sp>
         <p:nvSpPr>
-          <p:cNvPr id="16" name="Text 12"/>
+          <p:cNvPr id="17" name="Text 12"/>
           <p:cNvSpPr txBox="1"/>
           <p:nvPr/>
         </p:nvSpPr>
@@ -13800,9 +14088,9 @@
                 <a:solidFill>
                   <a:srgbClr val="FFFFFF"/>
                 </a:solidFill>
-                <a:latin typeface="Calibri" pitchFamily="34" charset="0"/>
-                <a:ea typeface="Calibri" pitchFamily="34" charset="-122"/>
-                <a:cs typeface="Calibri" pitchFamily="34" charset="-120"/>
+                <a:latin typeface="Montserrat" pitchFamily="34" charset="0"/>
+                <a:ea typeface="Montserrat" pitchFamily="34" charset="-122"/>
+                <a:cs typeface="Montserrat" pitchFamily="34" charset="-120"/>
               </a:rPr>
               <a:t>Ajuste inicial de redes neurais</a:t>
             </a:r>
@@ -13824,9 +14112,9 @@
                 <a:solidFill>
                   <a:srgbClr val="FFFFFF"/>
                 </a:solidFill>
-                <a:latin typeface="Calibri" pitchFamily="34" charset="0"/>
-                <a:ea typeface="Calibri" pitchFamily="34" charset="-122"/>
-                <a:cs typeface="Calibri" pitchFamily="34" charset="-120"/>
+                <a:latin typeface="Montserrat" pitchFamily="34" charset="0"/>
+                <a:ea typeface="Montserrat" pitchFamily="34" charset="-122"/>
+                <a:cs typeface="Montserrat" pitchFamily="34" charset="-120"/>
               </a:rPr>
               <a:t>Deixar variáveis na mesma escala</a:t>
             </a:r>
@@ -13848,9 +14136,9 @@
                 <a:solidFill>
                   <a:srgbClr val="FFFFFF"/>
                 </a:solidFill>
-                <a:latin typeface="Calibri" pitchFamily="34" charset="0"/>
-                <a:ea typeface="Calibri" pitchFamily="34" charset="-122"/>
-                <a:cs typeface="Calibri" pitchFamily="34" charset="-120"/>
+                <a:latin typeface="Montserrat" pitchFamily="34" charset="0"/>
+                <a:ea typeface="Montserrat" pitchFamily="34" charset="-122"/>
+                <a:cs typeface="Montserrat" pitchFamily="34" charset="-120"/>
               </a:rPr>
               <a:t>O modelo que usamos no próximo slide</a:t>
             </a:r>
@@ -13872,9 +14160,9 @@
                 <a:solidFill>
                   <a:srgbClr val="FFFFFF"/>
                 </a:solidFill>
-                <a:latin typeface="Calibri" pitchFamily="34" charset="0"/>
-                <a:ea typeface="Calibri" pitchFamily="34" charset="-122"/>
-                <a:cs typeface="Calibri" pitchFamily="34" charset="-120"/>
+                <a:latin typeface="Montserrat" pitchFamily="34" charset="0"/>
+                <a:ea typeface="Montserrat" pitchFamily="34" charset="-122"/>
+                <a:cs typeface="Montserrat" pitchFamily="34" charset="-120"/>
               </a:rPr>
               <a:t>Encontrar valores fora do normal</a:t>
             </a:r>
@@ -13896,9 +14184,9 @@
                 <a:solidFill>
                   <a:srgbClr val="FFFFFF"/>
                 </a:solidFill>
-                <a:latin typeface="Calibri" pitchFamily="34" charset="0"/>
-                <a:ea typeface="Calibri" pitchFamily="34" charset="-122"/>
-                <a:cs typeface="Calibri" pitchFamily="34" charset="-120"/>
+                <a:latin typeface="Montserrat" pitchFamily="34" charset="0"/>
+                <a:ea typeface="Montserrat" pitchFamily="34" charset="-122"/>
+                <a:cs typeface="Montserrat" pitchFamily="34" charset="-120"/>
               </a:rPr>
               <a:t>Programas que geram imagens</a:t>
             </a:r>
@@ -13920,9 +14208,9 @@
                 <a:solidFill>
                   <a:srgbClr val="FFFFFF"/>
                 </a:solidFill>
-                <a:latin typeface="Calibri" pitchFamily="34" charset="0"/>
-                <a:ea typeface="Calibri" pitchFamily="34" charset="-122"/>
-                <a:cs typeface="Calibri" pitchFamily="34" charset="-120"/>
+                <a:latin typeface="Montserrat" pitchFamily="34" charset="0"/>
+                <a:ea typeface="Montserrat" pitchFamily="34" charset="-122"/>
+                <a:cs typeface="Montserrat" pitchFamily="34" charset="-120"/>
               </a:rPr>
               <a:t>Margem de erro de pesquisas e testes</a:t>
             </a:r>
@@ -13977,7 +14265,7 @@
             <a:avLst/>
           </a:prstGeom>
           <a:solidFill>
-            <a:srgbClr val="1C7293"/>
+            <a:srgbClr val="1A1A1A"/>
           </a:solidFill>
           <a:ln/>
         </p:spPr>
@@ -14011,9 +14299,9 @@
                 <a:solidFill>
                   <a:srgbClr val="FFFFFF"/>
                 </a:solidFill>
-                <a:latin typeface="Cambria" pitchFamily="34" charset="0"/>
-                <a:ea typeface="Cambria" pitchFamily="34" charset="-122"/>
-                <a:cs typeface="Cambria" pitchFamily="34" charset="-120"/>
+                <a:latin typeface="Montserrat" pitchFamily="34" charset="0"/>
+                <a:ea typeface="Montserrat" pitchFamily="34" charset="-122"/>
+                <a:cs typeface="Montserrat" pitchFamily="34" charset="-120"/>
               </a:rPr>
               <a:t>8</a:t>
             </a:r>
@@ -14030,7 +14318,7 @@
         <p:spPr>
           <a:xfrm>
             <a:off x="1298448" y="329184"/>
-            <a:ext cx="10332720" cy="658368"/>
+            <a:ext cx="9235440" cy="658368"/>
           </a:xfrm>
           <a:prstGeom prst="rect">
             <a:avLst/>
@@ -14048,11 +14336,11 @@
             <a:r>
               <a:rPr lang="en-US" sz="3000" b="1" dirty="0">
                 <a:solidFill>
-                  <a:srgbClr val="21295C"/>
-                </a:solidFill>
-                <a:latin typeface="Cambria" pitchFamily="34" charset="0"/>
-                <a:ea typeface="Cambria" pitchFamily="34" charset="-122"/>
-                <a:cs typeface="Cambria" pitchFamily="34" charset="-120"/>
+                  <a:srgbClr val="1A1A1A"/>
+                </a:solidFill>
+                <a:latin typeface="Montserrat" pitchFamily="34" charset="0"/>
+                <a:ea typeface="Montserrat" pitchFamily="34" charset="-122"/>
+                <a:cs typeface="Montserrat" pitchFamily="34" charset="-120"/>
               </a:rPr>
               <a:t>Classificador Naive Bayes Gaussiano</a:t>
             </a:r>
@@ -14060,9 +14348,33 @@
           </a:p>
         </p:txBody>
       </p:sp>
-      <p:sp>
-        <p:nvSpPr>
-          <p:cNvPr id="5" name="Text 3"/>
+      <p:pic>
+        <p:nvPicPr>
+          <p:cNvPr id="5" name="Image 0" descr="/home/user/Projeto-Python/.claude/skills/fiap-doc/assets/header-logo.png">    </p:cNvPr>
+          <p:cNvPicPr>
+            <a:picLocks noChangeAspect="1"/>
+          </p:cNvPicPr>
+          <p:nvPr/>
+        </p:nvPicPr>
+        <p:blipFill>
+          <a:blip r:embed="rId1"/>
+          <a:stretch>
+            <a:fillRect/>
+          </a:stretch>
+        </p:blipFill>
+        <p:spPr>
+          <a:xfrm>
+            <a:off x="10716768" y="402336"/>
+            <a:ext cx="896112" cy="422453"/>
+          </a:xfrm>
+          <a:prstGeom prst="rect">
+            <a:avLst/>
+          </a:prstGeom>
+        </p:spPr>
+      </p:pic>
+      <p:sp>
+        <p:nvSpPr>
+          <p:cNvPr id="6" name="Text 3"/>
           <p:cNvSpPr txBox="1"/>
           <p:nvPr/>
         </p:nvSpPr>
@@ -14087,11 +14399,11 @@
             <a:r>
               <a:rPr lang="en-US" sz="1400" i="1" dirty="0">
                 <a:solidFill>
-                  <a:srgbClr val="5A6B7B"/>
-                </a:solidFill>
-                <a:latin typeface="Calibri" pitchFamily="34" charset="0"/>
-                <a:ea typeface="Calibri" pitchFamily="34" charset="-122"/>
-                <a:cs typeface="Calibri" pitchFamily="34" charset="-120"/>
+                  <a:srgbClr val="6E6E6E"/>
+                </a:solidFill>
+                <a:latin typeface="Montserrat" pitchFamily="34" charset="0"/>
+                <a:ea typeface="Montserrat" pitchFamily="34" charset="-122"/>
+                <a:cs typeface="Montserrat" pitchFamily="34" charset="-120"/>
               </a:rPr>
               <a:t>O modelo que junta os dois temas</a:t>
             </a:r>
@@ -14101,7 +14413,7 @@
       </p:sp>
       <p:sp>
         <p:nvSpPr>
-          <p:cNvPr id="6" name="Text 4"/>
+          <p:cNvPr id="7" name="Text 4"/>
           <p:cNvSpPr txBox="1"/>
           <p:nvPr/>
         </p:nvSpPr>
@@ -14129,11 +14441,11 @@
             <a:r>
               <a:rPr lang="en-US" sz="1400" dirty="0">
                 <a:solidFill>
-                  <a:srgbClr val="1B2A3A"/>
-                </a:solidFill>
-                <a:latin typeface="Calibri" pitchFamily="34" charset="0"/>
-                <a:ea typeface="Calibri" pitchFamily="34" charset="-122"/>
-                <a:cs typeface="Calibri" pitchFamily="34" charset="-120"/>
+                  <a:srgbClr val="333333"/>
+                </a:solidFill>
+                <a:latin typeface="Montserrat" pitchFamily="34" charset="0"/>
+                <a:ea typeface="Montserrat" pitchFamily="34" charset="-122"/>
+                <a:cs typeface="Montserrat" pitchFamily="34" charset="-120"/>
               </a:rPr>
               <a:t>O modelo aprende como é cada grupo, entregas no prazo e entregas atrasadas: distância média, quanto chove e quanto pega horário de pico. Diante de uma entrega nova, compara com os dois grupos, escolhe o mais parecido e diz em quantos por cento confia.</a:t>
             </a:r>
@@ -14143,7 +14455,7 @@
       </p:sp>
       <p:sp>
         <p:nvSpPr>
-          <p:cNvPr id="7" name="Shape 5"/>
+          <p:cNvPr id="8" name="Shape 5"/>
           <p:cNvSpPr/>
           <p:nvPr/>
         </p:nvSpPr>
@@ -14158,11 +14470,11 @@
             </a:avLst>
           </a:prstGeom>
           <a:solidFill>
-            <a:srgbClr val="21295C"/>
+            <a:srgbClr val="1A1A1A"/>
           </a:solidFill>
           <a:ln w="12700">
             <a:solidFill>
-              <a:srgbClr val="21295C"/>
+              <a:srgbClr val="1A1A1A"/>
             </a:solidFill>
             <a:prstDash val="solid"/>
           </a:ln>
@@ -14170,7 +14482,7 @@
       </p:sp>
       <p:sp>
         <p:nvSpPr>
-          <p:cNvPr id="8" name="Text 6"/>
+          <p:cNvPr id="9" name="Text 6"/>
           <p:cNvSpPr txBox="1"/>
           <p:nvPr/>
         </p:nvSpPr>
@@ -14209,7 +14521,7 @@
       </p:sp>
       <p:sp>
         <p:nvSpPr>
-          <p:cNvPr id="9" name="Text 7"/>
+          <p:cNvPr id="10" name="Text 7"/>
           <p:cNvSpPr txBox="1"/>
           <p:nvPr/>
         </p:nvSpPr>
@@ -14241,11 +14553,11 @@
             <a:r>
               <a:rPr lang="en-US" sz="1400" dirty="0">
                 <a:solidFill>
-                  <a:srgbClr val="1B2A3A"/>
-                </a:solidFill>
-                <a:latin typeface="Calibri" pitchFamily="34" charset="0"/>
-                <a:ea typeface="Calibri" pitchFamily="34" charset="-122"/>
-                <a:cs typeface="Calibri" pitchFamily="34" charset="-120"/>
+                  <a:srgbClr val="333333"/>
+                </a:solidFill>
+                <a:latin typeface="Montserrat" pitchFamily="34" charset="0"/>
+                <a:ea typeface="Montserrat" pitchFamily="34" charset="-122"/>
+                <a:cs typeface="Montserrat" pitchFamily="34" charset="-120"/>
               </a:rPr>
               <a:t>Treinamos com 70% das entregas e testamos nas outras 30%.</a:t>
             </a:r>
@@ -14265,11 +14577,11 @@
             <a:r>
               <a:rPr lang="en-US" sz="1400" dirty="0">
                 <a:solidFill>
-                  <a:srgbClr val="1B2A3A"/>
-                </a:solidFill>
-                <a:latin typeface="Calibri" pitchFamily="34" charset="0"/>
-                <a:ea typeface="Calibri" pitchFamily="34" charset="-122"/>
-                <a:cs typeface="Calibri" pitchFamily="34" charset="-120"/>
+                  <a:srgbClr val="333333"/>
+                </a:solidFill>
+                <a:latin typeface="Montserrat" pitchFamily="34" charset="0"/>
+                <a:ea typeface="Montserrat" pitchFamily="34" charset="-122"/>
+                <a:cs typeface="Montserrat" pitchFamily="34" charset="-120"/>
               </a:rPr>
               <a:t>O nome “naive”, ingênuo, vem de tratar as colunas como independentes.</a:t>
             </a:r>
@@ -14289,11 +14601,11 @@
             <a:r>
               <a:rPr lang="en-US" sz="1400" dirty="0">
                 <a:solidFill>
-                  <a:srgbClr val="1B2A3A"/>
-                </a:solidFill>
-                <a:latin typeface="Calibri" pitchFamily="34" charset="0"/>
-                <a:ea typeface="Calibri" pitchFamily="34" charset="-122"/>
-                <a:cs typeface="Calibri" pitchFamily="34" charset="-120"/>
+                  <a:srgbClr val="333333"/>
+                </a:solidFill>
+                <a:latin typeface="Montserrat" pitchFamily="34" charset="0"/>
+                <a:ea typeface="Montserrat" pitchFamily="34" charset="-122"/>
+                <a:cs typeface="Montserrat" pitchFamily="34" charset="-120"/>
               </a:rPr>
               <a:t>A curva Normal entra para medir o quanto a distância combina com cada grupo.</a:t>
             </a:r>
@@ -14313,11 +14625,11 @@
             <a:r>
               <a:rPr lang="en-US" sz="1400" dirty="0">
                 <a:solidFill>
-                  <a:srgbClr val="1B2A3A"/>
-                </a:solidFill>
-                <a:latin typeface="Calibri" pitchFamily="34" charset="0"/>
-                <a:ea typeface="Calibri" pitchFamily="34" charset="-122"/>
-                <a:cs typeface="Calibri" pitchFamily="34" charset="-120"/>
+                  <a:srgbClr val="333333"/>
+                </a:solidFill>
+                <a:latin typeface="Montserrat" pitchFamily="34" charset="0"/>
+                <a:ea typeface="Montserrat" pitchFamily="34" charset="-122"/>
+                <a:cs typeface="Montserrat" pitchFamily="34" charset="-120"/>
               </a:rPr>
               <a:t>A resposta vem em porcentagem, não só um sim ou não.</a:t>
             </a:r>
@@ -14327,7 +14639,7 @@
       </p:sp>
       <p:sp>
         <p:nvSpPr>
-          <p:cNvPr id="10" name="Shape 8"/>
+          <p:cNvPr id="11" name="Shape 8"/>
           <p:cNvSpPr/>
           <p:nvPr/>
         </p:nvSpPr>
@@ -14342,11 +14654,11 @@
             </a:avLst>
           </a:prstGeom>
           <a:solidFill>
-            <a:srgbClr val="0E2233"/>
+            <a:srgbClr val="1A1A1A"/>
           </a:solidFill>
           <a:ln w="12700">
             <a:solidFill>
-              <a:srgbClr val="0E2233"/>
+              <a:srgbClr val="1A1A1A"/>
             </a:solidFill>
             <a:prstDash val="solid"/>
           </a:ln>
@@ -14354,7 +14666,7 @@
       </p:sp>
       <p:sp>
         <p:nvSpPr>
-          <p:cNvPr id="11" name="Text 9"/>
+          <p:cNvPr id="12" name="Text 9"/>
           <p:cNvSpPr txBox="1"/>
           <p:nvPr/>
         </p:nvSpPr>
@@ -14379,7 +14691,7 @@
             <a:r>
               <a:rPr lang="en-US" sz="1150" dirty="0">
                 <a:solidFill>
-                  <a:srgbClr val="DCE9F2"/>
+                  <a:srgbClr val="EDEDED"/>
                 </a:solidFill>
                 <a:latin typeface="Courier New" pitchFamily="34" charset="0"/>
                 <a:ea typeface="Courier New" pitchFamily="34" charset="-122"/>
@@ -14396,7 +14708,7 @@
             <a:r>
               <a:rPr lang="en-US" sz="1150" dirty="0">
                 <a:solidFill>
-                  <a:srgbClr val="DCE9F2"/>
+                  <a:srgbClr val="EDEDED"/>
                 </a:solidFill>
                 <a:latin typeface="Courier New" pitchFamily="34" charset="0"/>
                 <a:ea typeface="Courier New" pitchFamily="34" charset="-122"/>
@@ -14413,7 +14725,7 @@
             <a:r>
               <a:rPr lang="en-US" sz="1150" dirty="0">
                 <a:solidFill>
-                  <a:srgbClr val="DCE9F2"/>
+                  <a:srgbClr val="EDEDED"/>
                 </a:solidFill>
                 <a:latin typeface="Courier New" pitchFamily="34" charset="0"/>
                 <a:ea typeface="Courier New" pitchFamily="34" charset="-122"/>
@@ -14436,7 +14748,7 @@
             <a:r>
               <a:rPr lang="en-US" sz="1150" dirty="0">
                 <a:solidFill>
-                  <a:srgbClr val="DCE9F2"/>
+                  <a:srgbClr val="EDEDED"/>
                 </a:solidFill>
                 <a:latin typeface="Courier New" pitchFamily="34" charset="0"/>
                 <a:ea typeface="Courier New" pitchFamily="34" charset="-122"/>
@@ -14453,7 +14765,7 @@
             <a:r>
               <a:rPr lang="en-US" sz="1150" dirty="0">
                 <a:solidFill>
-                  <a:srgbClr val="DCE9F2"/>
+                  <a:srgbClr val="EDEDED"/>
                 </a:solidFill>
                 <a:latin typeface="Courier New" pitchFamily="34" charset="0"/>
                 <a:ea typeface="Courier New" pitchFamily="34" charset="-122"/>
@@ -14470,7 +14782,7 @@
             <a:r>
               <a:rPr lang="en-US" sz="1150" dirty="0">
                 <a:solidFill>
-                  <a:srgbClr val="DCE9F2"/>
+                  <a:srgbClr val="EDEDED"/>
                 </a:solidFill>
                 <a:latin typeface="Courier New" pitchFamily="34" charset="0"/>
                 <a:ea typeface="Courier New" pitchFamily="34" charset="-122"/>
@@ -14487,7 +14799,7 @@
             <a:r>
               <a:rPr lang="en-US" sz="1150" dirty="0">
                 <a:solidFill>
-                  <a:srgbClr val="DCE9F2"/>
+                  <a:srgbClr val="EDEDED"/>
                 </a:solidFill>
                 <a:latin typeface="Courier New" pitchFamily="34" charset="0"/>
                 <a:ea typeface="Courier New" pitchFamily="34" charset="-122"/>
@@ -14504,7 +14816,7 @@
             <a:r>
               <a:rPr lang="en-US" sz="1150" dirty="0">
                 <a:solidFill>
-                  <a:srgbClr val="DCE9F2"/>
+                  <a:srgbClr val="EDEDED"/>
                 </a:solidFill>
                 <a:latin typeface="Courier New" pitchFamily="34" charset="0"/>
                 <a:ea typeface="Courier New" pitchFamily="34" charset="-122"/>
@@ -14521,7 +14833,7 @@
             <a:r>
               <a:rPr lang="en-US" sz="1150" dirty="0">
                 <a:solidFill>
-                  <a:srgbClr val="DCE9F2"/>
+                  <a:srgbClr val="EDEDED"/>
                 </a:solidFill>
                 <a:latin typeface="Courier New" pitchFamily="34" charset="0"/>
                 <a:ea typeface="Courier New" pitchFamily="34" charset="-122"/>
@@ -14538,7 +14850,7 @@
             <a:r>
               <a:rPr lang="en-US" sz="1150" dirty="0">
                 <a:solidFill>
-                  <a:srgbClr val="DCE9F2"/>
+                  <a:srgbClr val="EDEDED"/>
                 </a:solidFill>
                 <a:latin typeface="Courier New" pitchFamily="34" charset="0"/>
                 <a:ea typeface="Courier New" pitchFamily="34" charset="-122"/>
@@ -14555,7 +14867,7 @@
             <a:r>
               <a:rPr lang="en-US" sz="1150" dirty="0">
                 <a:solidFill>
-                  <a:srgbClr val="DCE9F2"/>
+                  <a:srgbClr val="EDEDED"/>
                 </a:solidFill>
                 <a:latin typeface="Courier New" pitchFamily="34" charset="0"/>
                 <a:ea typeface="Courier New" pitchFamily="34" charset="-122"/>
@@ -14572,7 +14884,7 @@
             <a:r>
               <a:rPr lang="en-US" sz="1150" dirty="0">
                 <a:solidFill>
-                  <a:srgbClr val="DCE9F2"/>
+                  <a:srgbClr val="EDEDED"/>
                 </a:solidFill>
                 <a:latin typeface="Courier New" pitchFamily="34" charset="0"/>
                 <a:ea typeface="Courier New" pitchFamily="34" charset="-122"/>
@@ -14589,7 +14901,7 @@
             <a:r>
               <a:rPr lang="en-US" sz="1150" dirty="0">
                 <a:solidFill>
-                  <a:srgbClr val="DCE9F2"/>
+                  <a:srgbClr val="EDEDED"/>
                 </a:solidFill>
                 <a:latin typeface="Courier New" pitchFamily="34" charset="0"/>
                 <a:ea typeface="Courier New" pitchFamily="34" charset="-122"/>
@@ -14603,7 +14915,7 @@
       </p:sp>
       <p:sp>
         <p:nvSpPr>
-          <p:cNvPr id="12" name="Text 10"/>
+          <p:cNvPr id="13" name="Text 10"/>
           <p:cNvSpPr txBox="1"/>
           <p:nvPr/>
         </p:nvSpPr>
@@ -14628,11 +14940,11 @@
             <a:r>
               <a:rPr lang="en-US" sz="1200" i="1" dirty="0">
                 <a:solidFill>
-                  <a:srgbClr val="5A6B7B"/>
-                </a:solidFill>
-                <a:latin typeface="Calibri" pitchFamily="34" charset="0"/>
-                <a:ea typeface="Calibri" pitchFamily="34" charset="-122"/>
-                <a:cs typeface="Calibri" pitchFamily="34" charset="-120"/>
+                  <a:srgbClr val="6E6E6E"/>
+                </a:solidFill>
+                <a:latin typeface="Montserrat" pitchFamily="34" charset="0"/>
+                <a:ea typeface="Montserrat" pitchFamily="34" charset="-122"/>
+                <a:cs typeface="Montserrat" pitchFamily="34" charset="-120"/>
               </a:rPr>
               <a:t>É o mesmo raciocínio de olhar uma fruta e dizer se é laranja ou limão pelo tamanho e pela cor: comparamos com o que já vimos antes de cada uma.</a:t>
             </a:r>
